--- a/06-classification-logistic-and-penalised/slides.pptx
+++ b/06-classification-logistic-and-penalised/slides.pptx
@@ -945,7 +945,7 @@
           <a:bodyPr anchor="t"/>
           <a:lstStyle>
             <a:lvl1pPr algn="l">
-              <a:defRPr sz="3000" b="1" cap="all"/>
+              <a:defRPr sz="2350" b="1" cap="all"/>
             </a:lvl1pPr>
           </a:lstStyle>
           <a:p>
@@ -977,7 +977,7 @@
           <a:lstStyle>
             <a:lvl1pPr marL="0" indent="0">
               <a:buNone/>
-              <a:defRPr sz="1500">
+              <a:defRPr sz="1150">
                 <a:solidFill>
                   <a:schemeClr val="tx1">
                     <a:tint val="75000"/>
@@ -987,7 +987,7 @@
             </a:lvl1pPr>
             <a:lvl2pPr marL="342900" indent="0">
               <a:buNone/>
-              <a:defRPr sz="1350">
+              <a:defRPr sz="1050">
                 <a:solidFill>
                   <a:schemeClr val="tx1">
                     <a:tint val="75000"/>
@@ -997,7 +997,7 @@
             </a:lvl2pPr>
             <a:lvl3pPr marL="685800" indent="0">
               <a:buNone/>
-              <a:defRPr sz="1200">
+              <a:defRPr sz="950">
                 <a:solidFill>
                   <a:schemeClr val="tx1">
                     <a:tint val="75000"/>
@@ -1007,7 +1007,7 @@
             </a:lvl3pPr>
             <a:lvl4pPr marL="1028700" indent="0">
               <a:buNone/>
-              <a:defRPr sz="1050">
+              <a:defRPr sz="800">
                 <a:solidFill>
                   <a:schemeClr val="tx1">
                     <a:tint val="75000"/>
@@ -1017,7 +1017,7 @@
             </a:lvl4pPr>
             <a:lvl5pPr marL="1371600" indent="0">
               <a:buNone/>
-              <a:defRPr sz="1050">
+              <a:defRPr sz="800">
                 <a:solidFill>
                   <a:schemeClr val="tx1">
                     <a:tint val="75000"/>
@@ -1027,7 +1027,7 @@
             </a:lvl5pPr>
             <a:lvl6pPr marL="1714500" indent="0">
               <a:buNone/>
-              <a:defRPr sz="1050">
+              <a:defRPr sz="800">
                 <a:solidFill>
                   <a:schemeClr val="tx1">
                     <a:tint val="75000"/>
@@ -1037,7 +1037,7 @@
             </a:lvl6pPr>
             <a:lvl7pPr marL="2057400" indent="0">
               <a:buNone/>
-              <a:defRPr sz="1050">
+              <a:defRPr sz="800">
                 <a:solidFill>
                   <a:schemeClr val="tx1">
                     <a:tint val="75000"/>
@@ -1047,7 +1047,7 @@
             </a:lvl7pPr>
             <a:lvl8pPr marL="2400300" indent="0">
               <a:buNone/>
-              <a:defRPr sz="1050">
+              <a:defRPr sz="800">
                 <a:solidFill>
                   <a:schemeClr val="tx1">
                     <a:tint val="75000"/>
@@ -1057,7 +1057,7 @@
             </a:lvl8pPr>
             <a:lvl9pPr marL="2743200" indent="0">
               <a:buNone/>
-              <a:defRPr sz="1050">
+              <a:defRPr sz="800">
                 <a:solidFill>
                   <a:schemeClr val="tx1">
                     <a:tint val="75000"/>
@@ -1212,31 +1212,31 @@
           <a:bodyPr/>
           <a:lstStyle>
             <a:lvl1pPr>
-              <a:defRPr sz="2100"/>
+              <a:defRPr sz="1650"/>
             </a:lvl1pPr>
             <a:lvl2pPr>
-              <a:defRPr sz="1800"/>
+              <a:defRPr sz="1400"/>
             </a:lvl2pPr>
             <a:lvl3pPr>
-              <a:defRPr sz="1500"/>
+              <a:defRPr sz="1150"/>
             </a:lvl3pPr>
             <a:lvl4pPr>
-              <a:defRPr sz="1350"/>
+              <a:defRPr sz="1050"/>
             </a:lvl4pPr>
             <a:lvl5pPr>
-              <a:defRPr sz="1350"/>
+              <a:defRPr sz="1050"/>
             </a:lvl5pPr>
             <a:lvl6pPr>
-              <a:defRPr sz="1350"/>
+              <a:defRPr sz="1050"/>
             </a:lvl6pPr>
             <a:lvl7pPr>
-              <a:defRPr sz="1350"/>
+              <a:defRPr sz="1050"/>
             </a:lvl7pPr>
             <a:lvl8pPr>
-              <a:defRPr sz="1350"/>
+              <a:defRPr sz="1050"/>
             </a:lvl8pPr>
             <a:lvl9pPr>
-              <a:defRPr sz="1350"/>
+              <a:defRPr sz="1050"/>
             </a:lvl9pPr>
           </a:lstStyle>
           <a:p>
@@ -1296,31 +1296,31 @@
           <a:bodyPr/>
           <a:lstStyle>
             <a:lvl1pPr>
-              <a:defRPr sz="2100"/>
+              <a:defRPr sz="1650"/>
             </a:lvl1pPr>
             <a:lvl2pPr>
-              <a:defRPr sz="1800"/>
+              <a:defRPr sz="1400"/>
             </a:lvl2pPr>
             <a:lvl3pPr>
-              <a:defRPr sz="1500"/>
+              <a:defRPr sz="1150"/>
             </a:lvl3pPr>
             <a:lvl4pPr>
-              <a:defRPr sz="1350"/>
+              <a:defRPr sz="1050"/>
             </a:lvl4pPr>
             <a:lvl5pPr>
-              <a:defRPr sz="1350"/>
+              <a:defRPr sz="1050"/>
             </a:lvl5pPr>
             <a:lvl6pPr>
-              <a:defRPr sz="1350"/>
+              <a:defRPr sz="1050"/>
             </a:lvl6pPr>
             <a:lvl7pPr>
-              <a:defRPr sz="1350"/>
+              <a:defRPr sz="1050"/>
             </a:lvl7pPr>
             <a:lvl8pPr>
-              <a:defRPr sz="1350"/>
+              <a:defRPr sz="1050"/>
             </a:lvl8pPr>
             <a:lvl9pPr>
-              <a:defRPr sz="1350"/>
+              <a:defRPr sz="1050"/>
             </a:lvl9pPr>
           </a:lstStyle>
           <a:p>
@@ -1502,39 +1502,39 @@
           <a:lstStyle>
             <a:lvl1pPr marL="0" indent="0">
               <a:buNone/>
-              <a:defRPr sz="1800" b="1"/>
+              <a:defRPr sz="1400" b="1"/>
             </a:lvl1pPr>
             <a:lvl2pPr marL="342900" indent="0">
               <a:buNone/>
-              <a:defRPr sz="1500" b="1"/>
+              <a:defRPr sz="1150" b="1"/>
             </a:lvl2pPr>
             <a:lvl3pPr marL="685800" indent="0">
               <a:buNone/>
-              <a:defRPr sz="1350" b="1"/>
+              <a:defRPr sz="1050" b="1"/>
             </a:lvl3pPr>
             <a:lvl4pPr marL="1028700" indent="0">
               <a:buNone/>
-              <a:defRPr sz="1200" b="1"/>
+              <a:defRPr sz="950" b="1"/>
             </a:lvl4pPr>
             <a:lvl5pPr marL="1371600" indent="0">
               <a:buNone/>
-              <a:defRPr sz="1200" b="1"/>
+              <a:defRPr sz="950" b="1"/>
             </a:lvl5pPr>
             <a:lvl6pPr marL="1714500" indent="0">
               <a:buNone/>
-              <a:defRPr sz="1200" b="1"/>
+              <a:defRPr sz="950" b="1"/>
             </a:lvl6pPr>
             <a:lvl7pPr marL="2057400" indent="0">
               <a:buNone/>
-              <a:defRPr sz="1200" b="1"/>
+              <a:defRPr sz="950" b="1"/>
             </a:lvl7pPr>
             <a:lvl8pPr marL="2400300" indent="0">
               <a:buNone/>
-              <a:defRPr sz="1200" b="1"/>
+              <a:defRPr sz="950" b="1"/>
             </a:lvl8pPr>
             <a:lvl9pPr marL="2743200" indent="0">
               <a:buNone/>
-              <a:defRPr sz="1200" b="1"/>
+              <a:defRPr sz="950" b="1"/>
             </a:lvl9pPr>
           </a:lstStyle>
           <a:p>
@@ -1566,31 +1566,31 @@
           <a:bodyPr/>
           <a:lstStyle>
             <a:lvl1pPr>
-              <a:defRPr sz="1800"/>
+              <a:defRPr sz="1400"/>
             </a:lvl1pPr>
             <a:lvl2pPr>
-              <a:defRPr sz="1500"/>
+              <a:defRPr sz="1150"/>
             </a:lvl2pPr>
             <a:lvl3pPr>
-              <a:defRPr sz="1350"/>
+              <a:defRPr sz="1050"/>
             </a:lvl3pPr>
             <a:lvl4pPr>
-              <a:defRPr sz="1200"/>
+              <a:defRPr sz="950"/>
             </a:lvl4pPr>
             <a:lvl5pPr>
-              <a:defRPr sz="1200"/>
+              <a:defRPr sz="950"/>
             </a:lvl5pPr>
             <a:lvl6pPr>
-              <a:defRPr sz="1200"/>
+              <a:defRPr sz="950"/>
             </a:lvl6pPr>
             <a:lvl7pPr>
-              <a:defRPr sz="1200"/>
+              <a:defRPr sz="950"/>
             </a:lvl7pPr>
             <a:lvl8pPr>
-              <a:defRPr sz="1200"/>
+              <a:defRPr sz="950"/>
             </a:lvl8pPr>
             <a:lvl9pPr>
-              <a:defRPr sz="1200"/>
+              <a:defRPr sz="950"/>
             </a:lvl9pPr>
           </a:lstStyle>
           <a:p>
@@ -1651,39 +1651,39 @@
           <a:lstStyle>
             <a:lvl1pPr marL="0" indent="0">
               <a:buNone/>
-              <a:defRPr sz="1800" b="1"/>
+              <a:defRPr sz="1400" b="1"/>
             </a:lvl1pPr>
             <a:lvl2pPr marL="342900" indent="0">
               <a:buNone/>
-              <a:defRPr sz="1500" b="1"/>
+              <a:defRPr sz="1150" b="1"/>
             </a:lvl2pPr>
             <a:lvl3pPr marL="685800" indent="0">
               <a:buNone/>
-              <a:defRPr sz="1350" b="1"/>
+              <a:defRPr sz="1050" b="1"/>
             </a:lvl3pPr>
             <a:lvl4pPr marL="1028700" indent="0">
               <a:buNone/>
-              <a:defRPr sz="1200" b="1"/>
+              <a:defRPr sz="950" b="1"/>
             </a:lvl4pPr>
             <a:lvl5pPr marL="1371600" indent="0">
               <a:buNone/>
-              <a:defRPr sz="1200" b="1"/>
+              <a:defRPr sz="950" b="1"/>
             </a:lvl5pPr>
             <a:lvl6pPr marL="1714500" indent="0">
               <a:buNone/>
-              <a:defRPr sz="1200" b="1"/>
+              <a:defRPr sz="950" b="1"/>
             </a:lvl6pPr>
             <a:lvl7pPr marL="2057400" indent="0">
               <a:buNone/>
-              <a:defRPr sz="1200" b="1"/>
+              <a:defRPr sz="950" b="1"/>
             </a:lvl7pPr>
             <a:lvl8pPr marL="2400300" indent="0">
               <a:buNone/>
-              <a:defRPr sz="1200" b="1"/>
+              <a:defRPr sz="950" b="1"/>
             </a:lvl8pPr>
             <a:lvl9pPr marL="2743200" indent="0">
               <a:buNone/>
-              <a:defRPr sz="1200" b="1"/>
+              <a:defRPr sz="950" b="1"/>
             </a:lvl9pPr>
           </a:lstStyle>
           <a:p>
@@ -1715,31 +1715,31 @@
           <a:bodyPr/>
           <a:lstStyle>
             <a:lvl1pPr>
-              <a:defRPr sz="1800"/>
+              <a:defRPr sz="1400"/>
             </a:lvl1pPr>
             <a:lvl2pPr>
-              <a:defRPr sz="1500"/>
+              <a:defRPr sz="1150"/>
             </a:lvl2pPr>
             <a:lvl3pPr>
-              <a:defRPr sz="1350"/>
+              <a:defRPr sz="1050"/>
             </a:lvl3pPr>
             <a:lvl4pPr>
-              <a:defRPr sz="1200"/>
+              <a:defRPr sz="950"/>
             </a:lvl4pPr>
             <a:lvl5pPr>
-              <a:defRPr sz="1200"/>
+              <a:defRPr sz="950"/>
             </a:lvl5pPr>
             <a:lvl6pPr>
-              <a:defRPr sz="1200"/>
+              <a:defRPr sz="950"/>
             </a:lvl6pPr>
             <a:lvl7pPr>
-              <a:defRPr sz="1200"/>
+              <a:defRPr sz="950"/>
             </a:lvl7pPr>
             <a:lvl8pPr>
-              <a:defRPr sz="1200"/>
+              <a:defRPr sz="950"/>
             </a:lvl8pPr>
             <a:lvl9pPr>
-              <a:defRPr sz="1200"/>
+              <a:defRPr sz="950"/>
             </a:lvl9pPr>
           </a:lstStyle>
           <a:p>
@@ -2106,7 +2106,7 @@
           <a:bodyPr anchor="b"/>
           <a:lstStyle>
             <a:lvl1pPr algn="l">
-              <a:defRPr sz="1500" b="1"/>
+              <a:defRPr sz="1150" b="1"/>
             </a:lvl1pPr>
           </a:lstStyle>
           <a:p>
@@ -2137,31 +2137,31 @@
           <a:bodyPr/>
           <a:lstStyle>
             <a:lvl1pPr>
-              <a:defRPr sz="2400"/>
+              <a:defRPr sz="1850"/>
             </a:lvl1pPr>
             <a:lvl2pPr>
-              <a:defRPr sz="2100"/>
+              <a:defRPr sz="1650"/>
             </a:lvl2pPr>
             <a:lvl3pPr>
-              <a:defRPr sz="1800"/>
+              <a:defRPr sz="1400"/>
             </a:lvl3pPr>
             <a:lvl4pPr>
-              <a:defRPr sz="1500"/>
+              <a:defRPr sz="1150"/>
             </a:lvl4pPr>
             <a:lvl5pPr>
-              <a:defRPr sz="1500"/>
+              <a:defRPr sz="1150"/>
             </a:lvl5pPr>
             <a:lvl6pPr>
-              <a:defRPr sz="1500"/>
+              <a:defRPr sz="1150"/>
             </a:lvl6pPr>
             <a:lvl7pPr>
-              <a:defRPr sz="1500"/>
+              <a:defRPr sz="1150"/>
             </a:lvl7pPr>
             <a:lvl8pPr>
-              <a:defRPr sz="1500"/>
+              <a:defRPr sz="1150"/>
             </a:lvl8pPr>
             <a:lvl9pPr>
-              <a:defRPr sz="1500"/>
+              <a:defRPr sz="1150"/>
             </a:lvl9pPr>
           </a:lstStyle>
           <a:p>
@@ -2222,39 +2222,39 @@
           <a:lstStyle>
             <a:lvl1pPr marL="0" indent="0">
               <a:buNone/>
-              <a:defRPr sz="1050"/>
+              <a:defRPr sz="800"/>
             </a:lvl1pPr>
             <a:lvl2pPr marL="342900" indent="0">
               <a:buNone/>
-              <a:defRPr sz="900"/>
+              <a:defRPr sz="700"/>
             </a:lvl2pPr>
             <a:lvl3pPr marL="685800" indent="0">
               <a:buNone/>
-              <a:defRPr sz="750"/>
+              <a:defRPr sz="700"/>
             </a:lvl3pPr>
             <a:lvl4pPr marL="1028700" indent="0">
               <a:buNone/>
-              <a:defRPr sz="675"/>
+              <a:defRPr sz="700"/>
             </a:lvl4pPr>
             <a:lvl5pPr marL="1371600" indent="0">
               <a:buNone/>
-              <a:defRPr sz="675"/>
+              <a:defRPr sz="700"/>
             </a:lvl5pPr>
             <a:lvl6pPr marL="1714500" indent="0">
               <a:buNone/>
-              <a:defRPr sz="675"/>
+              <a:defRPr sz="700"/>
             </a:lvl6pPr>
             <a:lvl7pPr marL="2057400" indent="0">
               <a:buNone/>
-              <a:defRPr sz="675"/>
+              <a:defRPr sz="700"/>
             </a:lvl7pPr>
             <a:lvl8pPr marL="2400300" indent="0">
               <a:buNone/>
-              <a:defRPr sz="675"/>
+              <a:defRPr sz="700"/>
             </a:lvl8pPr>
             <a:lvl9pPr marL="2743200" indent="0">
               <a:buNone/>
-              <a:defRPr sz="675"/>
+              <a:defRPr sz="700"/>
             </a:lvl9pPr>
           </a:lstStyle>
           <a:p>
@@ -2381,7 +2381,7 @@
           <a:bodyPr anchor="b"/>
           <a:lstStyle>
             <a:lvl1pPr algn="l">
-              <a:defRPr sz="1500" b="1"/>
+              <a:defRPr sz="1150" b="1"/>
             </a:lvl1pPr>
           </a:lstStyle>
           <a:p>
@@ -2413,39 +2413,39 @@
           <a:lstStyle>
             <a:lvl1pPr marL="0" indent="0">
               <a:buNone/>
-              <a:defRPr sz="2400"/>
+              <a:defRPr sz="1850"/>
             </a:lvl1pPr>
             <a:lvl2pPr marL="342900" indent="0">
               <a:buNone/>
-              <a:defRPr sz="2100"/>
+              <a:defRPr sz="1650"/>
             </a:lvl2pPr>
             <a:lvl3pPr marL="685800" indent="0">
               <a:buNone/>
-              <a:defRPr sz="1800"/>
+              <a:defRPr sz="1400"/>
             </a:lvl3pPr>
             <a:lvl4pPr marL="1028700" indent="0">
               <a:buNone/>
-              <a:defRPr sz="1500"/>
+              <a:defRPr sz="1150"/>
             </a:lvl4pPr>
             <a:lvl5pPr marL="1371600" indent="0">
               <a:buNone/>
-              <a:defRPr sz="1500"/>
+              <a:defRPr sz="1150"/>
             </a:lvl5pPr>
             <a:lvl6pPr marL="1714500" indent="0">
               <a:buNone/>
-              <a:defRPr sz="1500"/>
+              <a:defRPr sz="1150"/>
             </a:lvl6pPr>
             <a:lvl7pPr marL="2057400" indent="0">
               <a:buNone/>
-              <a:defRPr sz="1500"/>
+              <a:defRPr sz="1150"/>
             </a:lvl7pPr>
             <a:lvl8pPr marL="2400300" indent="0">
               <a:buNone/>
-              <a:defRPr sz="1500"/>
+              <a:defRPr sz="1150"/>
             </a:lvl8pPr>
             <a:lvl9pPr marL="2743200" indent="0">
               <a:buNone/>
-              <a:defRPr sz="1500"/>
+              <a:defRPr sz="1150"/>
             </a:lvl9pPr>
           </a:lstStyle>
           <a:p>
@@ -2474,39 +2474,39 @@
           <a:lstStyle>
             <a:lvl1pPr marL="0" indent="0">
               <a:buNone/>
-              <a:defRPr sz="1050"/>
+              <a:defRPr sz="800"/>
             </a:lvl1pPr>
             <a:lvl2pPr marL="342900" indent="0">
               <a:buNone/>
-              <a:defRPr sz="900"/>
+              <a:defRPr sz="700"/>
             </a:lvl2pPr>
             <a:lvl3pPr marL="685800" indent="0">
               <a:buNone/>
-              <a:defRPr sz="750"/>
+              <a:defRPr sz="700"/>
             </a:lvl3pPr>
             <a:lvl4pPr marL="1028700" indent="0">
               <a:buNone/>
-              <a:defRPr sz="675"/>
+              <a:defRPr sz="700"/>
             </a:lvl4pPr>
             <a:lvl5pPr marL="1371600" indent="0">
               <a:buNone/>
-              <a:defRPr sz="675"/>
+              <a:defRPr sz="700"/>
             </a:lvl5pPr>
             <a:lvl6pPr marL="1714500" indent="0">
               <a:buNone/>
-              <a:defRPr sz="675"/>
+              <a:defRPr sz="700"/>
             </a:lvl6pPr>
             <a:lvl7pPr marL="2057400" indent="0">
               <a:buNone/>
-              <a:defRPr sz="675"/>
+              <a:defRPr sz="700"/>
             </a:lvl7pPr>
             <a:lvl8pPr marL="2400300" indent="0">
               <a:buNone/>
-              <a:defRPr sz="675"/>
+              <a:defRPr sz="700"/>
             </a:lvl8pPr>
             <a:lvl9pPr marL="2743200" indent="0">
               <a:buNone/>
-              <a:defRPr sz="675"/>
+              <a:defRPr sz="700"/>
             </a:lvl9pPr>
           </a:lstStyle>
           <a:p>
@@ -2734,7 +2734,7 @@
           <a:bodyPr anchor="ctr" bIns="45720" lIns="91440" rIns="91440" rtlCol="0" tIns="45720" vert="horz"/>
           <a:lstStyle>
             <a:lvl1pPr algn="l">
-              <a:defRPr sz="900">
+              <a:defRPr sz="700">
                 <a:solidFill>
                   <a:schemeClr val="tx1">
                     <a:tint val="75000"/>
@@ -2775,7 +2775,7 @@
           <a:bodyPr anchor="ctr" bIns="45720" lIns="91440" rIns="91440" rtlCol="0" tIns="45720" vert="horz"/>
           <a:lstStyle>
             <a:lvl1pPr algn="ctr">
-              <a:defRPr sz="900">
+              <a:defRPr sz="700">
                 <a:solidFill>
                   <a:schemeClr val="tx1">
                     <a:tint val="75000"/>
@@ -2812,7 +2812,7 @@
           <a:bodyPr anchor="ctr" bIns="45720" lIns="91440" rIns="91440" rtlCol="0" tIns="45720" vert="horz"/>
           <a:lstStyle>
             <a:lvl1pPr algn="r">
-              <a:defRPr sz="900">
+              <a:defRPr sz="700">
                 <a:solidFill>
                   <a:schemeClr val="tx1">
                     <a:tint val="75000"/>
@@ -2858,7 +2858,7 @@
           <a:spcPct val="0"/>
         </a:spcBef>
         <a:buNone/>
-        <a:defRPr kern="1200" sz="3300">
+        <a:defRPr kern="1200" sz="2550">
           <a:solidFill>
             <a:schemeClr val="tx1"/>
           </a:solidFill>
@@ -2875,7 +2875,7 @@
         </a:spcBef>
         <a:buFont typeface="Arial"/>
         <a:buChar char="•"/>
-        <a:defRPr kern="1200" sz="2400">
+        <a:defRPr kern="1200" sz="1850">
           <a:solidFill>
             <a:schemeClr val="tx1"/>
           </a:solidFill>
@@ -2890,7 +2890,7 @@
         </a:spcBef>
         <a:buFont typeface="Arial"/>
         <a:buChar char="–"/>
-        <a:defRPr kern="1200" sz="2100">
+        <a:defRPr kern="1200" sz="1650">
           <a:solidFill>
             <a:schemeClr val="tx1"/>
           </a:solidFill>
@@ -2905,7 +2905,7 @@
         </a:spcBef>
         <a:buFont typeface="Arial"/>
         <a:buChar char="•"/>
-        <a:defRPr kern="1200" sz="1800">
+        <a:defRPr kern="1200" sz="1400">
           <a:solidFill>
             <a:schemeClr val="tx1"/>
           </a:solidFill>
@@ -2920,7 +2920,7 @@
         </a:spcBef>
         <a:buFont typeface="Arial"/>
         <a:buChar char="–"/>
-        <a:defRPr kern="1200" sz="1500">
+        <a:defRPr kern="1200" sz="1150">
           <a:solidFill>
             <a:schemeClr val="tx1"/>
           </a:solidFill>
@@ -2935,7 +2935,7 @@
         </a:spcBef>
         <a:buFont typeface="Arial"/>
         <a:buChar char="»"/>
-        <a:defRPr kern="1200" sz="1500">
+        <a:defRPr kern="1200" sz="1150">
           <a:solidFill>
             <a:schemeClr val="tx1"/>
           </a:solidFill>
@@ -2950,7 +2950,7 @@
         </a:spcBef>
         <a:buFont typeface="Arial"/>
         <a:buChar char="•"/>
-        <a:defRPr kern="1200" sz="1500">
+        <a:defRPr kern="1200" sz="1150">
           <a:solidFill>
             <a:schemeClr val="tx1"/>
           </a:solidFill>
@@ -2965,7 +2965,7 @@
         </a:spcBef>
         <a:buFont typeface="Arial"/>
         <a:buChar char="•"/>
-        <a:defRPr kern="1200" sz="1500">
+        <a:defRPr kern="1200" sz="1150">
           <a:solidFill>
             <a:schemeClr val="tx1"/>
           </a:solidFill>
@@ -2980,7 +2980,7 @@
         </a:spcBef>
         <a:buFont typeface="Arial"/>
         <a:buChar char="•"/>
-        <a:defRPr kern="1200" sz="1500">
+        <a:defRPr kern="1200" sz="1150">
           <a:solidFill>
             <a:schemeClr val="tx1"/>
           </a:solidFill>
@@ -2995,7 +2995,7 @@
         </a:spcBef>
         <a:buFont typeface="Arial"/>
         <a:buChar char="•"/>
-        <a:defRPr kern="1200" sz="1500">
+        <a:defRPr kern="1200" sz="1150">
           <a:solidFill>
             <a:schemeClr val="tx1"/>
           </a:solidFill>
@@ -3010,7 +3010,7 @@
         <a:defRPr lang="en-US"/>
       </a:defPPr>
       <a:lvl1pPr algn="l" defTabSz="342900" eaLnBrk="1" hangingPunct="1" latinLnBrk="0" marL="0" rtl="0">
-        <a:defRPr kern="1200" sz="1350">
+        <a:defRPr kern="1200" sz="1050">
           <a:solidFill>
             <a:schemeClr val="tx1"/>
           </a:solidFill>
@@ -3020,7 +3020,7 @@
         </a:defRPr>
       </a:lvl1pPr>
       <a:lvl2pPr algn="l" defTabSz="342900" eaLnBrk="1" hangingPunct="1" latinLnBrk="0" marL="342900" rtl="0">
-        <a:defRPr kern="1200" sz="1350">
+        <a:defRPr kern="1200" sz="1050">
           <a:solidFill>
             <a:schemeClr val="tx1"/>
           </a:solidFill>
@@ -3030,7 +3030,7 @@
         </a:defRPr>
       </a:lvl2pPr>
       <a:lvl3pPr algn="l" defTabSz="342900" eaLnBrk="1" hangingPunct="1" latinLnBrk="0" marL="685800" rtl="0">
-        <a:defRPr kern="1200" sz="1350">
+        <a:defRPr kern="1200" sz="1050">
           <a:solidFill>
             <a:schemeClr val="tx1"/>
           </a:solidFill>
@@ -3040,7 +3040,7 @@
         </a:defRPr>
       </a:lvl3pPr>
       <a:lvl4pPr algn="l" defTabSz="342900" eaLnBrk="1" hangingPunct="1" latinLnBrk="0" marL="1028700" rtl="0">
-        <a:defRPr kern="1200" sz="1350">
+        <a:defRPr kern="1200" sz="1050">
           <a:solidFill>
             <a:schemeClr val="tx1"/>
           </a:solidFill>
@@ -3050,7 +3050,7 @@
         </a:defRPr>
       </a:lvl4pPr>
       <a:lvl5pPr algn="l" defTabSz="342900" eaLnBrk="1" hangingPunct="1" latinLnBrk="0" marL="1371600" rtl="0">
-        <a:defRPr kern="1200" sz="1350">
+        <a:defRPr kern="1200" sz="1050">
           <a:solidFill>
             <a:schemeClr val="tx1"/>
           </a:solidFill>
@@ -3060,7 +3060,7 @@
         </a:defRPr>
       </a:lvl5pPr>
       <a:lvl6pPr algn="l" defTabSz="342900" eaLnBrk="1" hangingPunct="1" latinLnBrk="0" marL="1714500" rtl="0">
-        <a:defRPr kern="1200" sz="1350">
+        <a:defRPr kern="1200" sz="1050">
           <a:solidFill>
             <a:schemeClr val="tx1"/>
           </a:solidFill>
@@ -3070,7 +3070,7 @@
         </a:defRPr>
       </a:lvl6pPr>
       <a:lvl7pPr algn="l" defTabSz="342900" eaLnBrk="1" hangingPunct="1" latinLnBrk="0" marL="2057400" rtl="0">
-        <a:defRPr kern="1200" sz="1350">
+        <a:defRPr kern="1200" sz="1050">
           <a:solidFill>
             <a:schemeClr val="tx1"/>
           </a:solidFill>
@@ -3080,7 +3080,7 @@
         </a:defRPr>
       </a:lvl7pPr>
       <a:lvl8pPr algn="l" defTabSz="342900" eaLnBrk="1" hangingPunct="1" latinLnBrk="0" marL="2400300" rtl="0">
-        <a:defRPr kern="1200" sz="1350">
+        <a:defRPr kern="1200" sz="1050">
           <a:solidFill>
             <a:schemeClr val="tx1"/>
           </a:solidFill>
@@ -3090,7 +3090,7 @@
         </a:defRPr>
       </a:lvl8pPr>
       <a:lvl9pPr algn="l" defTabSz="342900" eaLnBrk="1" hangingPunct="1" latinLnBrk="0" marL="2743200" rtl="0">
-        <a:defRPr kern="1200" sz="1350">
+        <a:defRPr kern="1200" sz="1050">
           <a:solidFill>
             <a:schemeClr val="tx1"/>
           </a:solidFill>

--- a/06-classification-logistic-and-penalised/slides.pptx
+++ b/06-classification-logistic-and-penalised/slides.pptx
@@ -945,7 +945,7 @@
           <a:bodyPr anchor="t"/>
           <a:lstStyle>
             <a:lvl1pPr algn="l">
-              <a:defRPr sz="2350" b="1" cap="all"/>
+              <a:defRPr sz="1850" b="1" cap="all"/>
             </a:lvl1pPr>
           </a:lstStyle>
           <a:p>
@@ -977,7 +977,7 @@
           <a:lstStyle>
             <a:lvl1pPr marL="0" indent="0">
               <a:buNone/>
-              <a:defRPr sz="1150">
+              <a:defRPr sz="950">
                 <a:solidFill>
                   <a:schemeClr val="tx1">
                     <a:tint val="75000"/>
@@ -987,7 +987,7 @@
             </a:lvl1pPr>
             <a:lvl2pPr marL="342900" indent="0">
               <a:buNone/>
-              <a:defRPr sz="1050">
+              <a:defRPr sz="850">
                 <a:solidFill>
                   <a:schemeClr val="tx1">
                     <a:tint val="75000"/>
@@ -997,7 +997,7 @@
             </a:lvl2pPr>
             <a:lvl3pPr marL="685800" indent="0">
               <a:buNone/>
-              <a:defRPr sz="950">
+              <a:defRPr sz="750">
                 <a:solidFill>
                   <a:schemeClr val="tx1">
                     <a:tint val="75000"/>
@@ -1007,7 +1007,7 @@
             </a:lvl3pPr>
             <a:lvl4pPr marL="1028700" indent="0">
               <a:buNone/>
-              <a:defRPr sz="800">
+              <a:defRPr sz="650">
                 <a:solidFill>
                   <a:schemeClr val="tx1">
                     <a:tint val="75000"/>
@@ -1017,7 +1017,7 @@
             </a:lvl4pPr>
             <a:lvl5pPr marL="1371600" indent="0">
               <a:buNone/>
-              <a:defRPr sz="800">
+              <a:defRPr sz="650">
                 <a:solidFill>
                   <a:schemeClr val="tx1">
                     <a:tint val="75000"/>
@@ -1027,7 +1027,7 @@
             </a:lvl5pPr>
             <a:lvl6pPr marL="1714500" indent="0">
               <a:buNone/>
-              <a:defRPr sz="800">
+              <a:defRPr sz="650">
                 <a:solidFill>
                   <a:schemeClr val="tx1">
                     <a:tint val="75000"/>
@@ -1037,7 +1037,7 @@
             </a:lvl6pPr>
             <a:lvl7pPr marL="2057400" indent="0">
               <a:buNone/>
-              <a:defRPr sz="800">
+              <a:defRPr sz="650">
                 <a:solidFill>
                   <a:schemeClr val="tx1">
                     <a:tint val="75000"/>
@@ -1047,7 +1047,7 @@
             </a:lvl7pPr>
             <a:lvl8pPr marL="2400300" indent="0">
               <a:buNone/>
-              <a:defRPr sz="800">
+              <a:defRPr sz="650">
                 <a:solidFill>
                   <a:schemeClr val="tx1">
                     <a:tint val="75000"/>
@@ -1057,7 +1057,7 @@
             </a:lvl8pPr>
             <a:lvl9pPr marL="2743200" indent="0">
               <a:buNone/>
-              <a:defRPr sz="800">
+              <a:defRPr sz="650">
                 <a:solidFill>
                   <a:schemeClr val="tx1">
                     <a:tint val="75000"/>
@@ -1212,31 +1212,31 @@
           <a:bodyPr/>
           <a:lstStyle>
             <a:lvl1pPr>
-              <a:defRPr sz="1650"/>
+              <a:defRPr sz="1300"/>
             </a:lvl1pPr>
             <a:lvl2pPr>
-              <a:defRPr sz="1400"/>
+              <a:defRPr sz="1100"/>
             </a:lvl2pPr>
             <a:lvl3pPr>
-              <a:defRPr sz="1150"/>
+              <a:defRPr sz="950"/>
             </a:lvl3pPr>
             <a:lvl4pPr>
-              <a:defRPr sz="1050"/>
+              <a:defRPr sz="850"/>
             </a:lvl4pPr>
             <a:lvl5pPr>
-              <a:defRPr sz="1050"/>
+              <a:defRPr sz="850"/>
             </a:lvl5pPr>
             <a:lvl6pPr>
-              <a:defRPr sz="1050"/>
+              <a:defRPr sz="850"/>
             </a:lvl6pPr>
             <a:lvl7pPr>
-              <a:defRPr sz="1050"/>
+              <a:defRPr sz="850"/>
             </a:lvl7pPr>
             <a:lvl8pPr>
-              <a:defRPr sz="1050"/>
+              <a:defRPr sz="850"/>
             </a:lvl8pPr>
             <a:lvl9pPr>
-              <a:defRPr sz="1050"/>
+              <a:defRPr sz="850"/>
             </a:lvl9pPr>
           </a:lstStyle>
           <a:p>
@@ -1296,31 +1296,31 @@
           <a:bodyPr/>
           <a:lstStyle>
             <a:lvl1pPr>
-              <a:defRPr sz="1650"/>
+              <a:defRPr sz="1300"/>
             </a:lvl1pPr>
             <a:lvl2pPr>
-              <a:defRPr sz="1400"/>
+              <a:defRPr sz="1100"/>
             </a:lvl2pPr>
             <a:lvl3pPr>
-              <a:defRPr sz="1150"/>
+              <a:defRPr sz="950"/>
             </a:lvl3pPr>
             <a:lvl4pPr>
-              <a:defRPr sz="1050"/>
+              <a:defRPr sz="850"/>
             </a:lvl4pPr>
             <a:lvl5pPr>
-              <a:defRPr sz="1050"/>
+              <a:defRPr sz="850"/>
             </a:lvl5pPr>
             <a:lvl6pPr>
-              <a:defRPr sz="1050"/>
+              <a:defRPr sz="850"/>
             </a:lvl6pPr>
             <a:lvl7pPr>
-              <a:defRPr sz="1050"/>
+              <a:defRPr sz="850"/>
             </a:lvl7pPr>
             <a:lvl8pPr>
-              <a:defRPr sz="1050"/>
+              <a:defRPr sz="850"/>
             </a:lvl8pPr>
             <a:lvl9pPr>
-              <a:defRPr sz="1050"/>
+              <a:defRPr sz="850"/>
             </a:lvl9pPr>
           </a:lstStyle>
           <a:p>
@@ -1502,39 +1502,39 @@
           <a:lstStyle>
             <a:lvl1pPr marL="0" indent="0">
               <a:buNone/>
-              <a:defRPr sz="1400" b="1"/>
+              <a:defRPr sz="1100" b="1"/>
             </a:lvl1pPr>
             <a:lvl2pPr marL="342900" indent="0">
               <a:buNone/>
-              <a:defRPr sz="1150" b="1"/>
+              <a:defRPr sz="950" b="1"/>
             </a:lvl2pPr>
             <a:lvl3pPr marL="685800" indent="0">
               <a:buNone/>
-              <a:defRPr sz="1050" b="1"/>
+              <a:defRPr sz="850" b="1"/>
             </a:lvl3pPr>
             <a:lvl4pPr marL="1028700" indent="0">
               <a:buNone/>
-              <a:defRPr sz="950" b="1"/>
+              <a:defRPr sz="750" b="1"/>
             </a:lvl4pPr>
             <a:lvl5pPr marL="1371600" indent="0">
               <a:buNone/>
-              <a:defRPr sz="950" b="1"/>
+              <a:defRPr sz="750" b="1"/>
             </a:lvl5pPr>
             <a:lvl6pPr marL="1714500" indent="0">
               <a:buNone/>
-              <a:defRPr sz="950" b="1"/>
+              <a:defRPr sz="750" b="1"/>
             </a:lvl6pPr>
             <a:lvl7pPr marL="2057400" indent="0">
               <a:buNone/>
-              <a:defRPr sz="950" b="1"/>
+              <a:defRPr sz="750" b="1"/>
             </a:lvl7pPr>
             <a:lvl8pPr marL="2400300" indent="0">
               <a:buNone/>
-              <a:defRPr sz="950" b="1"/>
+              <a:defRPr sz="750" b="1"/>
             </a:lvl8pPr>
             <a:lvl9pPr marL="2743200" indent="0">
               <a:buNone/>
-              <a:defRPr sz="950" b="1"/>
+              <a:defRPr sz="750" b="1"/>
             </a:lvl9pPr>
           </a:lstStyle>
           <a:p>
@@ -1566,31 +1566,31 @@
           <a:bodyPr/>
           <a:lstStyle>
             <a:lvl1pPr>
-              <a:defRPr sz="1400"/>
+              <a:defRPr sz="1100"/>
             </a:lvl1pPr>
             <a:lvl2pPr>
-              <a:defRPr sz="1150"/>
+              <a:defRPr sz="950"/>
             </a:lvl2pPr>
             <a:lvl3pPr>
-              <a:defRPr sz="1050"/>
+              <a:defRPr sz="850"/>
             </a:lvl3pPr>
             <a:lvl4pPr>
-              <a:defRPr sz="950"/>
+              <a:defRPr sz="750"/>
             </a:lvl4pPr>
             <a:lvl5pPr>
-              <a:defRPr sz="950"/>
+              <a:defRPr sz="750"/>
             </a:lvl5pPr>
             <a:lvl6pPr>
-              <a:defRPr sz="950"/>
+              <a:defRPr sz="750"/>
             </a:lvl6pPr>
             <a:lvl7pPr>
-              <a:defRPr sz="950"/>
+              <a:defRPr sz="750"/>
             </a:lvl7pPr>
             <a:lvl8pPr>
-              <a:defRPr sz="950"/>
+              <a:defRPr sz="750"/>
             </a:lvl8pPr>
             <a:lvl9pPr>
-              <a:defRPr sz="950"/>
+              <a:defRPr sz="750"/>
             </a:lvl9pPr>
           </a:lstStyle>
           <a:p>
@@ -1651,39 +1651,39 @@
           <a:lstStyle>
             <a:lvl1pPr marL="0" indent="0">
               <a:buNone/>
-              <a:defRPr sz="1400" b="1"/>
+              <a:defRPr sz="1100" b="1"/>
             </a:lvl1pPr>
             <a:lvl2pPr marL="342900" indent="0">
               <a:buNone/>
-              <a:defRPr sz="1150" b="1"/>
+              <a:defRPr sz="950" b="1"/>
             </a:lvl2pPr>
             <a:lvl3pPr marL="685800" indent="0">
               <a:buNone/>
-              <a:defRPr sz="1050" b="1"/>
+              <a:defRPr sz="850" b="1"/>
             </a:lvl3pPr>
             <a:lvl4pPr marL="1028700" indent="0">
               <a:buNone/>
-              <a:defRPr sz="950" b="1"/>
+              <a:defRPr sz="750" b="1"/>
             </a:lvl4pPr>
             <a:lvl5pPr marL="1371600" indent="0">
               <a:buNone/>
-              <a:defRPr sz="950" b="1"/>
+              <a:defRPr sz="750" b="1"/>
             </a:lvl5pPr>
             <a:lvl6pPr marL="1714500" indent="0">
               <a:buNone/>
-              <a:defRPr sz="950" b="1"/>
+              <a:defRPr sz="750" b="1"/>
             </a:lvl6pPr>
             <a:lvl7pPr marL="2057400" indent="0">
               <a:buNone/>
-              <a:defRPr sz="950" b="1"/>
+              <a:defRPr sz="750" b="1"/>
             </a:lvl7pPr>
             <a:lvl8pPr marL="2400300" indent="0">
               <a:buNone/>
-              <a:defRPr sz="950" b="1"/>
+              <a:defRPr sz="750" b="1"/>
             </a:lvl8pPr>
             <a:lvl9pPr marL="2743200" indent="0">
               <a:buNone/>
-              <a:defRPr sz="950" b="1"/>
+              <a:defRPr sz="750" b="1"/>
             </a:lvl9pPr>
           </a:lstStyle>
           <a:p>
@@ -1715,31 +1715,31 @@
           <a:bodyPr/>
           <a:lstStyle>
             <a:lvl1pPr>
-              <a:defRPr sz="1400"/>
+              <a:defRPr sz="1100"/>
             </a:lvl1pPr>
             <a:lvl2pPr>
-              <a:defRPr sz="1150"/>
+              <a:defRPr sz="950"/>
             </a:lvl2pPr>
             <a:lvl3pPr>
-              <a:defRPr sz="1050"/>
+              <a:defRPr sz="850"/>
             </a:lvl3pPr>
             <a:lvl4pPr>
-              <a:defRPr sz="950"/>
+              <a:defRPr sz="750"/>
             </a:lvl4pPr>
             <a:lvl5pPr>
-              <a:defRPr sz="950"/>
+              <a:defRPr sz="750"/>
             </a:lvl5pPr>
             <a:lvl6pPr>
-              <a:defRPr sz="950"/>
+              <a:defRPr sz="750"/>
             </a:lvl6pPr>
             <a:lvl7pPr>
-              <a:defRPr sz="950"/>
+              <a:defRPr sz="750"/>
             </a:lvl7pPr>
             <a:lvl8pPr>
-              <a:defRPr sz="950"/>
+              <a:defRPr sz="750"/>
             </a:lvl8pPr>
             <a:lvl9pPr>
-              <a:defRPr sz="950"/>
+              <a:defRPr sz="750"/>
             </a:lvl9pPr>
           </a:lstStyle>
           <a:p>
@@ -2106,7 +2106,7 @@
           <a:bodyPr anchor="b"/>
           <a:lstStyle>
             <a:lvl1pPr algn="l">
-              <a:defRPr sz="1150" b="1"/>
+              <a:defRPr sz="950" b="1"/>
             </a:lvl1pPr>
           </a:lstStyle>
           <a:p>
@@ -2137,31 +2137,31 @@
           <a:bodyPr/>
           <a:lstStyle>
             <a:lvl1pPr>
-              <a:defRPr sz="1850"/>
+              <a:defRPr sz="1500"/>
             </a:lvl1pPr>
             <a:lvl2pPr>
-              <a:defRPr sz="1650"/>
+              <a:defRPr sz="1300"/>
             </a:lvl2pPr>
             <a:lvl3pPr>
-              <a:defRPr sz="1400"/>
+              <a:defRPr sz="1100"/>
             </a:lvl3pPr>
             <a:lvl4pPr>
-              <a:defRPr sz="1150"/>
+              <a:defRPr sz="950"/>
             </a:lvl4pPr>
             <a:lvl5pPr>
-              <a:defRPr sz="1150"/>
+              <a:defRPr sz="950"/>
             </a:lvl5pPr>
             <a:lvl6pPr>
-              <a:defRPr sz="1150"/>
+              <a:defRPr sz="950"/>
             </a:lvl6pPr>
             <a:lvl7pPr>
-              <a:defRPr sz="1150"/>
+              <a:defRPr sz="950"/>
             </a:lvl7pPr>
             <a:lvl8pPr>
-              <a:defRPr sz="1150"/>
+              <a:defRPr sz="950"/>
             </a:lvl8pPr>
             <a:lvl9pPr>
-              <a:defRPr sz="1150"/>
+              <a:defRPr sz="950"/>
             </a:lvl9pPr>
           </a:lstStyle>
           <a:p>
@@ -2222,39 +2222,39 @@
           <a:lstStyle>
             <a:lvl1pPr marL="0" indent="0">
               <a:buNone/>
-              <a:defRPr sz="800"/>
+              <a:defRPr sz="650"/>
             </a:lvl1pPr>
             <a:lvl2pPr marL="342900" indent="0">
               <a:buNone/>
-              <a:defRPr sz="700"/>
+              <a:defRPr sz="550"/>
             </a:lvl2pPr>
             <a:lvl3pPr marL="685800" indent="0">
               <a:buNone/>
-              <a:defRPr sz="700"/>
+              <a:defRPr sz="550"/>
             </a:lvl3pPr>
             <a:lvl4pPr marL="1028700" indent="0">
               <a:buNone/>
-              <a:defRPr sz="700"/>
+              <a:defRPr sz="550"/>
             </a:lvl4pPr>
             <a:lvl5pPr marL="1371600" indent="0">
               <a:buNone/>
-              <a:defRPr sz="700"/>
+              <a:defRPr sz="550"/>
             </a:lvl5pPr>
             <a:lvl6pPr marL="1714500" indent="0">
               <a:buNone/>
-              <a:defRPr sz="700"/>
+              <a:defRPr sz="550"/>
             </a:lvl6pPr>
             <a:lvl7pPr marL="2057400" indent="0">
               <a:buNone/>
-              <a:defRPr sz="700"/>
+              <a:defRPr sz="550"/>
             </a:lvl7pPr>
             <a:lvl8pPr marL="2400300" indent="0">
               <a:buNone/>
-              <a:defRPr sz="700"/>
+              <a:defRPr sz="550"/>
             </a:lvl8pPr>
             <a:lvl9pPr marL="2743200" indent="0">
               <a:buNone/>
-              <a:defRPr sz="700"/>
+              <a:defRPr sz="550"/>
             </a:lvl9pPr>
           </a:lstStyle>
           <a:p>
@@ -2381,7 +2381,7 @@
           <a:bodyPr anchor="b"/>
           <a:lstStyle>
             <a:lvl1pPr algn="l">
-              <a:defRPr sz="1150" b="1"/>
+              <a:defRPr sz="950" b="1"/>
             </a:lvl1pPr>
           </a:lstStyle>
           <a:p>
@@ -2413,39 +2413,39 @@
           <a:lstStyle>
             <a:lvl1pPr marL="0" indent="0">
               <a:buNone/>
-              <a:defRPr sz="1850"/>
+              <a:defRPr sz="1500"/>
             </a:lvl1pPr>
             <a:lvl2pPr marL="342900" indent="0">
               <a:buNone/>
-              <a:defRPr sz="1650"/>
+              <a:defRPr sz="1300"/>
             </a:lvl2pPr>
             <a:lvl3pPr marL="685800" indent="0">
               <a:buNone/>
-              <a:defRPr sz="1400"/>
+              <a:defRPr sz="1100"/>
             </a:lvl3pPr>
             <a:lvl4pPr marL="1028700" indent="0">
               <a:buNone/>
-              <a:defRPr sz="1150"/>
+              <a:defRPr sz="950"/>
             </a:lvl4pPr>
             <a:lvl5pPr marL="1371600" indent="0">
               <a:buNone/>
-              <a:defRPr sz="1150"/>
+              <a:defRPr sz="950"/>
             </a:lvl5pPr>
             <a:lvl6pPr marL="1714500" indent="0">
               <a:buNone/>
-              <a:defRPr sz="1150"/>
+              <a:defRPr sz="950"/>
             </a:lvl6pPr>
             <a:lvl7pPr marL="2057400" indent="0">
               <a:buNone/>
-              <a:defRPr sz="1150"/>
+              <a:defRPr sz="950"/>
             </a:lvl7pPr>
             <a:lvl8pPr marL="2400300" indent="0">
               <a:buNone/>
-              <a:defRPr sz="1150"/>
+              <a:defRPr sz="950"/>
             </a:lvl8pPr>
             <a:lvl9pPr marL="2743200" indent="0">
               <a:buNone/>
-              <a:defRPr sz="1150"/>
+              <a:defRPr sz="950"/>
             </a:lvl9pPr>
           </a:lstStyle>
           <a:p>
@@ -2474,39 +2474,39 @@
           <a:lstStyle>
             <a:lvl1pPr marL="0" indent="0">
               <a:buNone/>
-              <a:defRPr sz="800"/>
+              <a:defRPr sz="650"/>
             </a:lvl1pPr>
             <a:lvl2pPr marL="342900" indent="0">
               <a:buNone/>
-              <a:defRPr sz="700"/>
+              <a:defRPr sz="550"/>
             </a:lvl2pPr>
             <a:lvl3pPr marL="685800" indent="0">
               <a:buNone/>
-              <a:defRPr sz="700"/>
+              <a:defRPr sz="550"/>
             </a:lvl3pPr>
             <a:lvl4pPr marL="1028700" indent="0">
               <a:buNone/>
-              <a:defRPr sz="700"/>
+              <a:defRPr sz="550"/>
             </a:lvl4pPr>
             <a:lvl5pPr marL="1371600" indent="0">
               <a:buNone/>
-              <a:defRPr sz="700"/>
+              <a:defRPr sz="550"/>
             </a:lvl5pPr>
             <a:lvl6pPr marL="1714500" indent="0">
               <a:buNone/>
-              <a:defRPr sz="700"/>
+              <a:defRPr sz="550"/>
             </a:lvl6pPr>
             <a:lvl7pPr marL="2057400" indent="0">
               <a:buNone/>
-              <a:defRPr sz="700"/>
+              <a:defRPr sz="550"/>
             </a:lvl7pPr>
             <a:lvl8pPr marL="2400300" indent="0">
               <a:buNone/>
-              <a:defRPr sz="700"/>
+              <a:defRPr sz="550"/>
             </a:lvl8pPr>
             <a:lvl9pPr marL="2743200" indent="0">
               <a:buNone/>
-              <a:defRPr sz="700"/>
+              <a:defRPr sz="550"/>
             </a:lvl9pPr>
           </a:lstStyle>
           <a:p>
@@ -2734,7 +2734,7 @@
           <a:bodyPr anchor="ctr" bIns="45720" lIns="91440" rIns="91440" rtlCol="0" tIns="45720" vert="horz"/>
           <a:lstStyle>
             <a:lvl1pPr algn="l">
-              <a:defRPr sz="700">
+              <a:defRPr sz="550">
                 <a:solidFill>
                   <a:schemeClr val="tx1">
                     <a:tint val="75000"/>
@@ -2775,7 +2775,7 @@
           <a:bodyPr anchor="ctr" bIns="45720" lIns="91440" rIns="91440" rtlCol="0" tIns="45720" vert="horz"/>
           <a:lstStyle>
             <a:lvl1pPr algn="ctr">
-              <a:defRPr sz="700">
+              <a:defRPr sz="550">
                 <a:solidFill>
                   <a:schemeClr val="tx1">
                     <a:tint val="75000"/>
@@ -2812,7 +2812,7 @@
           <a:bodyPr anchor="ctr" bIns="45720" lIns="91440" rIns="91440" rtlCol="0" tIns="45720" vert="horz"/>
           <a:lstStyle>
             <a:lvl1pPr algn="r">
-              <a:defRPr sz="700">
+              <a:defRPr sz="550">
                 <a:solidFill>
                   <a:schemeClr val="tx1">
                     <a:tint val="75000"/>
@@ -2858,7 +2858,7 @@
           <a:spcPct val="0"/>
         </a:spcBef>
         <a:buNone/>
-        <a:defRPr kern="1200" sz="2550">
+        <a:defRPr kern="1200" sz="2050">
           <a:solidFill>
             <a:schemeClr val="tx1"/>
           </a:solidFill>
@@ -2875,7 +2875,7 @@
         </a:spcBef>
         <a:buFont typeface="Arial"/>
         <a:buChar char="•"/>
-        <a:defRPr kern="1200" sz="1850">
+        <a:defRPr kern="1200" sz="1500">
           <a:solidFill>
             <a:schemeClr val="tx1"/>
           </a:solidFill>
@@ -2890,7 +2890,7 @@
         </a:spcBef>
         <a:buFont typeface="Arial"/>
         <a:buChar char="–"/>
-        <a:defRPr kern="1200" sz="1650">
+        <a:defRPr kern="1200" sz="1300">
           <a:solidFill>
             <a:schemeClr val="tx1"/>
           </a:solidFill>
@@ -2905,7 +2905,7 @@
         </a:spcBef>
         <a:buFont typeface="Arial"/>
         <a:buChar char="•"/>
-        <a:defRPr kern="1200" sz="1400">
+        <a:defRPr kern="1200" sz="1100">
           <a:solidFill>
             <a:schemeClr val="tx1"/>
           </a:solidFill>
@@ -2920,7 +2920,7 @@
         </a:spcBef>
         <a:buFont typeface="Arial"/>
         <a:buChar char="–"/>
-        <a:defRPr kern="1200" sz="1150">
+        <a:defRPr kern="1200" sz="950">
           <a:solidFill>
             <a:schemeClr val="tx1"/>
           </a:solidFill>
@@ -2935,7 +2935,7 @@
         </a:spcBef>
         <a:buFont typeface="Arial"/>
         <a:buChar char="»"/>
-        <a:defRPr kern="1200" sz="1150">
+        <a:defRPr kern="1200" sz="950">
           <a:solidFill>
             <a:schemeClr val="tx1"/>
           </a:solidFill>
@@ -2950,7 +2950,7 @@
         </a:spcBef>
         <a:buFont typeface="Arial"/>
         <a:buChar char="•"/>
-        <a:defRPr kern="1200" sz="1150">
+        <a:defRPr kern="1200" sz="950">
           <a:solidFill>
             <a:schemeClr val="tx1"/>
           </a:solidFill>
@@ -2965,7 +2965,7 @@
         </a:spcBef>
         <a:buFont typeface="Arial"/>
         <a:buChar char="•"/>
-        <a:defRPr kern="1200" sz="1150">
+        <a:defRPr kern="1200" sz="950">
           <a:solidFill>
             <a:schemeClr val="tx1"/>
           </a:solidFill>
@@ -2980,7 +2980,7 @@
         </a:spcBef>
         <a:buFont typeface="Arial"/>
         <a:buChar char="•"/>
-        <a:defRPr kern="1200" sz="1150">
+        <a:defRPr kern="1200" sz="950">
           <a:solidFill>
             <a:schemeClr val="tx1"/>
           </a:solidFill>
@@ -2995,7 +2995,7 @@
         </a:spcBef>
         <a:buFont typeface="Arial"/>
         <a:buChar char="•"/>
-        <a:defRPr kern="1200" sz="1150">
+        <a:defRPr kern="1200" sz="950">
           <a:solidFill>
             <a:schemeClr val="tx1"/>
           </a:solidFill>
@@ -3010,7 +3010,7 @@
         <a:defRPr lang="en-US"/>
       </a:defPPr>
       <a:lvl1pPr algn="l" defTabSz="342900" eaLnBrk="1" hangingPunct="1" latinLnBrk="0" marL="0" rtl="0">
-        <a:defRPr kern="1200" sz="1050">
+        <a:defRPr kern="1200" sz="850">
           <a:solidFill>
             <a:schemeClr val="tx1"/>
           </a:solidFill>
@@ -3020,7 +3020,7 @@
         </a:defRPr>
       </a:lvl1pPr>
       <a:lvl2pPr algn="l" defTabSz="342900" eaLnBrk="1" hangingPunct="1" latinLnBrk="0" marL="342900" rtl="0">
-        <a:defRPr kern="1200" sz="1050">
+        <a:defRPr kern="1200" sz="850">
           <a:solidFill>
             <a:schemeClr val="tx1"/>
           </a:solidFill>
@@ -3030,7 +3030,7 @@
         </a:defRPr>
       </a:lvl2pPr>
       <a:lvl3pPr algn="l" defTabSz="342900" eaLnBrk="1" hangingPunct="1" latinLnBrk="0" marL="685800" rtl="0">
-        <a:defRPr kern="1200" sz="1050">
+        <a:defRPr kern="1200" sz="850">
           <a:solidFill>
             <a:schemeClr val="tx1"/>
           </a:solidFill>
@@ -3040,7 +3040,7 @@
         </a:defRPr>
       </a:lvl3pPr>
       <a:lvl4pPr algn="l" defTabSz="342900" eaLnBrk="1" hangingPunct="1" latinLnBrk="0" marL="1028700" rtl="0">
-        <a:defRPr kern="1200" sz="1050">
+        <a:defRPr kern="1200" sz="850">
           <a:solidFill>
             <a:schemeClr val="tx1"/>
           </a:solidFill>
@@ -3050,7 +3050,7 @@
         </a:defRPr>
       </a:lvl4pPr>
       <a:lvl5pPr algn="l" defTabSz="342900" eaLnBrk="1" hangingPunct="1" latinLnBrk="0" marL="1371600" rtl="0">
-        <a:defRPr kern="1200" sz="1050">
+        <a:defRPr kern="1200" sz="850">
           <a:solidFill>
             <a:schemeClr val="tx1"/>
           </a:solidFill>
@@ -3060,7 +3060,7 @@
         </a:defRPr>
       </a:lvl5pPr>
       <a:lvl6pPr algn="l" defTabSz="342900" eaLnBrk="1" hangingPunct="1" latinLnBrk="0" marL="1714500" rtl="0">
-        <a:defRPr kern="1200" sz="1050">
+        <a:defRPr kern="1200" sz="850">
           <a:solidFill>
             <a:schemeClr val="tx1"/>
           </a:solidFill>
@@ -3070,7 +3070,7 @@
         </a:defRPr>
       </a:lvl6pPr>
       <a:lvl7pPr algn="l" defTabSz="342900" eaLnBrk="1" hangingPunct="1" latinLnBrk="0" marL="2057400" rtl="0">
-        <a:defRPr kern="1200" sz="1050">
+        <a:defRPr kern="1200" sz="850">
           <a:solidFill>
             <a:schemeClr val="tx1"/>
           </a:solidFill>
@@ -3080,7 +3080,7 @@
         </a:defRPr>
       </a:lvl7pPr>
       <a:lvl8pPr algn="l" defTabSz="342900" eaLnBrk="1" hangingPunct="1" latinLnBrk="0" marL="2400300" rtl="0">
-        <a:defRPr kern="1200" sz="1050">
+        <a:defRPr kern="1200" sz="850">
           <a:solidFill>
             <a:schemeClr val="tx1"/>
           </a:solidFill>
@@ -3090,7 +3090,7 @@
         </a:defRPr>
       </a:lvl8pPr>
       <a:lvl9pPr algn="l" defTabSz="342900" eaLnBrk="1" hangingPunct="1" latinLnBrk="0" marL="2743200" rtl="0">
-        <a:defRPr kern="1200" sz="1050">
+        <a:defRPr kern="1200" sz="850">
           <a:solidFill>
             <a:schemeClr val="tx1"/>
           </a:solidFill>

--- a/06-classification-logistic-and-penalised/slides.pptx
+++ b/06-classification-logistic-and-penalised/slides.pptx
@@ -2827,6 +2827,72 @@
               <a:t>‹#›</a:t>
             </a:fld>
             <a:endParaRPr lang="en-US"/>
+          </a:p>
+        </p:txBody>
+      </p:sp>
+      <p:sp>
+        <p:nvSpPr>
+          <p:cNvPr id="7" name="Author Footer"/>
+          <p:cNvSpPr txBox="1"/>
+          <p:nvPr/>
+        </p:nvSpPr>
+        <p:spPr>
+          <a:xfrm>
+            <a:off x="457200" y="4735000"/>
+            <a:ext cx="5000000" cy="260000"/>
+          </a:xfrm>
+          <a:prstGeom prst="rect">
+            <a:avLst/>
+          </a:prstGeom>
+          <a:noFill/>
+        </p:spPr>
+        <p:txBody>
+          <a:bodyPr anchor="ctr" bIns="0" lIns="0" rIns="0" tIns="0" wrap="square"/>
+          <a:lstStyle/>
+          <a:p>
+            <a:pPr algn="l"/>
+            <a:r>
+              <a:rPr dirty="0" lang="en-US" sz="900">
+                <a:solidFill>
+                  <a:srgbClr val="6E7275"/>
+                </a:solidFill>
+                <a:latin typeface="+mn-lt"/>
+              </a:rPr>
+              <a:t>Thierry Warin, PhD</a:t>
+            </a:r>
+          </a:p>
+        </p:txBody>
+      </p:sp>
+      <p:sp>
+        <p:nvSpPr>
+          <p:cNvPr id="8" name="Slide Number Footer"/>
+          <p:cNvSpPr txBox="1"/>
+          <p:nvPr/>
+        </p:nvSpPr>
+        <p:spPr>
+          <a:xfrm>
+            <a:off x="7200000" y="4735000"/>
+            <a:ext cx="1486800" cy="260000"/>
+          </a:xfrm>
+          <a:prstGeom prst="rect">
+            <a:avLst/>
+          </a:prstGeom>
+          <a:noFill/>
+        </p:spPr>
+        <p:txBody>
+          <a:bodyPr anchor="ctr" bIns="0" lIns="0" rIns="0" tIns="0" wrap="square"/>
+          <a:lstStyle/>
+          <a:p>
+            <a:pPr algn="r"/>
+            <a:fld id="{9B1A2C3D-4E5F-6A7B-8C9D-0E1F2A3B4C5D}" type="slidenum">
+              <a:rPr dirty="0" lang="en-US" sz="900">
+                <a:solidFill>
+                  <a:srgbClr val="6E7275"/>
+                </a:solidFill>
+                <a:latin typeface="+mn-lt"/>
+              </a:rPr>
+              <a:t>2</a:t>
+            </a:fld>
           </a:p>
         </p:txBody>
       </p:sp>
@@ -3207,7 +3273,7 @@
             </a:pPr>
             <a:r>
               <a:rPr/>
-              <a:t>18 August 2026</a:t>
+              <a:t>19 August 2026</a:t>
             </a:r>
           </a:p>
         </p:txBody>

--- a/06-classification-logistic-and-penalised/slides.pptx
+++ b/06-classification-logistic-and-penalised/slides.pptx
@@ -8880,7 +8880,7 @@
                 </a:pPr>
                 <a:r>
                   <a:rPr/>
-                  <a:t>Fit penalised logistic on your angle under grouped CV; report the base rate first</a:t>
+                  <a:t>Fit penalised logistic on your project under grouped CV; report the base rate first</a:t>
                 </a:r>
               </a:p>
               <a:p>

--- a/06-classification-logistic-and-penalised/slides.pptx
+++ b/06-classification-logistic-and-penalised/slides.pptx
@@ -7858,7 +7858,7 @@
                 </a:pPr>
                 <a:r>
                   <a:rPr/>
-                  <a:t>That third one is the bug you will hit in the lab.</a:t>
+                  <a:t>That third one is the bug you will hit in the practice session.</a:t>
                 </a:r>
               </a:p>
             </p:txBody>
@@ -8806,7 +8806,7 @@
             </a:pPr>
             <a:r>
               <a:rPr/>
-              <a:t>The lab</a:t>
+              <a:t>The practice</a:t>
             </a:r>
           </a:p>
         </p:txBody>
@@ -9097,7 +9097,7 @@
                 <a:hlinkClick r:id="rId2"/>
                 <a:latin typeface="Courier"/>
               </a:rPr>
-              <a:t>02-lab/README.md</a:t>
+              <a:t>02-practice/README.md</a:t>
             </a:r>
           </a:p>
         </p:txBody>

--- a/06-classification-logistic-and-penalised/slides.pptx
+++ b/06-classification-logistic-and-penalised/slides.pptx
@@ -3559,7 +3559,25 @@
                         <m:rPr>
                           <m:sty m:val="p"/>
                         </m:rPr>
-                        <m:t>diag</m:t>
+                        <m:t>d</m:t>
+                      </m:r>
+                      <m:r>
+                        <m:rPr>
+                          <m:sty m:val="p"/>
+                        </m:rPr>
+                        <m:t>i</m:t>
+                      </m:r>
+                      <m:r>
+                        <m:rPr>
+                          <m:sty m:val="p"/>
+                        </m:rPr>
+                        <m:t>a</m:t>
+                      </m:r>
+                      <m:r>
+                        <m:rPr>
+                          <m:sty m:val="p"/>
+                        </m:rPr>
+                        <m:t>g</m:t>
                       </m:r>
                       <m:d>
                         <m:dPr>
@@ -4300,7 +4318,19 @@
                           <m:rPr>
                             <m:sty m:val="p"/>
                           </m:rPr>
-                          <m:t>Var</m:t>
+                          <m:t>V</m:t>
+                        </m:r>
+                        <m:r>
+                          <m:rPr>
+                            <m:sty m:val="p"/>
+                          </m:rPr>
+                          <m:t>a</m:t>
+                        </m:r>
+                        <m:r>
+                          <m:rPr>
+                            <m:sty m:val="p"/>
+                          </m:rPr>
+                          <m:t>r</m:t>
                         </m:r>
                       </m:e>
                     </m:acc>
@@ -7599,7 +7629,25 @@
                       <m:rPr>
                         <m:sty m:val="p"/>
                       </m:rPr>
-                      <m:t>sign</m:t>
+                      <m:t>s</m:t>
+                    </m:r>
+                    <m:r>
+                      <m:rPr>
+                        <m:sty m:val="p"/>
+                      </m:rPr>
+                      <m:t>i</m:t>
+                    </m:r>
+                    <m:r>
+                      <m:rPr>
+                        <m:sty m:val="p"/>
+                      </m:rPr>
+                      <m:t>g</m:t>
+                    </m:r>
+                    <m:r>
+                      <m:rPr>
+                        <m:sty m:val="p"/>
+                      </m:rPr>
+                      <m:t>n</m:t>
                     </m:r>
                     <m:d>
                       <m:dPr>

--- a/06-classification-logistic-and-penalised/slides.pptx
+++ b/06-classification-logistic-and-penalised/slides.pptx
@@ -46,6 +46,11 @@
     <p:sldId id="294" r:id="rId40"/>
     <p:sldId id="295" r:id="rId41"/>
     <p:sldId id="296" r:id="rId42"/>
+    <p:sldId id="297" r:id="rId43"/>
+    <p:sldId id="298" r:id="rId44"/>
+    <p:sldId id="299" r:id="rId45"/>
+    <p:sldId id="300" r:id="rId46"/>
+    <p:sldId id="301" r:id="rId47"/>
   </p:sldIdLst>
   <p:sldSz cx="9144000" cy="5143500" type="screen16x9"/>
   <p:notesSz cx="6858000" cy="9144000"/>
@@ -3494,6 +3499,26 @@
               <a:buNone/>
             </a:pPr>
             <a:r>
+              <a:rPr>
+                <a:latin typeface="Courier"/>
+              </a:rPr>
+              <a:t>python scripts/fetch_teaching_data.py     </a:t>
+            </a:r>
+            <a:r>
+              <a:rPr i="1">
+                <a:solidFill>
+                  <a:srgbClr val="60A0B0"/>
+                </a:solidFill>
+                <a:latin typeface="Courier"/>
+              </a:rPr>
+              <a:t># once, after cloning</a:t>
+            </a:r>
+          </a:p>
+          <a:p>
+            <a:pPr lvl="0" indent="0">
+              <a:buNone/>
+            </a:pPr>
+            <a:r>
               <a:rPr b="1">
                 <a:solidFill>
                   <a:srgbClr val="008000"/>
@@ -3529,7 +3554,7 @@
               <a:rPr>
                 <a:latin typeface="Courier"/>
               </a:rPr>
-              <a:t>URL </a:t>
+              <a:t>loans </a:t>
             </a:r>
             <a:r>
               <a:rPr>
@@ -3544,7 +3569,7 @@
               <a:rPr>
                 <a:latin typeface="Courier"/>
               </a:rPr>
-              <a:t> (</a:t>
+              <a:t> pd.read_parquet(</a:t>
             </a:r>
             <a:r>
               <a:rPr>
@@ -3553,224 +3578,29 @@
                 </a:solidFill>
                 <a:latin typeface="Courier"/>
               </a:rPr>
-              <a:t>"https://www.warin.ca/datalake/courses_data/"</a:t>
+              <a:t>"data/loans.parquet"</a:t>
+            </a:r>
+            <a:r>
+              <a:rPr>
+                <a:latin typeface="Courier"/>
+              </a:rPr>
+              <a:t>)</a:t>
             </a:r>
             <a:br/>
             <a:r>
               <a:rPr>
-                <a:latin typeface="Courier"/>
-              </a:rPr>
-              <a:t>       </a:t>
-            </a:r>
-            <a:r>
-              <a:rPr>
-                <a:solidFill>
-                  <a:srgbClr val="4070A0"/>
-                </a:solidFill>
-                <a:latin typeface="Courier"/>
-              </a:rPr>
-              <a:t>"qmibr/session7/loans.csv"</a:t>
-            </a:r>
-            <a:r>
-              <a:rPr>
-                <a:latin typeface="Courier"/>
-              </a:rPr>
-              <a:t>)</a:t>
-            </a:r>
-            <a:br/>
-            <a:br/>
-            <a:r>
-              <a:rPr>
-                <a:latin typeface="Courier"/>
-              </a:rPr>
-              <a:t>loans </a:t>
-            </a:r>
-            <a:r>
-              <a:rPr>
-                <a:solidFill>
-                  <a:srgbClr val="666666"/>
-                </a:solidFill>
-                <a:latin typeface="Courier"/>
-              </a:rPr>
-              <a:t>=</a:t>
-            </a:r>
-            <a:r>
-              <a:rPr>
-                <a:latin typeface="Courier"/>
-              </a:rPr>
-              <a:t> pd.read_csv(URL)</a:t>
-            </a:r>
-            <a:br/>
-            <a:r>
-              <a:rPr>
-                <a:latin typeface="Courier"/>
-              </a:rPr>
-              <a:t>loans.columns </a:t>
-            </a:r>
-            <a:r>
-              <a:rPr>
-                <a:solidFill>
-                  <a:srgbClr val="666666"/>
-                </a:solidFill>
-                <a:latin typeface="Courier"/>
-              </a:rPr>
-              <a:t>=</a:t>
-            </a:r>
-            <a:r>
-              <a:rPr>
-                <a:latin typeface="Courier"/>
-              </a:rPr>
-              <a:t> [c.replace(</a:t>
-            </a:r>
-            <a:r>
-              <a:rPr>
-                <a:solidFill>
-                  <a:srgbClr val="4070A0"/>
-                </a:solidFill>
-                <a:latin typeface="Courier"/>
-              </a:rPr>
-              <a:t>"."</a:t>
-            </a:r>
-            <a:r>
-              <a:rPr>
-                <a:latin typeface="Courier"/>
-              </a:rPr>
-              <a:t>, </a:t>
-            </a:r>
-            <a:r>
-              <a:rPr>
-                <a:solidFill>
-                  <a:srgbClr val="4070A0"/>
-                </a:solidFill>
-                <a:latin typeface="Courier"/>
-              </a:rPr>
-              <a:t>"_"</a:t>
-            </a:r>
-            <a:r>
-              <a:rPr>
-                <a:latin typeface="Courier"/>
-              </a:rPr>
-              <a:t>) </a:t>
-            </a:r>
-            <a:r>
-              <a:rPr b="1">
-                <a:solidFill>
-                  <a:srgbClr val="007020"/>
-                </a:solidFill>
-                <a:latin typeface="Courier"/>
-              </a:rPr>
-              <a:t>for</a:t>
-            </a:r>
-            <a:r>
-              <a:rPr>
-                <a:latin typeface="Courier"/>
-              </a:rPr>
-              <a:t> c </a:t>
-            </a:r>
-            <a:r>
-              <a:rPr b="1">
-                <a:solidFill>
-                  <a:srgbClr val="007020"/>
-                </a:solidFill>
-                <a:latin typeface="Courier"/>
-              </a:rPr>
-              <a:t>in</a:t>
-            </a:r>
-            <a:r>
-              <a:rPr>
-                <a:latin typeface="Courier"/>
-              </a:rPr>
-              <a:t> loans.columns]</a:t>
-            </a:r>
-            <a:br/>
-            <a:r>
-              <a:rPr>
-                <a:latin typeface="Courier"/>
-              </a:rPr>
-              <a:t>loans </a:t>
-            </a:r>
-            <a:r>
-              <a:rPr>
-                <a:solidFill>
-                  <a:srgbClr val="666666"/>
-                </a:solidFill>
-                <a:latin typeface="Courier"/>
-              </a:rPr>
-              <a:t>=</a:t>
-            </a:r>
-            <a:r>
-              <a:rPr>
-                <a:latin typeface="Courier"/>
-              </a:rPr>
-              <a:t> loans.rename(columns</a:t>
-            </a:r>
-            <a:r>
-              <a:rPr>
-                <a:solidFill>
-                  <a:srgbClr val="666666"/>
-                </a:solidFill>
-                <a:latin typeface="Courier"/>
-              </a:rPr>
-              <a:t>=</a:t>
-            </a:r>
-            <a:r>
-              <a:rPr>
-                <a:latin typeface="Courier"/>
-              </a:rPr>
-              <a:t>{</a:t>
-            </a:r>
-            <a:r>
-              <a:rPr>
-                <a:solidFill>
-                  <a:srgbClr val="4070A0"/>
-                </a:solidFill>
-                <a:latin typeface="Courier"/>
-              </a:rPr>
-              <a:t>"not_fully_paid"</a:t>
-            </a:r>
-            <a:r>
-              <a:rPr>
-                <a:latin typeface="Courier"/>
-              </a:rPr>
-              <a:t>: </a:t>
-            </a:r>
-            <a:r>
-              <a:rPr>
-                <a:solidFill>
-                  <a:srgbClr val="4070A0"/>
-                </a:solidFill>
-                <a:latin typeface="Courier"/>
-              </a:rPr>
-              <a:t>"default"</a:t>
-            </a:r>
-            <a:r>
-              <a:rPr>
-                <a:latin typeface="Courier"/>
-              </a:rPr>
-              <a:t>})</a:t>
-            </a:r>
-            <a:br/>
-            <a:br/>
-            <a:r>
-              <a:rPr>
-                <a:latin typeface="Courier"/>
-              </a:rPr>
-              <a:t>loans.to_parquet(</a:t>
-            </a:r>
-            <a:r>
-              <a:rPr>
-                <a:solidFill>
-                  <a:srgbClr val="4070A0"/>
-                </a:solidFill>
-                <a:latin typeface="Courier"/>
-              </a:rPr>
-              <a:t>"data/loans.parquet"</a:t>
-            </a:r>
-            <a:r>
-              <a:rPr>
-                <a:latin typeface="Courier"/>
-              </a:rPr>
-              <a:t>)     </a:t>
+                <a:solidFill>
+                  <a:srgbClr val="008000"/>
+                </a:solidFill>
+                <a:latin typeface="Courier"/>
+              </a:rPr>
+              <a:t>print</a:t>
+            </a:r>
+            <a:r>
+              <a:rPr>
+                <a:latin typeface="Courier"/>
+              </a:rPr>
+              <a:t>(loans.shape)                         </a:t>
             </a:r>
             <a:r>
               <a:rPr i="1">
@@ -3779,31 +3609,6 @@
                 </a:solidFill>
                 <a:latin typeface="Courier"/>
               </a:rPr>
-              <a:t># cache it once</a:t>
-            </a:r>
-            <a:br/>
-            <a:r>
-              <a:rPr>
-                <a:solidFill>
-                  <a:srgbClr val="008000"/>
-                </a:solidFill>
-                <a:latin typeface="Courier"/>
-              </a:rPr>
-              <a:t>print</a:t>
-            </a:r>
-            <a:r>
-              <a:rPr>
-                <a:latin typeface="Courier"/>
-              </a:rPr>
-              <a:t>(loans.shape)                          </a:t>
-            </a:r>
-            <a:r>
-              <a:rPr i="1">
-                <a:solidFill>
-                  <a:srgbClr val="60A0B0"/>
-                </a:solidFill>
-                <a:latin typeface="Courier"/>
-              </a:rPr>
               <a:t># (9578, 14)</a:t>
             </a:r>
           </a:p>
@@ -3813,7 +3618,7 @@
             </a:pPr>
             <a:r>
               <a:rPr/>
-              <a:t>Download </a:t>
+              <a:t>Fetch </a:t>
             </a:r>
             <a:r>
               <a:rPr b="1"/>
@@ -3821,7 +3626,7 @@
             </a:r>
             <a:r>
               <a:rPr/>
-              <a:t>, then read the parquet. Nothing in a practice session may require the internet.</a:t>
+              <a:t>, then read the parquet. Nothing in a practice session may require the internet — and the fetch script has already tidied the R-style column names for you.</a:t>
             </a:r>
           </a:p>
         </p:txBody>
@@ -6805,7 +6610,7 @@
                       </a:pPr>
                       <a:r>
                         <a:rPr/>
-                        <a:t>Another example: falling behind in Europe</a:t>
+                        <a:t>Another example: Portugal’s red wines</a:t>
                       </a:r>
                     </a:p>
                   </a:txBody>
@@ -6823,6 +6628,38 @@
                       <a:r>
                         <a:rPr b="1"/>
                         <a:t>8</a:t>
+                      </a:r>
+                    </a:p>
+                  </a:txBody>
+                </a:tc>
+                <a:tc>
+                  <a:txBody>
+                    <a:bodyPr/>
+                    <a:lstStyle/>
+                    <a:p>
+                      <a:pPr lvl="0" indent="0" marL="0">
+                        <a:buNone/>
+                      </a:pPr>
+                      <a:r>
+                        <a:rPr/>
+                        <a:t>A third: falling behind in Europe</a:t>
+                      </a:r>
+                    </a:p>
+                  </a:txBody>
+                </a:tc>
+              </a:tr>
+              <a:tr h="0">
+                <a:tc>
+                  <a:txBody>
+                    <a:bodyPr/>
+                    <a:lstStyle/>
+                    <a:p>
+                      <a:pPr lvl="0" indent="0" marL="0">
+                        <a:buNone/>
+                      </a:pPr>
+                      <a:r>
+                        <a:rPr b="1"/>
+                        <a:t>9</a:t>
                       </a:r>
                     </a:p>
                   </a:txBody>
@@ -7992,7 +7829,7 @@
             </a:pPr>
             <a:r>
               <a:rPr/>
-              <a:t>Falling behind in Europe</a:t>
+              <a:t>Portugal’s red wines</a:t>
             </a:r>
           </a:p>
         </p:txBody>
@@ -8017,7 +7854,15 @@
             </a:pPr>
             <a:r>
               <a:rPr/>
-              <a:t>The same machinery, a policy question, and the practice data:</a:t>
+              <a:t>1,599 red </a:t>
+            </a:r>
+            <a:r>
+              <a:rPr i="1"/>
+              <a:t>vinho verde</a:t>
+            </a:r>
+            <a:r>
+              <a:rPr/>
+              <a:t> wines, chemically assayed, each rated by at least three blind tasters.</a:t>
             </a:r>
           </a:p>
           <a:p>
@@ -8028,7 +7873,7 @@
               <a:rPr>
                 <a:latin typeface="Courier"/>
               </a:rPr>
-              <a:t>core </a:t>
+              <a:t>wine </a:t>
             </a:r>
             <a:r>
               <a:rPr>
@@ -8052,7 +7897,7 @@
                 </a:solidFill>
                 <a:latin typeface="Courier"/>
               </a:rPr>
-              <a:t>"data/spine/core.parquet"</a:t>
+              <a:t>"data/redwines.parquet"</a:t>
             </a:r>
             <a:r>
               <a:rPr>
@@ -8063,39 +7908,18 @@
             <a:br/>
             <a:r>
               <a:rPr>
-                <a:latin typeface="Courier"/>
-              </a:rPr>
-              <a:t>d </a:t>
-            </a:r>
-            <a:r>
-              <a:rPr>
-                <a:solidFill>
-                  <a:srgbClr val="666666"/>
-                </a:solidFill>
-                <a:latin typeface="Courier"/>
-              </a:rPr>
-              <a:t>=</a:t>
-            </a:r>
-            <a:r>
-              <a:rPr>
-                <a:latin typeface="Courier"/>
-              </a:rPr>
-              <a:t> core.dropna(subset</a:t>
-            </a:r>
-            <a:r>
-              <a:rPr>
-                <a:solidFill>
-                  <a:srgbClr val="666666"/>
-                </a:solidFill>
-                <a:latin typeface="Courier"/>
-              </a:rPr>
-              <a:t>=</a:t>
-            </a:r>
-            <a:r>
-              <a:rPr>
-                <a:latin typeface="Courier"/>
-              </a:rPr>
-              <a:t>[</a:t>
+                <a:solidFill>
+                  <a:srgbClr val="008000"/>
+                </a:solidFill>
+                <a:latin typeface="Courier"/>
+              </a:rPr>
+              <a:t>print</a:t>
+            </a:r>
+            <a:r>
+              <a:rPr>
+                <a:latin typeface="Courier"/>
+              </a:rPr>
+              <a:t>(wine.shape, wine[</a:t>
             </a:r>
             <a:r>
               <a:rPr>
@@ -8104,60 +7928,13 @@
                 </a:solidFill>
                 <a:latin typeface="Courier"/>
               </a:rPr>
-              <a:t>"falling_behind_next"</a:t>
-            </a:r>
-            <a:r>
-              <a:rPr>
-                <a:latin typeface="Courier"/>
-              </a:rPr>
-              <a:t>])</a:t>
-            </a:r>
-            <a:br/>
-            <a:br/>
-            <a:r>
-              <a:rPr>
-                <a:solidFill>
-                  <a:srgbClr val="008000"/>
-                </a:solidFill>
-                <a:latin typeface="Courier"/>
-              </a:rPr>
-              <a:t>print</a:t>
-            </a:r>
-            <a:r>
-              <a:rPr>
-                <a:latin typeface="Courier"/>
-              </a:rPr>
-              <a:t>(</a:t>
-            </a:r>
-            <a:r>
-              <a:rPr>
-                <a:solidFill>
-                  <a:srgbClr val="008000"/>
-                </a:solidFill>
-                <a:latin typeface="Courier"/>
-              </a:rPr>
-              <a:t>len</a:t>
-            </a:r>
-            <a:r>
-              <a:rPr>
-                <a:latin typeface="Courier"/>
-              </a:rPr>
-              <a:t>(d), d[</a:t>
-            </a:r>
-            <a:r>
-              <a:rPr>
-                <a:solidFill>
-                  <a:srgbClr val="4070A0"/>
-                </a:solidFill>
-                <a:latin typeface="Courier"/>
-              </a:rPr>
-              <a:t>"falling_behind_next"</a:t>
-            </a:r>
-            <a:r>
-              <a:rPr>
-                <a:latin typeface="Courier"/>
-              </a:rPr>
-              <a:t>].mean())   </a:t>
+              <a:t>"good"</a:t>
+            </a:r>
+            <a:r>
+              <a:rPr>
+                <a:latin typeface="Courier"/>
+              </a:rPr>
+              <a:t>].mean())     </a:t>
             </a:r>
             <a:r>
               <a:rPr i="1">
@@ -8166,62 +7943,54 @@
                 </a:solidFill>
                 <a:latin typeface="Courier"/>
               </a:rPr>
-              <a:t># 420, 0.10</a:t>
-            </a:r>
-          </a:p>
-          <a:p>
-            <a:pPr lvl="0"/>
-            <a:r>
-              <a:rPr/>
-              <a:t>Outcome: is this country in the </a:t>
+              <a:t># (1599, 9) 0.136</a:t>
+            </a:r>
+          </a:p>
+          <a:p>
+            <a:pPr lvl="0" indent="0" marL="0">
+              <a:buNone/>
+            </a:pPr>
+            <a:r>
+              <a:rPr/>
+              <a:t>In the raw CSV the outcome is the strings </a:t>
+            </a:r>
+            <a:r>
+              <a:rPr>
+                <a:latin typeface="Courier"/>
+              </a:rPr>
+              <a:t>"Yes"</a:t>
+            </a:r>
+            <a:r>
+              <a:rPr/>
+              <a:t>/</a:t>
+            </a:r>
+            <a:r>
+              <a:rPr>
+                <a:latin typeface="Courier"/>
+              </a:rPr>
+              <a:t>"No"</a:t>
+            </a:r>
+            <a:r>
+              <a:rPr/>
+              <a:t>. </a:t>
+            </a:r>
+            <a:r>
+              <a:rPr>
+                <a:latin typeface="Courier"/>
+              </a:rPr>
+              <a:t>astype(int)</a:t>
+            </a:r>
+            <a:r>
+              <a:rPr/>
+              <a:t> on that </a:t>
             </a:r>
             <a:r>
               <a:rPr b="1"/>
-              <a:t>bottom decile</a:t>
-            </a:r>
-            <a:r>
-              <a:rPr/>
-              <a:t> of productivity growth </a:t>
-            </a:r>
-            <a:r>
-              <a:rPr b="1"/>
-              <a:t>next year</a:t>
-            </a:r>
-            <a:r>
-              <a:rPr/>
-              <a:t>?</a:t>
-            </a:r>
-          </a:p>
-          <a:p>
-            <a:pPr lvl="0"/>
-            <a:r>
-              <a:rPr/>
-              <a:t>Base rate </a:t>
-            </a:r>
-            <a:r>
-              <a:rPr b="1"/>
-              <a:t>10%</a:t>
-            </a:r>
-            <a:r>
-              <a:rPr/>
-              <a:t> — by construction, since the threshold is the within-year decile</a:t>
-            </a:r>
-          </a:p>
-          <a:p>
-            <a:pPr lvl="0"/>
-            <a:r>
-              <a:rPr/>
-              <a:t>30 rows are </a:t>
-            </a:r>
-            <a:r>
-              <a:rPr>
-                <a:latin typeface="Courier"/>
-              </a:rPr>
-              <a:t>NaN</a:t>
-            </a:r>
-            <a:r>
-              <a:rPr/>
-              <a:t>: the last year of each country. There is no next year.</a:t>
+              <a:t>raises</a:t>
+            </a:r>
+            <a:r>
+              <a:rPr/>
+              <a:t>, and a silent miscast would be worse — so the fetch script converts it, and records that it did.</a:t>
             </a:r>
           </a:p>
         </p:txBody>
@@ -8268,7 +8037,7 @@
             </a:pPr>
             <a:r>
               <a:rPr/>
-              <a:t>Two differences that change everything</a:t>
+              <a:t>Fit the same model type</a:t>
             </a:r>
           </a:p>
         </p:txBody>
@@ -8288,58 +8057,162 @@
           <a:bodyPr/>
           <a:lstStyle/>
           <a:p>
-            <a:pPr lvl="0" indent="-342900" marL="342900">
-              <a:buAutoNum type="arabicPeriod"/>
+            <a:pPr lvl="0" indent="0">
+              <a:buNone/>
             </a:pPr>
             <a:r>
+              <a:rPr>
+                <a:latin typeface="Courier"/>
+              </a:rPr>
+              <a:t>m_w </a:t>
+            </a:r>
+            <a:r>
+              <a:rPr>
+                <a:solidFill>
+                  <a:srgbClr val="666666"/>
+                </a:solidFill>
+                <a:latin typeface="Courier"/>
+              </a:rPr>
+              <a:t>=</a:t>
+            </a:r>
+            <a:r>
+              <a:rPr>
+                <a:latin typeface="Courier"/>
+              </a:rPr>
+              <a:t> smf.logit(</a:t>
+            </a:r>
+            <a:r>
+              <a:rPr>
+                <a:solidFill>
+                  <a:srgbClr val="4070A0"/>
+                </a:solidFill>
+                <a:latin typeface="Courier"/>
+              </a:rPr>
+              <a:t>"good ~ alcohol + volatile_acidity + sulphates"</a:t>
+            </a:r>
+            <a:r>
+              <a:rPr>
+                <a:latin typeface="Courier"/>
+              </a:rPr>
+              <a:t>,</a:t>
+            </a:r>
+            <a:br/>
+            <a:r>
+              <a:rPr>
+                <a:latin typeface="Courier"/>
+              </a:rPr>
+              <a:t>                data</a:t>
+            </a:r>
+            <a:r>
+              <a:rPr>
+                <a:solidFill>
+                  <a:srgbClr val="666666"/>
+                </a:solidFill>
+                <a:latin typeface="Courier"/>
+              </a:rPr>
+              <a:t>=</a:t>
+            </a:r>
+            <a:r>
+              <a:rPr>
+                <a:latin typeface="Courier"/>
+              </a:rPr>
+              <a:t>wine).fit()</a:t>
+            </a:r>
+            <a:br/>
+            <a:r>
+              <a:rPr>
+                <a:solidFill>
+                  <a:srgbClr val="008000"/>
+                </a:solidFill>
+                <a:latin typeface="Courier"/>
+              </a:rPr>
+              <a:t>print</a:t>
+            </a:r>
+            <a:r>
+              <a:rPr>
+                <a:latin typeface="Courier"/>
+              </a:rPr>
+              <a:t>(m_w.summary().tables[</a:t>
+            </a:r>
+            <a:r>
+              <a:rPr>
+                <a:solidFill>
+                  <a:srgbClr val="40A070"/>
+                </a:solidFill>
+                <a:latin typeface="Courier"/>
+              </a:rPr>
+              <a:t>1</a:t>
+            </a:r>
+            <a:r>
+              <a:rPr>
+                <a:latin typeface="Courier"/>
+              </a:rPr>
+              <a:t>])</a:t>
+            </a:r>
+            <a:br/>
+            <a:r>
+              <a:rPr>
+                <a:solidFill>
+                  <a:srgbClr val="008000"/>
+                </a:solidFill>
+                <a:latin typeface="Courier"/>
+              </a:rPr>
+              <a:t>print</a:t>
+            </a:r>
+            <a:r>
+              <a:rPr>
+                <a:latin typeface="Courier"/>
+              </a:rPr>
+              <a:t>(np.exp(m_w.params[</a:t>
+            </a:r>
+            <a:r>
+              <a:rPr>
+                <a:solidFill>
+                  <a:srgbClr val="4070A0"/>
+                </a:solidFill>
+                <a:latin typeface="Courier"/>
+              </a:rPr>
+              <a:t>"alcohol"</a:t>
+            </a:r>
+            <a:r>
+              <a:rPr>
+                <a:latin typeface="Courier"/>
+              </a:rPr>
+              <a:t>]))    </a:t>
+            </a:r>
+            <a:r>
+              <a:rPr i="1">
+                <a:solidFill>
+                  <a:srgbClr val="60A0B0"/>
+                </a:solidFill>
+                <a:latin typeface="Courier"/>
+              </a:rPr>
+              <a:t># 2.74</a:t>
+            </a:r>
+          </a:p>
+          <a:p>
+            <a:pPr lvl="0" indent="0" marL="0">
+              <a:buNone/>
+            </a:pPr>
+            <a:r>
+              <a:rPr/>
+              <a:t>An odds ratio of </a:t>
+            </a:r>
+            <a:r>
               <a:rPr b="1"/>
-              <a:t>The rows are not independent.</a:t>
-            </a:r>
-            <a:r>
-              <a:rPr/>
-              <a:t> 30 countries × 14 years. Germany 2019 and Germany 2020 are not two draws — so cross-validate with </a:t>
-            </a:r>
-            <a:r>
-              <a:rPr>
-                <a:latin typeface="Courier"/>
-              </a:rPr>
-              <a:t>GroupKFold</a:t>
-            </a:r>
-            <a:r>
-              <a:rPr/>
-              <a:t> on </a:t>
-            </a:r>
-            <a:r>
-              <a:rPr>
-                <a:latin typeface="Courier"/>
-              </a:rPr>
-              <a:t>geo</a:t>
-            </a:r>
-            <a:r>
-              <a:rPr/>
-              <a:t>, not at random.</a:t>
-            </a:r>
-          </a:p>
-          <a:p>
-            <a:pPr lvl="0" indent="-342900" marL="342900">
-              <a:buAutoNum type="arabicPeriod"/>
-            </a:pPr>
+              <a:t>2.74</a:t>
+            </a:r>
+            <a:r>
+              <a:rPr/>
+              <a:t> for alcohol: each extra percentage point of alcohol nearly </a:t>
+            </a:r>
             <a:r>
               <a:rPr b="1"/>
-              <a:t>Dropping those 30 NaNs is correct.</a:t>
-            </a:r>
-            <a:r>
-              <a:rPr/>
-              <a:t> Imputing them would be inventing the future.</a:t>
-            </a:r>
-          </a:p>
-          <a:p>
-            <a:pPr lvl="0" indent="0" marL="0">
-              <a:buNone/>
-            </a:pPr>
-            <a:r>
-              <a:rPr/>
-              <a:t>Lending Club rows are arguably exchangeable. Panel rows never are. The method is identical; the validation is not.</a:t>
+              <a:t>triples</a:t>
+            </a:r>
+            <a:r>
+              <a:rPr/>
+              <a:t> the odds a taster calls the wine good. Compare the FICO odds ratio of 0.9936 — same method, wildly different effect sizes, because the units are different.</a:t>
             </a:r>
           </a:p>
         </p:txBody>
@@ -8349,56 +8222,7 @@
 </p:sld>
 </file>
 
-<file path=ppt/slides/slide38.xml><?xml version="1.0" encoding="utf-8"?>
-<p:sld xmlns:a="http://schemas.openxmlformats.org/drawingml/2006/main" xmlns:r="http://schemas.openxmlformats.org/officeDocument/2006/relationships" xmlns:p="http://schemas.openxmlformats.org/presentationml/2006/main">
-  <p:cSld>
-    <p:spTree>
-      <p:nvGrpSpPr>
-        <p:cNvPr id="1" name=""/>
-        <p:cNvGrpSpPr/>
-        <p:nvPr/>
-      </p:nvGrpSpPr>
-      <p:grpSpPr>
-        <a:xfrm>
-          <a:off x="0" y="0"/>
-          <a:ext cx="0" cy="0"/>
-          <a:chOff x="0" y="0"/>
-          <a:chExt cx="0" cy="0"/>
-        </a:xfrm>
-      </p:grpSpPr>
-      <p:sp>
-        <p:nvSpPr>
-          <p:cNvPr id="2" name="Title 1"/>
-          <p:cNvSpPr>
-            <a:spLocks noGrp="1"/>
-          </p:cNvSpPr>
-          <p:nvPr>
-            <p:ph type="title"/>
-          </p:nvPr>
-        </p:nvSpPr>
-        <p:spPr>
-          <a:xfrm>
-            <a:off x="722313" y="3305176"/>
-            <a:ext cx="7772400" cy="1021556"/>
-          </a:xfrm>
-        </p:spPr>
-        <p:txBody>
-          <a:bodyPr/>
-          <a:lstStyle/>
-          <a:p>
-            <a:pPr lvl="0" indent="0" marL="0">
-              <a:buNone/>
-            </a:pPr>
-            <a:r>
-              <a:rPr/>
-              <a:t>8 · Key takeaways</a:t>
-            </a:r>
-          </a:p>
-        </p:txBody>
-      </p:sp>
-    </p:spTree>
-  </p:cSld>
-</p:sld>
+<file path=ppt/slides/slide38.xml><?xml version="1.0" encoding="UTF-8"?><p:sld xmlns:a="http://schemas.openxmlformats.org/drawingml/2006/main" xmlns:r="http://schemas.openxmlformats.org/officeDocument/2006/relationships" xmlns:p="http://schemas.openxmlformats.org/presentationml/2006/main"><p:cSld><p:spTree><p:nvGrpSpPr><p:cNvPr id="1" name="" /><p:cNvGrpSpPr /><p:nvPr /></p:nvGrpSpPr><p:grpSpPr><a:xfrm><a:off x="0" y="0" /><a:ext cx="0" cy="0" /><a:chOff x="0" y="0" /><a:chExt cx="0" cy="0" /></a:xfrm></p:grpSpPr><p:sp><p:nvSpPr><p:cNvPr id="2" name="Title 1" /><p:cNvSpPr><a:spLocks noGrp="1" /></p:cNvSpPr><p:nvPr><p:ph type="title" /></p:nvPr></p:nvSpPr><p:spPr /><p:txBody><a:bodyPr /><a:lstStyle /><a:p><a:pPr lvl="0" indent="0" marL="0"><a:buNone /></a:pPr><a:r><a:rPr /><a:t>Same method, very different signal</a:t></a:r></a:p></p:txBody></p:sp><p:graphicFrame><p:nvGraphicFramePr><p:cNvPr id="6" name="Content Placeholder 5" /><p:cNvGraphicFramePr><a:graphicFrameLocks noGrp="1" /></p:cNvGraphicFramePr><p:nvPr><p:ph idx="1" /></p:nvPr></p:nvGraphicFramePr><p:xfrm><a:off x="457200" y="1193800" /><a:ext cx="8229600" cy="3390900" /></p:xfrm><a:graphic><a:graphicData uri="http://schemas.openxmlformats.org/drawingml/2006/table"><a:tbl><a:tblPr firstRow="1" bandRow="1"><a:tableStyleId>{5C22544A-7EE6-4342-B048-85BDC9FD1C3A}</a:tableStyleId></a:tblPr><a:tblGrid><a:gridCol w="2743200" /><a:gridCol w="2743200" /><a:gridCol w="2743200" /></a:tblGrid><a:tr h="0"><a:tc><a:txBody><a:bodyPr /><a:lstStyle /><a:p><a:endParaRPr /></a:p></a:txBody><a:tcPr /></a:tc><a:tc><a:txBody><a:bodyPr /><a:lstStyle /><a:p><a:pPr lvl="0" indent="0" marL="0"><a:buNone /></a:pPr><a:r><a:rPr /><a:t>Lending Club</a:t></a:r></a:p></a:txBody><a:tcPr /></a:tc><a:tc><a:txBody><a:bodyPr /><a:lstStyle /><a:p><a:pPr lvl="0" indent="0" marL="0"><a:buNone /></a:pPr><a:r><a:rPr /><a:t>Red wines</a:t></a:r></a:p></a:txBody><a:tcPr /></a:tc></a:tr><a:tr h="0"><a:tc><a:txBody><a:bodyPr /><a:lstStyle /><a:p><a:pPr lvl="0" indent="0" marL="0"><a:buNone /></a:pPr><a14:m><m:oMath xmlns:m="http://schemas.openxmlformats.org/officeDocument/2006/math"><m:r><m:t>n</m:t></m:r></m:oMath></a14:m></a:p></a:txBody></a:tc><a:tc><a:txBody><a:bodyPr /><a:lstStyle /><a:p><a:pPr lvl="0" indent="0" marL="0"><a:buNone /></a:pPr><a:r><a:rPr /><a:t>9,578</a:t></a:r></a:p></a:txBody></a:tc><a:tc><a:txBody><a:bodyPr /><a:lstStyle /><a:p><a:pPr lvl="0" indent="0" marL="0"><a:buNone /></a:pPr><a:r><a:rPr /><a:t>1,599</a:t></a:r></a:p></a:txBody></a:tc></a:tr><a:tr h="0"><a:tc><a:txBody><a:bodyPr /><a:lstStyle /><a:p><a:pPr lvl="0" indent="0" marL="0"><a:buNone /></a:pPr><a:r><a:rPr /><a:t>Base rate</a:t></a:r></a:p></a:txBody></a:tc><a:tc><a:txBody><a:bodyPr /><a:lstStyle /><a:p><a:pPr lvl="0" indent="0" marL="0"><a:buNone /></a:pPr><a:r><a:rPr /><a:t>0.160</a:t></a:r></a:p></a:txBody></a:tc><a:tc><a:txBody><a:bodyPr /><a:lstStyle /><a:p><a:pPr lvl="0" indent="0" marL="0"><a:buNone /></a:pPr><a:r><a:rPr /><a:t>0.136</a:t></a:r></a:p></a:txBody></a:tc></a:tr><a:tr h="0"><a:tc><a:txBody><a:bodyPr /><a:lstStyle /><a:p><a:pPr lvl="0" indent="0" marL="0"><a:buNone /></a:pPr><a:r><a:rPr b="1" /><a:t>ROC AUC</a:t></a:r></a:p></a:txBody></a:tc><a:tc><a:txBody><a:bodyPr /><a:lstStyle /><a:p><a:pPr lvl="0" indent="0" marL="0"><a:buNone /></a:pPr><a:r><a:rPr b="1" /><a:t>0.627</a:t></a:r></a:p></a:txBody></a:tc><a:tc><a:txBody><a:bodyPr /><a:lstStyle /><a:p><a:pPr lvl="0" indent="0" marL="0"><a:buNone /></a:pPr><a:r><a:rPr b="1" /><a:t>0.866</a:t></a:r></a:p></a:txBody></a:tc></a:tr><a:tr h="0"><a:tc><a:txBody><a:bodyPr /><a:lstStyle /><a:p><a:pPr lvl="0" indent="0" marL="0"><a:buNone /></a:pPr><a:r><a:rPr b="1" /><a:t>PR AUC</a:t></a:r></a:p></a:txBody></a:tc><a:tc><a:txBody><a:bodyPr /><a:lstStyle /><a:p><a:pPr lvl="0" indent="0" marL="0"><a:buNone /></a:pPr><a:r><a:rPr /><a:t>0.232</a:t></a:r></a:p></a:txBody></a:tc><a:tc><a:txBody><a:bodyPr /><a:lstStyle /><a:p><a:pPr lvl="0" indent="0" marL="0"><a:buNone /></a:pPr><a:r><a:rPr /><a:t>0.475</a:t></a:r></a:p></a:txBody></a:tc></a:tr></a:tbl></a:graphicData></a:graphic></p:graphicFrame></p:spTree></p:cSld></p:sld>
 </file>
 
 <file path=ppt/slides/slide39.xml><?xml version="1.0" encoding="utf-8"?>
@@ -8420,12 +8244,12 @@
       </p:grpSpPr>
       <p:sp>
         <p:nvSpPr>
-          <p:cNvPr id="2" name="Title 1"/>
-          <p:cNvSpPr>
-            <a:spLocks noGrp="1"/>
-          </p:cNvSpPr>
-          <p:nvPr>
-            <p:ph type="title"/>
+          <p:cNvPr id="3" name="Content Placeholder 2"/>
+          <p:cNvSpPr>
+            <a:spLocks noGrp="1"/>
+          </p:cNvSpPr>
+          <p:nvPr>
+            <p:ph idx="1"/>
           </p:nvPr>
         </p:nvSpPr>
         <p:spPr/>
@@ -8438,101 +8262,20 @@
             </a:pPr>
             <a:r>
               <a:rPr/>
-              <a:t>What to carry out of this session</a:t>
-            </a:r>
-          </a:p>
-        </p:txBody>
-      </p:sp>
-      <p:sp>
-        <p:nvSpPr>
-          <p:cNvPr id="3" name="Content Placeholder 2"/>
-          <p:cNvSpPr>
-            <a:spLocks noGrp="1"/>
-          </p:cNvSpPr>
-          <p:nvPr>
-            <p:ph idx="1"/>
-          </p:nvPr>
-        </p:nvSpPr>
-        <p:spPr/>
-        <p:txBody>
-          <a:bodyPr/>
-          <a:lstStyle/>
-          <a:p>
-            <a:pPr lvl="0" indent="-342900" marL="342900">
-              <a:buAutoNum type="arabicPeriod"/>
+              <a:t>Both are imbalanced. Both use the same estimator. One barely ranks better than chance; the other ranks well. </a:t>
+            </a:r>
+            <a:r>
+              <a:rPr b="1"/>
+              <a:t>The method did not differ — the informativeness of the predictors did.</a:t>
+            </a:r>
+          </a:p>
+          <a:p>
+            <a:pPr lvl="0" indent="0" marL="0">
+              <a:buNone/>
             </a:pPr>
             <a:r>
-              <a:rPr b="1"/>
-              <a:t>A model gives a probability; a decision needs a threshold.</a:t>
-            </a:r>
-            <a:r>
-              <a:rPr/>
-              <a:t> Separate acts, separate justifications.</a:t>
-            </a:r>
-          </a:p>
-          <a:p>
-            <a:pPr lvl="0" indent="-342900" marL="342900">
-              <a:buAutoNum type="arabicPeriod"/>
-            </a:pPr>
-            <a:r>
-              <a:rPr b="1"/>
-              <a:t>Report the base rate first.</a:t>
-            </a:r>
-            <a:r>
-              <a:rPr/>
-              <a:t> Accuracy cannot be read without it.</a:t>
-            </a:r>
-          </a:p>
-          <a:p>
-            <a:pPr lvl="0" indent="-342900" marL="342900">
-              <a:buAutoNum type="arabicPeriod"/>
-            </a:pPr>
-            <a:r>
-              <a:rPr b="1"/>
-              <a:t>Report an odds ratio or an average marginal effect</a:t>
-            </a:r>
-            <a:r>
-              <a:rPr/>
-              <a:t>, with its units — not a bare coefficient.</a:t>
-            </a:r>
-          </a:p>
-          <a:p>
-            <a:pPr lvl="0" indent="-342900" marL="342900">
-              <a:buAutoNum type="arabicPeriod"/>
-            </a:pPr>
-            <a:r>
-              <a:rPr b="1"/>
-              <a:t>Derive your threshold from a stated cost ratio</a:t>
-            </a:r>
-            <a:r>
-              <a:rPr/>
-              <a:t>, and show how the answer moves if it is wrong.</a:t>
-            </a:r>
-          </a:p>
-          <a:p>
-            <a:pPr lvl="0" indent="-342900" marL="342900">
-              <a:buAutoNum type="arabicPeriod"/>
-            </a:pPr>
-            <a:r>
-              <a:rPr b="1"/>
-              <a:t>Check calibration</a:t>
-            </a:r>
-            <a:r>
-              <a:rPr/>
-              <a:t> before any probability enters a cost calculation.</a:t>
-            </a:r>
-          </a:p>
-          <a:p>
-            <a:pPr lvl="0" indent="-342900" marL="342900">
-              <a:buAutoNum type="arabicPeriod"/>
-            </a:pPr>
-            <a:r>
-              <a:rPr b="1"/>
-              <a:t>Match the validation to the data.</a:t>
-            </a:r>
-            <a:r>
-              <a:rPr/>
-              <a:t> Exchangeable rows and panel rows are not the same problem.</a:t>
+              <a:rPr/>
+              <a:t>Chemistry measures the thing being judged. A credit file measures a person’s past, not their next three years.</a:t>
             </a:r>
           </a:p>
         </p:txBody>
@@ -8718,6 +8461,645 @@
 </file>
 
 <file path=ppt/slides/slide40.xml><?xml version="1.0" encoding="utf-8"?>
+<p:sld xmlns:a="http://schemas.openxmlformats.org/drawingml/2006/main" xmlns:r="http://schemas.openxmlformats.org/officeDocument/2006/relationships" xmlns:p="http://schemas.openxmlformats.org/presentationml/2006/main">
+  <p:cSld>
+    <p:spTree>
+      <p:nvGrpSpPr>
+        <p:cNvPr id="1" name=""/>
+        <p:cNvGrpSpPr/>
+        <p:nvPr/>
+      </p:nvGrpSpPr>
+      <p:grpSpPr>
+        <a:xfrm>
+          <a:off x="0" y="0"/>
+          <a:ext cx="0" cy="0"/>
+          <a:chOff x="0" y="0"/>
+          <a:chExt cx="0" cy="0"/>
+        </a:xfrm>
+      </p:grpSpPr>
+      <p:sp>
+        <p:nvSpPr>
+          <p:cNvPr id="2" name="Title 1"/>
+          <p:cNvSpPr>
+            <a:spLocks noGrp="1"/>
+          </p:cNvSpPr>
+          <p:nvPr>
+            <p:ph type="title"/>
+          </p:nvPr>
+        </p:nvSpPr>
+        <p:spPr>
+          <a:xfrm>
+            <a:off x="722313" y="3305176"/>
+            <a:ext cx="7772400" cy="1021556"/>
+          </a:xfrm>
+        </p:spPr>
+        <p:txBody>
+          <a:bodyPr/>
+          <a:lstStyle/>
+          <a:p>
+            <a:pPr lvl="0" indent="0" marL="0">
+              <a:buNone/>
+            </a:pPr>
+            <a:r>
+              <a:rPr/>
+              <a:t>8 · A third example</a:t>
+            </a:r>
+          </a:p>
+        </p:txBody>
+      </p:sp>
+    </p:spTree>
+  </p:cSld>
+</p:sld>
+</file>
+
+<file path=ppt/slides/slide41.xml><?xml version="1.0" encoding="utf-8"?>
+<p:sld xmlns:a="http://schemas.openxmlformats.org/drawingml/2006/main" xmlns:r="http://schemas.openxmlformats.org/officeDocument/2006/relationships" xmlns:p="http://schemas.openxmlformats.org/presentationml/2006/main">
+  <p:cSld>
+    <p:spTree>
+      <p:nvGrpSpPr>
+        <p:cNvPr id="1" name=""/>
+        <p:cNvGrpSpPr/>
+        <p:nvPr/>
+      </p:nvGrpSpPr>
+      <p:grpSpPr>
+        <a:xfrm>
+          <a:off x="0" y="0"/>
+          <a:ext cx="0" cy="0"/>
+          <a:chOff x="0" y="0"/>
+          <a:chExt cx="0" cy="0"/>
+        </a:xfrm>
+      </p:grpSpPr>
+      <p:sp>
+        <p:nvSpPr>
+          <p:cNvPr id="2" name="Title 1"/>
+          <p:cNvSpPr>
+            <a:spLocks noGrp="1"/>
+          </p:cNvSpPr>
+          <p:nvPr>
+            <p:ph type="title"/>
+          </p:nvPr>
+        </p:nvSpPr>
+        <p:spPr/>
+        <p:txBody>
+          <a:bodyPr/>
+          <a:lstStyle/>
+          <a:p>
+            <a:pPr lvl="0" indent="0" marL="0">
+              <a:buNone/>
+            </a:pPr>
+            <a:r>
+              <a:rPr/>
+              <a:t>Falling behind in Europe</a:t>
+            </a:r>
+          </a:p>
+        </p:txBody>
+      </p:sp>
+      <p:sp>
+        <p:nvSpPr>
+          <p:cNvPr id="3" name="Content Placeholder 2"/>
+          <p:cNvSpPr>
+            <a:spLocks noGrp="1"/>
+          </p:cNvSpPr>
+          <p:nvPr>
+            <p:ph idx="1"/>
+          </p:nvPr>
+        </p:nvSpPr>
+        <p:spPr/>
+        <p:txBody>
+          <a:bodyPr/>
+          <a:lstStyle/>
+          <a:p>
+            <a:pPr lvl="0" indent="0" marL="0">
+              <a:buNone/>
+            </a:pPr>
+            <a:r>
+              <a:rPr/>
+              <a:t>The same machinery, a policy question, and the practice data:</a:t>
+            </a:r>
+          </a:p>
+          <a:p>
+            <a:pPr lvl="0" indent="0">
+              <a:buNone/>
+            </a:pPr>
+            <a:r>
+              <a:rPr>
+                <a:latin typeface="Courier"/>
+              </a:rPr>
+              <a:t>core </a:t>
+            </a:r>
+            <a:r>
+              <a:rPr>
+                <a:solidFill>
+                  <a:srgbClr val="666666"/>
+                </a:solidFill>
+                <a:latin typeface="Courier"/>
+              </a:rPr>
+              <a:t>=</a:t>
+            </a:r>
+            <a:r>
+              <a:rPr>
+                <a:latin typeface="Courier"/>
+              </a:rPr>
+              <a:t> pd.read_parquet(</a:t>
+            </a:r>
+            <a:r>
+              <a:rPr>
+                <a:solidFill>
+                  <a:srgbClr val="4070A0"/>
+                </a:solidFill>
+                <a:latin typeface="Courier"/>
+              </a:rPr>
+              <a:t>"data/spine/core.parquet"</a:t>
+            </a:r>
+            <a:r>
+              <a:rPr>
+                <a:latin typeface="Courier"/>
+              </a:rPr>
+              <a:t>)</a:t>
+            </a:r>
+            <a:br/>
+            <a:r>
+              <a:rPr>
+                <a:latin typeface="Courier"/>
+              </a:rPr>
+              <a:t>d </a:t>
+            </a:r>
+            <a:r>
+              <a:rPr>
+                <a:solidFill>
+                  <a:srgbClr val="666666"/>
+                </a:solidFill>
+                <a:latin typeface="Courier"/>
+              </a:rPr>
+              <a:t>=</a:t>
+            </a:r>
+            <a:r>
+              <a:rPr>
+                <a:latin typeface="Courier"/>
+              </a:rPr>
+              <a:t> core.dropna(subset</a:t>
+            </a:r>
+            <a:r>
+              <a:rPr>
+                <a:solidFill>
+                  <a:srgbClr val="666666"/>
+                </a:solidFill>
+                <a:latin typeface="Courier"/>
+              </a:rPr>
+              <a:t>=</a:t>
+            </a:r>
+            <a:r>
+              <a:rPr>
+                <a:latin typeface="Courier"/>
+              </a:rPr>
+              <a:t>[</a:t>
+            </a:r>
+            <a:r>
+              <a:rPr>
+                <a:solidFill>
+                  <a:srgbClr val="4070A0"/>
+                </a:solidFill>
+                <a:latin typeface="Courier"/>
+              </a:rPr>
+              <a:t>"falling_behind_next"</a:t>
+            </a:r>
+            <a:r>
+              <a:rPr>
+                <a:latin typeface="Courier"/>
+              </a:rPr>
+              <a:t>])</a:t>
+            </a:r>
+            <a:br/>
+            <a:br/>
+            <a:r>
+              <a:rPr>
+                <a:solidFill>
+                  <a:srgbClr val="008000"/>
+                </a:solidFill>
+                <a:latin typeface="Courier"/>
+              </a:rPr>
+              <a:t>print</a:t>
+            </a:r>
+            <a:r>
+              <a:rPr>
+                <a:latin typeface="Courier"/>
+              </a:rPr>
+              <a:t>(</a:t>
+            </a:r>
+            <a:r>
+              <a:rPr>
+                <a:solidFill>
+                  <a:srgbClr val="008000"/>
+                </a:solidFill>
+                <a:latin typeface="Courier"/>
+              </a:rPr>
+              <a:t>len</a:t>
+            </a:r>
+            <a:r>
+              <a:rPr>
+                <a:latin typeface="Courier"/>
+              </a:rPr>
+              <a:t>(d), d[</a:t>
+            </a:r>
+            <a:r>
+              <a:rPr>
+                <a:solidFill>
+                  <a:srgbClr val="4070A0"/>
+                </a:solidFill>
+                <a:latin typeface="Courier"/>
+              </a:rPr>
+              <a:t>"falling_behind_next"</a:t>
+            </a:r>
+            <a:r>
+              <a:rPr>
+                <a:latin typeface="Courier"/>
+              </a:rPr>
+              <a:t>].mean())   </a:t>
+            </a:r>
+            <a:r>
+              <a:rPr i="1">
+                <a:solidFill>
+                  <a:srgbClr val="60A0B0"/>
+                </a:solidFill>
+                <a:latin typeface="Courier"/>
+              </a:rPr>
+              <a:t># 420, 0.10</a:t>
+            </a:r>
+          </a:p>
+          <a:p>
+            <a:pPr lvl="0"/>
+            <a:r>
+              <a:rPr/>
+              <a:t>Outcome: is this country in the </a:t>
+            </a:r>
+            <a:r>
+              <a:rPr b="1"/>
+              <a:t>bottom decile</a:t>
+            </a:r>
+            <a:r>
+              <a:rPr/>
+              <a:t> of productivity growth </a:t>
+            </a:r>
+            <a:r>
+              <a:rPr b="1"/>
+              <a:t>next year</a:t>
+            </a:r>
+            <a:r>
+              <a:rPr/>
+              <a:t>?</a:t>
+            </a:r>
+          </a:p>
+          <a:p>
+            <a:pPr lvl="0"/>
+            <a:r>
+              <a:rPr/>
+              <a:t>Base rate </a:t>
+            </a:r>
+            <a:r>
+              <a:rPr b="1"/>
+              <a:t>10%</a:t>
+            </a:r>
+            <a:r>
+              <a:rPr/>
+              <a:t> — by construction, since the threshold is the within-year decile</a:t>
+            </a:r>
+          </a:p>
+          <a:p>
+            <a:pPr lvl="0"/>
+            <a:r>
+              <a:rPr/>
+              <a:t>30 rows are </a:t>
+            </a:r>
+            <a:r>
+              <a:rPr>
+                <a:latin typeface="Courier"/>
+              </a:rPr>
+              <a:t>NaN</a:t>
+            </a:r>
+            <a:r>
+              <a:rPr/>
+              <a:t>: the last year of each country. There is no next year.</a:t>
+            </a:r>
+          </a:p>
+        </p:txBody>
+      </p:sp>
+    </p:spTree>
+  </p:cSld>
+</p:sld>
+</file>
+
+<file path=ppt/slides/slide42.xml><?xml version="1.0" encoding="utf-8"?>
+<p:sld xmlns:a="http://schemas.openxmlformats.org/drawingml/2006/main" xmlns:r="http://schemas.openxmlformats.org/officeDocument/2006/relationships" xmlns:p="http://schemas.openxmlformats.org/presentationml/2006/main">
+  <p:cSld>
+    <p:spTree>
+      <p:nvGrpSpPr>
+        <p:cNvPr id="1" name=""/>
+        <p:cNvGrpSpPr/>
+        <p:nvPr/>
+      </p:nvGrpSpPr>
+      <p:grpSpPr>
+        <a:xfrm>
+          <a:off x="0" y="0"/>
+          <a:ext cx="0" cy="0"/>
+          <a:chOff x="0" y="0"/>
+          <a:chExt cx="0" cy="0"/>
+        </a:xfrm>
+      </p:grpSpPr>
+      <p:sp>
+        <p:nvSpPr>
+          <p:cNvPr id="2" name="Title 1"/>
+          <p:cNvSpPr>
+            <a:spLocks noGrp="1"/>
+          </p:cNvSpPr>
+          <p:nvPr>
+            <p:ph type="title"/>
+          </p:nvPr>
+        </p:nvSpPr>
+        <p:spPr/>
+        <p:txBody>
+          <a:bodyPr/>
+          <a:lstStyle/>
+          <a:p>
+            <a:pPr lvl="0" indent="0" marL="0">
+              <a:buNone/>
+            </a:pPr>
+            <a:r>
+              <a:rPr/>
+              <a:t>Two differences that change everything</a:t>
+            </a:r>
+          </a:p>
+        </p:txBody>
+      </p:sp>
+      <p:sp>
+        <p:nvSpPr>
+          <p:cNvPr id="3" name="Content Placeholder 2"/>
+          <p:cNvSpPr>
+            <a:spLocks noGrp="1"/>
+          </p:cNvSpPr>
+          <p:nvPr>
+            <p:ph idx="1"/>
+          </p:nvPr>
+        </p:nvSpPr>
+        <p:spPr/>
+        <p:txBody>
+          <a:bodyPr/>
+          <a:lstStyle/>
+          <a:p>
+            <a:pPr lvl="0" indent="-342900" marL="342900">
+              <a:buAutoNum type="arabicPeriod"/>
+            </a:pPr>
+            <a:r>
+              <a:rPr b="1"/>
+              <a:t>The rows are not independent.</a:t>
+            </a:r>
+            <a:r>
+              <a:rPr/>
+              <a:t> 30 countries × 14 years. Germany 2019 and Germany 2020 are not two draws — so cross-validate with </a:t>
+            </a:r>
+            <a:r>
+              <a:rPr>
+                <a:latin typeface="Courier"/>
+              </a:rPr>
+              <a:t>GroupKFold</a:t>
+            </a:r>
+            <a:r>
+              <a:rPr/>
+              <a:t> on </a:t>
+            </a:r>
+            <a:r>
+              <a:rPr>
+                <a:latin typeface="Courier"/>
+              </a:rPr>
+              <a:t>geo</a:t>
+            </a:r>
+            <a:r>
+              <a:rPr/>
+              <a:t>, not at random.</a:t>
+            </a:r>
+          </a:p>
+          <a:p>
+            <a:pPr lvl="0" indent="-342900" marL="342900">
+              <a:buAutoNum type="arabicPeriod"/>
+            </a:pPr>
+            <a:r>
+              <a:rPr b="1"/>
+              <a:t>Dropping those 30 NaNs is correct.</a:t>
+            </a:r>
+            <a:r>
+              <a:rPr/>
+              <a:t> Imputing them would be inventing the future.</a:t>
+            </a:r>
+          </a:p>
+          <a:p>
+            <a:pPr lvl="0" indent="0" marL="0">
+              <a:buNone/>
+            </a:pPr>
+            <a:r>
+              <a:rPr/>
+              <a:t>Lending Club rows are arguably exchangeable. Panel rows never are. The method is identical; the validation is not.</a:t>
+            </a:r>
+          </a:p>
+        </p:txBody>
+      </p:sp>
+    </p:spTree>
+  </p:cSld>
+</p:sld>
+</file>
+
+<file path=ppt/slides/slide43.xml><?xml version="1.0" encoding="utf-8"?>
+<p:sld xmlns:a="http://schemas.openxmlformats.org/drawingml/2006/main" xmlns:r="http://schemas.openxmlformats.org/officeDocument/2006/relationships" xmlns:p="http://schemas.openxmlformats.org/presentationml/2006/main">
+  <p:cSld>
+    <p:spTree>
+      <p:nvGrpSpPr>
+        <p:cNvPr id="1" name=""/>
+        <p:cNvGrpSpPr/>
+        <p:nvPr/>
+      </p:nvGrpSpPr>
+      <p:grpSpPr>
+        <a:xfrm>
+          <a:off x="0" y="0"/>
+          <a:ext cx="0" cy="0"/>
+          <a:chOff x="0" y="0"/>
+          <a:chExt cx="0" cy="0"/>
+        </a:xfrm>
+      </p:grpSpPr>
+      <p:sp>
+        <p:nvSpPr>
+          <p:cNvPr id="2" name="Title 1"/>
+          <p:cNvSpPr>
+            <a:spLocks noGrp="1"/>
+          </p:cNvSpPr>
+          <p:nvPr>
+            <p:ph type="title"/>
+          </p:nvPr>
+        </p:nvSpPr>
+        <p:spPr>
+          <a:xfrm>
+            <a:off x="722313" y="3305176"/>
+            <a:ext cx="7772400" cy="1021556"/>
+          </a:xfrm>
+        </p:spPr>
+        <p:txBody>
+          <a:bodyPr/>
+          <a:lstStyle/>
+          <a:p>
+            <a:pPr lvl="0" indent="0" marL="0">
+              <a:buNone/>
+            </a:pPr>
+            <a:r>
+              <a:rPr/>
+              <a:t>9 · Key takeaways</a:t>
+            </a:r>
+          </a:p>
+        </p:txBody>
+      </p:sp>
+    </p:spTree>
+  </p:cSld>
+</p:sld>
+</file>
+
+<file path=ppt/slides/slide44.xml><?xml version="1.0" encoding="utf-8"?>
+<p:sld xmlns:a="http://schemas.openxmlformats.org/drawingml/2006/main" xmlns:r="http://schemas.openxmlformats.org/officeDocument/2006/relationships" xmlns:p="http://schemas.openxmlformats.org/presentationml/2006/main">
+  <p:cSld>
+    <p:spTree>
+      <p:nvGrpSpPr>
+        <p:cNvPr id="1" name=""/>
+        <p:cNvGrpSpPr/>
+        <p:nvPr/>
+      </p:nvGrpSpPr>
+      <p:grpSpPr>
+        <a:xfrm>
+          <a:off x="0" y="0"/>
+          <a:ext cx="0" cy="0"/>
+          <a:chOff x="0" y="0"/>
+          <a:chExt cx="0" cy="0"/>
+        </a:xfrm>
+      </p:grpSpPr>
+      <p:sp>
+        <p:nvSpPr>
+          <p:cNvPr id="2" name="Title 1"/>
+          <p:cNvSpPr>
+            <a:spLocks noGrp="1"/>
+          </p:cNvSpPr>
+          <p:nvPr>
+            <p:ph type="title"/>
+          </p:nvPr>
+        </p:nvSpPr>
+        <p:spPr/>
+        <p:txBody>
+          <a:bodyPr/>
+          <a:lstStyle/>
+          <a:p>
+            <a:pPr lvl="0" indent="0" marL="0">
+              <a:buNone/>
+            </a:pPr>
+            <a:r>
+              <a:rPr/>
+              <a:t>What to carry out of this session</a:t>
+            </a:r>
+          </a:p>
+        </p:txBody>
+      </p:sp>
+      <p:sp>
+        <p:nvSpPr>
+          <p:cNvPr id="3" name="Content Placeholder 2"/>
+          <p:cNvSpPr>
+            <a:spLocks noGrp="1"/>
+          </p:cNvSpPr>
+          <p:nvPr>
+            <p:ph idx="1"/>
+          </p:nvPr>
+        </p:nvSpPr>
+        <p:spPr/>
+        <p:txBody>
+          <a:bodyPr/>
+          <a:lstStyle/>
+          <a:p>
+            <a:pPr lvl="0" indent="-342900" marL="342900">
+              <a:buAutoNum type="arabicPeriod"/>
+            </a:pPr>
+            <a:r>
+              <a:rPr b="1"/>
+              <a:t>A model gives a probability; a decision needs a threshold.</a:t>
+            </a:r>
+            <a:r>
+              <a:rPr/>
+              <a:t> Separate acts, separate justifications.</a:t>
+            </a:r>
+          </a:p>
+          <a:p>
+            <a:pPr lvl="0" indent="-342900" marL="342900">
+              <a:buAutoNum type="arabicPeriod"/>
+            </a:pPr>
+            <a:r>
+              <a:rPr b="1"/>
+              <a:t>Report the base rate first.</a:t>
+            </a:r>
+            <a:r>
+              <a:rPr/>
+              <a:t> Accuracy cannot be read without it.</a:t>
+            </a:r>
+          </a:p>
+          <a:p>
+            <a:pPr lvl="0" indent="-342900" marL="342900">
+              <a:buAutoNum type="arabicPeriod"/>
+            </a:pPr>
+            <a:r>
+              <a:rPr b="1"/>
+              <a:t>Report an odds ratio or an average marginal effect</a:t>
+            </a:r>
+            <a:r>
+              <a:rPr/>
+              <a:t>, with its units — not a bare coefficient.</a:t>
+            </a:r>
+          </a:p>
+          <a:p>
+            <a:pPr lvl="0" indent="-342900" marL="342900">
+              <a:buAutoNum type="arabicPeriod"/>
+            </a:pPr>
+            <a:r>
+              <a:rPr b="1"/>
+              <a:t>Derive your threshold from a stated cost ratio</a:t>
+            </a:r>
+            <a:r>
+              <a:rPr/>
+              <a:t>, and show how the answer moves if it is wrong.</a:t>
+            </a:r>
+          </a:p>
+          <a:p>
+            <a:pPr lvl="0" indent="-342900" marL="342900">
+              <a:buAutoNum type="arabicPeriod"/>
+            </a:pPr>
+            <a:r>
+              <a:rPr b="1"/>
+              <a:t>Check calibration</a:t>
+            </a:r>
+            <a:r>
+              <a:rPr/>
+              <a:t> before any probability enters a cost calculation.</a:t>
+            </a:r>
+          </a:p>
+          <a:p>
+            <a:pPr lvl="0" indent="-342900" marL="342900">
+              <a:buAutoNum type="arabicPeriod"/>
+            </a:pPr>
+            <a:r>
+              <a:rPr b="1"/>
+              <a:t>Match the validation to the data.</a:t>
+            </a:r>
+            <a:r>
+              <a:rPr/>
+              <a:t> Exchangeable rows and panel rows are not the same problem.</a:t>
+            </a:r>
+          </a:p>
+        </p:txBody>
+      </p:sp>
+    </p:spTree>
+  </p:cSld>
+</p:sld>
+</file>
+
+<file path=ppt/slides/slide45.xml><?xml version="1.0" encoding="utf-8"?>
 <p:sld xmlns:a="http://schemas.openxmlformats.org/drawingml/2006/main" xmlns:r="http://schemas.openxmlformats.org/officeDocument/2006/relationships" xmlns:p="http://schemas.openxmlformats.org/presentationml/2006/main">
   <p:cSld>
     <p:spTree>
@@ -8952,7 +9334,7 @@
 </p:sld>
 </file>
 
-<file path=ppt/slides/slide41.xml><?xml version="1.0" encoding="utf-8"?>
+<file path=ppt/slides/slide46.xml><?xml version="1.0" encoding="utf-8"?>
 <p:sld xmlns:a="http://schemas.openxmlformats.org/drawingml/2006/main" xmlns:r="http://schemas.openxmlformats.org/officeDocument/2006/relationships" xmlns:p="http://schemas.openxmlformats.org/presentationml/2006/main">
   <p:cSld>
     <p:spTree>

--- a/06-classification-logistic-and-penalised/slides.pptx
+++ b/06-classification-logistic-and-penalised/slides.pptx
@@ -51,6 +51,10 @@
     <p:sldId id="299" r:id="rId45"/>
     <p:sldId id="300" r:id="rId46"/>
     <p:sldId id="301" r:id="rId47"/>
+    <p:sldId id="302" r:id="rId48"/>
+    <p:sldId id="303" r:id="rId49"/>
+    <p:sldId id="304" r:id="rId50"/>
+    <p:sldId id="305" r:id="rId51"/>
   </p:sldIdLst>
   <p:sldSz cx="9144000" cy="5143500" type="screen16x9"/>
   <p:notesSz cx="6858000" cy="9144000"/>
@@ -3324,7 +3328,12 @@
             <p:ph type="title"/>
           </p:nvPr>
         </p:nvSpPr>
-        <p:spPr/>
+        <p:spPr>
+          <a:xfrm>
+            <a:off x="722313" y="3305176"/>
+            <a:ext cx="7772400" cy="1021556"/>
+          </a:xfrm>
+        </p:spPr>
         <p:txBody>
           <a:bodyPr/>
           <a:lstStyle/>
@@ -3334,82 +3343,7 @@
             </a:pPr>
             <a:r>
               <a:rPr/>
-              <a:t>Lending Club</a:t>
-            </a:r>
-          </a:p>
-        </p:txBody>
-      </p:sp>
-      <p:sp>
-        <p:nvSpPr>
-          <p:cNvPr id="3" name="Content Placeholder 2"/>
-          <p:cNvSpPr>
-            <a:spLocks noGrp="1"/>
-          </p:cNvSpPr>
-          <p:nvPr>
-            <p:ph idx="1"/>
-          </p:nvPr>
-        </p:nvSpPr>
-        <p:spPr/>
-        <p:txBody>
-          <a:bodyPr/>
-          <a:lstStyle/>
-          <a:p>
-            <a:pPr lvl="0" indent="0" marL="0">
-              <a:buNone/>
-            </a:pPr>
-            <a:r>
-              <a:rPr/>
-              <a:t>A peer-to-peer lending marketplace: individuals lend to individuals, and the platform prices the risk.</a:t>
-            </a:r>
-          </a:p>
-          <a:p>
-            <a:pPr lvl="0"/>
-            <a:r>
-              <a:rPr b="1"/>
-              <a:t>9,578</a:t>
-            </a:r>
-            <a:r>
-              <a:rPr/>
-              <a:t> three-year loans funded through LendingClub.com</a:t>
-            </a:r>
-          </a:p>
-          <a:p>
-            <a:pPr lvl="0"/>
-            <a:r>
-              <a:rPr b="1"/>
-              <a:t>May 2007 – February 2010</a:t>
-            </a:r>
-          </a:p>
-          <a:p>
-            <a:pPr lvl="0"/>
-            <a:r>
-              <a:rPr/>
-              <a:t>Outcome: the loan was </a:t>
-            </a:r>
-            <a:r>
-              <a:rPr b="1"/>
-              <a:t>not fully paid back</a:t>
-            </a:r>
-            <a:r>
-              <a:rPr/>
-              <a:t> — the borrower defaulted, or the loan was charged off</a:t>
-            </a:r>
-          </a:p>
-          <a:p>
-            <a:pPr lvl="0" indent="0" marL="1270000">
-              <a:buNone/>
-            </a:pPr>
-            <a:r>
-              <a:rPr sz="2000" b="1"/>
-              <a:t>The question a lender actually has:</a:t>
-            </a:r>
-            <a:r>
-              <a:rPr sz="2000"/>
-              <a:t> </a:t>
-            </a:r>
-            <a:r>
-              <a:rPr sz="2000" i="1"/>
-              <a:t>which of these applications should I fund?</a:t>
+              <a:t>2 · An example</a:t>
             </a:r>
           </a:p>
         </p:txBody>
@@ -3456,7 +3390,7 @@
             </a:pPr>
             <a:r>
               <a:rPr/>
-              <a:t>Load it</a:t>
+              <a:t>Lending Club</a:t>
             </a:r>
           </a:p>
         </p:txBody>
@@ -3481,152 +3415,57 @@
             </a:pPr>
             <a:r>
               <a:rPr/>
-              <a:t>VS Codium terminal · with </a:t>
-            </a:r>
-            <a:r>
-              <a:rPr>
-                <a:latin typeface="Courier"/>
-              </a:rPr>
-              <a:t>(.venv)</a:t>
-            </a:r>
-            <a:r>
-              <a:rPr/>
-              <a:t> showing</a:t>
-            </a:r>
-          </a:p>
-          <a:p>
-            <a:pPr lvl="0" indent="0">
+              <a:t>A peer-to-peer marketplace: individuals lend to individuals, and the platform prices the risk.</a:t>
+            </a:r>
+          </a:p>
+          <a:p>
+            <a:pPr lvl="0"/>
+            <a:r>
+              <a:rPr b="1"/>
+              <a:t>9,578</a:t>
+            </a:r>
+            <a:r>
+              <a:rPr/>
+              <a:t> three-year loans funded through LendingClub.com</a:t>
+            </a:r>
+          </a:p>
+          <a:p>
+            <a:pPr lvl="0"/>
+            <a:r>
+              <a:rPr b="1"/>
+              <a:t>May 2007 – February 2010</a:t>
+            </a:r>
+          </a:p>
+          <a:p>
+            <a:pPr lvl="0"/>
+            <a:r>
+              <a:rPr/>
+              <a:t>Outcome: the loan was </a:t>
+            </a:r>
+            <a:r>
+              <a:rPr b="1"/>
+              <a:t>not fully repaid</a:t>
+            </a:r>
+            <a:r>
+              <a:rPr/>
+              <a:t> — default, or charged off</a:t>
+            </a:r>
+          </a:p>
+          <a:p>
+            <a:pPr lvl="0" indent="0" marL="1270000">
               <a:buNone/>
             </a:pPr>
             <a:r>
-              <a:rPr>
-                <a:latin typeface="Courier"/>
-              </a:rPr>
-              <a:t>python scripts/fetch_teaching_data.py     </a:t>
-            </a:r>
-            <a:r>
-              <a:rPr i="1">
-                <a:solidFill>
-                  <a:srgbClr val="60A0B0"/>
-                </a:solidFill>
-                <a:latin typeface="Courier"/>
-              </a:rPr>
-              <a:t># once, after cloning</a:t>
-            </a:r>
-          </a:p>
-          <a:p>
-            <a:pPr lvl="0" indent="0">
-              <a:buNone/>
-            </a:pPr>
-            <a:r>
-              <a:rPr b="1">
-                <a:solidFill>
-                  <a:srgbClr val="008000"/>
-                </a:solidFill>
-                <a:latin typeface="Courier"/>
-              </a:rPr>
-              <a:t>import</a:t>
-            </a:r>
-            <a:r>
-              <a:rPr>
-                <a:latin typeface="Courier"/>
-              </a:rPr>
-              <a:t> pandas </a:t>
-            </a:r>
-            <a:r>
-              <a:rPr b="1">
-                <a:solidFill>
-                  <a:srgbClr val="008000"/>
-                </a:solidFill>
-                <a:latin typeface="Courier"/>
-              </a:rPr>
-              <a:t>as</a:t>
-            </a:r>
-            <a:r>
-              <a:rPr>
-                <a:latin typeface="Courier"/>
-              </a:rPr>
-              <a:t> pd</a:t>
-            </a:r>
-            <a:br/>
-            <a:br/>
-            <a:r>
-              <a:rPr>
-                <a:latin typeface="Courier"/>
-              </a:rPr>
-              <a:t>loans </a:t>
-            </a:r>
-            <a:r>
-              <a:rPr>
-                <a:solidFill>
-                  <a:srgbClr val="666666"/>
-                </a:solidFill>
-                <a:latin typeface="Courier"/>
-              </a:rPr>
-              <a:t>=</a:t>
-            </a:r>
-            <a:r>
-              <a:rPr>
-                <a:latin typeface="Courier"/>
-              </a:rPr>
-              <a:t> pd.read_parquet(</a:t>
-            </a:r>
-            <a:r>
-              <a:rPr>
-                <a:solidFill>
-                  <a:srgbClr val="4070A0"/>
-                </a:solidFill>
-                <a:latin typeface="Courier"/>
-              </a:rPr>
-              <a:t>"data/loans.parquet"</a:t>
-            </a:r>
-            <a:r>
-              <a:rPr>
-                <a:latin typeface="Courier"/>
-              </a:rPr>
-              <a:t>)</a:t>
-            </a:r>
-            <a:br/>
-            <a:r>
-              <a:rPr>
-                <a:solidFill>
-                  <a:srgbClr val="008000"/>
-                </a:solidFill>
-                <a:latin typeface="Courier"/>
-              </a:rPr>
-              <a:t>print</a:t>
-            </a:r>
-            <a:r>
-              <a:rPr>
-                <a:latin typeface="Courier"/>
-              </a:rPr>
-              <a:t>(loans.shape)                         </a:t>
-            </a:r>
-            <a:r>
-              <a:rPr i="1">
-                <a:solidFill>
-                  <a:srgbClr val="60A0B0"/>
-                </a:solidFill>
-                <a:latin typeface="Courier"/>
-              </a:rPr>
-              <a:t># (9578, 14)</a:t>
-            </a:r>
-          </a:p>
-          <a:p>
-            <a:pPr lvl="0" indent="0" marL="0">
-              <a:buNone/>
-            </a:pPr>
-            <a:r>
-              <a:rPr/>
-              <a:t>Fetch </a:t>
-            </a:r>
-            <a:r>
-              <a:rPr b="1"/>
-              <a:t>once</a:t>
-            </a:r>
-            <a:r>
-              <a:rPr/>
-              <a:t>, then read the parquet. Nothing in a practice session may require the internet — and the fetch script has already tidied the R-style column names for you.</a:t>
+              <a:rPr sz="2000" b="1"/>
+              <a:t>The question a lender actually has:</a:t>
+            </a:r>
+            <a:r>
+              <a:rPr sz="2000"/>
+              <a:t> </a:t>
+            </a:r>
+            <a:r>
+              <a:rPr sz="2000" i="1"/>
+              <a:t>which of these applications should I fund?</a:t>
             </a:r>
           </a:p>
         </p:txBody>
@@ -3673,7 +3512,7 @@
             </a:pPr>
             <a:r>
               <a:rPr/>
-              <a:t>Look before you model</a:t>
+              <a:t>Get the data, once</a:t>
             </a:r>
           </a:p>
         </p:txBody>
@@ -3693,23 +3532,80 @@
           <a:bodyPr/>
           <a:lstStyle/>
           <a:p>
+            <a:pPr lvl="0" indent="0" marL="0">
+              <a:buNone/>
+            </a:pPr>
+            <a:r>
+              <a:rPr/>
+              <a:t>VS Codium terminal</a:t>
+            </a:r>
+          </a:p>
+          <a:p>
             <a:pPr lvl="0" indent="0">
               <a:buNone/>
             </a:pPr>
             <a:r>
               <a:rPr>
+                <a:latin typeface="Courier"/>
+              </a:rPr>
+              <a:t>python scripts/fetch_teaching_data.py</a:t>
+            </a:r>
+          </a:p>
+          <a:p>
+            <a:pPr lvl="0" indent="0">
+              <a:buNone/>
+            </a:pPr>
+            <a:r>
+              <a:rPr b="1">
                 <a:solidFill>
                   <a:srgbClr val="008000"/>
                 </a:solidFill>
                 <a:latin typeface="Courier"/>
               </a:rPr>
-              <a:t>print</a:t>
+              <a:t>import</a:t>
             </a:r>
             <a:r>
               <a:rPr>
                 <a:latin typeface="Courier"/>
               </a:rPr>
-              <a:t>(loans[</a:t>
+              <a:t> pandas </a:t>
+            </a:r>
+            <a:r>
+              <a:rPr b="1">
+                <a:solidFill>
+                  <a:srgbClr val="008000"/>
+                </a:solidFill>
+                <a:latin typeface="Courier"/>
+              </a:rPr>
+              <a:t>as</a:t>
+            </a:r>
+            <a:r>
+              <a:rPr>
+                <a:latin typeface="Courier"/>
+              </a:rPr>
+              <a:t> pd</a:t>
+            </a:r>
+            <a:br/>
+            <a:r>
+              <a:rPr>
+                <a:latin typeface="Courier"/>
+              </a:rPr>
+              <a:t>loans </a:t>
+            </a:r>
+            <a:r>
+              <a:rPr>
+                <a:solidFill>
+                  <a:srgbClr val="666666"/>
+                </a:solidFill>
+                <a:latin typeface="Courier"/>
+              </a:rPr>
+              <a:t>=</a:t>
+            </a:r>
+            <a:r>
+              <a:rPr>
+                <a:latin typeface="Courier"/>
+              </a:rPr>
+              <a:t> pd.read_parquet(</a:t>
             </a:r>
             <a:r>
               <a:rPr>
@@ -3718,133 +3614,50 @@
                 </a:solidFill>
                 <a:latin typeface="Courier"/>
               </a:rPr>
-              <a:t>"default"</a:t>
+              <a:t>"data/loans.parquet"</a:t>
             </a:r>
             <a:r>
               <a:rPr>
                 <a:latin typeface="Courier"/>
               </a:rPr>
-              <a:t>].mean())        </a:t>
-            </a:r>
-            <a:r>
-              <a:rPr i="1">
-                <a:solidFill>
-                  <a:srgbClr val="60A0B0"/>
-                </a:solidFill>
-                <a:latin typeface="Courier"/>
-              </a:rPr>
-              <a:t># 0.160</a:t>
-            </a:r>
-            <a:br/>
-            <a:r>
-              <a:rPr>
-                <a:solidFill>
-                  <a:srgbClr val="008000"/>
-                </a:solidFill>
-                <a:latin typeface="Courier"/>
-              </a:rPr>
-              <a:t>print</a:t>
+              <a:t>)</a:t>
+            </a:r>
+          </a:p>
+          <a:p>
+            <a:pPr lvl="0" indent="0" marL="0">
+              <a:buNone/>
+            </a:pPr>
+            <a:r>
+              <a:rPr/>
+              <a:t>The script downloads, tidies the R-style column names (</a:t>
             </a:r>
             <a:r>
               <a:rPr>
                 <a:latin typeface="Courier"/>
               </a:rPr>
-              <a:t>(loans[</a:t>
-            </a:r>
-            <a:r>
-              <a:rPr>
-                <a:solidFill>
-                  <a:srgbClr val="4070A0"/>
-                </a:solidFill>
-                <a:latin typeface="Courier"/>
-              </a:rPr>
-              <a:t>"purpose"</a:t>
+              <a:t>not.fully.paid</a:t>
+            </a:r>
+            <a:r>
+              <a:rPr/>
+              <a:t> → </a:t>
             </a:r>
             <a:r>
               <a:rPr>
                 <a:latin typeface="Courier"/>
               </a:rPr>
-              <a:t>].value_counts())</a:t>
-            </a:r>
-            <a:br/>
-            <a:r>
-              <a:rPr>
-                <a:latin typeface="Courier"/>
-              </a:rPr>
-              <a:t>loans[[</a:t>
-            </a:r>
-            <a:r>
-              <a:rPr>
-                <a:solidFill>
-                  <a:srgbClr val="4070A0"/>
-                </a:solidFill>
-                <a:latin typeface="Courier"/>
-              </a:rPr>
-              <a:t>"fico"</a:t>
-            </a:r>
-            <a:r>
-              <a:rPr>
-                <a:latin typeface="Courier"/>
-              </a:rPr>
-              <a:t>, </a:t>
-            </a:r>
-            <a:r>
-              <a:rPr>
-                <a:solidFill>
-                  <a:srgbClr val="4070A0"/>
-                </a:solidFill>
-                <a:latin typeface="Courier"/>
-              </a:rPr>
-              <a:t>"int_rate"</a:t>
-            </a:r>
-            <a:r>
-              <a:rPr>
-                <a:latin typeface="Courier"/>
-              </a:rPr>
-              <a:t>, </a:t>
-            </a:r>
-            <a:r>
-              <a:rPr>
-                <a:solidFill>
-                  <a:srgbClr val="4070A0"/>
-                </a:solidFill>
-                <a:latin typeface="Courier"/>
-              </a:rPr>
-              <a:t>"dti"</a:t>
-            </a:r>
-            <a:r>
-              <a:rPr>
-                <a:latin typeface="Courier"/>
-              </a:rPr>
-              <a:t>, </a:t>
-            </a:r>
-            <a:r>
-              <a:rPr>
-                <a:solidFill>
-                  <a:srgbClr val="4070A0"/>
-                </a:solidFill>
-                <a:latin typeface="Courier"/>
-              </a:rPr>
-              <a:t>"log_annual_inc"</a:t>
-            </a:r>
-            <a:r>
-              <a:rPr>
-                <a:latin typeface="Courier"/>
-              </a:rPr>
-              <a:t>]].describe()</a:t>
-            </a:r>
-          </a:p>
-          <a:p>
-            <a:pPr lvl="0" indent="0" marL="0">
-              <a:buNone/>
-            </a:pPr>
+              <a:t>default</a:t>
+            </a:r>
+            <a:r>
+              <a:rPr/>
+              <a:t>) and caches to parquet. </a:t>
+            </a:r>
             <a:r>
               <a:rPr b="1"/>
-              <a:t>16% of loans default.</a:t>
-            </a:r>
-            <a:r>
-              <a:rPr/>
-              <a:t> Write that number down — everything in section 5 depends on it, and a model that never predicts default is already 84% accurate.</a:t>
+              <a:t>Run it once.</a:t>
+            </a:r>
+            <a:r>
+              <a:rPr/>
+              <a:t> Nothing else in the course touches the network.</a:t>
             </a:r>
           </a:p>
         </p:txBody>
@@ -3881,287 +3694,138 @@
             <p:ph type="title"/>
           </p:nvPr>
         </p:nvSpPr>
+        <p:spPr>
+          <a:xfrm>
+            <a:off x="457201" y="204787"/>
+            <a:ext cx="3008313" cy="871538"/>
+          </a:xfrm>
+        </p:spPr>
+        <p:txBody>
+          <a:bodyPr/>
+          <a:lstStyle/>
+          <a:p>
+            <a:pPr lvl="0" indent="0" marL="0">
+              <a:buNone/>
+            </a:pPr>
+            <a:r>
+              <a:rPr/>
+              <a:t>Look before you model</a:t>
+            </a:r>
+          </a:p>
+        </p:txBody>
+      </p:sp>
+      <p:sp>
+        <p:nvSpPr>
+          <p:cNvPr id="4" name="Text Placeholder 3"/>
+          <p:cNvSpPr>
+            <a:spLocks noGrp="1"/>
+          </p:cNvSpPr>
+          <p:nvPr>
+            <p:ph idx="2" sz="half" type="body"/>
+          </p:nvPr>
+        </p:nvSpPr>
         <p:spPr/>
         <p:txBody>
           <a:bodyPr/>
           <a:lstStyle/>
           <a:p>
-            <a:pPr lvl="0" indent="0" marL="0">
+            <a:pPr lvl="0" indent="0">
               <a:buNone/>
             </a:pPr>
             <a:r>
-              <a:rPr/>
-              <a:t>What the columns mean</a:t>
-            </a:r>
-          </a:p>
-        </p:txBody>
-      </p:sp>
-      <p:graphicFrame>
-        <p:nvGraphicFramePr>
-          <p:cNvPr id="6" name="Content Placeholder 5"/>
-          <p:cNvGraphicFramePr>
-            <a:graphicFrameLocks noGrp="1"/>
-          </p:cNvGraphicFramePr>
-          <p:nvPr>
-            <p:ph idx="1"/>
-          </p:nvPr>
-        </p:nvGraphicFramePr>
-        <p:xfrm>
-          <a:off x="457200" y="1193800"/>
-          <a:ext cx="8229600" cy="3390900"/>
-        </p:xfrm>
-        <a:graphic>
-          <a:graphicData uri="http://schemas.openxmlformats.org/drawingml/2006/table">
-            <a:tbl>
-              <a:tblPr firstRow="1" bandRow="1">
-                <a:tableStyleId>{5C22544A-7EE6-4342-B048-85BDC9FD1C3A}</a:tableStyleId>
-              </a:tblPr>
-              <a:tblGrid>
-                <a:gridCol w="4114800"/>
-                <a:gridCol w="4114800"/>
-              </a:tblGrid>
-              <a:tr h="0">
-                <a:tc>
-                  <a:txBody>
-                    <a:bodyPr/>
-                    <a:lstStyle/>
-                    <a:p>
-                      <a:pPr lvl="0" indent="0" marL="0">
-                        <a:buNone/>
-                      </a:pPr>
-                      <a:r>
-                        <a:rPr/>
-                        <a:t>Column</a:t>
-                      </a:r>
-                    </a:p>
-                  </a:txBody>
-                  <a:tcPr/>
-                </a:tc>
-                <a:tc>
-                  <a:txBody>
-                    <a:bodyPr/>
-                    <a:lstStyle/>
-                    <a:p>
-                      <a:pPr lvl="0" indent="0" marL="0">
-                        <a:buNone/>
-                      </a:pPr>
-                      <a:r>
-                        <a:rPr/>
-                        <a:t>What it is</a:t>
-                      </a:r>
-                    </a:p>
-                  </a:txBody>
-                  <a:tcPr/>
-                </a:tc>
-              </a:tr>
-              <a:tr h="0">
-                <a:tc>
-                  <a:txBody>
-                    <a:bodyPr/>
-                    <a:lstStyle/>
-                    <a:p>
-                      <a:pPr lvl="0" indent="0" marL="0">
-                        <a:buNone/>
-                      </a:pPr>
-                      <a:r>
-                        <a:rPr>
-                          <a:latin typeface="Courier"/>
-                        </a:rPr>
-                        <a:t>fico</a:t>
-                      </a:r>
-                    </a:p>
-                  </a:txBody>
-                </a:tc>
-                <a:tc>
-                  <a:txBody>
-                    <a:bodyPr/>
-                    <a:lstStyle/>
-                    <a:p>
-                      <a:pPr lvl="0" indent="0" marL="0">
-                        <a:buNone/>
-                      </a:pPr>
-                      <a:r>
-                        <a:rPr/>
-                        <a:t>FICO credit score — the lender’s existing risk measure</a:t>
-                      </a:r>
-                    </a:p>
-                  </a:txBody>
-                </a:tc>
-              </a:tr>
-              <a:tr h="0">
-                <a:tc>
-                  <a:txBody>
-                    <a:bodyPr/>
-                    <a:lstStyle/>
-                    <a:p>
-                      <a:pPr lvl="0" indent="0" marL="0">
-                        <a:buNone/>
-                      </a:pPr>
-                      <a:r>
-                        <a:rPr>
-                          <a:latin typeface="Courier"/>
-                        </a:rPr>
-                        <a:t>int_rate</a:t>
-                      </a:r>
-                    </a:p>
-                  </a:txBody>
-                </a:tc>
-                <a:tc>
-                  <a:txBody>
-                    <a:bodyPr/>
-                    <a:lstStyle/>
-                    <a:p>
-                      <a:pPr lvl="0" indent="0" marL="0">
-                        <a:buNone/>
-                      </a:pPr>
-                      <a:r>
-                        <a:rPr/>
-                        <a:t>the rate the platform charged, i.e. its own risk assessment</a:t>
-                      </a:r>
-                    </a:p>
-                  </a:txBody>
-                </a:tc>
-              </a:tr>
-              <a:tr h="0">
-                <a:tc>
-                  <a:txBody>
-                    <a:bodyPr/>
-                    <a:lstStyle/>
-                    <a:p>
-                      <a:pPr lvl="0" indent="0" marL="0">
-                        <a:buNone/>
-                      </a:pPr>
-                      <a:r>
-                        <a:rPr>
-                          <a:latin typeface="Courier"/>
-                        </a:rPr>
-                        <a:t>dti</a:t>
-                      </a:r>
-                    </a:p>
-                  </a:txBody>
-                </a:tc>
-                <a:tc>
-                  <a:txBody>
-                    <a:bodyPr/>
-                    <a:lstStyle/>
-                    <a:p>
-                      <a:pPr lvl="0" indent="0" marL="0">
-                        <a:buNone/>
-                      </a:pPr>
-                      <a:r>
-                        <a:rPr/>
-                        <a:t>debt-to-income ratio</a:t>
-                      </a:r>
-                    </a:p>
-                  </a:txBody>
-                </a:tc>
-              </a:tr>
-              <a:tr h="0">
-                <a:tc>
-                  <a:txBody>
-                    <a:bodyPr/>
-                    <a:lstStyle/>
-                    <a:p>
-                      <a:pPr lvl="0" indent="0" marL="0">
-                        <a:buNone/>
-                      </a:pPr>
-                      <a:r>
-                        <a:rPr>
-                          <a:latin typeface="Courier"/>
-                        </a:rPr>
-                        <a:t>log_annual_inc</a:t>
-                      </a:r>
-                    </a:p>
-                  </a:txBody>
-                </a:tc>
-                <a:tc>
-                  <a:txBody>
-                    <a:bodyPr/>
-                    <a:lstStyle/>
-                    <a:p>
-                      <a:pPr lvl="0" indent="0" marL="0">
-                        <a:buNone/>
-                      </a:pPr>
-                      <a:r>
-                        <a:rPr/>
-                        <a:t>log annual income, self-reported</a:t>
-                      </a:r>
-                    </a:p>
-                  </a:txBody>
-                </a:tc>
-              </a:tr>
-              <a:tr h="0">
-                <a:tc>
-                  <a:txBody>
-                    <a:bodyPr/>
-                    <a:lstStyle/>
-                    <a:p>
-                      <a:pPr lvl="0" indent="0" marL="0">
-                        <a:buNone/>
-                      </a:pPr>
-                      <a:r>
-                        <a:rPr>
-                          <a:latin typeface="Courier"/>
-                        </a:rPr>
-                        <a:t>revol_bal</a:t>
-                      </a:r>
-                    </a:p>
-                  </a:txBody>
-                </a:tc>
-                <a:tc>
-                  <a:txBody>
-                    <a:bodyPr/>
-                    <a:lstStyle/>
-                    <a:p>
-                      <a:pPr lvl="0" indent="0" marL="0">
-                        <a:buNone/>
-                      </a:pPr>
-                      <a:r>
-                        <a:rPr/>
-                        <a:t>revolving balance outstanding</a:t>
-                      </a:r>
-                    </a:p>
-                  </a:txBody>
-                </a:tc>
-              </a:tr>
-              <a:tr h="0">
-                <a:tc>
-                  <a:txBody>
-                    <a:bodyPr/>
-                    <a:lstStyle/>
-                    <a:p>
-                      <a:pPr lvl="0" indent="0" marL="0">
-                        <a:buNone/>
-                      </a:pPr>
-                      <a:r>
-                        <a:rPr>
-                          <a:latin typeface="Courier"/>
-                        </a:rPr>
-                        <a:t>purpose</a:t>
-                      </a:r>
-                    </a:p>
-                  </a:txBody>
-                </a:tc>
-                <a:tc>
-                  <a:txBody>
-                    <a:bodyPr/>
-                    <a:lstStyle/>
-                    <a:p>
-                      <a:pPr lvl="0" indent="0" marL="0">
-                        <a:buNone/>
-                      </a:pPr>
-                      <a:r>
-                        <a:rPr/>
-                        <a:t>stated reason for the loan, 7 categories</a:t>
-                      </a:r>
-                    </a:p>
-                  </a:txBody>
-                </a:tc>
-              </a:tr>
-            </a:tbl>
-          </a:graphicData>
-        </a:graphic>
-      </p:graphicFrame>
+              <a:rPr>
+                <a:latin typeface="Courier"/>
+              </a:rPr>
+              <a:t>loans[</a:t>
+            </a:r>
+            <a:r>
+              <a:rPr>
+                <a:solidFill>
+                  <a:srgbClr val="4070A0"/>
+                </a:solidFill>
+                <a:latin typeface="Courier"/>
+              </a:rPr>
+              <a:t>"default"</a:t>
+            </a:r>
+            <a:r>
+              <a:rPr>
+                <a:latin typeface="Courier"/>
+              </a:rPr>
+              <a:t>].mean()          </a:t>
+            </a:r>
+            <a:r>
+              <a:rPr i="1">
+                <a:solidFill>
+                  <a:srgbClr val="60A0B0"/>
+                </a:solidFill>
+                <a:latin typeface="Courier"/>
+              </a:rPr>
+              <a:t># 0.160</a:t>
+            </a:r>
+            <a:br/>
+            <a:r>
+              <a:rPr>
+                <a:latin typeface="Courier"/>
+              </a:rPr>
+              <a:t>loans[</a:t>
+            </a:r>
+            <a:r>
+              <a:rPr>
+                <a:solidFill>
+                  <a:srgbClr val="4070A0"/>
+                </a:solidFill>
+                <a:latin typeface="Courier"/>
+              </a:rPr>
+              <a:t>"purpose"</a:t>
+            </a:r>
+            <a:r>
+              <a:rPr>
+                <a:latin typeface="Courier"/>
+              </a:rPr>
+              <a:t>].value_counts()  </a:t>
+            </a:r>
+            <a:r>
+              <a:rPr i="1">
+                <a:solidFill>
+                  <a:srgbClr val="60A0B0"/>
+                </a:solidFill>
+                <a:latin typeface="Courier"/>
+              </a:rPr>
+              <a:t># 7 categories</a:t>
+            </a:r>
+          </a:p>
+        </p:txBody>
+      </p:sp>
+      <p:pic>
+        <p:nvPicPr>
+          <p:cNvPr descr="slides_files/figure-pptx/cell-3-output-1.png" id="0" name="Picture 1"/>
+          <p:cNvPicPr>
+            <a:picLocks noGrp="1" noChangeAspect="1"/>
+          </p:cNvPicPr>
+          <p:nvPr/>
+        </p:nvPicPr>
+        <p:blipFill>
+          <a:blip r:embed="rId2"/>
+          <a:stretch>
+            <a:fillRect/>
+          </a:stretch>
+        </p:blipFill>
+        <p:spPr bwMode="auto">
+          <a:xfrm>
+            <a:off x="3568700" y="1638300"/>
+            <a:ext cx="5105400" cy="1524000"/>
+          </a:xfrm>
+          <a:prstGeom prst="rect">
+            <a:avLst/>
+          </a:prstGeom>
+          <a:noFill/>
+          <a:ln w="9525">
+            <a:noFill/>
+            <a:headEnd/>
+            <a:tailEnd/>
+          </a:ln>
+        </p:spPr>
+      </p:pic>
     </p:spTree>
   </p:cSld>
 </p:sld>
@@ -4203,26 +3867,12 @@
               <a:buNone/>
             </a:pPr>
             <a:r>
-              <a:rPr/>
-              <a:t>Note </a:t>
-            </a:r>
-            <a:r>
-              <a:rPr>
-                <a:latin typeface="Courier"/>
-              </a:rPr>
-              <a:t>int_rate</a:t>
-            </a:r>
-            <a:r>
-              <a:rPr/>
-              <a:t>: the platform’s </a:t>
-            </a:r>
-            <a:r>
-              <a:rPr i="1"/>
-              <a:t>price</a:t>
-            </a:r>
-            <a:r>
-              <a:rPr/>
-              <a:t> is itself a prediction. Using it as a predictor asks a different question from using only borrower characteristics.</a:t>
+              <a:rPr b="1"/>
+              <a:t>16% default.</a:t>
+            </a:r>
+            <a:r>
+              <a:rPr/>
+              <a:t> Hold that number — section 6 turns on it.</a:t>
             </a:r>
           </a:p>
         </p:txBody>
@@ -4274,7 +3924,7 @@
             </a:pPr>
             <a:r>
               <a:rPr/>
-              <a:t>3 · The basics</a:t>
+              <a:t>3 · Why a straight line fails</a:t>
             </a:r>
           </a:p>
         </p:txBody>
@@ -4321,7 +3971,605 @@
             </a:pPr>
             <a:r>
               <a:rPr/>
-              <a:t>Model the log-odds</a:t>
+              <a:t>Try it anyway</a:t>
+            </a:r>
+          </a:p>
+        </p:txBody>
+      </p:sp>
+      <p:sp>
+        <p:nvSpPr>
+          <p:cNvPr id="3" name="Content Placeholder 2"/>
+          <p:cNvSpPr>
+            <a:spLocks noGrp="1"/>
+          </p:cNvSpPr>
+          <p:nvPr>
+            <p:ph idx="1"/>
+          </p:nvPr>
+        </p:nvSpPr>
+        <p:spPr/>
+        <p:txBody>
+          <a:bodyPr/>
+          <a:lstStyle/>
+          <a:p>
+            <a:pPr lvl="0" indent="0" marL="0">
+              <a:buNone/>
+            </a:pPr>
+            <a:r>
+              <a:rPr/>
+              <a:t>Regress the 0/1 outcome on FICO by ordinary least squares — the Session 02 estimator, unchanged.</a:t>
+            </a:r>
+          </a:p>
+          <a:p>
+            <a:pPr lvl="0" indent="0">
+              <a:buNone/>
+            </a:pPr>
+            <a:r>
+              <a:rPr b="1">
+                <a:solidFill>
+                  <a:srgbClr val="008000"/>
+                </a:solidFill>
+                <a:latin typeface="Courier"/>
+              </a:rPr>
+              <a:t>import</a:t>
+            </a:r>
+            <a:r>
+              <a:rPr>
+                <a:latin typeface="Courier"/>
+              </a:rPr>
+              <a:t> statsmodels.api </a:t>
+            </a:r>
+            <a:r>
+              <a:rPr b="1">
+                <a:solidFill>
+                  <a:srgbClr val="008000"/>
+                </a:solidFill>
+                <a:latin typeface="Courier"/>
+              </a:rPr>
+              <a:t>as</a:t>
+            </a:r>
+            <a:r>
+              <a:rPr>
+                <a:latin typeface="Courier"/>
+              </a:rPr>
+              <a:t> sm</a:t>
+            </a:r>
+            <a:br/>
+            <a:r>
+              <a:rPr>
+                <a:latin typeface="Courier"/>
+              </a:rPr>
+              <a:t>X   </a:t>
+            </a:r>
+            <a:r>
+              <a:rPr>
+                <a:solidFill>
+                  <a:srgbClr val="666666"/>
+                </a:solidFill>
+                <a:latin typeface="Courier"/>
+              </a:rPr>
+              <a:t>=</a:t>
+            </a:r>
+            <a:r>
+              <a:rPr>
+                <a:latin typeface="Courier"/>
+              </a:rPr>
+              <a:t> sm.add_constant(loans[[</a:t>
+            </a:r>
+            <a:r>
+              <a:rPr>
+                <a:solidFill>
+                  <a:srgbClr val="4070A0"/>
+                </a:solidFill>
+                <a:latin typeface="Courier"/>
+              </a:rPr>
+              <a:t>"fico"</a:t>
+            </a:r>
+            <a:r>
+              <a:rPr>
+                <a:latin typeface="Courier"/>
+              </a:rPr>
+              <a:t>]])</a:t>
+            </a:r>
+            <a:br/>
+            <a:r>
+              <a:rPr>
+                <a:latin typeface="Courier"/>
+              </a:rPr>
+              <a:t>lpm </a:t>
+            </a:r>
+            <a:r>
+              <a:rPr>
+                <a:solidFill>
+                  <a:srgbClr val="666666"/>
+                </a:solidFill>
+                <a:latin typeface="Courier"/>
+              </a:rPr>
+              <a:t>=</a:t>
+            </a:r>
+            <a:r>
+              <a:rPr>
+                <a:latin typeface="Courier"/>
+              </a:rPr>
+              <a:t> sm.OLS(loans[</a:t>
+            </a:r>
+            <a:r>
+              <a:rPr>
+                <a:solidFill>
+                  <a:srgbClr val="4070A0"/>
+                </a:solidFill>
+                <a:latin typeface="Courier"/>
+              </a:rPr>
+              <a:t>"default"</a:t>
+            </a:r>
+            <a:r>
+              <a:rPr>
+                <a:latin typeface="Courier"/>
+              </a:rPr>
+              <a:t>], X).fit()</a:t>
+            </a:r>
+          </a:p>
+          <a:p>
+            <a:pPr lvl="0" indent="0" marL="0">
+              <a:buNone/>
+            </a:pPr>
+            <a:r>
+              <a:rPr/>
+              <a:t>This is the </a:t>
+            </a:r>
+            <a:r>
+              <a:rPr b="1"/>
+              <a:t>linear probability model</a:t>
+            </a:r>
+            <a:r>
+              <a:rPr/>
+              <a:t>. Economists use it, and for an average effect it is defensible.</a:t>
+            </a:r>
+          </a:p>
+        </p:txBody>
+      </p:sp>
+    </p:spTree>
+  </p:cSld>
+</p:sld>
+</file>
+
+<file path=ppt/slides/slide17.xml><?xml version="1.0" encoding="utf-8"?>
+<p:sld xmlns:a="http://schemas.openxmlformats.org/drawingml/2006/main" xmlns:r="http://schemas.openxmlformats.org/officeDocument/2006/relationships" xmlns:p="http://schemas.openxmlformats.org/presentationml/2006/main">
+  <p:cSld>
+    <p:spTree>
+      <p:nvGrpSpPr>
+        <p:cNvPr id="1" name=""/>
+        <p:cNvGrpSpPr/>
+        <p:nvPr/>
+      </p:nvGrpSpPr>
+      <p:grpSpPr>
+        <a:xfrm>
+          <a:off x="0" y="0"/>
+          <a:ext cx="0" cy="0"/>
+          <a:chOff x="0" y="0"/>
+          <a:chExt cx="0" cy="0"/>
+        </a:xfrm>
+      </p:grpSpPr>
+      <p:sp>
+        <p:nvSpPr>
+          <p:cNvPr id="2" name="Title 1"/>
+          <p:cNvSpPr>
+            <a:spLocks noGrp="1"/>
+          </p:cNvSpPr>
+          <p:nvPr>
+            <p:ph type="title"/>
+          </p:nvPr>
+        </p:nvSpPr>
+        <p:spPr/>
+        <p:txBody>
+          <a:bodyPr/>
+          <a:lstStyle/>
+          <a:p>
+            <a:pPr lvl="0" indent="0" marL="0">
+              <a:buNone/>
+            </a:pPr>
+            <a:r>
+              <a:rPr/>
+              <a:t>Look at what it predicts</a:t>
+            </a:r>
+          </a:p>
+        </p:txBody>
+      </p:sp>
+      <p:pic>
+        <p:nvPicPr>
+          <p:cNvPr descr="slides_files/figure-pptx/cell-4-output-1.png" id="0" name="Picture 1"/>
+          <p:cNvPicPr>
+            <a:picLocks noGrp="1" noChangeAspect="1"/>
+          </p:cNvPicPr>
+          <p:nvPr/>
+        </p:nvPicPr>
+        <p:blipFill>
+          <a:blip r:embed="rId2"/>
+          <a:stretch>
+            <a:fillRect/>
+          </a:stretch>
+        </p:blipFill>
+        <p:spPr bwMode="auto">
+          <a:xfrm>
+            <a:off x="1143000" y="1193800"/>
+            <a:ext cx="6858000" cy="3390900"/>
+          </a:xfrm>
+          <a:prstGeom prst="rect">
+            <a:avLst/>
+          </a:prstGeom>
+          <a:noFill/>
+          <a:ln w="9525">
+            <a:noFill/>
+            <a:headEnd/>
+            <a:tailEnd/>
+          </a:ln>
+        </p:spPr>
+      </p:pic>
+    </p:spTree>
+  </p:cSld>
+</p:sld>
+</file>
+
+<file path=ppt/slides/slide18.xml><?xml version="1.0" encoding="utf-8"?>
+<p:sld xmlns:a="http://schemas.openxmlformats.org/drawingml/2006/main" xmlns:r="http://schemas.openxmlformats.org/officeDocument/2006/relationships" xmlns:p="http://schemas.openxmlformats.org/presentationml/2006/main">
+  <p:cSld>
+    <p:spTree>
+      <p:nvGrpSpPr>
+        <p:cNvPr id="1" name=""/>
+        <p:cNvGrpSpPr/>
+        <p:nvPr/>
+      </p:nvGrpSpPr>
+      <p:grpSpPr>
+        <a:xfrm>
+          <a:off x="0" y="0"/>
+          <a:ext cx="0" cy="0"/>
+          <a:chOff x="0" y="0"/>
+          <a:chExt cx="0" cy="0"/>
+        </a:xfrm>
+      </p:grpSpPr>
+      <p:sp>
+        <p:nvSpPr>
+          <p:cNvPr id="3" name="Content Placeholder 2"/>
+          <p:cNvSpPr>
+            <a:spLocks noGrp="1"/>
+          </p:cNvSpPr>
+          <p:nvPr>
+            <p:ph idx="1"/>
+          </p:nvPr>
+        </p:nvSpPr>
+        <p:spPr/>
+        <p:txBody>
+          <a:bodyPr/>
+          <a:lstStyle/>
+          <a:p>
+            <a:pPr lvl="0" indent="0" marL="0">
+              <a:buNone/>
+            </a:pPr>
+            <a:r>
+              <a:rPr/>
+              <a:t>The straight line crosses zero: for high-FICO applicants it predicts a </a:t>
+            </a:r>
+            <a:r>
+              <a:rPr b="1"/>
+              <a:t>negative probability of default</a:t>
+            </a:r>
+            <a:r>
+              <a:rPr/>
+              <a:t> — here as low as </a:t>
+            </a:r>
+            <a:r>
+              <a:rPr b="1"/>
+              <a:t>−0.08</a:t>
+            </a:r>
+            <a:r>
+              <a:rPr/>
+              <a:t>.</a:t>
+            </a:r>
+          </a:p>
+        </p:txBody>
+      </p:sp>
+    </p:spTree>
+  </p:cSld>
+</p:sld>
+</file>
+
+<file path=ppt/slides/slide19.xml><?xml version="1.0" encoding="utf-8"?>
+<p:sld xmlns:a="http://schemas.openxmlformats.org/drawingml/2006/main" xmlns:r="http://schemas.openxmlformats.org/officeDocument/2006/relationships" xmlns:p="http://schemas.openxmlformats.org/presentationml/2006/main">
+  <p:cSld>
+    <p:spTree>
+      <p:nvGrpSpPr>
+        <p:cNvPr id="1" name=""/>
+        <p:cNvGrpSpPr/>
+        <p:nvPr/>
+      </p:nvGrpSpPr>
+      <p:grpSpPr>
+        <a:xfrm>
+          <a:off x="0" y="0"/>
+          <a:ext cx="0" cy="0"/>
+          <a:chOff x="0" y="0"/>
+          <a:chExt cx="0" cy="0"/>
+        </a:xfrm>
+      </p:grpSpPr>
+      <p:sp>
+        <p:nvSpPr>
+          <p:cNvPr id="2" name="Title 1"/>
+          <p:cNvSpPr>
+            <a:spLocks noGrp="1"/>
+          </p:cNvSpPr>
+          <p:nvPr>
+            <p:ph type="title"/>
+          </p:nvPr>
+        </p:nvSpPr>
+        <p:spPr/>
+        <p:txBody>
+          <a:bodyPr/>
+          <a:lstStyle/>
+          <a:p>
+            <a:pPr lvl="0" indent="0" marL="0">
+              <a:buNone/>
+            </a:pPr>
+            <a:r>
+              <a:rPr/>
+              <a:t>Why that is fatal for a decision</a:t>
+            </a:r>
+          </a:p>
+        </p:txBody>
+      </p:sp>
+      <mc:AlternateContent xmlns:mc="http://schemas.openxmlformats.org/markup-compatibility/2006">
+        <mc:Choice xmlns:a14="http://schemas.microsoft.com/office/drawing/2010/main" Requires="a14">
+          <p:sp>
+            <p:nvSpPr>
+              <p:cNvPr id="3" name="Content Placeholder 2"/>
+              <p:cNvSpPr>
+                <a:spLocks noGrp="1"/>
+              </p:cNvSpPr>
+              <p:nvPr>
+                <p:ph idx="1"/>
+              </p:nvPr>
+            </p:nvSpPr>
+            <p:spPr/>
+            <p:txBody>
+              <a:bodyPr/>
+              <a:lstStyle/>
+              <a:p>
+                <a:pPr lvl="0"/>
+                <a:r>
+                  <a:rPr/>
+                  <a:t>A probability below 0 or above 1 </a:t>
+                </a:r>
+                <a:r>
+                  <a:rPr b="1"/>
+                  <a:t>cannot be acted on</a:t>
+                </a:r>
+                <a:r>
+                  <a:rPr/>
+                  <a:t> — you cannot multiply it by a cost</a:t>
+                </a:r>
+              </a:p>
+              <a:p>
+                <a:pPr lvl="0"/>
+                <a:r>
+                  <a:rPr/>
+                  <a:t>The errors are heteroskedastic </a:t>
+                </a:r>
+                <a:r>
+                  <a:rPr b="1"/>
+                  <a:t>by construction</a:t>
+                </a:r>
+                <a:r>
+                  <a:rPr/>
+                  <a:t>: the variance is </a:t>
+                </a:r>
+                <a14:m>
+                  <m:oMath xmlns:m="http://schemas.openxmlformats.org/officeDocument/2006/math">
+                    <m:r>
+                      <m:t>p</m:t>
+                    </m:r>
+                    <m:d>
+                      <m:dPr>
+                        <m:begChr m:val="("/>
+                        <m:sepChr m:val=""/>
+                        <m:endChr m:val=")"/>
+                        <m:grow/>
+                      </m:dPr>
+                      <m:e>
+                        <m:r>
+                          <m:t>1</m:t>
+                        </m:r>
+                        <m:r>
+                          <m:rPr>
+                            <m:sty m:val="p"/>
+                          </m:rPr>
+                          <m:t>−</m:t>
+                        </m:r>
+                        <m:r>
+                          <m:t>p</m:t>
+                        </m:r>
+                      </m:e>
+                    </m:d>
+                  </m:oMath>
+                </a14:m>
+              </a:p>
+              <a:p>
+                <a:pPr lvl="0"/>
+                <a:r>
+                  <a:rPr/>
+                  <a:t>The fit is dragged by points far from the boundary, where nothing is being decided</a:t>
+                </a:r>
+              </a:p>
+              <a:p>
+                <a:pPr lvl="0" indent="0" marL="0">
+                  <a:buNone/>
+                </a:pPr>
+                <a:r>
+                  <a:rPr/>
+                  <a:t>For an </a:t>
+                </a:r>
+                <a:r>
+                  <a:rPr i="1"/>
+                  <a:t>average effect</a:t>
+                </a:r>
+                <a:r>
+                  <a:rPr/>
+                  <a:t> the LPM survives. For an </a:t>
+                </a:r>
+                <a:r>
+                  <a:rPr i="1"/>
+                  <a:t>individual decision</a:t>
+                </a:r>
+                <a:r>
+                  <a:rPr/>
+                  <a:t> it does not — and this session is about decisions.</a:t>
+                </a:r>
+              </a:p>
+            </p:txBody>
+          </p:sp>
+        </mc:Choice>
+      </mc:AlternateContent>
+    </p:spTree>
+  </p:cSld>
+</p:sld>
+</file>
+
+<file path=ppt/slides/slide2.xml><?xml version="1.0" encoding="utf-8"?>
+<p:sld xmlns:a="http://schemas.openxmlformats.org/drawingml/2006/main" xmlns:r="http://schemas.openxmlformats.org/officeDocument/2006/relationships" xmlns:p="http://schemas.openxmlformats.org/presentationml/2006/main">
+  <p:cSld>
+    <p:spTree>
+      <p:nvGrpSpPr>
+        <p:cNvPr id="1" name=""/>
+        <p:cNvGrpSpPr/>
+        <p:nvPr/>
+      </p:nvGrpSpPr>
+      <p:grpSpPr>
+        <a:xfrm>
+          <a:off x="0" y="0"/>
+          <a:ext cx="0" cy="0"/>
+          <a:chOff x="0" y="0"/>
+          <a:chExt cx="0" cy="0"/>
+        </a:xfrm>
+      </p:grpSpPr>
+      <p:sp>
+        <p:nvSpPr>
+          <p:cNvPr id="3" name="Content Placeholder 2"/>
+          <p:cNvSpPr>
+            <a:spLocks noGrp="1"/>
+          </p:cNvSpPr>
+          <p:nvPr>
+            <p:ph idx="1"/>
+          </p:nvPr>
+        </p:nvSpPr>
+        <p:spPr/>
+        <p:txBody>
+          <a:bodyPr/>
+          <a:lstStyle/>
+          <a:p>
+            <a:pPr lvl="0" indent="0" marL="0">
+              <a:spcBef>
+                <a:spcPts val="3000"/>
+              </a:spcBef>
+              <a:buNone/>
+            </a:pPr>
+            <a:r>
+              <a:rPr b="1"/>
+              <a:t>Your classifier is 97% accurate. Should anyone be impressed?</a:t>
+            </a:r>
+          </a:p>
+        </p:txBody>
+      </p:sp>
+    </p:spTree>
+  </p:cSld>
+</p:sld>
+</file>
+
+<file path=ppt/slides/slide20.xml><?xml version="1.0" encoding="utf-8"?>
+<p:sld xmlns:a="http://schemas.openxmlformats.org/drawingml/2006/main" xmlns:r="http://schemas.openxmlformats.org/officeDocument/2006/relationships" xmlns:p="http://schemas.openxmlformats.org/presentationml/2006/main">
+  <p:cSld>
+    <p:spTree>
+      <p:nvGrpSpPr>
+        <p:cNvPr id="1" name=""/>
+        <p:cNvGrpSpPr/>
+        <p:nvPr/>
+      </p:nvGrpSpPr>
+      <p:grpSpPr>
+        <a:xfrm>
+          <a:off x="0" y="0"/>
+          <a:ext cx="0" cy="0"/>
+          <a:chOff x="0" y="0"/>
+          <a:chExt cx="0" cy="0"/>
+        </a:xfrm>
+      </p:grpSpPr>
+      <p:sp>
+        <p:nvSpPr>
+          <p:cNvPr id="2" name="Title 1"/>
+          <p:cNvSpPr>
+            <a:spLocks noGrp="1"/>
+          </p:cNvSpPr>
+          <p:nvPr>
+            <p:ph type="title"/>
+          </p:nvPr>
+        </p:nvSpPr>
+        <p:spPr>
+          <a:xfrm>
+            <a:off x="722313" y="3305176"/>
+            <a:ext cx="7772400" cy="1021556"/>
+          </a:xfrm>
+        </p:spPr>
+        <p:txBody>
+          <a:bodyPr/>
+          <a:lstStyle/>
+          <a:p>
+            <a:pPr lvl="0" indent="0" marL="0">
+              <a:buNone/>
+            </a:pPr>
+            <a:r>
+              <a:rPr/>
+              <a:t>4 · The logistic curve</a:t>
+            </a:r>
+          </a:p>
+        </p:txBody>
+      </p:sp>
+    </p:spTree>
+  </p:cSld>
+</p:sld>
+</file>
+
+<file path=ppt/slides/slide21.xml><?xml version="1.0" encoding="utf-8"?>
+<p:sld xmlns:a="http://schemas.openxmlformats.org/drawingml/2006/main" xmlns:r="http://schemas.openxmlformats.org/officeDocument/2006/relationships" xmlns:p="http://schemas.openxmlformats.org/presentationml/2006/main">
+  <p:cSld>
+    <p:spTree>
+      <p:nvGrpSpPr>
+        <p:cNvPr id="1" name=""/>
+        <p:cNvGrpSpPr/>
+        <p:nvPr/>
+      </p:nvGrpSpPr>
+      <p:grpSpPr>
+        <a:xfrm>
+          <a:off x="0" y="0"/>
+          <a:ext cx="0" cy="0"/>
+          <a:chOff x="0" y="0"/>
+          <a:chExt cx="0" cy="0"/>
+        </a:xfrm>
+      </p:grpSpPr>
+      <p:sp>
+        <p:nvSpPr>
+          <p:cNvPr id="2" name="Title 1"/>
+          <p:cNvSpPr>
+            <a:spLocks noGrp="1"/>
+          </p:cNvSpPr>
+          <p:nvPr>
+            <p:ph type="title"/>
+          </p:nvPr>
+        </p:nvSpPr>
+        <p:spPr/>
+        <p:txBody>
+          <a:bodyPr/>
+          <a:lstStyle/>
+          <a:p>
+            <a:pPr lvl="0" indent="0" marL="0">
+              <a:buNone/>
+            </a:pPr>
+            <a:r>
+              <a:rPr/>
+              <a:t>Bend the line into the unit interval</a:t>
             </a:r>
           </a:p>
         </p:txBody>
@@ -4530,7 +4778,55 @@
                 </a:pPr>
                 <a:r>
                   <a:rPr/>
-                  <a:t>The logistic function maps the whole real line into </a:t>
+                  <a:t>The </a:t>
+                </a:r>
+                <a:r>
+                  <a:rPr b="1"/>
+                  <a:t>log-odds</a:t>
+                </a:r>
+                <a:r>
+                  <a:rPr/>
+                  <a:t> on the left is free to run from </a:t>
+                </a:r>
+                <a14:m>
+                  <m:oMath xmlns:m="http://schemas.openxmlformats.org/officeDocument/2006/math">
+                    <m:r>
+                      <m:rPr>
+                        <m:sty m:val="p"/>
+                      </m:rPr>
+                      <m:t>−</m:t>
+                    </m:r>
+                    <m:r>
+                      <m:rPr>
+                        <m:sty m:val="p"/>
+                      </m:rPr>
+                      <m:t>∞</m:t>
+                    </m:r>
+                  </m:oMath>
+                </a14:m>
+                <a:r>
+                  <a:rPr/>
+                  <a:t> to </a:t>
+                </a:r>
+                <a14:m>
+                  <m:oMath xmlns:m="http://schemas.openxmlformats.org/officeDocument/2006/math">
+                    <m:r>
+                      <m:rPr>
+                        <m:sty m:val="p"/>
+                      </m:rPr>
+                      <m:t>+</m:t>
+                    </m:r>
+                    <m:r>
+                      <m:rPr>
+                        <m:sty m:val="p"/>
+                      </m:rPr>
+                      <m:t>∞</m:t>
+                    </m:r>
+                  </m:oMath>
+                </a14:m>
+                <a:r>
+                  <a:rPr/>
+                  <a:t>, so a linear model is safe there. The probability on the right is then squeezed into </a:t>
                 </a:r>
                 <a14:m>
                   <m:oMath xmlns:m="http://schemas.openxmlformats.org/officeDocument/2006/math">
@@ -4560,794 +4856,13 @@
                 </a14:m>
                 <a:r>
                   <a:rPr/>
-                  <a:t>, so </a:t>
-                </a:r>
-                <a:r>
-                  <a:rPr b="1"/>
-                  <a:t>no fitted value can be an impossible probability</a:t>
-                </a:r>
-                <a:r>
-                  <a:rPr/>
-                  <a:t>. That is the whole reason for the transformation.</a:t>
+                  <a:t> automatically.</a:t>
                 </a:r>
               </a:p>
             </p:txBody>
           </p:sp>
         </mc:Choice>
       </mc:AlternateContent>
-    </p:spTree>
-  </p:cSld>
-</p:sld>
-</file>
-
-<file path=ppt/slides/slide17.xml><?xml version="1.0" encoding="utf-8"?>
-<p:sld xmlns:a="http://schemas.openxmlformats.org/drawingml/2006/main" xmlns:r="http://schemas.openxmlformats.org/officeDocument/2006/relationships" xmlns:p="http://schemas.openxmlformats.org/presentationml/2006/main">
-  <p:cSld>
-    <p:spTree>
-      <p:nvGrpSpPr>
-        <p:cNvPr id="1" name=""/>
-        <p:cNvGrpSpPr/>
-        <p:nvPr/>
-      </p:nvGrpSpPr>
-      <p:grpSpPr>
-        <a:xfrm>
-          <a:off x="0" y="0"/>
-          <a:ext cx="0" cy="0"/>
-          <a:chOff x="0" y="0"/>
-          <a:chExt cx="0" cy="0"/>
-        </a:xfrm>
-      </p:grpSpPr>
-      <p:sp>
-        <p:nvSpPr>
-          <p:cNvPr id="2" name="Title 1"/>
-          <p:cNvSpPr>
-            <a:spLocks noGrp="1"/>
-          </p:cNvSpPr>
-          <p:nvPr>
-            <p:ph type="title"/>
-          </p:nvPr>
-        </p:nvSpPr>
-        <p:spPr/>
-        <p:txBody>
-          <a:bodyPr/>
-          <a:lstStyle/>
-          <a:p>
-            <a:pPr lvl="0" indent="0" marL="0">
-              <a:buNone/>
-            </a:pPr>
-            <a:r>
-              <a:rPr/>
-              <a:t>Where it comes from, in one line</a:t>
-            </a:r>
-          </a:p>
-        </p:txBody>
-      </p:sp>
-      <mc:AlternateContent xmlns:mc="http://schemas.openxmlformats.org/markup-compatibility/2006">
-        <mc:Choice xmlns:a14="http://schemas.microsoft.com/office/drawing/2010/main" Requires="a14">
-          <p:sp>
-            <p:nvSpPr>
-              <p:cNvPr id="3" name="Content Placeholder 2"/>
-              <p:cNvSpPr>
-                <a:spLocks noGrp="1"/>
-              </p:cNvSpPr>
-              <p:nvPr>
-                <p:ph idx="1"/>
-              </p:nvPr>
-            </p:nvSpPr>
-            <p:spPr/>
-            <p:txBody>
-              <a:bodyPr/>
-              <a:lstStyle/>
-              <a:p>
-                <a:pPr lvl="0" indent="0" marL="0">
-                  <a:buNone/>
-                </a:pPr>
-                <a:r>
-                  <a:rPr/>
-                  <a:t>An unobserved index </a:t>
-                </a:r>
-                <a14:m>
-                  <m:oMath xmlns:m="http://schemas.openxmlformats.org/officeDocument/2006/math">
-                    <m:sSubSup>
-                      <m:e>
-                        <m:r>
-                          <m:t>y</m:t>
-                        </m:r>
-                      </m:e>
-                      <m:sub>
-                        <m:r>
-                          <m:t>i</m:t>
-                        </m:r>
-                      </m:sub>
-                      <m:sup>
-                        <m:r>
-                          <m:rPr>
-                            <m:sty m:val="p"/>
-                          </m:rPr>
-                          <m:t>*</m:t>
-                        </m:r>
-                      </m:sup>
-                    </m:sSubSup>
-                    <m:r>
-                      <m:rPr>
-                        <m:sty m:val="p"/>
-                      </m:rPr>
-                      <m:t>=</m:t>
-                    </m:r>
-                    <m:sSubSup>
-                      <m:e>
-                        <m:r>
-                          <m:t>x</m:t>
-                        </m:r>
-                      </m:e>
-                      <m:sub>
-                        <m:r>
-                          <m:t>i</m:t>
-                        </m:r>
-                      </m:sub>
-                      <m:sup>
-                        <m:r>
-                          <m:rPr>
-                            <m:sty m:val="p"/>
-                          </m:rPr>
-                          <m:t>⊤</m:t>
-                        </m:r>
-                      </m:sup>
-                    </m:sSubSup>
-                    <m:r>
-                      <m:t>β</m:t>
-                    </m:r>
-                    <m:r>
-                      <m:rPr>
-                        <m:sty m:val="p"/>
-                      </m:rPr>
-                      <m:t>−</m:t>
-                    </m:r>
-                    <m:sSub>
-                      <m:e>
-                        <m:r>
-                          <m:t>u</m:t>
-                        </m:r>
-                      </m:e>
-                      <m:sub>
-                        <m:r>
-                          <m:t>i</m:t>
-                        </m:r>
-                      </m:sub>
-                    </m:sSub>
-                  </m:oMath>
-                </a14:m>
-                <a:r>
-                  <a:rPr/>
-                  <a:t>, with </a:t>
-                </a:r>
-                <a14:m>
-                  <m:oMath xmlns:m="http://schemas.openxmlformats.org/officeDocument/2006/math">
-                    <m:sSub>
-                      <m:e>
-                        <m:r>
-                          <m:t>y</m:t>
-                        </m:r>
-                      </m:e>
-                      <m:sub>
-                        <m:r>
-                          <m:t>i</m:t>
-                        </m:r>
-                      </m:sub>
-                    </m:sSub>
-                    <m:r>
-                      <m:rPr>
-                        <m:sty m:val="p"/>
-                      </m:rPr>
-                      <m:t>=</m:t>
-                    </m:r>
-                    <m:r>
-                      <m:t>1</m:t>
-                    </m:r>
-                  </m:oMath>
-                </a14:m>
-                <a:r>
-                  <a:rPr/>
-                  <a:t> when </a:t>
-                </a:r>
-                <a14:m>
-                  <m:oMath xmlns:m="http://schemas.openxmlformats.org/officeDocument/2006/math">
-                    <m:sSubSup>
-                      <m:e>
-                        <m:r>
-                          <m:t>y</m:t>
-                        </m:r>
-                      </m:e>
-                      <m:sub>
-                        <m:r>
-                          <m:t>i</m:t>
-                        </m:r>
-                      </m:sub>
-                      <m:sup>
-                        <m:r>
-                          <m:rPr>
-                            <m:sty m:val="p"/>
-                          </m:rPr>
-                          <m:t>*</m:t>
-                        </m:r>
-                      </m:sup>
-                    </m:sSubSup>
-                    <m:r>
-                      <m:rPr>
-                        <m:sty m:val="p"/>
-                      </m:rPr>
-                      <m:t>&gt;</m:t>
-                    </m:r>
-                    <m:r>
-                      <m:t>0</m:t>
-                    </m:r>
-                  </m:oMath>
-                </a14:m>
-                <a:r>
-                  <a:rPr/>
-                  <a:t>.</a:t>
-                </a:r>
-              </a:p>
-              <a:p>
-                <a:pPr lvl="0"/>
-                <a14:m>
-                  <m:oMath xmlns:m="http://schemas.openxmlformats.org/officeDocument/2006/math">
-                    <m:sSub>
-                      <m:e>
-                        <m:r>
-                          <m:t>u</m:t>
-                        </m:r>
-                      </m:e>
-                      <m:sub>
-                        <m:r>
-                          <m:t>i</m:t>
-                        </m:r>
-                      </m:sub>
-                    </m:sSub>
-                  </m:oMath>
-                </a14:m>
-                <a:r>
-                  <a:rPr/>
-                  <a:t> standard </a:t>
-                </a:r>
-                <a:r>
-                  <a:rPr b="1"/>
-                  <a:t>logistic</a:t>
-                </a:r>
-                <a:r>
-                  <a:rPr/>
-                  <a:t> → logit</a:t>
-                </a:r>
-              </a:p>
-              <a:p>
-                <a:pPr lvl="0"/>
-                <a14:m>
-                  <m:oMath xmlns:m="http://schemas.openxmlformats.org/officeDocument/2006/math">
-                    <m:sSub>
-                      <m:e>
-                        <m:r>
-                          <m:t>u</m:t>
-                        </m:r>
-                      </m:e>
-                      <m:sub>
-                        <m:r>
-                          <m:t>i</m:t>
-                        </m:r>
-                      </m:sub>
-                    </m:sSub>
-                  </m:oMath>
-                </a14:m>
-                <a:r>
-                  <a:rPr/>
-                  <a:t> standard </a:t>
-                </a:r>
-                <a:r>
-                  <a:rPr b="1"/>
-                  <a:t>normal</a:t>
-                </a:r>
-                <a:r>
-                  <a:rPr/>
-                  <a:t> → probit</a:t>
-                </a:r>
-              </a:p>
-              <a:p>
-                <a:pPr lvl="0" indent="0" marL="0">
-                  <a:buNone/>
-                </a:pPr>
-                <a:r>
-                  <a:rPr/>
-                  <a:t>The economist’s reading: </a:t>
-                </a:r>
-                <a14:m>
-                  <m:oMath xmlns:m="http://schemas.openxmlformats.org/officeDocument/2006/math">
-                    <m:sSup>
-                      <m:e>
-                        <m:r>
-                          <m:t>y</m:t>
-                        </m:r>
-                      </m:e>
-                      <m:sup>
-                        <m:r>
-                          <m:rPr>
-                            <m:sty m:val="p"/>
-                          </m:rPr>
-                          <m:t>*</m:t>
-                        </m:r>
-                      </m:sup>
-                    </m:sSup>
-                  </m:oMath>
-                </a14:m>
-                <a:r>
-                  <a:rPr/>
-                  <a:t> is a latent utility difference and this is a random utility model. In practice logit and probit give nearly identical fitted probabilities — the choice is about the distribution of unobserved heterogeneity, not about fit.</a:t>
-                </a:r>
-              </a:p>
-            </p:txBody>
-          </p:sp>
-        </mc:Choice>
-      </mc:AlternateContent>
-    </p:spTree>
-  </p:cSld>
-</p:sld>
-</file>
-
-<file path=ppt/slides/slide18.xml><?xml version="1.0" encoding="UTF-8"?><p:sld xmlns:a="http://schemas.openxmlformats.org/drawingml/2006/main" xmlns:r="http://schemas.openxmlformats.org/officeDocument/2006/relationships" xmlns:p="http://schemas.openxmlformats.org/presentationml/2006/main"><p:cSld><p:spTree><p:nvGrpSpPr><p:cNvPr id="1" name="" /><p:cNvGrpSpPr /><p:nvPr /></p:nvGrpSpPr><p:grpSpPr><a:xfrm><a:off x="0" y="0" /><a:ext cx="0" cy="0" /><a:chOff x="0" y="0" /><a:chExt cx="0" cy="0" /></a:xfrm></p:grpSpPr><p:sp><p:nvSpPr><p:cNvPr id="2" name="Title 1" /><p:cNvSpPr><a:spLocks noGrp="1" /></p:cNvSpPr><p:nvPr><p:ph type="title" /></p:nvPr></p:nvSpPr><p:spPr /><p:txBody><a:bodyPr /><a:lstStyle /><a:p><a:pPr lvl="0" indent="0" marL="0"><a:buNone /></a:pPr><a:r><a:rPr /><a:t>Three ways to report a coefficient</a:t></a:r></a:p></p:txBody></p:sp><p:graphicFrame><p:nvGraphicFramePr><p:cNvPr id="6" name="Content Placeholder 5" /><p:cNvGraphicFramePr><a:graphicFrameLocks noGrp="1" /></p:cNvGraphicFramePr><p:nvPr><p:ph idx="1" /></p:nvPr></p:nvGraphicFramePr><p:xfrm><a:off x="457200" y="1193800" /><a:ext cx="8229600" cy="3390900" /></p:xfrm><a:graphic><a:graphicData uri="http://schemas.openxmlformats.org/drawingml/2006/table"><a:tbl><a:tblPr firstRow="1" bandRow="1"><a:tableStyleId>{5C22544A-7EE6-4342-B048-85BDC9FD1C3A}</a:tableStyleId></a:tblPr><a:tblGrid><a:gridCol w="2743200" /><a:gridCol w="2743200" /><a:gridCol w="2743200" /></a:tblGrid><a:tr h="0"><a:tc><a:txBody><a:bodyPr /><a:lstStyle /><a:p><a:pPr lvl="0" indent="0" marL="0"><a:buNone /></a:pPr><a:r><a:rPr /><a:t>Quantity</a:t></a:r></a:p></a:txBody><a:tcPr /></a:tc><a:tc><a:txBody><a:bodyPr /><a:lstStyle /><a:p><a:pPr lvl="0" indent="0" marL="0"><a:buNone /></a:pPr><a:r><a:rPr /><a:t>Formula</a:t></a:r></a:p></a:txBody><a:tcPr /></a:tc><a:tc><a:txBody><a:bodyPr /><a:lstStyle /><a:p><a:pPr lvl="0" indent="0" marL="0"><a:buNone /></a:pPr><a:r><a:rPr /><a:t>Use it when</a:t></a:r></a:p></a:txBody><a:tcPr /></a:tc></a:tr><a:tr h="0"><a:tc><a:txBody><a:bodyPr /><a:lstStyle /><a:p><a:pPr lvl="0" indent="0" marL="0"><a:buNone /></a:pPr><a:r><a:rPr /><a:t>Log-odds</a:t></a:r></a:p></a:txBody></a:tc><a:tc><a:txBody><a:bodyPr /><a:lstStyle /><a:p><a:pPr lvl="0" indent="0" marL="0"><a:buNone /></a:pPr><a14:m><m:oMath xmlns:m="http://schemas.openxmlformats.org/officeDocument/2006/math"><m:sSub><m:e><m:r><m:t>β</m:t></m:r></m:e><m:sub><m:r><m:t>j</m:t></m:r></m:sub></m:sSub></m:oMath></a14:m></a:p></a:txBody></a:tc><a:tc><a:txBody><a:bodyPr /><a:lstStyle /><a:p><a:pPr lvl="0" indent="0" marL="0"><a:buNone /></a:pPr><a:r><a:rPr /><a:t>reporting the raw model</a:t></a:r></a:p></a:txBody></a:tc></a:tr><a:tr h="0"><a:tc><a:txBody><a:bodyPr /><a:lstStyle /><a:p><a:pPr lvl="0" indent="0" marL="0"><a:buNone /></a:pPr><a:r><a:rPr b="1" /><a:t>Odds ratio</a:t></a:r></a:p></a:txBody></a:tc><a:tc><a:txBody><a:bodyPr /><a:lstStyle /><a:p><a:pPr lvl="0" indent="0" marL="0"><a:buNone /></a:pPr><a14:m><m:oMath xmlns:m="http://schemas.openxmlformats.org/officeDocument/2006/math"><m:sSup><m:e><m:r><m:t>e</m:t></m:r></m:e><m:sup><m:sSub><m:e><m:r><m:t>β</m:t></m:r></m:e><m:sub><m:r><m:t>j</m:t></m:r></m:sub></m:sSub></m:sup></m:sSup></m:oMath></a14:m></a:p></a:txBody></a:tc><a:tc><a:txBody><a:bodyPr /><a:lstStyle /><a:p><a:pPr lvl="0" indent="0" marL="0"><a:buNone /></a:pPr><a:r><a:rPr /><a:t>a credit or clinical audience</a:t></a:r></a:p></a:txBody></a:tc></a:tr><a:tr h="0"><a:tc><a:txBody><a:bodyPr /><a:lstStyle /><a:p><a:pPr lvl="0" indent="0" marL="0"><a:buNone /></a:pPr><a:r><a:rPr b="1" /><a:t>Average marginal effect</a:t></a:r></a:p></a:txBody></a:tc><a:tc><a:txBody><a:bodyPr /><a:lstStyle /><a:p><a:pPr lvl="0" indent="0" marL="0"><a:buNone /></a:pPr><a14:m><m:oMath xmlns:m="http://schemas.openxmlformats.org/officeDocument/2006/math"><m:f><m:fPr><m:type m:val="bar" /></m:fPr><m:num><m:r><m:t>1</m:t></m:r></m:num><m:den><m:r><m:t>n</m:t></m:r></m:den></m:f><m:nary><m:naryPr><m:chr m:val="∑" /><m:limLoc m:val="undOvr" /><m:subHide m:val="off" /><m:supHide m:val="on" /></m:naryPr><m:sub><m:r><m:t>i</m:t></m:r></m:sub><m:sup><m:r><m:t>​</m:t></m:r></m:sup><m:e><m:sSub><m:e><m:r><m:t>β</m:t></m:r></m:e><m:sub><m:r><m:t>j</m:t></m:r></m:sub></m:sSub></m:e></m:nary><m:r><m:t> </m:t></m:r><m:sSub><m:e><m:r><m:t>p</m:t></m:r></m:e><m:sub><m:r><m:t>i</m:t></m:r></m:sub></m:sSub><m:d><m:dPr><m:begChr m:val="(" /><m:sepChr m:val="" /><m:endChr m:val=")" /><m:grow /></m:dPr><m:e><m:r><m:t>1</m:t></m:r><m:r><m:rPr><m:sty m:val="p" /></m:rPr><m:t>−</m:t></m:r><m:sSub><m:e><m:r><m:t>p</m:t></m:r></m:e><m:sub><m:r><m:t>i</m:t></m:r></m:sub></m:sSub></m:e></m:d></m:oMath></a14:m></a:p></a:txBody></a:tc><a:tc><a:txBody><a:bodyPr /><a:lstStyle /><a:p><a:pPr lvl="0" indent="0" marL="0"><a:buNone /></a:pPr><a:r><a:rPr b="1" /><a:t>reporting to economists</a:t></a:r></a:p></a:txBody></a:tc></a:tr></a:tbl></a:graphicData></a:graphic></p:graphicFrame></p:spTree></p:cSld></p:sld>
-</file>
-
-<file path=ppt/slides/slide19.xml><?xml version="1.0" encoding="utf-8"?>
-<p:sld xmlns:a="http://schemas.openxmlformats.org/drawingml/2006/main" xmlns:r="http://schemas.openxmlformats.org/officeDocument/2006/relationships" xmlns:p="http://schemas.openxmlformats.org/presentationml/2006/main">
-  <p:cSld>
-    <p:spTree>
-      <p:nvGrpSpPr>
-        <p:cNvPr id="1" name=""/>
-        <p:cNvGrpSpPr/>
-        <p:nvPr/>
-      </p:nvGrpSpPr>
-      <p:grpSpPr>
-        <a:xfrm>
-          <a:off x="0" y="0"/>
-          <a:ext cx="0" cy="0"/>
-          <a:chOff x="0" y="0"/>
-          <a:chExt cx="0" cy="0"/>
-        </a:xfrm>
-      </p:grpSpPr>
-      <mc:AlternateContent xmlns:mc="http://schemas.openxmlformats.org/markup-compatibility/2006">
-        <mc:Choice xmlns:a14="http://schemas.microsoft.com/office/drawing/2010/main" Requires="a14">
-          <p:sp>
-            <p:nvSpPr>
-              <p:cNvPr id="3" name="Content Placeholder 2"/>
-              <p:cNvSpPr>
-                <a:spLocks noGrp="1"/>
-              </p:cNvSpPr>
-              <p:nvPr>
-                <p:ph idx="1"/>
-              </p:nvPr>
-            </p:nvSpPr>
-            <p:spPr/>
-            <p:txBody>
-              <a:bodyPr/>
-              <a:lstStyle/>
-              <a:p>
-                <a:pPr lvl="0" indent="0" marL="0">
-                  <a:buNone/>
-                </a:pPr>
-                <a:r>
-                  <a:rPr/>
-                  <a:t>The same </a:t>
-                </a:r>
-                <a14:m>
-                  <m:oMath xmlns:m="http://schemas.openxmlformats.org/officeDocument/2006/math">
-                    <m:sSub>
-                      <m:e>
-                        <m:r>
-                          <m:t>β</m:t>
-                        </m:r>
-                      </m:e>
-                      <m:sub>
-                        <m:r>
-                          <m:t>j</m:t>
-                        </m:r>
-                      </m:sub>
-                    </m:sSub>
-                  </m:oMath>
-                </a14:m>
-                <a:r>
-                  <a:rPr/>
-                  <a:t> implies a large probability change near </a:t>
-                </a:r>
-                <a14:m>
-                  <m:oMath xmlns:m="http://schemas.openxmlformats.org/officeDocument/2006/math">
-                    <m:r>
-                      <m:t>p</m:t>
-                    </m:r>
-                    <m:r>
-                      <m:rPr>
-                        <m:sty m:val="p"/>
-                      </m:rPr>
-                      <m:t>=</m:t>
-                    </m:r>
-                    <m:r>
-                      <m:t>0.5</m:t>
-                    </m:r>
-                  </m:oMath>
-                </a14:m>
-                <a:r>
-                  <a:rPr/>
-                  <a:t> and almost none near </a:t>
-                </a:r>
-                <a14:m>
-                  <m:oMath xmlns:m="http://schemas.openxmlformats.org/officeDocument/2006/math">
-                    <m:r>
-                      <m:t>p</m:t>
-                    </m:r>
-                    <m:r>
-                      <m:rPr>
-                        <m:sty m:val="p"/>
-                      </m:rPr>
-                      <m:t>=</m:t>
-                    </m:r>
-                    <m:r>
-                      <m:t>0.01</m:t>
-                    </m:r>
-                  </m:oMath>
-                </a14:m>
-                <a:r>
-                  <a:rPr/>
-                  <a:t>. A bare odds ratio invites misreading.</a:t>
-                </a:r>
-              </a:p>
-            </p:txBody>
-          </p:sp>
-        </mc:Choice>
-      </mc:AlternateContent>
-    </p:spTree>
-  </p:cSld>
-</p:sld>
-</file>
-
-<file path=ppt/slides/slide2.xml><?xml version="1.0" encoding="utf-8"?>
-<p:sld xmlns:a="http://schemas.openxmlformats.org/drawingml/2006/main" xmlns:r="http://schemas.openxmlformats.org/officeDocument/2006/relationships" xmlns:p="http://schemas.openxmlformats.org/presentationml/2006/main">
-  <p:cSld>
-    <p:spTree>
-      <p:nvGrpSpPr>
-        <p:cNvPr id="1" name=""/>
-        <p:cNvGrpSpPr/>
-        <p:nvPr/>
-      </p:nvGrpSpPr>
-      <p:grpSpPr>
-        <a:xfrm>
-          <a:off x="0" y="0"/>
-          <a:ext cx="0" cy="0"/>
-          <a:chOff x="0" y="0"/>
-          <a:chExt cx="0" cy="0"/>
-        </a:xfrm>
-      </p:grpSpPr>
-      <p:sp>
-        <p:nvSpPr>
-          <p:cNvPr id="3" name="Content Placeholder 2"/>
-          <p:cNvSpPr>
-            <a:spLocks noGrp="1"/>
-          </p:cNvSpPr>
-          <p:nvPr>
-            <p:ph idx="1"/>
-          </p:nvPr>
-        </p:nvSpPr>
-        <p:spPr/>
-        <p:txBody>
-          <a:bodyPr/>
-          <a:lstStyle/>
-          <a:p>
-            <a:pPr lvl="0" indent="0" marL="0">
-              <a:spcBef>
-                <a:spcPts val="3000"/>
-              </a:spcBef>
-              <a:buNone/>
-            </a:pPr>
-            <a:r>
-              <a:rPr b="1"/>
-              <a:t>Your classifier is 97% accurate. Should anyone be impressed?</a:t>
-            </a:r>
-          </a:p>
-        </p:txBody>
-      </p:sp>
-    </p:spTree>
-  </p:cSld>
-</p:sld>
-</file>
-
-<file path=ppt/slides/slide20.xml><?xml version="1.0" encoding="utf-8"?>
-<p:sld xmlns:a="http://schemas.openxmlformats.org/drawingml/2006/main" xmlns:r="http://schemas.openxmlformats.org/officeDocument/2006/relationships" xmlns:p="http://schemas.openxmlformats.org/presentationml/2006/main">
-  <p:cSld>
-    <p:spTree>
-      <p:nvGrpSpPr>
-        <p:cNvPr id="1" name=""/>
-        <p:cNvGrpSpPr/>
-        <p:nvPr/>
-      </p:nvGrpSpPr>
-      <p:grpSpPr>
-        <a:xfrm>
-          <a:off x="0" y="0"/>
-          <a:ext cx="0" cy="0"/>
-          <a:chOff x="0" y="0"/>
-          <a:chExt cx="0" cy="0"/>
-        </a:xfrm>
-      </p:grpSpPr>
-      <p:sp>
-        <p:nvSpPr>
-          <p:cNvPr id="2" name="Title 1"/>
-          <p:cNvSpPr>
-            <a:spLocks noGrp="1"/>
-          </p:cNvSpPr>
-          <p:nvPr>
-            <p:ph type="title"/>
-          </p:nvPr>
-        </p:nvSpPr>
-        <p:spPr>
-          <a:xfrm>
-            <a:off x="722313" y="3305176"/>
-            <a:ext cx="7772400" cy="1021556"/>
-          </a:xfrm>
-        </p:spPr>
-        <p:txBody>
-          <a:bodyPr/>
-          <a:lstStyle/>
-          <a:p>
-            <a:pPr lvl="0" indent="0" marL="0">
-              <a:buNone/>
-            </a:pPr>
-            <a:r>
-              <a:rPr/>
-              <a:t>4 · Reading the output</a:t>
-            </a:r>
-          </a:p>
-        </p:txBody>
-      </p:sp>
-    </p:spTree>
-  </p:cSld>
-</p:sld>
-</file>
-
-<file path=ppt/slides/slide21.xml><?xml version="1.0" encoding="utf-8"?>
-<p:sld xmlns:a="http://schemas.openxmlformats.org/drawingml/2006/main" xmlns:r="http://schemas.openxmlformats.org/officeDocument/2006/relationships" xmlns:p="http://schemas.openxmlformats.org/presentationml/2006/main">
-  <p:cSld>
-    <p:spTree>
-      <p:nvGrpSpPr>
-        <p:cNvPr id="1" name=""/>
-        <p:cNvGrpSpPr/>
-        <p:nvPr/>
-      </p:nvGrpSpPr>
-      <p:grpSpPr>
-        <a:xfrm>
-          <a:off x="0" y="0"/>
-          <a:ext cx="0" cy="0"/>
-          <a:chOff x="0" y="0"/>
-          <a:chExt cx="0" cy="0"/>
-        </a:xfrm>
-      </p:grpSpPr>
-      <p:sp>
-        <p:nvSpPr>
-          <p:cNvPr id="2" name="Title 1"/>
-          <p:cNvSpPr>
-            <a:spLocks noGrp="1"/>
-          </p:cNvSpPr>
-          <p:nvPr>
-            <p:ph type="title"/>
-          </p:nvPr>
-        </p:nvSpPr>
-        <p:spPr/>
-        <p:txBody>
-          <a:bodyPr/>
-          <a:lstStyle/>
-          <a:p>
-            <a:pPr lvl="0" indent="0" marL="0">
-              <a:buNone/>
-            </a:pPr>
-            <a:r>
-              <a:rPr/>
-              <a:t>Fit it</a:t>
-            </a:r>
-          </a:p>
-        </p:txBody>
-      </p:sp>
-      <p:sp>
-        <p:nvSpPr>
-          <p:cNvPr id="3" name="Content Placeholder 2"/>
-          <p:cNvSpPr>
-            <a:spLocks noGrp="1"/>
-          </p:cNvSpPr>
-          <p:nvPr>
-            <p:ph idx="1"/>
-          </p:nvPr>
-        </p:nvSpPr>
-        <p:spPr/>
-        <p:txBody>
-          <a:bodyPr/>
-          <a:lstStyle/>
-          <a:p>
-            <a:pPr lvl="0" indent="0">
-              <a:buNone/>
-            </a:pPr>
-            <a:r>
-              <a:rPr b="1">
-                <a:solidFill>
-                  <a:srgbClr val="008000"/>
-                </a:solidFill>
-                <a:latin typeface="Courier"/>
-              </a:rPr>
-              <a:t>import</a:t>
-            </a:r>
-            <a:r>
-              <a:rPr>
-                <a:latin typeface="Courier"/>
-              </a:rPr>
-              <a:t> numpy </a:t>
-            </a:r>
-            <a:r>
-              <a:rPr b="1">
-                <a:solidFill>
-                  <a:srgbClr val="008000"/>
-                </a:solidFill>
-                <a:latin typeface="Courier"/>
-              </a:rPr>
-              <a:t>as</a:t>
-            </a:r>
-            <a:r>
-              <a:rPr>
-                <a:latin typeface="Courier"/>
-              </a:rPr>
-              <a:t> np</a:t>
-            </a:r>
-            <a:br/>
-            <a:r>
-              <a:rPr b="1">
-                <a:solidFill>
-                  <a:srgbClr val="008000"/>
-                </a:solidFill>
-                <a:latin typeface="Courier"/>
-              </a:rPr>
-              <a:t>import</a:t>
-            </a:r>
-            <a:r>
-              <a:rPr>
-                <a:latin typeface="Courier"/>
-              </a:rPr>
-              <a:t> statsmodels.formula.api </a:t>
-            </a:r>
-            <a:r>
-              <a:rPr b="1">
-                <a:solidFill>
-                  <a:srgbClr val="008000"/>
-                </a:solidFill>
-                <a:latin typeface="Courier"/>
-              </a:rPr>
-              <a:t>as</a:t>
-            </a:r>
-            <a:r>
-              <a:rPr>
-                <a:latin typeface="Courier"/>
-              </a:rPr>
-              <a:t> smf</a:t>
-            </a:r>
-            <a:br/>
-            <a:br/>
-            <a:r>
-              <a:rPr>
-                <a:latin typeface="Courier"/>
-              </a:rPr>
-              <a:t>m </a:t>
-            </a:r>
-            <a:r>
-              <a:rPr>
-                <a:solidFill>
-                  <a:srgbClr val="666666"/>
-                </a:solidFill>
-                <a:latin typeface="Courier"/>
-              </a:rPr>
-              <a:t>=</a:t>
-            </a:r>
-            <a:r>
-              <a:rPr>
-                <a:latin typeface="Courier"/>
-              </a:rPr>
-              <a:t> smf.logit(</a:t>
-            </a:r>
-            <a:r>
-              <a:rPr>
-                <a:solidFill>
-                  <a:srgbClr val="4070A0"/>
-                </a:solidFill>
-                <a:latin typeface="Courier"/>
-              </a:rPr>
-              <a:t>"default ~ fico + int_rate + np.log(revol_bal + 1)"</a:t>
-            </a:r>
-            <a:r>
-              <a:rPr>
-                <a:latin typeface="Courier"/>
-              </a:rPr>
-              <a:t>,</a:t>
-            </a:r>
-            <a:br/>
-            <a:r>
-              <a:rPr>
-                <a:latin typeface="Courier"/>
-              </a:rPr>
-              <a:t>              data</a:t>
-            </a:r>
-            <a:r>
-              <a:rPr>
-                <a:solidFill>
-                  <a:srgbClr val="666666"/>
-                </a:solidFill>
-                <a:latin typeface="Courier"/>
-              </a:rPr>
-              <a:t>=</a:t>
-            </a:r>
-            <a:r>
-              <a:rPr>
-                <a:latin typeface="Courier"/>
-              </a:rPr>
-              <a:t>loans).fit()</a:t>
-            </a:r>
-            <a:br/>
-            <a:br/>
-            <a:r>
-              <a:rPr>
-                <a:solidFill>
-                  <a:srgbClr val="008000"/>
-                </a:solidFill>
-                <a:latin typeface="Courier"/>
-              </a:rPr>
-              <a:t>print</a:t>
-            </a:r>
-            <a:r>
-              <a:rPr>
-                <a:latin typeface="Courier"/>
-              </a:rPr>
-              <a:t>(m.summary().tables[</a:t>
-            </a:r>
-            <a:r>
-              <a:rPr>
-                <a:solidFill>
-                  <a:srgbClr val="40A070"/>
-                </a:solidFill>
-                <a:latin typeface="Courier"/>
-              </a:rPr>
-              <a:t>1</a:t>
-            </a:r>
-            <a:r>
-              <a:rPr>
-                <a:latin typeface="Courier"/>
-              </a:rPr>
-              <a:t>])</a:t>
-            </a:r>
-          </a:p>
-          <a:p>
-            <a:pPr lvl="0" indent="0" marL="0">
-              <a:buNone/>
-            </a:pPr>
-            <a:r>
-              <a:rPr>
-                <a:latin typeface="Courier"/>
-              </a:rPr>
-              <a:t>statsmodels</a:t>
-            </a:r>
-            <a:r>
-              <a:rPr/>
-              <a:t> gives you the inference; </a:t>
-            </a:r>
-            <a:r>
-              <a:rPr>
-                <a:latin typeface="Courier"/>
-              </a:rPr>
-              <a:t>scikit-learn</a:t>
-            </a:r>
-            <a:r>
-              <a:rPr/>
-              <a:t> gives you the pipeline. Use the first to understand a model and the second to validate one.</a:t>
-            </a:r>
-          </a:p>
-        </p:txBody>
-      </p:sp>
     </p:spTree>
   </p:cSld>
 </p:sld>
@@ -5390,83 +4905,41 @@
             </a:pPr>
             <a:r>
               <a:rPr/>
-              <a:t>What it says</a:t>
-            </a:r>
-          </a:p>
-        </p:txBody>
-      </p:sp>
-      <p:sp>
-        <p:nvSpPr>
-          <p:cNvPr id="3" name="Content Placeholder 2"/>
-          <p:cNvSpPr>
-            <a:spLocks noGrp="1"/>
-          </p:cNvSpPr>
-          <p:nvPr>
-            <p:ph idx="1"/>
-          </p:nvPr>
-        </p:nvSpPr>
-        <p:spPr/>
-        <p:txBody>
-          <a:bodyPr/>
-          <a:lstStyle/>
-          <a:p>
-            <a:pPr lvl="0" indent="0">
-              <a:buNone/>
-            </a:pPr>
-            <a:r>
-              <a:rPr>
-                <a:latin typeface="Courier"/>
-              </a:rPr>
-              <a:t>                          coef    std err        z     P&gt;|z|
-Intercept               1.6886      0.923    1.829     0.067
-fico                   -0.0064      0.001   -5.833     0.000
-int_rate               10.5902      1.468    7.214     0.000
-np.log(revol_bal + 1)  -0.0162      0.013   -1.231     0.218</a:t>
-            </a:r>
-          </a:p>
-          <a:p>
-            <a:pPr lvl="0" indent="0" marL="0">
-              <a:buNone/>
-            </a:pPr>
-            <a:r>
-              <a:rPr>
-                <a:latin typeface="Courier"/>
-              </a:rPr>
-              <a:t>fico</a:t>
-            </a:r>
-            <a:r>
-              <a:rPr/>
-              <a:t> is </a:t>
-            </a:r>
-            <a:r>
-              <a:rPr b="1"/>
-              <a:t>negative</a:t>
-            </a:r>
-            <a:r>
-              <a:rPr/>
-              <a:t> — a higher credit score lowers default. </a:t>
-            </a:r>
-            <a:r>
-              <a:rPr>
-                <a:latin typeface="Courier"/>
-              </a:rPr>
-              <a:t>int_rate</a:t>
-            </a:r>
-            <a:r>
-              <a:rPr/>
-              <a:t> is strongly </a:t>
-            </a:r>
-            <a:r>
-              <a:rPr b="1"/>
-              <a:t>positive</a:t>
-            </a:r>
-            <a:r>
-              <a:rPr/>
-              <a:t>: the platform’s own pricing already knows who is risky.</a:t>
-            </a:r>
-          </a:p>
-        </p:txBody>
-      </p:sp>
+              <a:t>What the squeeze looks like</a:t>
+            </a:r>
+          </a:p>
+        </p:txBody>
+      </p:sp>
+      <p:pic>
+        <p:nvPicPr>
+          <p:cNvPr descr="slides_files/figure-pptx/cell-5-output-1.png" id="0" name="Picture 1"/>
+          <p:cNvPicPr>
+            <a:picLocks noGrp="1" noChangeAspect="1"/>
+          </p:cNvPicPr>
+          <p:nvPr/>
+        </p:nvPicPr>
+        <p:blipFill>
+          <a:blip r:embed="rId2"/>
+          <a:stretch>
+            <a:fillRect/>
+          </a:stretch>
+        </p:blipFill>
+        <p:spPr bwMode="auto">
+          <a:xfrm>
+            <a:off x="1143000" y="1193800"/>
+            <a:ext cx="6858000" cy="3390900"/>
+          </a:xfrm>
+          <a:prstGeom prst="rect">
+            <a:avLst/>
+          </a:prstGeom>
+          <a:noFill/>
+          <a:ln w="9525">
+            <a:noFill/>
+            <a:headEnd/>
+            <a:tailEnd/>
+          </a:ln>
+        </p:spPr>
+      </p:pic>
     </p:spTree>
   </p:cSld>
 </p:sld>
@@ -5491,6 +4964,111 @@
       </p:grpSpPr>
       <p:sp>
         <p:nvSpPr>
+          <p:cNvPr id="3" name="Content Placeholder 2"/>
+          <p:cNvSpPr>
+            <a:spLocks noGrp="1"/>
+          </p:cNvSpPr>
+          <p:nvPr>
+            <p:ph idx="1"/>
+          </p:nvPr>
+        </p:nvSpPr>
+        <p:spPr/>
+        <p:txBody>
+          <a:bodyPr/>
+          <a:lstStyle/>
+          <a:p>
+            <a:pPr lvl="0" indent="0" marL="0">
+              <a:buNone/>
+            </a:pPr>
+            <a:r>
+              <a:rPr/>
+              <a:t>The slope is </a:t>
+            </a:r>
+            <a:r>
+              <a:rPr b="1"/>
+              <a:t>not constant</a:t>
+            </a:r>
+            <a:r>
+              <a:rPr/>
+              <a:t>. That is why one coefficient does not translate into one change in probability.</a:t>
+            </a:r>
+          </a:p>
+        </p:txBody>
+      </p:sp>
+    </p:spTree>
+  </p:cSld>
+</p:sld>
+</file>
+
+<file path=ppt/slides/slide24.xml><?xml version="1.0" encoding="UTF-8"?><p:sld xmlns:a="http://schemas.openxmlformats.org/drawingml/2006/main" xmlns:r="http://schemas.openxmlformats.org/officeDocument/2006/relationships" xmlns:p="http://schemas.openxmlformats.org/presentationml/2006/main"><p:cSld><p:spTree><p:nvGrpSpPr><p:cNvPr id="1" name="" /><p:cNvGrpSpPr /><p:nvPr /></p:nvGrpSpPr><p:grpSpPr><a:xfrm><a:off x="0" y="0" /><a:ext cx="0" cy="0" /><a:chOff x="0" y="0" /><a:chExt cx="0" cy="0" /></a:xfrm></p:grpSpPr><p:sp><p:nvSpPr><p:cNvPr id="2" name="Title 1" /><p:cNvSpPr><a:spLocks noGrp="1" /></p:cNvSpPr><p:nvPr><p:ph type="title" /></p:nvPr></p:nvSpPr><p:spPr /><p:txBody><a:bodyPr /><a:lstStyle /><a:p><a:pPr lvl="0" indent="0" marL="0"><a:buNone /></a:pPr><a:r><a:rPr /><a:t>Three ways to report one coefficient</a:t></a:r></a:p></p:txBody></p:sp><p:graphicFrame><p:nvGraphicFramePr><p:cNvPr id="6" name="Content Placeholder 5" /><p:cNvGraphicFramePr><a:graphicFrameLocks noGrp="1" /></p:cNvGraphicFramePr><p:nvPr><p:ph idx="1" /></p:nvPr></p:nvGraphicFramePr><p:xfrm><a:off x="457200" y="1193800" /><a:ext cx="8229600" cy="3390900" /></p:xfrm><a:graphic><a:graphicData uri="http://schemas.openxmlformats.org/drawingml/2006/table"><a:tbl><a:tblPr firstRow="1" bandRow="1"><a:tableStyleId>{5C22544A-7EE6-4342-B048-85BDC9FD1C3A}</a:tableStyleId></a:tblPr><a:tblGrid><a:gridCol w="2743200" /><a:gridCol w="2743200" /><a:gridCol w="2743200" /></a:tblGrid><a:tr h="0"><a:tc><a:txBody><a:bodyPr /><a:lstStyle /><a:p><a:pPr lvl="0" indent="0" marL="0"><a:buNone /></a:pPr><a:r><a:rPr /><a:t>Quantity</a:t></a:r></a:p></a:txBody><a:tcPr /></a:tc><a:tc><a:txBody><a:bodyPr /><a:lstStyle /><a:p><a:pPr lvl="0" indent="0" marL="0"><a:buNone /></a:pPr><a:r><a:rPr /><a:t>Formula</a:t></a:r></a:p></a:txBody><a:tcPr /></a:tc><a:tc><a:txBody><a:bodyPr /><a:lstStyle /><a:p><a:pPr lvl="0" indent="0" marL="0"><a:buNone /></a:pPr><a:r><a:rPr /><a:t>Use when</a:t></a:r></a:p></a:txBody><a:tcPr /></a:tc></a:tr><a:tr h="0"><a:tc><a:txBody><a:bodyPr /><a:lstStyle /><a:p><a:pPr lvl="0" indent="0" marL="0"><a:buNone /></a:pPr><a:r><a:rPr /><a:t>Log-odds</a:t></a:r></a:p></a:txBody></a:tc><a:tc><a:txBody><a:bodyPr /><a:lstStyle /><a:p><a:pPr lvl="0" indent="0" marL="0"><a:buNone /></a:pPr><a14:m><m:oMath xmlns:m="http://schemas.openxmlformats.org/officeDocument/2006/math"><m:sSub><m:e><m:r><m:t>β</m:t></m:r></m:e><m:sub><m:r><m:t>j</m:t></m:r></m:sub></m:sSub></m:oMath></a14:m></a:p></a:txBody></a:tc><a:tc><a:txBody><a:bodyPr /><a:lstStyle /><a:p><a:pPr lvl="0" indent="0" marL="0"><a:buNone /></a:pPr><a:r><a:rPr /><a:t>reporting the raw model</a:t></a:r></a:p></a:txBody></a:tc></a:tr><a:tr h="0"><a:tc><a:txBody><a:bodyPr /><a:lstStyle /><a:p><a:pPr lvl="0" indent="0" marL="0"><a:buNone /></a:pPr><a:r><a:rPr b="1" /><a:t>Odds ratio</a:t></a:r></a:p></a:txBody></a:tc><a:tc><a:txBody><a:bodyPr /><a:lstStyle /><a:p><a:pPr lvl="0" indent="0" marL="0"><a:buNone /></a:pPr><a14:m><m:oMath xmlns:m="http://schemas.openxmlformats.org/officeDocument/2006/math"><m:sSup><m:e><m:r><m:t>e</m:t></m:r></m:e><m:sup><m:sSub><m:e><m:r><m:t>β</m:t></m:r></m:e><m:sub><m:r><m:t>j</m:t></m:r></m:sub></m:sSub></m:sup></m:sSup></m:oMath></a14:m></a:p></a:txBody></a:tc><a:tc><a:txBody><a:bodyPr /><a:lstStyle /><a:p><a:pPr lvl="0" indent="0" marL="0"><a:buNone /></a:pPr><a:r><a:rPr /><a:t>a credit or clinical audience</a:t></a:r></a:p></a:txBody></a:tc></a:tr><a:tr h="0"><a:tc><a:txBody><a:bodyPr /><a:lstStyle /><a:p><a:pPr lvl="0" indent="0" marL="0"><a:buNone /></a:pPr><a:r><a:rPr b="1" /><a:t>Average marginal effect</a:t></a:r></a:p></a:txBody></a:tc><a:tc><a:txBody><a:bodyPr /><a:lstStyle /><a:p><a:pPr lvl="0" indent="0" marL="0"><a:buNone /></a:pPr><a14:m><m:oMath xmlns:m="http://schemas.openxmlformats.org/officeDocument/2006/math"><m:f><m:fPr><m:type m:val="bar" /></m:fPr><m:num><m:r><m:t>1</m:t></m:r></m:num><m:den><m:r><m:t>n</m:t></m:r></m:den></m:f><m:nary><m:naryPr><m:chr m:val="∑" /><m:limLoc m:val="undOvr" /><m:subHide m:val="off" /><m:supHide m:val="on" /></m:naryPr><m:sub><m:r><m:t>i</m:t></m:r></m:sub><m:sup><m:r><m:t>​</m:t></m:r></m:sup><m:e><m:sSub><m:e><m:r><m:t>β</m:t></m:r></m:e><m:sub><m:r><m:t>j</m:t></m:r></m:sub></m:sSub></m:e></m:nary><m:r><m:t> </m:t></m:r><m:sSub><m:e><m:r><m:t>p</m:t></m:r></m:e><m:sub><m:r><m:t>i</m:t></m:r></m:sub></m:sSub><m:d><m:dPr><m:begChr m:val="(" /><m:sepChr m:val="" /><m:endChr m:val=")" /><m:grow /></m:dPr><m:e><m:r><m:t>1</m:t></m:r><m:r><m:rPr><m:sty m:val="p" /></m:rPr><m:t>−</m:t></m:r><m:sSub><m:e><m:r><m:t>p</m:t></m:r></m:e><m:sub><m:r><m:t>i</m:t></m:r></m:sub></m:sSub></m:e></m:d></m:oMath></a14:m></a:p></a:txBody></a:tc><a:tc><a:txBody><a:bodyPr /><a:lstStyle /><a:p><a:pPr lvl="0" indent="0" marL="0"><a:buNone /></a:pPr><a:r><a:rPr b="1" /><a:t>reporting to economists</a:t></a:r></a:p></a:txBody></a:tc></a:tr></a:tbl></a:graphicData></a:graphic></p:graphicFrame></p:spTree></p:cSld></p:sld>
+</file>
+
+<file path=ppt/slides/slide25.xml><?xml version="1.0" encoding="utf-8"?>
+<p:sld xmlns:a="http://schemas.openxmlformats.org/drawingml/2006/main" xmlns:r="http://schemas.openxmlformats.org/officeDocument/2006/relationships" xmlns:p="http://schemas.openxmlformats.org/presentationml/2006/main">
+  <p:cSld>
+    <p:spTree>
+      <p:nvGrpSpPr>
+        <p:cNvPr id="1" name=""/>
+        <p:cNvGrpSpPr/>
+        <p:nvPr/>
+      </p:nvGrpSpPr>
+      <p:grpSpPr>
+        <a:xfrm>
+          <a:off x="0" y="0"/>
+          <a:ext cx="0" cy="0"/>
+          <a:chOff x="0" y="0"/>
+          <a:chExt cx="0" cy="0"/>
+        </a:xfrm>
+      </p:grpSpPr>
+      <p:sp>
+        <p:nvSpPr>
+          <p:cNvPr id="3" name="Content Placeholder 2"/>
+          <p:cNvSpPr>
+            <a:spLocks noGrp="1"/>
+          </p:cNvSpPr>
+          <p:nvPr>
+            <p:ph idx="1"/>
+          </p:nvPr>
+        </p:nvSpPr>
+        <p:spPr/>
+        <p:txBody>
+          <a:bodyPr/>
+          <a:lstStyle/>
+          <a:p>
+            <a:pPr lvl="0" indent="0" marL="0">
+              <a:buNone/>
+            </a:pPr>
+            <a:r>
+              <a:rPr/>
+              <a:t>The odds ratio is constant everywhere; the probability change is not. Report the average marginal effect unless you have a reason not to.</a:t>
+            </a:r>
+          </a:p>
+        </p:txBody>
+      </p:sp>
+    </p:spTree>
+  </p:cSld>
+</p:sld>
+</file>
+
+<file path=ppt/slides/slide26.xml><?xml version="1.0" encoding="utf-8"?>
+<p:sld xmlns:a="http://schemas.openxmlformats.org/drawingml/2006/main" xmlns:r="http://schemas.openxmlformats.org/officeDocument/2006/relationships" xmlns:p="http://schemas.openxmlformats.org/presentationml/2006/main">
+  <p:cSld>
+    <p:spTree>
+      <p:nvGrpSpPr>
+        <p:cNvPr id="1" name=""/>
+        <p:cNvGrpSpPr/>
+        <p:nvPr/>
+      </p:nvGrpSpPr>
+      <p:grpSpPr>
+        <a:xfrm>
+          <a:off x="0" y="0"/>
+          <a:ext cx="0" cy="0"/>
+          <a:chOff x="0" y="0"/>
+          <a:chExt cx="0" cy="0"/>
+        </a:xfrm>
+      </p:grpSpPr>
+      <p:sp>
+        <p:nvSpPr>
           <p:cNvPr id="2" name="Title 1"/>
           <p:cNvSpPr>
             <a:spLocks noGrp="1"/>
@@ -5499,6 +5077,58 @@
             <p:ph type="title"/>
           </p:nvPr>
         </p:nvSpPr>
+        <p:spPr>
+          <a:xfrm>
+            <a:off x="722313" y="3305176"/>
+            <a:ext cx="7772400" cy="1021556"/>
+          </a:xfrm>
+        </p:spPr>
+        <p:txBody>
+          <a:bodyPr/>
+          <a:lstStyle/>
+          <a:p>
+            <a:pPr lvl="0" indent="0" marL="0">
+              <a:buNone/>
+            </a:pPr>
+            <a:r>
+              <a:rPr/>
+              <a:t>5 · Reading the output</a:t>
+            </a:r>
+          </a:p>
+        </p:txBody>
+      </p:sp>
+    </p:spTree>
+  </p:cSld>
+</p:sld>
+</file>
+
+<file path=ppt/slides/slide27.xml><?xml version="1.0" encoding="utf-8"?>
+<p:sld xmlns:a="http://schemas.openxmlformats.org/drawingml/2006/main" xmlns:r="http://schemas.openxmlformats.org/officeDocument/2006/relationships" xmlns:p="http://schemas.openxmlformats.org/presentationml/2006/main">
+  <p:cSld>
+    <p:spTree>
+      <p:nvGrpSpPr>
+        <p:cNvPr id="1" name=""/>
+        <p:cNvGrpSpPr/>
+        <p:nvPr/>
+      </p:nvGrpSpPr>
+      <p:grpSpPr>
+        <a:xfrm>
+          <a:off x="0" y="0"/>
+          <a:ext cx="0" cy="0"/>
+          <a:chOff x="0" y="0"/>
+          <a:chExt cx="0" cy="0"/>
+        </a:xfrm>
+      </p:grpSpPr>
+      <p:sp>
+        <p:nvSpPr>
+          <p:cNvPr id="2" name="Title 1"/>
+          <p:cNvSpPr>
+            <a:spLocks noGrp="1"/>
+          </p:cNvSpPr>
+          <p:nvPr>
+            <p:ph type="title"/>
+          </p:nvPr>
+        </p:nvSpPr>
         <p:spPr/>
         <p:txBody>
           <a:bodyPr/>
@@ -5509,7 +5139,433 @@
             </a:pPr>
             <a:r>
               <a:rPr/>
-              <a:t>Turn it into something reportable</a:t>
+              <a:t>Fit it</a:t>
+            </a:r>
+          </a:p>
+        </p:txBody>
+      </p:sp>
+      <mc:AlternateContent xmlns:mc="http://schemas.openxmlformats.org/markup-compatibility/2006">
+        <mc:Choice xmlns:a14="http://schemas.microsoft.com/office/drawing/2010/main" Requires="a14">
+          <p:sp>
+            <p:nvSpPr>
+              <p:cNvPr id="3" name="Content Placeholder 2"/>
+              <p:cNvSpPr>
+                <a:spLocks noGrp="1"/>
+              </p:cNvSpPr>
+              <p:nvPr>
+                <p:ph idx="1"/>
+              </p:nvPr>
+            </p:nvSpPr>
+            <p:spPr/>
+            <p:txBody>
+              <a:bodyPr/>
+              <a:lstStyle/>
+              <a:p>
+                <a:pPr lvl="0" indent="0">
+                  <a:buNone/>
+                </a:pPr>
+                <a:r>
+                  <a:rPr b="1">
+                    <a:solidFill>
+                      <a:srgbClr val="008000"/>
+                    </a:solidFill>
+                    <a:latin typeface="Courier"/>
+                  </a:rPr>
+                  <a:t>import</a:t>
+                </a:r>
+                <a:r>
+                  <a:rPr>
+                    <a:latin typeface="Courier"/>
+                  </a:rPr>
+                  <a:t> numpy </a:t>
+                </a:r>
+                <a:r>
+                  <a:rPr b="1">
+                    <a:solidFill>
+                      <a:srgbClr val="008000"/>
+                    </a:solidFill>
+                    <a:latin typeface="Courier"/>
+                  </a:rPr>
+                  <a:t>as</a:t>
+                </a:r>
+                <a:r>
+                  <a:rPr>
+                    <a:latin typeface="Courier"/>
+                  </a:rPr>
+                  <a:t> np</a:t>
+                </a:r>
+                <a:br/>
+                <a:r>
+                  <a:rPr b="1">
+                    <a:solidFill>
+                      <a:srgbClr val="008000"/>
+                    </a:solidFill>
+                    <a:latin typeface="Courier"/>
+                  </a:rPr>
+                  <a:t>import</a:t>
+                </a:r>
+                <a:r>
+                  <a:rPr>
+                    <a:latin typeface="Courier"/>
+                  </a:rPr>
+                  <a:t> statsmodels.formula.api </a:t>
+                </a:r>
+                <a:r>
+                  <a:rPr b="1">
+                    <a:solidFill>
+                      <a:srgbClr val="008000"/>
+                    </a:solidFill>
+                    <a:latin typeface="Courier"/>
+                  </a:rPr>
+                  <a:t>as</a:t>
+                </a:r>
+                <a:r>
+                  <a:rPr>
+                    <a:latin typeface="Courier"/>
+                  </a:rPr>
+                  <a:t> smf</a:t>
+                </a:r>
+                <a:br/>
+                <a:br/>
+                <a:r>
+                  <a:rPr>
+                    <a:latin typeface="Courier"/>
+                  </a:rPr>
+                  <a:t>m </a:t>
+                </a:r>
+                <a:r>
+                  <a:rPr>
+                    <a:solidFill>
+                      <a:srgbClr val="666666"/>
+                    </a:solidFill>
+                    <a:latin typeface="Courier"/>
+                  </a:rPr>
+                  <a:t>=</a:t>
+                </a:r>
+                <a:r>
+                  <a:rPr>
+                    <a:latin typeface="Courier"/>
+                  </a:rPr>
+                  <a:t> smf.logit(</a:t>
+                </a:r>
+                <a:r>
+                  <a:rPr>
+                    <a:solidFill>
+                      <a:srgbClr val="4070A0"/>
+                    </a:solidFill>
+                    <a:latin typeface="Courier"/>
+                  </a:rPr>
+                  <a:t>"default ~ fico + int_rate + np.log(revol_bal + 1)"</a:t>
+                </a:r>
+                <a:r>
+                  <a:rPr>
+                    <a:latin typeface="Courier"/>
+                  </a:rPr>
+                  <a:t>,</a:t>
+                </a:r>
+                <a:br/>
+                <a:r>
+                  <a:rPr>
+                    <a:latin typeface="Courier"/>
+                  </a:rPr>
+                  <a:t>              data</a:t>
+                </a:r>
+                <a:r>
+                  <a:rPr>
+                    <a:solidFill>
+                      <a:srgbClr val="666666"/>
+                    </a:solidFill>
+                    <a:latin typeface="Courier"/>
+                  </a:rPr>
+                  <a:t>=</a:t>
+                </a:r>
+                <a:r>
+                  <a:rPr>
+                    <a:latin typeface="Courier"/>
+                  </a:rPr>
+                  <a:t>loans).fit()</a:t>
+                </a:r>
+                <a:br/>
+                <a:r>
+                  <a:rPr>
+                    <a:solidFill>
+                      <a:srgbClr val="008000"/>
+                    </a:solidFill>
+                    <a:latin typeface="Courier"/>
+                  </a:rPr>
+                  <a:t>print</a:t>
+                </a:r>
+                <a:r>
+                  <a:rPr>
+                    <a:latin typeface="Courier"/>
+                  </a:rPr>
+                  <a:t>(m.summary().tables[</a:t>
+                </a:r>
+                <a:r>
+                  <a:rPr>
+                    <a:solidFill>
+                      <a:srgbClr val="40A070"/>
+                    </a:solidFill>
+                    <a:latin typeface="Courier"/>
+                  </a:rPr>
+                  <a:t>1</a:t>
+                </a:r>
+                <a:r>
+                  <a:rPr>
+                    <a:latin typeface="Courier"/>
+                  </a:rPr>
+                  <a:t>])</a:t>
+                </a:r>
+              </a:p>
+              <a:p>
+                <a:pPr lvl="0" indent="0" marL="0">
+                  <a:buNone/>
+                </a:pPr>
+                <a:r>
+                  <a:rPr/>
+                  <a:t>Line by line:</a:t>
+                </a:r>
+              </a:p>
+              <a:p>
+                <a:pPr lvl="0"/>
+                <a:r>
+                  <a:rPr>
+                    <a:latin typeface="Courier"/>
+                  </a:rPr>
+                  <a:t>smf.logit</a:t>
+                </a:r>
+                <a:r>
+                  <a:rPr/>
+                  <a:t> — the formula interface; </a:t>
+                </a:r>
+                <a:r>
+                  <a:rPr>
+                    <a:latin typeface="Courier"/>
+                  </a:rPr>
+                  <a:t>default ~ ...</a:t>
+                </a:r>
+                <a:r>
+                  <a:rPr/>
+                  <a:t> reads “default explained by”</a:t>
+                </a:r>
+              </a:p>
+              <a:p>
+                <a:pPr lvl="0"/>
+                <a:r>
+                  <a:rPr>
+                    <a:latin typeface="Courier"/>
+                  </a:rPr>
+                  <a:t>np.log(revol_bal + 1)</a:t>
+                </a:r>
+                <a:r>
+                  <a:rPr/>
+                  <a:t> — transformed </a:t>
+                </a:r>
+                <a:r>
+                  <a:rPr b="1"/>
+                  <a:t>inside</a:t>
+                </a:r>
+                <a:r>
+                  <a:rPr/>
+                  <a:t> the formula, so the transformation is part of the recorded model rather than a step you might forget</a:t>
+                </a:r>
+              </a:p>
+              <a:p>
+                <a:pPr lvl="0"/>
+                <a:r>
+                  <a:rPr>
+                    <a:latin typeface="Courier"/>
+                  </a:rPr>
+                  <a:t>+ 1</a:t>
+                </a:r>
+                <a:r>
+                  <a:rPr/>
+                  <a:t> because balances of exactly zero exist, and </a:t>
+                </a:r>
+                <a14:m>
+                  <m:oMath xmlns:m="http://schemas.openxmlformats.org/officeDocument/2006/math">
+                    <m:r>
+                      <m:rPr>
+                        <m:sty m:val="p"/>
+                      </m:rPr>
+                      <m:t>log</m:t>
+                    </m:r>
+                    <m:r>
+                      <m:t>0</m:t>
+                    </m:r>
+                  </m:oMath>
+                </a14:m>
+                <a:r>
+                  <a:rPr/>
+                  <a:t> is undefined</a:t>
+                </a:r>
+              </a:p>
+            </p:txBody>
+          </p:sp>
+        </mc:Choice>
+      </mc:AlternateContent>
+    </p:spTree>
+  </p:cSld>
+</p:sld>
+</file>
+
+<file path=ppt/slides/slide28.xml><?xml version="1.0" encoding="utf-8"?>
+<p:sld xmlns:a="http://schemas.openxmlformats.org/drawingml/2006/main" xmlns:r="http://schemas.openxmlformats.org/officeDocument/2006/relationships" xmlns:p="http://schemas.openxmlformats.org/presentationml/2006/main">
+  <p:cSld>
+    <p:spTree>
+      <p:nvGrpSpPr>
+        <p:cNvPr id="1" name=""/>
+        <p:cNvGrpSpPr/>
+        <p:nvPr/>
+      </p:nvGrpSpPr>
+      <p:grpSpPr>
+        <a:xfrm>
+          <a:off x="0" y="0"/>
+          <a:ext cx="0" cy="0"/>
+          <a:chOff x="0" y="0"/>
+          <a:chExt cx="0" cy="0"/>
+        </a:xfrm>
+      </p:grpSpPr>
+      <p:sp>
+        <p:nvSpPr>
+          <p:cNvPr id="2" name="Title 1"/>
+          <p:cNvSpPr>
+            <a:spLocks noGrp="1"/>
+          </p:cNvSpPr>
+          <p:nvPr>
+            <p:ph type="title"/>
+          </p:nvPr>
+        </p:nvSpPr>
+        <p:spPr/>
+        <p:txBody>
+          <a:bodyPr/>
+          <a:lstStyle/>
+          <a:p>
+            <a:pPr lvl="0" indent="0" marL="0">
+              <a:buNone/>
+            </a:pPr>
+            <a:r>
+              <a:rPr/>
+              <a:t>What it says</a:t>
+            </a:r>
+          </a:p>
+        </p:txBody>
+      </p:sp>
+      <p:sp>
+        <p:nvSpPr>
+          <p:cNvPr id="3" name="Content Placeholder 2"/>
+          <p:cNvSpPr>
+            <a:spLocks noGrp="1"/>
+          </p:cNvSpPr>
+          <p:nvPr>
+            <p:ph idx="1"/>
+          </p:nvPr>
+        </p:nvSpPr>
+        <p:spPr/>
+        <p:txBody>
+          <a:bodyPr/>
+          <a:lstStyle/>
+          <a:p>
+            <a:pPr lvl="0" indent="0">
+              <a:buNone/>
+            </a:pPr>
+            <a:r>
+              <a:rPr>
+                <a:latin typeface="Courier"/>
+              </a:rPr>
+              <a:t>                     coef  std err       z   P&gt;|z|
+Intercept          1.6886   0.9231  1.8292  0.0674
+fico              -0.0064   0.0011 -5.8332  0.0000
+int_rate          10.5902   1.4681  7.2138  0.0000
+log(revol_bal+1)  -0.0162   0.0131 -1.2314  0.2182</a:t>
+            </a:r>
+          </a:p>
+          <a:p>
+            <a:pPr lvl="0" indent="0" marL="0">
+              <a:buNone/>
+            </a:pPr>
+            <a:r>
+              <a:rPr>
+                <a:latin typeface="Courier"/>
+              </a:rPr>
+              <a:t>fico</a:t>
+            </a:r>
+            <a:r>
+              <a:rPr/>
+              <a:t> is </a:t>
+            </a:r>
+            <a:r>
+              <a:rPr b="1"/>
+              <a:t>negative</a:t>
+            </a:r>
+            <a:r>
+              <a:rPr/>
+              <a:t> — a better score lowers default risk. </a:t>
+            </a:r>
+            <a:r>
+              <a:rPr>
+                <a:latin typeface="Courier"/>
+              </a:rPr>
+              <a:t>int_rate</a:t>
+            </a:r>
+            <a:r>
+              <a:rPr/>
+              <a:t> is strongly </a:t>
+            </a:r>
+            <a:r>
+              <a:rPr b="1"/>
+              <a:t>positive</a:t>
+            </a:r>
+            <a:r>
+              <a:rPr/>
+              <a:t>: the platform’s own pricing already encodes who is risky.</a:t>
+            </a:r>
+          </a:p>
+        </p:txBody>
+      </p:sp>
+    </p:spTree>
+  </p:cSld>
+</p:sld>
+</file>
+
+<file path=ppt/slides/slide29.xml><?xml version="1.0" encoding="utf-8"?>
+<p:sld xmlns:a="http://schemas.openxmlformats.org/drawingml/2006/main" xmlns:r="http://schemas.openxmlformats.org/officeDocument/2006/relationships" xmlns:p="http://schemas.openxmlformats.org/presentationml/2006/main">
+  <p:cSld>
+    <p:spTree>
+      <p:nvGrpSpPr>
+        <p:cNvPr id="1" name=""/>
+        <p:cNvGrpSpPr/>
+        <p:nvPr/>
+      </p:nvGrpSpPr>
+      <p:grpSpPr>
+        <a:xfrm>
+          <a:off x="0" y="0"/>
+          <a:ext cx="0" cy="0"/>
+          <a:chOff x="0" y="0"/>
+          <a:chExt cx="0" cy="0"/>
+        </a:xfrm>
+      </p:grpSpPr>
+      <p:sp>
+        <p:nvSpPr>
+          <p:cNvPr id="2" name="Title 1"/>
+          <p:cNvSpPr>
+            <a:spLocks noGrp="1"/>
+          </p:cNvSpPr>
+          <p:nvPr>
+            <p:ph type="title"/>
+          </p:nvPr>
+        </p:nvSpPr>
+        <p:spPr/>
+        <p:txBody>
+          <a:bodyPr/>
+          <a:lstStyle/>
+          <a:p>
+            <a:pPr lvl="0" indent="0" marL="0">
+              <a:buNone/>
+            </a:pPr>
+            <a:r>
+              <a:rPr/>
+              <a:t>Make it reportable</a:t>
             </a:r>
           </a:p>
         </p:txBody>
@@ -5536,18 +5592,9 @@
                 </a:pPr>
                 <a:r>
                   <a:rPr>
-                    <a:solidFill>
-                      <a:srgbClr val="008000"/>
-                    </a:solidFill>
                     <a:latin typeface="Courier"/>
                   </a:rPr>
-                  <a:t>print</a:t>
-                </a:r>
-                <a:r>
-                  <a:rPr>
-                    <a:latin typeface="Courier"/>
-                  </a:rPr>
-                  <a:t>(np.exp(m.params[</a:t>
+                  <a:t>np.exp(m.params[</a:t>
                 </a:r>
                 <a:r>
                   <a:rPr>
@@ -5562,7 +5609,7 @@
                   <a:rPr>
                     <a:latin typeface="Courier"/>
                   </a:rPr>
-                  <a:t>]))        </a:t>
+                  <a:t>])     </a:t>
                 </a:r>
                 <a:r>
                   <a:rPr i="1">
@@ -5571,23 +5618,14 @@
                     </a:solidFill>
                     <a:latin typeface="Courier"/>
                   </a:rPr>
-                  <a:t># 0.9936  odds ratio</a:t>
+                  <a:t># 0.9936  — odds ratio per FICO point</a:t>
                 </a:r>
                 <a:br/>
                 <a:r>
                   <a:rPr>
-                    <a:solidFill>
-                      <a:srgbClr val="008000"/>
-                    </a:solidFill>
                     <a:latin typeface="Courier"/>
                   </a:rPr>
-                  <a:t>print</a:t>
-                </a:r>
-                <a:r>
-                  <a:rPr>
-                    <a:latin typeface="Courier"/>
-                  </a:rPr>
-                  <a:t>(m.get_margeff().summary())       </a:t>
+                  <a:t>m.get_margeff().summary()    </a:t>
                 </a:r>
                 <a:r>
                   <a:rPr i="1">
@@ -5604,16 +5642,12 @@
                   <a:buNone/>
                 </a:pPr>
                 <a:r>
-                  <a:rPr/>
-                  <a:t>An odds ratio of </a:t>
-                </a:r>
-                <a:r>
                   <a:rPr b="1"/>
                   <a:t>0.9936</a:t>
                 </a:r>
                 <a:r>
                   <a:rPr/>
-                  <a:t> per FICO point sounds negligible. Per </a:t>
+                  <a:t> per point sounds like nothing. Per </a:t>
                 </a:r>
                 <a:r>
                   <a:rPr b="1"/>
@@ -5650,7 +5684,15 @@
                 </a14:m>
                 <a:r>
                   <a:rPr/>
-                  <a:t> — the odds of default roughly halve.</a:t>
+                  <a:t> — the odds of default roughly </a:t>
+                </a:r>
+                <a:r>
+                  <a:rPr b="1"/>
+                  <a:t>halve</a:t>
+                </a:r>
+                <a:r>
+                  <a:rPr/>
+                  <a:t>.</a:t>
                 </a:r>
               </a:p>
               <a:p>
@@ -5659,662 +5701,15 @@
                 </a:pPr>
                 <a:r>
                   <a:rPr/>
-                  <a:t>Scale matters in the reporting, not in the model. State the units you are quoting.</a:t>
+                  <a:t>The model does not care about units; your sentence does. Always say </a:t>
                 </a:r>
-              </a:p>
-            </p:txBody>
-          </p:sp>
-        </mc:Choice>
-      </mc:AlternateContent>
-    </p:spTree>
-  </p:cSld>
-</p:sld>
-</file>
-
-<file path=ppt/slides/slide24.xml><?xml version="1.0" encoding="utf-8"?>
-<p:sld xmlns:a="http://schemas.openxmlformats.org/drawingml/2006/main" xmlns:r="http://schemas.openxmlformats.org/officeDocument/2006/relationships" xmlns:p="http://schemas.openxmlformats.org/presentationml/2006/main">
-  <p:cSld>
-    <p:spTree>
-      <p:nvGrpSpPr>
-        <p:cNvPr id="1" name=""/>
-        <p:cNvGrpSpPr/>
-        <p:nvPr/>
-      </p:nvGrpSpPr>
-      <p:grpSpPr>
-        <a:xfrm>
-          <a:off x="0" y="0"/>
-          <a:ext cx="0" cy="0"/>
-          <a:chOff x="0" y="0"/>
-          <a:chExt cx="0" cy="0"/>
-        </a:xfrm>
-      </p:grpSpPr>
-      <p:sp>
-        <p:nvSpPr>
-          <p:cNvPr id="2" name="Title 1"/>
-          <p:cNvSpPr>
-            <a:spLocks noGrp="1"/>
-          </p:cNvSpPr>
-          <p:nvPr>
-            <p:ph type="title"/>
-          </p:nvPr>
-        </p:nvSpPr>
-        <p:spPr>
-          <a:xfrm>
-            <a:off x="722313" y="3305176"/>
-            <a:ext cx="7772400" cy="1021556"/>
-          </a:xfrm>
-        </p:spPr>
-        <p:txBody>
-          <a:bodyPr/>
-          <a:lstStyle/>
-          <a:p>
-            <a:pPr lvl="0" indent="0" marL="0">
-              <a:buNone/>
-            </a:pPr>
-            <a:r>
-              <a:rPr/>
-              <a:t>5 · Why accuracy lies</a:t>
-            </a:r>
-          </a:p>
-        </p:txBody>
-      </p:sp>
-    </p:spTree>
-  </p:cSld>
-</p:sld>
-</file>
-
-<file path=ppt/slides/slide25.xml><?xml version="1.0" encoding="utf-8"?>
-<p:sld xmlns:a="http://schemas.openxmlformats.org/drawingml/2006/main" xmlns:r="http://schemas.openxmlformats.org/officeDocument/2006/relationships" xmlns:p="http://schemas.openxmlformats.org/presentationml/2006/main">
-  <p:cSld>
-    <p:spTree>
-      <p:nvGrpSpPr>
-        <p:cNvPr id="1" name=""/>
-        <p:cNvGrpSpPr/>
-        <p:nvPr/>
-      </p:nvGrpSpPr>
-      <p:grpSpPr>
-        <a:xfrm>
-          <a:off x="0" y="0"/>
-          <a:ext cx="0" cy="0"/>
-          <a:chOff x="0" y="0"/>
-          <a:chExt cx="0" cy="0"/>
-        </a:xfrm>
-      </p:grpSpPr>
-      <p:sp>
-        <p:nvSpPr>
-          <p:cNvPr id="2" name="Title 1"/>
-          <p:cNvSpPr>
-            <a:spLocks noGrp="1"/>
-          </p:cNvSpPr>
-          <p:nvPr>
-            <p:ph type="title"/>
-          </p:nvPr>
-        </p:nvSpPr>
-        <p:spPr/>
-        <p:txBody>
-          <a:bodyPr/>
-          <a:lstStyle/>
-          <a:p>
-            <a:pPr lvl="0" indent="0" marL="0">
-              <a:buNone/>
-            </a:pPr>
-            <a:r>
-              <a:rPr/>
-              <a:t>The base rate is your benchmark</a:t>
-            </a:r>
-          </a:p>
-        </p:txBody>
-      </p:sp>
-      <p:sp>
-        <p:nvSpPr>
-          <p:cNvPr id="3" name="Content Placeholder 2"/>
-          <p:cNvSpPr>
-            <a:spLocks noGrp="1"/>
-          </p:cNvSpPr>
-          <p:nvPr>
-            <p:ph idx="1"/>
-          </p:nvPr>
-        </p:nvSpPr>
-        <p:spPr/>
-        <p:txBody>
-          <a:bodyPr/>
-          <a:lstStyle/>
-          <a:p>
-            <a:pPr lvl="0" indent="0" marL="0">
-              <a:buNone/>
-            </a:pPr>
-            <a:r>
-              <a:rPr/>
-              <a:t>16% of these loans default. So a model that says </a:t>
-            </a:r>
-            <a:r>
-              <a:rPr i="1"/>
-              <a:t>“nobody defaults”</a:t>
-            </a:r>
-            <a:r>
-              <a:rPr/>
-              <a:t>, for every applicant, is</a:t>
-            </a:r>
-          </a:p>
-          <a:p>
-            <a:pPr lvl="0" indent="0" marL="1270000">
-              <a:buNone/>
-            </a:pPr>
-            <a:r>
-              <a:rPr sz="2000" b="1"/>
-              <a:t>84% accurate.</a:t>
-            </a:r>
-          </a:p>
-          <a:p>
-            <a:pPr lvl="0" indent="0" marL="0">
-              <a:buNone/>
-            </a:pPr>
-            <a:r>
-              <a:rPr/>
-              <a:t>If your model reports 85% accuracy, it has bought you one percentage point over saying nothing at all. </a:t>
-            </a:r>
-            <a:r>
-              <a:rPr b="1"/>
-              <a:t>Accuracy on an imbalanced problem measures the base rate, not skill.</a:t>
-            </a:r>
-          </a:p>
-        </p:txBody>
-      </p:sp>
-    </p:spTree>
-  </p:cSld>
-</p:sld>
-</file>
-
-<file path=ppt/slides/slide26.xml><?xml version="1.0" encoding="utf-8"?>
-<p:sld xmlns:a="http://schemas.openxmlformats.org/drawingml/2006/main" xmlns:r="http://schemas.openxmlformats.org/officeDocument/2006/relationships" xmlns:p="http://schemas.openxmlformats.org/presentationml/2006/main">
-  <p:cSld>
-    <p:spTree>
-      <p:nvGrpSpPr>
-        <p:cNvPr id="1" name=""/>
-        <p:cNvGrpSpPr/>
-        <p:nvPr/>
-      </p:nvGrpSpPr>
-      <p:grpSpPr>
-        <a:xfrm>
-          <a:off x="0" y="0"/>
-          <a:ext cx="0" cy="0"/>
-          <a:chOff x="0" y="0"/>
-          <a:chExt cx="0" cy="0"/>
-        </a:xfrm>
-      </p:grpSpPr>
-      <p:sp>
-        <p:nvSpPr>
-          <p:cNvPr id="2" name="Title 1"/>
-          <p:cNvSpPr>
-            <a:spLocks noGrp="1"/>
-          </p:cNvSpPr>
-          <p:nvPr>
-            <p:ph type="title"/>
-          </p:nvPr>
-        </p:nvSpPr>
-        <p:spPr>
-          <a:xfrm>
-            <a:off x="457201" y="204787"/>
-            <a:ext cx="3008313" cy="871538"/>
-          </a:xfrm>
-        </p:spPr>
-        <p:txBody>
-          <a:bodyPr/>
-          <a:lstStyle/>
-          <a:p>
-            <a:pPr lvl="0" indent="0" marL="0">
-              <a:buNone/>
-            </a:pPr>
-            <a:r>
-              <a:rPr/>
-              <a:t>What to use instead</a:t>
-            </a:r>
-          </a:p>
-        </p:txBody>
-      </p:sp>
-      <p:sp>
-        <p:nvSpPr>
-          <p:cNvPr id="4" name="Text Placeholder 3"/>
-          <p:cNvSpPr>
-            <a:spLocks noGrp="1"/>
-          </p:cNvSpPr>
-          <p:nvPr>
-            <p:ph idx="2" sz="half" type="body"/>
-          </p:nvPr>
-        </p:nvSpPr>
-        <p:spPr/>
-        <p:txBody>
-          <a:bodyPr/>
-          <a:lstStyle/>
-          <a:p>
-            <a:pPr lvl="0" indent="0">
-              <a:buNone/>
-            </a:pPr>
-            <a:r>
-              <a:rPr b="1">
-                <a:solidFill>
-                  <a:srgbClr val="008000"/>
-                </a:solidFill>
-                <a:latin typeface="Courier"/>
-              </a:rPr>
-              <a:t>from</a:t>
-            </a:r>
-            <a:r>
-              <a:rPr>
-                <a:latin typeface="Courier"/>
-              </a:rPr>
-              <a:t> sklearn.metrics </a:t>
-            </a:r>
-            <a:r>
-              <a:rPr b="1">
-                <a:solidFill>
-                  <a:srgbClr val="008000"/>
-                </a:solidFill>
-                <a:latin typeface="Courier"/>
-              </a:rPr>
-              <a:t>import</a:t>
-            </a:r>
-            <a:r>
-              <a:rPr>
-                <a:latin typeface="Courier"/>
-              </a:rPr>
-              <a:t> roc_auc_score, average_precision_score</a:t>
-            </a:r>
-            <a:br/>
-            <a:br/>
-            <a:r>
-              <a:rPr>
-                <a:solidFill>
-                  <a:srgbClr val="008000"/>
-                </a:solidFill>
-                <a:latin typeface="Courier"/>
-              </a:rPr>
-              <a:t>print</a:t>
-            </a:r>
-            <a:r>
-              <a:rPr>
-                <a:latin typeface="Courier"/>
-              </a:rPr>
-              <a:t>(roc_auc_score(y, p))            </a:t>
-            </a:r>
-            <a:r>
-              <a:rPr i="1">
-                <a:solidFill>
-                  <a:srgbClr val="60A0B0"/>
-                </a:solidFill>
-                <a:latin typeface="Courier"/>
-              </a:rPr>
-              <a:t># ranks well?</a:t>
-            </a:r>
-            <a:br/>
-            <a:r>
-              <a:rPr>
-                <a:solidFill>
-                  <a:srgbClr val="008000"/>
-                </a:solidFill>
-                <a:latin typeface="Courier"/>
-              </a:rPr>
-              <a:t>print</a:t>
-            </a:r>
-            <a:r>
-              <a:rPr>
-                <a:latin typeface="Courier"/>
-              </a:rPr>
-              <a:t>(average_precision_score(y, p))  </a:t>
-            </a:r>
-            <a:r>
-              <a:rPr i="1">
-                <a:solidFill>
-                  <a:srgbClr val="60A0B0"/>
-                </a:solidFill>
-                <a:latin typeface="Courier"/>
-              </a:rPr>
-              <a:t># baseline is the base rate, 0.16</a:t>
-            </a:r>
-          </a:p>
-        </p:txBody>
-      </p:sp>
-      <p:graphicFrame>
-        <p:nvGraphicFramePr>
-          <p:cNvPr id="6" name="Content Placeholder 5"/>
-          <p:cNvGraphicFramePr>
-            <a:graphicFrameLocks noGrp="1"/>
-          </p:cNvGraphicFramePr>
-          <p:nvPr>
-            <p:ph idx="1"/>
-          </p:nvPr>
-        </p:nvGraphicFramePr>
-        <p:xfrm>
-          <a:off x="3568700" y="203200"/>
-          <a:ext cx="5105400" cy="4381500"/>
-        </p:xfrm>
-        <a:graphic>
-          <a:graphicData uri="http://schemas.openxmlformats.org/drawingml/2006/table">
-            <a:tbl>
-              <a:tblPr firstRow="1" bandRow="1">
-                <a:tableStyleId>{5C22544A-7EE6-4342-B048-85BDC9FD1C3A}</a:tableStyleId>
-              </a:tblPr>
-              <a:tblGrid>
-                <a:gridCol w="2552700"/>
-                <a:gridCol w="2552700"/>
-              </a:tblGrid>
-              <a:tr h="0">
-                <a:tc>
-                  <a:txBody>
-                    <a:bodyPr/>
-                    <a:lstStyle/>
-                    <a:p>
-                      <a:endParaRPr/>
-                    </a:p>
-                  </a:txBody>
-                  <a:tcPr/>
-                </a:tc>
-                <a:tc>
-                  <a:txBody>
-                    <a:bodyPr/>
-                    <a:lstStyle/>
-                    <a:p>
-                      <a:pPr lvl="0" indent="0" marL="0">
-                        <a:buNone/>
-                      </a:pPr>
-                      <a:r>
-                        <a:rPr/>
-                        <a:t>Reads</a:t>
-                      </a:r>
-                    </a:p>
-                  </a:txBody>
-                  <a:tcPr/>
-                </a:tc>
-              </a:tr>
-              <a:tr h="0">
-                <a:tc>
-                  <a:txBody>
-                    <a:bodyPr/>
-                    <a:lstStyle/>
-                    <a:p>
-                      <a:pPr lvl="0" indent="0" marL="0">
-                        <a:buNone/>
-                      </a:pPr>
-                      <a:r>
-                        <a:rPr b="1"/>
-                        <a:t>ROC AUC</a:t>
-                      </a:r>
-                    </a:p>
-                  </a:txBody>
-                </a:tc>
-                <a:tc>
-                  <a:txBody>
-                    <a:bodyPr/>
-                    <a:lstStyle/>
-                    <a:p>
-                      <a:pPr lvl="0" indent="0" marL="0">
-                        <a:buNone/>
-                      </a:pPr>
-                      <a:r>
-                        <a:rPr/>
-                        <a:t>probability a random defaulter is ranked above a random non-defaulter</a:t>
-                      </a:r>
-                    </a:p>
-                  </a:txBody>
-                </a:tc>
-              </a:tr>
-              <a:tr h="0">
-                <a:tc>
-                  <a:txBody>
-                    <a:bodyPr/>
-                    <a:lstStyle/>
-                    <a:p>
-                      <a:pPr lvl="0" indent="0" marL="0">
-                        <a:buNone/>
-                      </a:pPr>
-                      <a:r>
-                        <a:rPr b="1"/>
-                        <a:t>PR AUC</a:t>
-                      </a:r>
-                    </a:p>
-                  </a:txBody>
-                </a:tc>
-                <a:tc>
-                  <a:txBody>
-                    <a:bodyPr/>
-                    <a:lstStyle/>
-                    <a:p>
-                      <a:pPr lvl="0" indent="0" marL="0">
-                        <a:buNone/>
-                      </a:pPr>
-                      <a:r>
-                        <a:rPr/>
-                        <a:t>precision across recall levels; </a:t>
-                      </a:r>
-                      <a:r>
-                        <a:rPr b="1"/>
-                        <a:t>its floor is the base rate</a:t>
-                      </a:r>
-                    </a:p>
-                  </a:txBody>
-                </a:tc>
-              </a:tr>
-            </a:tbl>
-          </a:graphicData>
-        </a:graphic>
-      </p:graphicFrame>
-    </p:spTree>
-  </p:cSld>
-</p:sld>
-</file>
-
-<file path=ppt/slides/slide27.xml><?xml version="1.0" encoding="utf-8"?>
-<p:sld xmlns:a="http://schemas.openxmlformats.org/drawingml/2006/main" xmlns:r="http://schemas.openxmlformats.org/officeDocument/2006/relationships" xmlns:p="http://schemas.openxmlformats.org/presentationml/2006/main">
-  <p:cSld>
-    <p:spTree>
-      <p:nvGrpSpPr>
-        <p:cNvPr id="1" name=""/>
-        <p:cNvGrpSpPr/>
-        <p:nvPr/>
-      </p:nvGrpSpPr>
-      <p:grpSpPr>
-        <a:xfrm>
-          <a:off x="0" y="0"/>
-          <a:ext cx="0" cy="0"/>
-          <a:chOff x="0" y="0"/>
-          <a:chExt cx="0" cy="0"/>
-        </a:xfrm>
-      </p:grpSpPr>
-      <p:sp>
-        <p:nvSpPr>
-          <p:cNvPr id="3" name="Content Placeholder 2"/>
-          <p:cNvSpPr>
-            <a:spLocks noGrp="1"/>
-          </p:cNvSpPr>
-          <p:nvPr>
-            <p:ph idx="1"/>
-          </p:nvPr>
-        </p:nvSpPr>
-        <p:spPr/>
-        <p:txBody>
-          <a:bodyPr/>
-          <a:lstStyle/>
-          <a:p>
-            <a:pPr lvl="0" indent="0" marL="0">
-              <a:buNone/>
-            </a:pPr>
-            <a:r>
-              <a:rPr/>
-              <a:t>Under heavy imbalance, ROC AUC flatters. Report PR AUC </a:t>
-            </a:r>
-            <a:r>
-              <a:rPr b="1"/>
-              <a:t>with its baseline</a:t>
-            </a:r>
-            <a:r>
-              <a:rPr/>
-              <a:t> so a reader can see what you beat.</a:t>
-            </a:r>
-          </a:p>
-        </p:txBody>
-      </p:sp>
-    </p:spTree>
-  </p:cSld>
-</p:sld>
-</file>
-
-<file path=ppt/slides/slide28.xml><?xml version="1.0" encoding="utf-8"?>
-<p:sld xmlns:a="http://schemas.openxmlformats.org/drawingml/2006/main" xmlns:r="http://schemas.openxmlformats.org/officeDocument/2006/relationships" xmlns:p="http://schemas.openxmlformats.org/presentationml/2006/main">
-  <p:cSld>
-    <p:spTree>
-      <p:nvGrpSpPr>
-        <p:cNvPr id="1" name=""/>
-        <p:cNvGrpSpPr/>
-        <p:nvPr/>
-      </p:nvGrpSpPr>
-      <p:grpSpPr>
-        <a:xfrm>
-          <a:off x="0" y="0"/>
-          <a:ext cx="0" cy="0"/>
-          <a:chOff x="0" y="0"/>
-          <a:chExt cx="0" cy="0"/>
-        </a:xfrm>
-      </p:grpSpPr>
-      <p:sp>
-        <p:nvSpPr>
-          <p:cNvPr id="2" name="Title 1"/>
-          <p:cNvSpPr>
-            <a:spLocks noGrp="1"/>
-          </p:cNvSpPr>
-          <p:nvPr>
-            <p:ph type="title"/>
-          </p:nvPr>
-        </p:nvSpPr>
-        <p:spPr>
-          <a:xfrm>
-            <a:off x="722313" y="3305176"/>
-            <a:ext cx="7772400" cy="1021556"/>
-          </a:xfrm>
-        </p:spPr>
-        <p:txBody>
-          <a:bodyPr/>
-          <a:lstStyle/>
-          <a:p>
-            <a:pPr lvl="0" indent="0" marL="0">
-              <a:buNone/>
-            </a:pPr>
-            <a:r>
-              <a:rPr/>
-              <a:t>6 · The threshold</a:t>
-            </a:r>
-          </a:p>
-        </p:txBody>
-      </p:sp>
-    </p:spTree>
-  </p:cSld>
-</p:sld>
-</file>
-
-<file path=ppt/slides/slide29.xml><?xml version="1.0" encoding="utf-8"?>
-<p:sld xmlns:a="http://schemas.openxmlformats.org/drawingml/2006/main" xmlns:r="http://schemas.openxmlformats.org/officeDocument/2006/relationships" xmlns:p="http://schemas.openxmlformats.org/presentationml/2006/main">
-  <p:cSld>
-    <p:spTree>
-      <p:nvGrpSpPr>
-        <p:cNvPr id="1" name=""/>
-        <p:cNvGrpSpPr/>
-        <p:nvPr/>
-      </p:nvGrpSpPr>
-      <p:grpSpPr>
-        <a:xfrm>
-          <a:off x="0" y="0"/>
-          <a:ext cx="0" cy="0"/>
-          <a:chOff x="0" y="0"/>
-          <a:chExt cx="0" cy="0"/>
-        </a:xfrm>
-      </p:grpSpPr>
-      <p:sp>
-        <p:nvSpPr>
-          <p:cNvPr id="2" name="Title 1"/>
-          <p:cNvSpPr>
-            <a:spLocks noGrp="1"/>
-          </p:cNvSpPr>
-          <p:nvPr>
-            <p:ph type="title"/>
-          </p:nvPr>
-        </p:nvSpPr>
-        <p:spPr/>
-        <p:txBody>
-          <a:bodyPr/>
-          <a:lstStyle/>
-          <a:p>
-            <a:pPr lvl="0" indent="0" marL="0">
-              <a:buNone/>
-            </a:pPr>
-            <a:r>
-              <a:rPr/>
-              <a:t>0.5 is not a default. It is a claim.</a:t>
-            </a:r>
-          </a:p>
-        </p:txBody>
-      </p:sp>
-      <mc:AlternateContent xmlns:mc="http://schemas.openxmlformats.org/markup-compatibility/2006">
-        <mc:Choice xmlns:a14="http://schemas.microsoft.com/office/drawing/2010/main" Requires="a14">
-          <p:sp>
-            <p:nvSpPr>
-              <p:cNvPr id="3" name="Content Placeholder 2"/>
-              <p:cNvSpPr>
-                <a:spLocks noGrp="1"/>
-              </p:cNvSpPr>
-              <p:nvPr>
-                <p:ph idx="1"/>
-              </p:nvPr>
-            </p:nvSpPr>
-            <p:spPr/>
-            <p:txBody>
-              <a:bodyPr/>
-              <a:lstStyle/>
-              <a:p>
-                <a:pPr lvl="0" indent="0" marL="0">
-                  <a:buNone/>
-                </a:pPr>
+                <a:r>
+                  <a:rPr i="1"/>
+                  <a:t>per what</a:t>
+                </a:r>
                 <a:r>
                   <a:rPr/>
-                  <a:t>Classifying at </a:t>
-                </a:r>
-                <a14:m>
-                  <m:oMath xmlns:m="http://schemas.openxmlformats.org/officeDocument/2006/math">
-                    <m:acc>
-                      <m:accPr>
-                        <m:chr m:val="̂"/>
-                      </m:accPr>
-                      <m:e>
-                        <m:r>
-                          <m:t>p</m:t>
-                        </m:r>
-                      </m:e>
-                    </m:acc>
-                    <m:r>
-                      <m:rPr>
-                        <m:sty m:val="p"/>
-                      </m:rPr>
-                      <m:t>&gt;</m:t>
-                    </m:r>
-                    <m:r>
-                      <m:t>0.5</m:t>
-                    </m:r>
-                  </m:oMath>
-                </a14:m>
-                <a:r>
-                  <a:rPr/>
-                  <a:t> asserts that a </a:t>
-                </a:r>
-                <a:r>
-                  <a:rPr b="1"/>
-                  <a:t>false positive and a false negative cost the same.</a:t>
-                </a:r>
-              </a:p>
-              <a:p>
-                <a:pPr lvl="0" indent="0" marL="0">
-                  <a:buNone/>
-                </a:pPr>
-                <a:r>
-                  <a:rPr/>
-                  <a:t>For a lender they obviously do not: refusing a good borrower costs a margin; funding a defaulter costs the principal.</a:t>
+                  <a:t>.</a:t>
                 </a:r>
               </a:p>
             </p:txBody>
@@ -6418,7 +5813,7 @@
                       </a:pPr>
                       <a:r>
                         <a:rPr/>
-                        <a:t>Introduction — the decision, not the model</a:t>
+                        <a:t>Where we are, and what this adds</a:t>
                       </a:r>
                     </a:p>
                   </a:txBody>
@@ -6482,7 +5877,7 @@
                       </a:pPr>
                       <a:r>
                         <a:rPr/>
-                        <a:t>The basics of logistic regression</a:t>
+                        <a:t>Why a straight line fails</a:t>
                       </a:r>
                     </a:p>
                   </a:txBody>
@@ -6514,7 +5909,7 @@
                       </a:pPr>
                       <a:r>
                         <a:rPr/>
-                        <a:t>Reading the output</a:t>
+                        <a:t>The logistic curve</a:t>
                       </a:r>
                     </a:p>
                   </a:txBody>
@@ -6546,7 +5941,7 @@
                       </a:pPr>
                       <a:r>
                         <a:rPr/>
-                        <a:t>Why accuracy is the wrong metric</a:t>
+                        <a:t>Reading the output</a:t>
                       </a:r>
                     </a:p>
                   </a:txBody>
@@ -6578,7 +5973,7 @@
                       </a:pPr>
                       <a:r>
                         <a:rPr/>
-                        <a:t>The threshold is an economic choice</a:t>
+                        <a:t>Why accuracy lies</a:t>
                       </a:r>
                     </a:p>
                   </a:txBody>
@@ -6610,7 +6005,7 @@
                       </a:pPr>
                       <a:r>
                         <a:rPr/>
-                        <a:t>Another example: Portugal’s red wines</a:t>
+                        <a:t>The threshold is an economic choice</a:t>
                       </a:r>
                     </a:p>
                   </a:txBody>
@@ -6642,7 +6037,7 @@
                       </a:pPr>
                       <a:r>
                         <a:rPr/>
-                        <a:t>A third: falling behind in Europe</a:t>
+                        <a:t>A second example: Portugal’s red wines</a:t>
                       </a:r>
                     </a:p>
                   </a:txBody>
@@ -6689,7 +6084,56 @@
 </p:sld>
 </file>
 
-<file path=ppt/slides/slide30.xml><?xml version="1.0" encoding="UTF-8"?><p:sld xmlns:a="http://schemas.openxmlformats.org/drawingml/2006/main" xmlns:r="http://schemas.openxmlformats.org/officeDocument/2006/relationships" xmlns:p="http://schemas.openxmlformats.org/presentationml/2006/main"><p:cSld><p:spTree><p:nvGrpSpPr><p:cNvPr id="1" name="" /><p:cNvGrpSpPr /><p:nvPr /></p:nvGrpSpPr><p:grpSpPr><a:xfrm><a:off x="0" y="0" /><a:ext cx="0" cy="0" /><a:chOff x="0" y="0" /><a:chExt cx="0" cy="0" /></a:xfrm></p:grpSpPr><p:sp><p:nvSpPr><p:cNvPr id="2" name="Title 1" /><p:cNvSpPr><a:spLocks noGrp="1" /></p:cNvSpPr><p:nvPr><p:ph type="title" /></p:nvPr></p:nvSpPr><p:spPr><a:xfrm><a:off x="457201" y="204787" /><a:ext cx="3008313" cy="871538" /></a:xfrm></p:spPr><p:txBody><a:bodyPr /><a:lstStyle /><a:p><a:pPr lvl="0" indent="0" marL="0"><a:buNone /></a:pPr><a:r><a:rPr /><a:t>The cost-optimal threshold</a:t></a:r></a:p></p:txBody></p:sp><mc:AlternateContent xmlns:mc="http://schemas.openxmlformats.org/markup-compatibility/2006"><mc:Choice xmlns:a14="http://schemas.microsoft.com/office/drawing/2010/main" Requires="a14"><p:sp><p:nvSpPr><p:cNvPr id="4" name="Text Placeholder 3" /><p:cNvSpPr><a:spLocks noGrp="1" /></p:cNvSpPr><p:nvPr><p:ph idx="2" sz="half" type="body" /></p:nvPr></p:nvSpPr><p:spPr /><p:txBody><a:bodyPr /><a:lstStyle /><a:p><a:pPr lvl="0" indent="0" marL="0"><a:buNone /></a:pPr><a14:m><m:oMathPara xmlns:m="http://schemas.openxmlformats.org/officeDocument/2006/math"><m:oMathParaPr><m:jc m:val="center" /></m:oMathParaPr><m:oMath><m:borderBox><m:e><m:r><m:t> </m:t></m:r><m:sSup><m:e><m:r><m:t>τ</m:t></m:r></m:e><m:sup><m:r><m:rPr><m:sty m:val="p" /></m:rPr><m:t>⋆</m:t></m:r></m:sup></m:sSup><m:r><m:rPr><m:sty m:val="p" /></m:rPr><m:t>=</m:t></m:r><m:f><m:fPr><m:type m:val="bar" /></m:fPr><m:num><m:sSub><m:e><m:r><m:t>c</m:t></m:r></m:e><m:sub><m:r><m:t>F</m:t></m:r><m:r><m:t>P</m:t></m:r></m:sub></m:sSub></m:num><m:den><m:sSub><m:e><m:r><m:t>c</m:t></m:r></m:e><m:sub><m:r><m:t>F</m:t></m:r><m:r><m:t>P</m:t></m:r></m:sub></m:sSub><m:r><m:rPr><m:sty m:val="p" /></m:rPr><m:t>+</m:t></m:r><m:sSub><m:e><m:r><m:t>c</m:t></m:r></m:e><m:sub><m:r><m:t>F</m:t></m:r><m:r><m:t>N</m:t></m:r></m:sub></m:sSub></m:den></m:f><m:r><m:t> </m:t></m:r></m:e></m:borderBox></m:oMath></m:oMathPara></a14:m></a:p></p:txBody></p:sp></mc:Choice></mc:AlternateContent><p:graphicFrame><p:nvGraphicFramePr><p:cNvPr id="6" name="Content Placeholder 5" /><p:cNvGraphicFramePr><a:graphicFrameLocks noGrp="1" /></p:cNvGraphicFramePr><p:nvPr><p:ph idx="1" /></p:nvPr></p:nvGraphicFramePr><p:xfrm><a:off x="3568700" y="203200" /><a:ext cx="5105400" cy="4381500" /></p:xfrm><a:graphic><a:graphicData uri="http://schemas.openxmlformats.org/drawingml/2006/table"><a:tbl><a:tblPr firstRow="1" bandRow="1"><a:tableStyleId>{5C22544A-7EE6-4342-B048-85BDC9FD1C3A}</a:tableStyleId></a:tblPr><a:tblGrid><a:gridCol w="2552700" /><a:gridCol w="2552700" /></a:tblGrid><a:tr h="0"><a:tc><a:txBody><a:bodyPr /><a:lstStyle /><a:p><a:pPr lvl="0" indent="0" marL="0"><a:buNone /></a:pPr><a:r><a:rPr /><a:t>Cost ratio </a:t></a:r><a14:m><m:oMath xmlns:m="http://schemas.openxmlformats.org/officeDocument/2006/math"><m:sSub><m:e><m:r><m:t>c</m:t></m:r></m:e><m:sub><m:r><m:t>F</m:t></m:r><m:r><m:t>N</m:t></m:r></m:sub></m:sSub><m:r><m:t>​</m:t></m:r><m:r><m:rPr><m:sty m:val="p" /></m:rPr><m:t>:</m:t></m:r><m:r><m:t>​</m:t></m:r><m:sSub><m:e><m:r><m:t>c</m:t></m:r></m:e><m:sub><m:r><m:t>F</m:t></m:r><m:r><m:t>P</m:t></m:r></m:sub></m:sSub></m:oMath></a14:m></a:p></a:txBody><a:tcPr /></a:tc><a:tc><a:txBody><a:bodyPr /><a:lstStyle /><a:p><a:pPr lvl="0" indent="0" marL="0"><a:buNone /></a:pPr><a14:m><m:oMath xmlns:m="http://schemas.openxmlformats.org/officeDocument/2006/math"><m:sSup><m:e><m:r><m:t>τ</m:t></m:r></m:e><m:sup><m:r><m:rPr><m:sty m:val="p" /></m:rPr><m:t>⋆</m:t></m:r></m:sup></m:sSup></m:oMath></a14:m></a:p></a:txBody><a:tcPr /></a:tc></a:tr><a:tr h="0"><a:tc><a:txBody><a:bodyPr /><a:lstStyle /><a:p><a:pPr lvl="0" indent="0" marL="0"><a:buNone /></a:pPr><a:r><a:rPr /><a:t>1 : 1</a:t></a:r></a:p></a:txBody></a:tc><a:tc><a:txBody><a:bodyPr /><a:lstStyle /><a:p><a:pPr lvl="0" indent="0" marL="0"><a:buNone /></a:pPr><a:r><a:rPr /><a:t>0.50</a:t></a:r></a:p></a:txBody></a:tc></a:tr><a:tr h="0"><a:tc><a:txBody><a:bodyPr /><a:lstStyle /><a:p><a:pPr lvl="0" indent="0" marL="0"><a:buNone /></a:pPr><a:r><a:rPr b="1" /><a:t>5 : 1</a:t></a:r></a:p></a:txBody></a:tc><a:tc><a:txBody><a:bodyPr /><a:lstStyle /><a:p><a:pPr lvl="0" indent="0" marL="0"><a:buNone /></a:pPr><a:r><a:rPr b="1" /><a:t>0.167</a:t></a:r></a:p></a:txBody></a:tc></a:tr><a:tr h="0"><a:tc><a:txBody><a:bodyPr /><a:lstStyle /><a:p><a:pPr lvl="0" indent="0" marL="0"><a:buNone /></a:pPr><a:r><a:rPr /><a:t>10 : 1</a:t></a:r></a:p></a:txBody></a:tc><a:tc><a:txBody><a:bodyPr /><a:lstStyle /><a:p><a:pPr lvl="0" indent="0" marL="0"><a:buNone /></a:pPr><a:r><a:rPr /><a:t>0.091</a:t></a:r></a:p></a:txBody></a:tc></a:tr></a:tbl></a:graphicData></a:graphic></p:graphicFrame></p:spTree></p:cSld></p:sld>
+<file path=ppt/slides/slide30.xml><?xml version="1.0" encoding="utf-8"?>
+<p:sld xmlns:a="http://schemas.openxmlformats.org/drawingml/2006/main" xmlns:r="http://schemas.openxmlformats.org/officeDocument/2006/relationships" xmlns:p="http://schemas.openxmlformats.org/presentationml/2006/main">
+  <p:cSld>
+    <p:spTree>
+      <p:nvGrpSpPr>
+        <p:cNvPr id="1" name=""/>
+        <p:cNvGrpSpPr/>
+        <p:nvPr/>
+      </p:nvGrpSpPr>
+      <p:grpSpPr>
+        <a:xfrm>
+          <a:off x="0" y="0"/>
+          <a:ext cx="0" cy="0"/>
+          <a:chOff x="0" y="0"/>
+          <a:chExt cx="0" cy="0"/>
+        </a:xfrm>
+      </p:grpSpPr>
+      <p:sp>
+        <p:nvSpPr>
+          <p:cNvPr id="2" name="Title 1"/>
+          <p:cNvSpPr>
+            <a:spLocks noGrp="1"/>
+          </p:cNvSpPr>
+          <p:nvPr>
+            <p:ph type="title"/>
+          </p:nvPr>
+        </p:nvSpPr>
+        <p:spPr>
+          <a:xfrm>
+            <a:off x="722313" y="3305176"/>
+            <a:ext cx="7772400" cy="1021556"/>
+          </a:xfrm>
+        </p:spPr>
+        <p:txBody>
+          <a:bodyPr/>
+          <a:lstStyle/>
+          <a:p>
+            <a:pPr lvl="0" indent="0" marL="0">
+              <a:buNone/>
+            </a:pPr>
+            <a:r>
+              <a:rPr/>
+              <a:t>6 · Why accuracy lies</a:t>
+            </a:r>
+          </a:p>
+        </p:txBody>
+      </p:sp>
+    </p:spTree>
+  </p:cSld>
+</p:sld>
 </file>
 
 <file path=ppt/slides/slide31.xml><?xml version="1.0" encoding="utf-8"?>
@@ -6711,6 +6155,31 @@
       </p:grpSpPr>
       <p:sp>
         <p:nvSpPr>
+          <p:cNvPr id="2" name="Title 1"/>
+          <p:cNvSpPr>
+            <a:spLocks noGrp="1"/>
+          </p:cNvSpPr>
+          <p:nvPr>
+            <p:ph type="title"/>
+          </p:nvPr>
+        </p:nvSpPr>
+        <p:spPr/>
+        <p:txBody>
+          <a:bodyPr/>
+          <a:lstStyle/>
+          <a:p>
+            <a:pPr lvl="0" indent="0" marL="0">
+              <a:buNone/>
+            </a:pPr>
+            <a:r>
+              <a:rPr/>
+              <a:t>The null model is already good</a:t>
+            </a:r>
+          </a:p>
+        </p:txBody>
+      </p:sp>
+      <p:sp>
+        <p:nvSpPr>
           <p:cNvPr id="3" name="Content Placeholder 2"/>
           <p:cNvSpPr>
             <a:spLocks noGrp="1"/>
@@ -6728,12 +6197,42 @@
               <a:buNone/>
             </a:pPr>
             <a:r>
+              <a:rPr/>
+              <a:t>16% default. So the model </a:t>
+            </a:r>
+            <a:r>
+              <a:rPr i="1"/>
+              <a:t>“nobody ever defaults”</a:t>
+            </a:r>
+            <a:r>
+              <a:rPr/>
+              <a:t> — which uses no data at all — is</a:t>
+            </a:r>
+          </a:p>
+          <a:p>
+            <a:pPr lvl="0" indent="0" marL="1270000">
+              <a:buNone/>
+            </a:pPr>
+            <a:r>
+              <a:rPr sz="2000" b="1"/>
+              <a:t>84% accurate.</a:t>
+            </a:r>
+          </a:p>
+          <a:p>
+            <a:pPr lvl="0" indent="0" marL="0">
+              <a:buNone/>
+            </a:pPr>
+            <a:r>
+              <a:rPr/>
+              <a:t>Report 85% accuracy and you have bought </a:t>
+            </a:r>
+            <a:r>
               <a:rPr b="1"/>
-              <a:t>The default threshold in every software package is an unstated assumption about costs.</a:t>
-            </a:r>
-            <a:r>
-              <a:rPr/>
-              <a:t> State yours.</a:t>
+              <a:t>one point</a:t>
+            </a:r>
+            <a:r>
+              <a:rPr/>
+              <a:t> over saying nothing. Under imbalance, accuracy measures the base rate, not skill.</a:t>
             </a:r>
           </a:p>
         </p:txBody>
@@ -6780,497 +6279,41 @@
             </a:pPr>
             <a:r>
               <a:rPr/>
-              <a:t>Sweep it, and read the workload</a:t>
-            </a:r>
-          </a:p>
-        </p:txBody>
-      </p:sp>
-      <p:sp>
-        <p:nvSpPr>
-          <p:cNvPr id="3" name="Content Placeholder 2"/>
-          <p:cNvSpPr>
-            <a:spLocks noGrp="1"/>
-          </p:cNvSpPr>
-          <p:nvPr>
-            <p:ph idx="1"/>
-          </p:nvPr>
-        </p:nvSpPr>
-        <p:spPr/>
-        <p:txBody>
-          <a:bodyPr/>
-          <a:lstStyle/>
-          <a:p>
-            <a:pPr lvl="0" indent="0">
-              <a:buNone/>
-            </a:pPr>
-            <a:r>
-              <a:rPr b="1">
-                <a:solidFill>
-                  <a:srgbClr val="008000"/>
-                </a:solidFill>
-                <a:latin typeface="Courier"/>
-              </a:rPr>
-              <a:t>from</a:t>
-            </a:r>
-            <a:r>
-              <a:rPr>
-                <a:latin typeface="Courier"/>
-              </a:rPr>
-              <a:t> sklearn.metrics </a:t>
-            </a:r>
-            <a:r>
-              <a:rPr b="1">
-                <a:solidFill>
-                  <a:srgbClr val="008000"/>
-                </a:solidFill>
-                <a:latin typeface="Courier"/>
-              </a:rPr>
-              <a:t>import</a:t>
-            </a:r>
-            <a:r>
-              <a:rPr>
-                <a:latin typeface="Courier"/>
-              </a:rPr>
-              <a:t> precision_score, recall_score</a:t>
-            </a:r>
-            <a:br/>
-            <a:br/>
-            <a:r>
-              <a:rPr b="1">
-                <a:solidFill>
-                  <a:srgbClr val="007020"/>
-                </a:solidFill>
-                <a:latin typeface="Courier"/>
-              </a:rPr>
-              <a:t>for</a:t>
-            </a:r>
-            <a:r>
-              <a:rPr>
-                <a:latin typeface="Courier"/>
-              </a:rPr>
-              <a:t> t </a:t>
-            </a:r>
-            <a:r>
-              <a:rPr b="1">
-                <a:solidFill>
-                  <a:srgbClr val="007020"/>
-                </a:solidFill>
-                <a:latin typeface="Courier"/>
-              </a:rPr>
-              <a:t>in</a:t>
-            </a:r>
-            <a:r>
-              <a:rPr>
-                <a:latin typeface="Courier"/>
-              </a:rPr>
-              <a:t> [</a:t>
-            </a:r>
-            <a:r>
-              <a:rPr>
-                <a:solidFill>
-                  <a:srgbClr val="40A070"/>
-                </a:solidFill>
-                <a:latin typeface="Courier"/>
-              </a:rPr>
-              <a:t>0.1</a:t>
-            </a:r>
-            <a:r>
-              <a:rPr>
-                <a:latin typeface="Courier"/>
-              </a:rPr>
-              <a:t>, </a:t>
-            </a:r>
-            <a:r>
-              <a:rPr>
-                <a:solidFill>
-                  <a:srgbClr val="40A070"/>
-                </a:solidFill>
-                <a:latin typeface="Courier"/>
-              </a:rPr>
-              <a:t>0.15</a:t>
-            </a:r>
-            <a:r>
-              <a:rPr>
-                <a:latin typeface="Courier"/>
-              </a:rPr>
-              <a:t>, </a:t>
-            </a:r>
-            <a:r>
-              <a:rPr>
-                <a:solidFill>
-                  <a:srgbClr val="40A070"/>
-                </a:solidFill>
-                <a:latin typeface="Courier"/>
-              </a:rPr>
-              <a:t>0.2</a:t>
-            </a:r>
-            <a:r>
-              <a:rPr>
-                <a:latin typeface="Courier"/>
-              </a:rPr>
-              <a:t>, </a:t>
-            </a:r>
-            <a:r>
-              <a:rPr>
-                <a:solidFill>
-                  <a:srgbClr val="40A070"/>
-                </a:solidFill>
-                <a:latin typeface="Courier"/>
-              </a:rPr>
-              <a:t>0.3</a:t>
-            </a:r>
-            <a:r>
-              <a:rPr>
-                <a:latin typeface="Courier"/>
-              </a:rPr>
-              <a:t>, </a:t>
-            </a:r>
-            <a:r>
-              <a:rPr>
-                <a:solidFill>
-                  <a:srgbClr val="40A070"/>
-                </a:solidFill>
-                <a:latin typeface="Courier"/>
-              </a:rPr>
-              <a:t>0.5</a:t>
-            </a:r>
-            <a:r>
-              <a:rPr>
-                <a:latin typeface="Courier"/>
-              </a:rPr>
-              <a:t>]:</a:t>
-            </a:r>
-            <a:br/>
-            <a:r>
-              <a:rPr>
-                <a:latin typeface="Courier"/>
-              </a:rPr>
-              <a:t>    yhat </a:t>
-            </a:r>
-            <a:r>
-              <a:rPr>
-                <a:solidFill>
-                  <a:srgbClr val="666666"/>
-                </a:solidFill>
-                <a:latin typeface="Courier"/>
-              </a:rPr>
-              <a:t>=</a:t>
-            </a:r>
-            <a:r>
-              <a:rPr>
-                <a:latin typeface="Courier"/>
-              </a:rPr>
-              <a:t> (p </a:t>
-            </a:r>
-            <a:r>
-              <a:rPr>
-                <a:solidFill>
-                  <a:srgbClr val="666666"/>
-                </a:solidFill>
-                <a:latin typeface="Courier"/>
-              </a:rPr>
-              <a:t>&gt;=</a:t>
-            </a:r>
-            <a:r>
-              <a:rPr>
-                <a:latin typeface="Courier"/>
-              </a:rPr>
-              <a:t> t).astype(</a:t>
-            </a:r>
-            <a:r>
-              <a:rPr>
-                <a:solidFill>
-                  <a:srgbClr val="008000"/>
-                </a:solidFill>
-                <a:latin typeface="Courier"/>
-              </a:rPr>
-              <a:t>int</a:t>
-            </a:r>
-            <a:r>
-              <a:rPr>
-                <a:latin typeface="Courier"/>
-              </a:rPr>
-              <a:t>)</a:t>
-            </a:r>
-            <a:br/>
-            <a:r>
-              <a:rPr>
-                <a:latin typeface="Courier"/>
-              </a:rPr>
-              <a:t>    </a:t>
-            </a:r>
-            <a:r>
-              <a:rPr>
-                <a:solidFill>
-                  <a:srgbClr val="008000"/>
-                </a:solidFill>
-                <a:latin typeface="Courier"/>
-              </a:rPr>
-              <a:t>print</a:t>
-            </a:r>
-            <a:r>
-              <a:rPr>
-                <a:latin typeface="Courier"/>
-              </a:rPr>
-              <a:t>(</a:t>
-            </a:r>
-            <a:r>
-              <a:rPr>
-                <a:solidFill>
-                  <a:srgbClr val="BB6688"/>
-                </a:solidFill>
-                <a:latin typeface="Courier"/>
-              </a:rPr>
-              <a:t>f"</a:t>
-            </a:r>
-            <a:r>
-              <a:rPr>
-                <a:solidFill>
-                  <a:srgbClr val="4070A0"/>
-                </a:solidFill>
-                <a:latin typeface="Courier"/>
-              </a:rPr>
-              <a:t>{</a:t>
-            </a:r>
-            <a:r>
-              <a:rPr>
-                <a:latin typeface="Courier"/>
-              </a:rPr>
-              <a:t>t</a:t>
-            </a:r>
-            <a:r>
-              <a:rPr>
-                <a:solidFill>
-                  <a:srgbClr val="4070A0"/>
-                </a:solidFill>
-                <a:latin typeface="Courier"/>
-              </a:rPr>
-              <a:t>:.2f}</a:t>
-            </a:r>
-            <a:r>
-              <a:rPr>
-                <a:solidFill>
-                  <a:srgbClr val="BB6688"/>
-                </a:solidFill>
-                <a:latin typeface="Courier"/>
-              </a:rPr>
-              <a:t>  flagged=</a:t>
-            </a:r>
-            <a:r>
-              <a:rPr>
-                <a:solidFill>
-                  <a:srgbClr val="4070A0"/>
-                </a:solidFill>
-                <a:latin typeface="Courier"/>
-              </a:rPr>
-              <a:t>{</a:t>
-            </a:r>
-            <a:r>
-              <a:rPr>
-                <a:latin typeface="Courier"/>
-              </a:rPr>
-              <a:t>yhat</a:t>
-            </a:r>
-            <a:r>
-              <a:rPr>
-                <a:solidFill>
-                  <a:srgbClr val="4070A0"/>
-                </a:solidFill>
-                <a:latin typeface="Courier"/>
-              </a:rPr>
-              <a:t>.</a:t>
-            </a:r>
-            <a:r>
-              <a:rPr>
-                <a:solidFill>
-                  <a:srgbClr val="008000"/>
-                </a:solidFill>
-                <a:latin typeface="Courier"/>
-              </a:rPr>
-              <a:t>sum</a:t>
-            </a:r>
-            <a:r>
-              <a:rPr>
-                <a:latin typeface="Courier"/>
-              </a:rPr>
-              <a:t>()</a:t>
-            </a:r>
-            <a:r>
-              <a:rPr>
-                <a:solidFill>
-                  <a:srgbClr val="4070A0"/>
-                </a:solidFill>
-                <a:latin typeface="Courier"/>
-              </a:rPr>
-              <a:t>:5d}</a:t>
-            </a:r>
-            <a:r>
-              <a:rPr>
-                <a:solidFill>
-                  <a:srgbClr val="BB6688"/>
-                </a:solidFill>
-                <a:latin typeface="Courier"/>
-              </a:rPr>
-              <a:t>  "</a:t>
-            </a:r>
-            <a:br/>
-            <a:r>
-              <a:rPr>
-                <a:latin typeface="Courier"/>
-              </a:rPr>
-              <a:t>          </a:t>
-            </a:r>
-            <a:r>
-              <a:rPr>
-                <a:solidFill>
-                  <a:srgbClr val="BB6688"/>
-                </a:solidFill>
-                <a:latin typeface="Courier"/>
-              </a:rPr>
-              <a:t>f"prec=</a:t>
-            </a:r>
-            <a:r>
-              <a:rPr>
-                <a:solidFill>
-                  <a:srgbClr val="4070A0"/>
-                </a:solidFill>
-                <a:latin typeface="Courier"/>
-              </a:rPr>
-              <a:t>{</a:t>
-            </a:r>
-            <a:r>
-              <a:rPr>
-                <a:latin typeface="Courier"/>
-              </a:rPr>
-              <a:t>precision_score(y, yhat, zero_division</a:t>
-            </a:r>
-            <a:r>
-              <a:rPr>
-                <a:solidFill>
-                  <a:srgbClr val="666666"/>
-                </a:solidFill>
-                <a:latin typeface="Courier"/>
-              </a:rPr>
-              <a:t>=</a:t>
-            </a:r>
-            <a:r>
-              <a:rPr>
-                <a:solidFill>
-                  <a:srgbClr val="40A070"/>
-                </a:solidFill>
-                <a:latin typeface="Courier"/>
-              </a:rPr>
-              <a:t>0</a:t>
-            </a:r>
-            <a:r>
-              <a:rPr>
-                <a:latin typeface="Courier"/>
-              </a:rPr>
-              <a:t>)</a:t>
-            </a:r>
-            <a:r>
-              <a:rPr>
-                <a:solidFill>
-                  <a:srgbClr val="4070A0"/>
-                </a:solidFill>
-                <a:latin typeface="Courier"/>
-              </a:rPr>
-              <a:t>:.3f}</a:t>
-            </a:r>
-            <a:r>
-              <a:rPr>
-                <a:solidFill>
-                  <a:srgbClr val="BB6688"/>
-                </a:solidFill>
-                <a:latin typeface="Courier"/>
-              </a:rPr>
-              <a:t>  "</a:t>
-            </a:r>
-            <a:br/>
-            <a:r>
-              <a:rPr>
-                <a:latin typeface="Courier"/>
-              </a:rPr>
-              <a:t>          </a:t>
-            </a:r>
-            <a:r>
-              <a:rPr>
-                <a:solidFill>
-                  <a:srgbClr val="BB6688"/>
-                </a:solidFill>
-                <a:latin typeface="Courier"/>
-              </a:rPr>
-              <a:t>f"rec=</a:t>
-            </a:r>
-            <a:r>
-              <a:rPr>
-                <a:solidFill>
-                  <a:srgbClr val="4070A0"/>
-                </a:solidFill>
-                <a:latin typeface="Courier"/>
-              </a:rPr>
-              <a:t>{</a:t>
-            </a:r>
-            <a:r>
-              <a:rPr>
-                <a:latin typeface="Courier"/>
-              </a:rPr>
-              <a:t>recall_score(y, yhat)</a:t>
-            </a:r>
-            <a:r>
-              <a:rPr>
-                <a:solidFill>
-                  <a:srgbClr val="4070A0"/>
-                </a:solidFill>
-                <a:latin typeface="Courier"/>
-              </a:rPr>
-              <a:t>:.3f}</a:t>
-            </a:r>
-            <a:r>
-              <a:rPr>
-                <a:solidFill>
-                  <a:srgbClr val="BB6688"/>
-                </a:solidFill>
-                <a:latin typeface="Courier"/>
-              </a:rPr>
-              <a:t>"</a:t>
-            </a:r>
-            <a:r>
-              <a:rPr>
-                <a:latin typeface="Courier"/>
-              </a:rPr>
-              <a:t>)</a:t>
-            </a:r>
-          </a:p>
-          <a:p>
-            <a:pPr lvl="0" indent="0">
-              <a:buNone/>
-            </a:pPr>
-            <a:r>
-              <a:rPr>
-                <a:latin typeface="Courier"/>
-              </a:rPr>
-              <a:t>0.10  flagged= 7625  prec=0.184  rec=0.915
-0.15  flagged= 5072  prec=0.202  rec=0.670
-0.20  flagged= 2440  prec=0.232  rec=0.369
-0.50  flagged=    0  prec=0.000  rec=0.000</a:t>
-            </a:r>
-          </a:p>
-          <a:p>
-            <a:pPr lvl="0" indent="0" marL="0">
-              <a:buNone/>
-            </a:pPr>
-            <a:r>
-              <a:rPr b="1"/>
-              <a:t>At 0.50 the model flags nothing at all.</a:t>
-            </a:r>
-            <a:r>
-              <a:rPr/>
-              <a:t> Every applicant is approved, recall is zero, and the software reported no error. This is what an unstated threshold does.</a:t>
-            </a:r>
-          </a:p>
-        </p:txBody>
-      </p:sp>
+              <a:t>Two curves, one model</a:t>
+            </a:r>
+          </a:p>
+        </p:txBody>
+      </p:sp>
+      <p:pic>
+        <p:nvPicPr>
+          <p:cNvPr descr="slides_files/figure-pptx/cell-7-output-1.png" id="0" name="Picture 1"/>
+          <p:cNvPicPr>
+            <a:picLocks noGrp="1" noChangeAspect="1"/>
+          </p:cNvPicPr>
+          <p:nvPr/>
+        </p:nvPicPr>
+        <p:blipFill>
+          <a:blip r:embed="rId2"/>
+          <a:stretch>
+            <a:fillRect/>
+          </a:stretch>
+        </p:blipFill>
+        <p:spPr bwMode="auto">
+          <a:xfrm>
+            <a:off x="457200" y="1333500"/>
+            <a:ext cx="8229600" cy="3111500"/>
+          </a:xfrm>
+          <a:prstGeom prst="rect">
+            <a:avLst/>
+          </a:prstGeom>
+          <a:noFill/>
+          <a:ln w="9525">
+            <a:noFill/>
+            <a:headEnd/>
+            <a:tailEnd/>
+          </a:ln>
+        </p:spPr>
+      </p:pic>
     </p:spTree>
   </p:cSld>
 </p:sld>
@@ -7313,17 +6356,177 @@
             </a:pPr>
             <a:r>
               <a:rPr/>
-              <a:t>Read </a:t>
-            </a:r>
-            <a:r>
-              <a:rPr>
-                <a:latin typeface="Courier"/>
-              </a:rPr>
-              <a:t>flagged</a:t>
-            </a:r>
-            <a:r>
-              <a:rPr/>
-              <a:t> as a workload</a:t>
+              <a:t>Read them against each other</a:t>
+            </a:r>
+          </a:p>
+        </p:txBody>
+      </p:sp>
+      <p:sp>
+        <p:nvSpPr>
+          <p:cNvPr id="3" name="Content Placeholder 2"/>
+          <p:cNvSpPr>
+            <a:spLocks noGrp="1"/>
+          </p:cNvSpPr>
+          <p:nvPr>
+            <p:ph idx="1"/>
+          </p:nvPr>
+        </p:nvSpPr>
+        <p:spPr/>
+        <p:txBody>
+          <a:bodyPr/>
+          <a:lstStyle/>
+          <a:p>
+            <a:pPr lvl="0"/>
+            <a:r>
+              <a:rPr b="1"/>
+              <a:t>ROC AUC 0.627</a:t>
+            </a:r>
+            <a:r>
+              <a:rPr/>
+              <a:t> — looks like a working model. Its reference line is </a:t>
+            </a:r>
+            <a:r>
+              <a:rPr i="1"/>
+              <a:t>chance</a:t>
+            </a:r>
+            <a:r>
+              <a:rPr/>
+              <a:t>, a low bar.</a:t>
+            </a:r>
+          </a:p>
+          <a:p>
+            <a:pPr lvl="0"/>
+            <a:r>
+              <a:rPr b="1"/>
+              <a:t>PR AUC 0.232</a:t>
+            </a:r>
+            <a:r>
+              <a:rPr/>
+              <a:t> — its reference line is the </a:t>
+            </a:r>
+            <a:r>
+              <a:rPr b="1"/>
+              <a:t>base rate, 0.160</a:t>
+            </a:r>
+            <a:r>
+              <a:rPr/>
+              <a:t>. The real gain is 0.232 against 0.160.</a:t>
+            </a:r>
+          </a:p>
+          <a:p>
+            <a:pPr lvl="0" indent="0" marL="0">
+              <a:buNone/>
+            </a:pPr>
+            <a:r>
+              <a:rPr/>
+              <a:t>Under heavy imbalance, </a:t>
+            </a:r>
+            <a:r>
+              <a:rPr b="1"/>
+              <a:t>report PR with its baseline.</a:t>
+            </a:r>
+            <a:r>
+              <a:rPr/>
+              <a:t> ROC flatters, because the false-positive denominator is enormous.</a:t>
+            </a:r>
+          </a:p>
+        </p:txBody>
+      </p:sp>
+    </p:spTree>
+  </p:cSld>
+</p:sld>
+</file>
+
+<file path=ppt/slides/slide34.xml><?xml version="1.0" encoding="utf-8"?>
+<p:sld xmlns:a="http://schemas.openxmlformats.org/drawingml/2006/main" xmlns:r="http://schemas.openxmlformats.org/officeDocument/2006/relationships" xmlns:p="http://schemas.openxmlformats.org/presentationml/2006/main">
+  <p:cSld>
+    <p:spTree>
+      <p:nvGrpSpPr>
+        <p:cNvPr id="1" name=""/>
+        <p:cNvGrpSpPr/>
+        <p:nvPr/>
+      </p:nvGrpSpPr>
+      <p:grpSpPr>
+        <a:xfrm>
+          <a:off x="0" y="0"/>
+          <a:ext cx="0" cy="0"/>
+          <a:chOff x="0" y="0"/>
+          <a:chExt cx="0" cy="0"/>
+        </a:xfrm>
+      </p:grpSpPr>
+      <p:sp>
+        <p:nvSpPr>
+          <p:cNvPr id="2" name="Title 1"/>
+          <p:cNvSpPr>
+            <a:spLocks noGrp="1"/>
+          </p:cNvSpPr>
+          <p:nvPr>
+            <p:ph type="title"/>
+          </p:nvPr>
+        </p:nvSpPr>
+        <p:spPr>
+          <a:xfrm>
+            <a:off x="722313" y="3305176"/>
+            <a:ext cx="7772400" cy="1021556"/>
+          </a:xfrm>
+        </p:spPr>
+        <p:txBody>
+          <a:bodyPr/>
+          <a:lstStyle/>
+          <a:p>
+            <a:pPr lvl="0" indent="0" marL="0">
+              <a:buNone/>
+            </a:pPr>
+            <a:r>
+              <a:rPr/>
+              <a:t>7 · The threshold</a:t>
+            </a:r>
+          </a:p>
+        </p:txBody>
+      </p:sp>
+    </p:spTree>
+  </p:cSld>
+</p:sld>
+</file>
+
+<file path=ppt/slides/slide35.xml><?xml version="1.0" encoding="utf-8"?>
+<p:sld xmlns:a="http://schemas.openxmlformats.org/drawingml/2006/main" xmlns:r="http://schemas.openxmlformats.org/officeDocument/2006/relationships" xmlns:p="http://schemas.openxmlformats.org/presentationml/2006/main">
+  <p:cSld>
+    <p:spTree>
+      <p:nvGrpSpPr>
+        <p:cNvPr id="1" name=""/>
+        <p:cNvGrpSpPr/>
+        <p:nvPr/>
+      </p:nvGrpSpPr>
+      <p:grpSpPr>
+        <a:xfrm>
+          <a:off x="0" y="0"/>
+          <a:ext cx="0" cy="0"/>
+          <a:chOff x="0" y="0"/>
+          <a:chExt cx="0" cy="0"/>
+        </a:xfrm>
+      </p:grpSpPr>
+      <p:sp>
+        <p:nvSpPr>
+          <p:cNvPr id="2" name="Title 1"/>
+          <p:cNvSpPr>
+            <a:spLocks noGrp="1"/>
+          </p:cNvSpPr>
+          <p:nvPr>
+            <p:ph type="title"/>
+          </p:nvPr>
+        </p:nvSpPr>
+        <p:spPr/>
+        <p:txBody>
+          <a:bodyPr/>
+          <a:lstStyle/>
+          <a:p>
+            <a:pPr lvl="0" indent="0" marL="0">
+              <a:buNone/>
+            </a:pPr>
+            <a:r>
+              <a:rPr/>
+              <a:t>0.5 is a claim, not a default</a:t>
             </a:r>
           </a:p>
         </p:txBody>
@@ -7350,7 +6553,42 @@
                 </a:pPr>
                 <a:r>
                   <a:rPr/>
-                  <a:t>How many applications a human actually has to review — that is the number the business cares about.</a:t>
+                  <a:t>Classifying at </a:t>
+                </a:r>
+                <a14:m>
+                  <m:oMath xmlns:m="http://schemas.openxmlformats.org/officeDocument/2006/math">
+                    <m:acc>
+                      <m:accPr>
+                        <m:chr m:val="̂"/>
+                      </m:accPr>
+                      <m:e>
+                        <m:r>
+                          <m:t>p</m:t>
+                        </m:r>
+                      </m:e>
+                    </m:acc>
+                    <m:r>
+                      <m:rPr>
+                        <m:sty m:val="p"/>
+                      </m:rPr>
+                      <m:t>&gt;</m:t>
+                    </m:r>
+                    <m:r>
+                      <m:t>0.5</m:t>
+                    </m:r>
+                  </m:oMath>
+                </a14:m>
+                <a:r>
+                  <a:rPr/>
+                  <a:t> asserts that a </a:t>
+                </a:r>
+                <a:r>
+                  <a:rPr b="1"/>
+                  <a:t>false positive and a false negative cost the same</a:t>
+                </a:r>
+                <a:r>
+                  <a:rPr/>
+                  <a:t>.</a:t>
                 </a:r>
               </a:p>
               <a:p>
@@ -7359,434 +6597,29 @@
                 </a:pPr>
                 <a:r>
                   <a:rPr/>
-                  <a:t>At </a:t>
-                </a:r>
-                <a14:m>
-                  <m:oMath xmlns:m="http://schemas.openxmlformats.org/officeDocument/2006/math">
-                    <m:sSup>
-                      <m:e>
-                        <m:r>
-                          <m:t>τ</m:t>
-                        </m:r>
-                      </m:e>
-                      <m:sup>
-                        <m:r>
-                          <m:rPr>
-                            <m:sty m:val="p"/>
-                          </m:rPr>
-                          <m:t>⋆</m:t>
-                        </m:r>
-                      </m:sup>
-                    </m:sSup>
-                    <m:r>
-                      <m:rPr>
-                        <m:sty m:val="p"/>
-                      </m:rPr>
-                      <m:t>=</m:t>
-                    </m:r>
-                    <m:r>
-                      <m:t>0.167</m:t>
-                    </m:r>
-                  </m:oMath>
-                </a14:m>
-                <a:r>
-                  <a:rPr/>
-                  <a:t> you flag roughly 5,000 of 9,578 and catch 67% of defaults. At 0.20 you flag 2,440 and catch 37%. </a:t>
+                  <a:t>For a lender they do not: refusing a good borrower costs a </a:t>
                 </a:r>
                 <a:r>
                   <a:rPr b="1"/>
-                  <a:t>That trade is the decision</a:t>
+                  <a:t>margin</a:t>
                 </a:r>
                 <a:r>
                   <a:rPr/>
-                  <a:t>, and it is not the model’s to make.</a:t>
+                  <a:t>; funding a defaulter costs the </a:t>
+                </a:r>
+                <a:r>
+                  <a:rPr b="1"/>
+                  <a:t>principal</a:t>
+                </a:r>
+                <a:r>
+                  <a:rPr/>
+                  <a:t>.</a:t>
                 </a:r>
               </a:p>
             </p:txBody>
           </p:sp>
         </mc:Choice>
       </mc:AlternateContent>
-    </p:spTree>
-  </p:cSld>
-</p:sld>
-</file>
-
-<file path=ppt/slides/slide34.xml><?xml version="1.0" encoding="utf-8"?>
-<p:sld xmlns:a="http://schemas.openxmlformats.org/drawingml/2006/main" xmlns:r="http://schemas.openxmlformats.org/officeDocument/2006/relationships" xmlns:p="http://schemas.openxmlformats.org/presentationml/2006/main">
-  <p:cSld>
-    <p:spTree>
-      <p:nvGrpSpPr>
-        <p:cNvPr id="1" name=""/>
-        <p:cNvGrpSpPr/>
-        <p:nvPr/>
-      </p:nvGrpSpPr>
-      <p:grpSpPr>
-        <a:xfrm>
-          <a:off x="0" y="0"/>
-          <a:ext cx="0" cy="0"/>
-          <a:chOff x="0" y="0"/>
-          <a:chExt cx="0" cy="0"/>
-        </a:xfrm>
-      </p:grpSpPr>
-      <p:sp>
-        <p:nvSpPr>
-          <p:cNvPr id="2" name="Title 1"/>
-          <p:cNvSpPr>
-            <a:spLocks noGrp="1"/>
-          </p:cNvSpPr>
-          <p:nvPr>
-            <p:ph type="title"/>
-          </p:nvPr>
-        </p:nvSpPr>
-        <p:spPr/>
-        <p:txBody>
-          <a:bodyPr/>
-          <a:lstStyle/>
-          <a:p>
-            <a:pPr lvl="0" indent="0" marL="0">
-              <a:buNone/>
-            </a:pPr>
-            <a:r>
-              <a:rPr/>
-              <a:t>Calibration — is 0.3 really 30%?</a:t>
-            </a:r>
-          </a:p>
-        </p:txBody>
-      </p:sp>
-      <p:sp>
-        <p:nvSpPr>
-          <p:cNvPr id="3" name="Content Placeholder 2"/>
-          <p:cNvSpPr>
-            <a:spLocks noGrp="1"/>
-          </p:cNvSpPr>
-          <p:nvPr>
-            <p:ph idx="1"/>
-          </p:nvPr>
-        </p:nvSpPr>
-        <p:spPr/>
-        <p:txBody>
-          <a:bodyPr/>
-          <a:lstStyle/>
-          <a:p>
-            <a:pPr lvl="0" indent="0">
-              <a:buNone/>
-            </a:pPr>
-            <a:r>
-              <a:rPr b="1">
-                <a:solidFill>
-                  <a:srgbClr val="008000"/>
-                </a:solidFill>
-                <a:latin typeface="Courier"/>
-              </a:rPr>
-              <a:t>from</a:t>
-            </a:r>
-            <a:r>
-              <a:rPr>
-                <a:latin typeface="Courier"/>
-              </a:rPr>
-              <a:t> sklearn.calibration </a:t>
-            </a:r>
-            <a:r>
-              <a:rPr b="1">
-                <a:solidFill>
-                  <a:srgbClr val="008000"/>
-                </a:solidFill>
-                <a:latin typeface="Courier"/>
-              </a:rPr>
-              <a:t>import</a:t>
-            </a:r>
-            <a:r>
-              <a:rPr>
-                <a:latin typeface="Courier"/>
-              </a:rPr>
-              <a:t> calibration_curve</a:t>
-            </a:r>
-            <a:br/>
-            <a:r>
-              <a:rPr b="1">
-                <a:solidFill>
-                  <a:srgbClr val="008000"/>
-                </a:solidFill>
-                <a:latin typeface="Courier"/>
-              </a:rPr>
-              <a:t>import</a:t>
-            </a:r>
-            <a:r>
-              <a:rPr>
-                <a:latin typeface="Courier"/>
-              </a:rPr>
-              <a:t> matplotlib.pyplot </a:t>
-            </a:r>
-            <a:r>
-              <a:rPr b="1">
-                <a:solidFill>
-                  <a:srgbClr val="008000"/>
-                </a:solidFill>
-                <a:latin typeface="Courier"/>
-              </a:rPr>
-              <a:t>as</a:t>
-            </a:r>
-            <a:r>
-              <a:rPr>
-                <a:latin typeface="Courier"/>
-              </a:rPr>
-              <a:t> plt</a:t>
-            </a:r>
-            <a:br/>
-            <a:br/>
-            <a:r>
-              <a:rPr>
-                <a:latin typeface="Courier"/>
-              </a:rPr>
-              <a:t>frac, mean_pred </a:t>
-            </a:r>
-            <a:r>
-              <a:rPr>
-                <a:solidFill>
-                  <a:srgbClr val="666666"/>
-                </a:solidFill>
-                <a:latin typeface="Courier"/>
-              </a:rPr>
-              <a:t>=</a:t>
-            </a:r>
-            <a:r>
-              <a:rPr>
-                <a:latin typeface="Courier"/>
-              </a:rPr>
-              <a:t> calibration_curve(y, p, n_bins</a:t>
-            </a:r>
-            <a:r>
-              <a:rPr>
-                <a:solidFill>
-                  <a:srgbClr val="666666"/>
-                </a:solidFill>
-                <a:latin typeface="Courier"/>
-              </a:rPr>
-              <a:t>=</a:t>
-            </a:r>
-            <a:r>
-              <a:rPr>
-                <a:solidFill>
-                  <a:srgbClr val="40A070"/>
-                </a:solidFill>
-                <a:latin typeface="Courier"/>
-              </a:rPr>
-              <a:t>8</a:t>
-            </a:r>
-            <a:r>
-              <a:rPr>
-                <a:latin typeface="Courier"/>
-              </a:rPr>
-              <a:t>, strategy</a:t>
-            </a:r>
-            <a:r>
-              <a:rPr>
-                <a:solidFill>
-                  <a:srgbClr val="666666"/>
-                </a:solidFill>
-                <a:latin typeface="Courier"/>
-              </a:rPr>
-              <a:t>=</a:t>
-            </a:r>
-            <a:r>
-              <a:rPr>
-                <a:solidFill>
-                  <a:srgbClr val="4070A0"/>
-                </a:solidFill>
-                <a:latin typeface="Courier"/>
-              </a:rPr>
-              <a:t>"quantile"</a:t>
-            </a:r>
-            <a:r>
-              <a:rPr>
-                <a:latin typeface="Courier"/>
-              </a:rPr>
-              <a:t>)</a:t>
-            </a:r>
-            <a:br/>
-            <a:r>
-              <a:rPr>
-                <a:latin typeface="Courier"/>
-              </a:rPr>
-              <a:t>plt.plot(mean_pred, frac, </a:t>
-            </a:r>
-            <a:r>
-              <a:rPr>
-                <a:solidFill>
-                  <a:srgbClr val="4070A0"/>
-                </a:solidFill>
-                <a:latin typeface="Courier"/>
-              </a:rPr>
-              <a:t>"o-"</a:t>
-            </a:r>
-            <a:r>
-              <a:rPr>
-                <a:latin typeface="Courier"/>
-              </a:rPr>
-              <a:t>)</a:t>
-            </a:r>
-            <a:r>
-              <a:rPr>
-                <a:solidFill>
-                  <a:srgbClr val="666666"/>
-                </a:solidFill>
-                <a:latin typeface="Courier"/>
-              </a:rPr>
-              <a:t>;</a:t>
-            </a:r>
-            <a:r>
-              <a:rPr>
-                <a:latin typeface="Courier"/>
-              </a:rPr>
-              <a:t> plt.plot([</a:t>
-            </a:r>
-            <a:r>
-              <a:rPr>
-                <a:solidFill>
-                  <a:srgbClr val="40A070"/>
-                </a:solidFill>
-                <a:latin typeface="Courier"/>
-              </a:rPr>
-              <a:t>0</a:t>
-            </a:r>
-            <a:r>
-              <a:rPr>
-                <a:latin typeface="Courier"/>
-              </a:rPr>
-              <a:t>, </a:t>
-            </a:r>
-            <a:r>
-              <a:rPr>
-                <a:solidFill>
-                  <a:srgbClr val="40A070"/>
-                </a:solidFill>
-                <a:latin typeface="Courier"/>
-              </a:rPr>
-              <a:t>1</a:t>
-            </a:r>
-            <a:r>
-              <a:rPr>
-                <a:latin typeface="Courier"/>
-              </a:rPr>
-              <a:t>], [</a:t>
-            </a:r>
-            <a:r>
-              <a:rPr>
-                <a:solidFill>
-                  <a:srgbClr val="40A070"/>
-                </a:solidFill>
-                <a:latin typeface="Courier"/>
-              </a:rPr>
-              <a:t>0</a:t>
-            </a:r>
-            <a:r>
-              <a:rPr>
-                <a:latin typeface="Courier"/>
-              </a:rPr>
-              <a:t>, </a:t>
-            </a:r>
-            <a:r>
-              <a:rPr>
-                <a:solidFill>
-                  <a:srgbClr val="40A070"/>
-                </a:solidFill>
-                <a:latin typeface="Courier"/>
-              </a:rPr>
-              <a:t>1</a:t>
-            </a:r>
-            <a:r>
-              <a:rPr>
-                <a:latin typeface="Courier"/>
-              </a:rPr>
-              <a:t>], </a:t>
-            </a:r>
-            <a:r>
-              <a:rPr>
-                <a:solidFill>
-                  <a:srgbClr val="4070A0"/>
-                </a:solidFill>
-                <a:latin typeface="Courier"/>
-              </a:rPr>
-              <a:t>"--"</a:t>
-            </a:r>
-            <a:r>
-              <a:rPr>
-                <a:latin typeface="Courier"/>
-              </a:rPr>
-              <a:t>)</a:t>
-            </a:r>
-          </a:p>
-          <a:p>
-            <a:pPr lvl="0" indent="0" marL="0">
-              <a:buNone/>
-            </a:pPr>
-            <a:r>
-              <a:rPr/>
-              <a:t>Discrimination and calibration are </a:t>
-            </a:r>
-            <a:r>
-              <a:rPr b="1"/>
-              <a:t>different properties</a:t>
-            </a:r>
-            <a:r>
-              <a:rPr/>
-              <a:t>. A model can rank perfectly and still be badly miscalibrated — and a miscalibrated probability cannot be fed into a cost calculation.</a:t>
-            </a:r>
-          </a:p>
-        </p:txBody>
-      </p:sp>
-    </p:spTree>
-  </p:cSld>
-</p:sld>
-</file>
-
-<file path=ppt/slides/slide35.xml><?xml version="1.0" encoding="utf-8"?>
-<p:sld xmlns:a="http://schemas.openxmlformats.org/drawingml/2006/main" xmlns:r="http://schemas.openxmlformats.org/officeDocument/2006/relationships" xmlns:p="http://schemas.openxmlformats.org/presentationml/2006/main">
-  <p:cSld>
-    <p:spTree>
-      <p:nvGrpSpPr>
-        <p:cNvPr id="1" name=""/>
-        <p:cNvGrpSpPr/>
-        <p:nvPr/>
-      </p:nvGrpSpPr>
-      <p:grpSpPr>
-        <a:xfrm>
-          <a:off x="0" y="0"/>
-          <a:ext cx="0" cy="0"/>
-          <a:chOff x="0" y="0"/>
-          <a:chExt cx="0" cy="0"/>
-        </a:xfrm>
-      </p:grpSpPr>
-      <p:sp>
-        <p:nvSpPr>
-          <p:cNvPr id="2" name="Title 1"/>
-          <p:cNvSpPr>
-            <a:spLocks noGrp="1"/>
-          </p:cNvSpPr>
-          <p:nvPr>
-            <p:ph type="title"/>
-          </p:nvPr>
-        </p:nvSpPr>
-        <p:spPr>
-          <a:xfrm>
-            <a:off x="722313" y="3305176"/>
-            <a:ext cx="7772400" cy="1021556"/>
-          </a:xfrm>
-        </p:spPr>
-        <p:txBody>
-          <a:bodyPr/>
-          <a:lstStyle/>
-          <a:p>
-            <a:pPr lvl="0" indent="0" marL="0">
-              <a:buNone/>
-            </a:pPr>
-            <a:r>
-              <a:rPr/>
-              <a:t>7 · Another example</a:t>
-            </a:r>
-          </a:p>
-        </p:txBody>
-      </p:sp>
     </p:spTree>
   </p:cSld>
 </p:sld>
@@ -7819,7 +6652,12 @@
             <p:ph type="title"/>
           </p:nvPr>
         </p:nvSpPr>
-        <p:spPr/>
+        <p:spPr>
+          <a:xfrm>
+            <a:off x="457201" y="204787"/>
+            <a:ext cx="3008313" cy="871538"/>
+          </a:xfrm>
+        </p:spPr>
         <p:txBody>
           <a:bodyPr/>
           <a:lstStyle/>
@@ -7829,172 +6667,166 @@
             </a:pPr>
             <a:r>
               <a:rPr/>
-              <a:t>Portugal’s red wines</a:t>
-            </a:r>
-          </a:p>
-        </p:txBody>
-      </p:sp>
-      <p:sp>
-        <p:nvSpPr>
-          <p:cNvPr id="3" name="Content Placeholder 2"/>
-          <p:cNvSpPr>
-            <a:spLocks noGrp="1"/>
-          </p:cNvSpPr>
-          <p:nvPr>
-            <p:ph idx="1"/>
-          </p:nvPr>
-        </p:nvSpPr>
-        <p:spPr/>
-        <p:txBody>
-          <a:bodyPr/>
-          <a:lstStyle/>
-          <a:p>
-            <a:pPr lvl="0" indent="0" marL="0">
-              <a:buNone/>
-            </a:pPr>
-            <a:r>
-              <a:rPr/>
-              <a:t>1,599 red </a:t>
-            </a:r>
-            <a:r>
-              <a:rPr i="1"/>
-              <a:t>vinho verde</a:t>
-            </a:r>
-            <a:r>
-              <a:rPr/>
-              <a:t> wines, chemically assayed, each rated by at least three blind tasters.</a:t>
-            </a:r>
-          </a:p>
-          <a:p>
-            <a:pPr lvl="0" indent="0">
-              <a:buNone/>
-            </a:pPr>
-            <a:r>
-              <a:rPr>
-                <a:latin typeface="Courier"/>
-              </a:rPr>
-              <a:t>wine </a:t>
-            </a:r>
-            <a:r>
-              <a:rPr>
-                <a:solidFill>
-                  <a:srgbClr val="666666"/>
-                </a:solidFill>
-                <a:latin typeface="Courier"/>
-              </a:rPr>
-              <a:t>=</a:t>
-            </a:r>
-            <a:r>
-              <a:rPr>
-                <a:latin typeface="Courier"/>
-              </a:rPr>
-              <a:t> pd.read_parquet(</a:t>
-            </a:r>
-            <a:r>
-              <a:rPr>
-                <a:solidFill>
-                  <a:srgbClr val="4070A0"/>
-                </a:solidFill>
-                <a:latin typeface="Courier"/>
-              </a:rPr>
-              <a:t>"data/redwines.parquet"</a:t>
-            </a:r>
-            <a:r>
-              <a:rPr>
-                <a:latin typeface="Courier"/>
-              </a:rPr>
-              <a:t>)</a:t>
-            </a:r>
-            <a:br/>
-            <a:r>
-              <a:rPr>
-                <a:solidFill>
-                  <a:srgbClr val="008000"/>
-                </a:solidFill>
-                <a:latin typeface="Courier"/>
-              </a:rPr>
-              <a:t>print</a:t>
-            </a:r>
-            <a:r>
-              <a:rPr>
-                <a:latin typeface="Courier"/>
-              </a:rPr>
-              <a:t>(wine.shape, wine[</a:t>
-            </a:r>
-            <a:r>
-              <a:rPr>
-                <a:solidFill>
-                  <a:srgbClr val="4070A0"/>
-                </a:solidFill>
-                <a:latin typeface="Courier"/>
-              </a:rPr>
-              <a:t>"good"</a:t>
-            </a:r>
-            <a:r>
-              <a:rPr>
-                <a:latin typeface="Courier"/>
-              </a:rPr>
-              <a:t>].mean())     </a:t>
-            </a:r>
-            <a:r>
-              <a:rPr i="1">
-                <a:solidFill>
-                  <a:srgbClr val="60A0B0"/>
-                </a:solidFill>
-                <a:latin typeface="Courier"/>
-              </a:rPr>
-              <a:t># (1599, 9) 0.136</a:t>
-            </a:r>
-          </a:p>
-          <a:p>
-            <a:pPr lvl="0" indent="0" marL="0">
-              <a:buNone/>
-            </a:pPr>
-            <a:r>
-              <a:rPr/>
-              <a:t>In the raw CSV the outcome is the strings </a:t>
-            </a:r>
-            <a:r>
-              <a:rPr>
-                <a:latin typeface="Courier"/>
-              </a:rPr>
-              <a:t>"Yes"</a:t>
-            </a:r>
-            <a:r>
-              <a:rPr/>
-              <a:t>/</a:t>
-            </a:r>
-            <a:r>
-              <a:rPr>
-                <a:latin typeface="Courier"/>
-              </a:rPr>
-              <a:t>"No"</a:t>
-            </a:r>
-            <a:r>
-              <a:rPr/>
-              <a:t>. </a:t>
-            </a:r>
-            <a:r>
-              <a:rPr>
-                <a:latin typeface="Courier"/>
-              </a:rPr>
-              <a:t>astype(int)</a:t>
-            </a:r>
-            <a:r>
-              <a:rPr/>
-              <a:t> on that </a:t>
-            </a:r>
-            <a:r>
-              <a:rPr b="1"/>
-              <a:t>raises</a:t>
-            </a:r>
-            <a:r>
-              <a:rPr/>
-              <a:t>, and a silent miscast would be worse — so the fetch script converts it, and records that it did.</a:t>
-            </a:r>
-          </a:p>
-        </p:txBody>
-      </p:sp>
+              <a:t>The cost-optimal threshold</a:t>
+            </a:r>
+          </a:p>
+        </p:txBody>
+      </p:sp>
+      <mc:AlternateContent xmlns:mc="http://schemas.openxmlformats.org/markup-compatibility/2006">
+        <mc:Choice xmlns:a14="http://schemas.microsoft.com/office/drawing/2010/main" Requires="a14">
+          <p:sp>
+            <p:nvSpPr>
+              <p:cNvPr id="4" name="Text Placeholder 3"/>
+              <p:cNvSpPr>
+                <a:spLocks noGrp="1"/>
+              </p:cNvSpPr>
+              <p:nvPr>
+                <p:ph idx="2" sz="half" type="body"/>
+              </p:nvPr>
+            </p:nvSpPr>
+            <p:spPr/>
+            <p:txBody>
+              <a:bodyPr/>
+              <a:lstStyle/>
+              <a:p>
+                <a:pPr lvl="0" indent="0" marL="0">
+                  <a:buNone/>
+                </a:pPr>
+                <a14:m>
+                  <m:oMathPara xmlns:m="http://schemas.openxmlformats.org/officeDocument/2006/math">
+                    <m:oMathParaPr>
+                      <m:jc m:val="center"/>
+                    </m:oMathParaPr>
+                    <m:oMath>
+                      <m:borderBox>
+                        <m:e>
+                          <m:r>
+                            <m:t> </m:t>
+                          </m:r>
+                          <m:sSup>
+                            <m:e>
+                              <m:r>
+                                <m:t>τ</m:t>
+                              </m:r>
+                            </m:e>
+                            <m:sup>
+                              <m:r>
+                                <m:rPr>
+                                  <m:sty m:val="p"/>
+                                </m:rPr>
+                                <m:t>⋆</m:t>
+                              </m:r>
+                            </m:sup>
+                          </m:sSup>
+                          <m:r>
+                            <m:rPr>
+                              <m:sty m:val="p"/>
+                            </m:rPr>
+                            <m:t>=</m:t>
+                          </m:r>
+                          <m:f>
+                            <m:fPr>
+                              <m:type m:val="bar"/>
+                            </m:fPr>
+                            <m:num>
+                              <m:sSub>
+                                <m:e>
+                                  <m:r>
+                                    <m:t>c</m:t>
+                                  </m:r>
+                                </m:e>
+                                <m:sub>
+                                  <m:r>
+                                    <m:t>F</m:t>
+                                  </m:r>
+                                  <m:r>
+                                    <m:t>P</m:t>
+                                  </m:r>
+                                </m:sub>
+                              </m:sSub>
+                            </m:num>
+                            <m:den>
+                              <m:sSub>
+                                <m:e>
+                                  <m:r>
+                                    <m:t>c</m:t>
+                                  </m:r>
+                                </m:e>
+                                <m:sub>
+                                  <m:r>
+                                    <m:t>F</m:t>
+                                  </m:r>
+                                  <m:r>
+                                    <m:t>P</m:t>
+                                  </m:r>
+                                </m:sub>
+                              </m:sSub>
+                              <m:r>
+                                <m:rPr>
+                                  <m:sty m:val="p"/>
+                                </m:rPr>
+                                <m:t>+</m:t>
+                              </m:r>
+                              <m:sSub>
+                                <m:e>
+                                  <m:r>
+                                    <m:t>c</m:t>
+                                  </m:r>
+                                </m:e>
+                                <m:sub>
+                                  <m:r>
+                                    <m:t>F</m:t>
+                                  </m:r>
+                                  <m:r>
+                                    <m:t>N</m:t>
+                                  </m:r>
+                                </m:sub>
+                              </m:sSub>
+                            </m:den>
+                          </m:f>
+                          <m:r>
+                            <m:t> </m:t>
+                          </m:r>
+                        </m:e>
+                      </m:borderBox>
+                    </m:oMath>
+                  </m:oMathPara>
+                </a14:m>
+              </a:p>
+            </p:txBody>
+          </p:sp>
+        </mc:Choice>
+      </mc:AlternateContent>
+      <p:pic>
+        <p:nvPicPr>
+          <p:cNvPr descr="slides_files/figure-pptx/cell-8-output-1.png" id="0" name="Picture 1"/>
+          <p:cNvPicPr>
+            <a:picLocks noGrp="1" noChangeAspect="1"/>
+          </p:cNvPicPr>
+          <p:nvPr/>
+        </p:nvPicPr>
+        <p:blipFill>
+          <a:blip r:embed="rId2"/>
+          <a:stretch>
+            <a:fillRect/>
+          </a:stretch>
+        </p:blipFill>
+        <p:spPr bwMode="auto">
+          <a:xfrm>
+            <a:off x="3568700" y="1447800"/>
+            <a:ext cx="5105400" cy="1879600"/>
+          </a:xfrm>
+          <a:prstGeom prst="rect">
+            <a:avLst/>
+          </a:prstGeom>
+          <a:noFill/>
+          <a:ln w="9525">
+            <a:noFill/>
+            <a:headEnd/>
+            <a:tailEnd/>
+          </a:ln>
+        </p:spPr>
+      </p:pic>
     </p:spTree>
   </p:cSld>
 </p:sld>
@@ -8019,12 +6851,12 @@
       </p:grpSpPr>
       <p:sp>
         <p:nvSpPr>
-          <p:cNvPr id="2" name="Title 1"/>
-          <p:cNvSpPr>
-            <a:spLocks noGrp="1"/>
-          </p:cNvSpPr>
-          <p:nvPr>
-            <p:ph type="title"/>
+          <p:cNvPr id="3" name="Content Placeholder 2"/>
+          <p:cNvSpPr>
+            <a:spLocks noGrp="1"/>
+          </p:cNvSpPr>
+          <p:nvPr>
+            <p:ph idx="1"/>
           </p:nvPr>
         </p:nvSpPr>
         <p:spPr/>
@@ -8037,182 +6869,15 @@
             </a:pPr>
             <a:r>
               <a:rPr/>
-              <a:t>Fit the same model type</a:t>
-            </a:r>
-          </a:p>
-        </p:txBody>
-      </p:sp>
-      <p:sp>
-        <p:nvSpPr>
-          <p:cNvPr id="3" name="Content Placeholder 2"/>
-          <p:cNvSpPr>
-            <a:spLocks noGrp="1"/>
-          </p:cNvSpPr>
-          <p:nvPr>
-            <p:ph idx="1"/>
-          </p:nvPr>
-        </p:nvSpPr>
-        <p:spPr/>
-        <p:txBody>
-          <a:bodyPr/>
-          <a:lstStyle/>
-          <a:p>
-            <a:pPr lvl="0" indent="0">
-              <a:buNone/>
-            </a:pPr>
-            <a:r>
-              <a:rPr>
-                <a:latin typeface="Courier"/>
-              </a:rPr>
-              <a:t>m_w </a:t>
-            </a:r>
-            <a:r>
-              <a:rPr>
-                <a:solidFill>
-                  <a:srgbClr val="666666"/>
-                </a:solidFill>
-                <a:latin typeface="Courier"/>
-              </a:rPr>
-              <a:t>=</a:t>
-            </a:r>
-            <a:r>
-              <a:rPr>
-                <a:latin typeface="Courier"/>
-              </a:rPr>
-              <a:t> smf.logit(</a:t>
-            </a:r>
-            <a:r>
-              <a:rPr>
-                <a:solidFill>
-                  <a:srgbClr val="4070A0"/>
-                </a:solidFill>
-                <a:latin typeface="Courier"/>
-              </a:rPr>
-              <a:t>"good ~ alcohol + volatile_acidity + sulphates"</a:t>
-            </a:r>
-            <a:r>
-              <a:rPr>
-                <a:latin typeface="Courier"/>
-              </a:rPr>
-              <a:t>,</a:t>
-            </a:r>
-            <a:br/>
-            <a:r>
-              <a:rPr>
-                <a:latin typeface="Courier"/>
-              </a:rPr>
-              <a:t>                data</a:t>
-            </a:r>
-            <a:r>
-              <a:rPr>
-                <a:solidFill>
-                  <a:srgbClr val="666666"/>
-                </a:solidFill>
-                <a:latin typeface="Courier"/>
-              </a:rPr>
-              <a:t>=</a:t>
-            </a:r>
-            <a:r>
-              <a:rPr>
-                <a:latin typeface="Courier"/>
-              </a:rPr>
-              <a:t>wine).fit()</a:t>
-            </a:r>
-            <a:br/>
-            <a:r>
-              <a:rPr>
-                <a:solidFill>
-                  <a:srgbClr val="008000"/>
-                </a:solidFill>
-                <a:latin typeface="Courier"/>
-              </a:rPr>
-              <a:t>print</a:t>
-            </a:r>
-            <a:r>
-              <a:rPr>
-                <a:latin typeface="Courier"/>
-              </a:rPr>
-              <a:t>(m_w.summary().tables[</a:t>
-            </a:r>
-            <a:r>
-              <a:rPr>
-                <a:solidFill>
-                  <a:srgbClr val="40A070"/>
-                </a:solidFill>
-                <a:latin typeface="Courier"/>
-              </a:rPr>
-              <a:t>1</a:t>
-            </a:r>
-            <a:r>
-              <a:rPr>
-                <a:latin typeface="Courier"/>
-              </a:rPr>
-              <a:t>])</a:t>
-            </a:r>
-            <a:br/>
-            <a:r>
-              <a:rPr>
-                <a:solidFill>
-                  <a:srgbClr val="008000"/>
-                </a:solidFill>
-                <a:latin typeface="Courier"/>
-              </a:rPr>
-              <a:t>print</a:t>
-            </a:r>
-            <a:r>
-              <a:rPr>
-                <a:latin typeface="Courier"/>
-              </a:rPr>
-              <a:t>(np.exp(m_w.params[</a:t>
-            </a:r>
-            <a:r>
-              <a:rPr>
-                <a:solidFill>
-                  <a:srgbClr val="4070A0"/>
-                </a:solidFill>
-                <a:latin typeface="Courier"/>
-              </a:rPr>
-              <a:t>"alcohol"</a:t>
-            </a:r>
-            <a:r>
-              <a:rPr>
-                <a:latin typeface="Courier"/>
-              </a:rPr>
-              <a:t>]))    </a:t>
-            </a:r>
-            <a:r>
-              <a:rPr i="1">
-                <a:solidFill>
-                  <a:srgbClr val="60A0B0"/>
-                </a:solidFill>
-                <a:latin typeface="Courier"/>
-              </a:rPr>
-              <a:t># 2.74</a:t>
-            </a:r>
-          </a:p>
-          <a:p>
-            <a:pPr lvl="0" indent="0" marL="0">
-              <a:buNone/>
-            </a:pPr>
-            <a:r>
-              <a:rPr/>
-              <a:t>An odds ratio of </a:t>
+              <a:t>At a 5:1 cost ratio the right threshold is </a:t>
             </a:r>
             <a:r>
               <a:rPr b="1"/>
-              <a:t>2.74</a:t>
-            </a:r>
-            <a:r>
-              <a:rPr/>
-              <a:t> for alcohol: each extra percentage point of alcohol nearly </a:t>
-            </a:r>
-            <a:r>
-              <a:rPr b="1"/>
-              <a:t>triples</a:t>
-            </a:r>
-            <a:r>
-              <a:rPr/>
-              <a:t> the odds a taster calls the wine good. Compare the FICO odds ratio of 0.9936 — same method, wildly different effect sizes, because the units are different.</a:t>
+              <a:t>0.167</a:t>
+            </a:r>
+            <a:r>
+              <a:rPr/>
+              <a:t>, not 0.5.</a:t>
             </a:r>
           </a:p>
         </p:txBody>
@@ -8222,7 +6887,81 @@
 </p:sld>
 </file>
 
-<file path=ppt/slides/slide38.xml><?xml version="1.0" encoding="UTF-8"?><p:sld xmlns:a="http://schemas.openxmlformats.org/drawingml/2006/main" xmlns:r="http://schemas.openxmlformats.org/officeDocument/2006/relationships" xmlns:p="http://schemas.openxmlformats.org/presentationml/2006/main"><p:cSld><p:spTree><p:nvGrpSpPr><p:cNvPr id="1" name="" /><p:cNvGrpSpPr /><p:nvPr /></p:nvGrpSpPr><p:grpSpPr><a:xfrm><a:off x="0" y="0" /><a:ext cx="0" cy="0" /><a:chOff x="0" y="0" /><a:chExt cx="0" cy="0" /></a:xfrm></p:grpSpPr><p:sp><p:nvSpPr><p:cNvPr id="2" name="Title 1" /><p:cNvSpPr><a:spLocks noGrp="1" /></p:cNvSpPr><p:nvPr><p:ph type="title" /></p:nvPr></p:nvSpPr><p:spPr /><p:txBody><a:bodyPr /><a:lstStyle /><a:p><a:pPr lvl="0" indent="0" marL="0"><a:buNone /></a:pPr><a:r><a:rPr /><a:t>Same method, very different signal</a:t></a:r></a:p></p:txBody></p:sp><p:graphicFrame><p:nvGraphicFramePr><p:cNvPr id="6" name="Content Placeholder 5" /><p:cNvGraphicFramePr><a:graphicFrameLocks noGrp="1" /></p:cNvGraphicFramePr><p:nvPr><p:ph idx="1" /></p:nvPr></p:nvGraphicFramePr><p:xfrm><a:off x="457200" y="1193800" /><a:ext cx="8229600" cy="3390900" /></p:xfrm><a:graphic><a:graphicData uri="http://schemas.openxmlformats.org/drawingml/2006/table"><a:tbl><a:tblPr firstRow="1" bandRow="1"><a:tableStyleId>{5C22544A-7EE6-4342-B048-85BDC9FD1C3A}</a:tableStyleId></a:tblPr><a:tblGrid><a:gridCol w="2743200" /><a:gridCol w="2743200" /><a:gridCol w="2743200" /></a:tblGrid><a:tr h="0"><a:tc><a:txBody><a:bodyPr /><a:lstStyle /><a:p><a:endParaRPr /></a:p></a:txBody><a:tcPr /></a:tc><a:tc><a:txBody><a:bodyPr /><a:lstStyle /><a:p><a:pPr lvl="0" indent="0" marL="0"><a:buNone /></a:pPr><a:r><a:rPr /><a:t>Lending Club</a:t></a:r></a:p></a:txBody><a:tcPr /></a:tc><a:tc><a:txBody><a:bodyPr /><a:lstStyle /><a:p><a:pPr lvl="0" indent="0" marL="0"><a:buNone /></a:pPr><a:r><a:rPr /><a:t>Red wines</a:t></a:r></a:p></a:txBody><a:tcPr /></a:tc></a:tr><a:tr h="0"><a:tc><a:txBody><a:bodyPr /><a:lstStyle /><a:p><a:pPr lvl="0" indent="0" marL="0"><a:buNone /></a:pPr><a14:m><m:oMath xmlns:m="http://schemas.openxmlformats.org/officeDocument/2006/math"><m:r><m:t>n</m:t></m:r></m:oMath></a14:m></a:p></a:txBody></a:tc><a:tc><a:txBody><a:bodyPr /><a:lstStyle /><a:p><a:pPr lvl="0" indent="0" marL="0"><a:buNone /></a:pPr><a:r><a:rPr /><a:t>9,578</a:t></a:r></a:p></a:txBody></a:tc><a:tc><a:txBody><a:bodyPr /><a:lstStyle /><a:p><a:pPr lvl="0" indent="0" marL="0"><a:buNone /></a:pPr><a:r><a:rPr /><a:t>1,599</a:t></a:r></a:p></a:txBody></a:tc></a:tr><a:tr h="0"><a:tc><a:txBody><a:bodyPr /><a:lstStyle /><a:p><a:pPr lvl="0" indent="0" marL="0"><a:buNone /></a:pPr><a:r><a:rPr /><a:t>Base rate</a:t></a:r></a:p></a:txBody></a:tc><a:tc><a:txBody><a:bodyPr /><a:lstStyle /><a:p><a:pPr lvl="0" indent="0" marL="0"><a:buNone /></a:pPr><a:r><a:rPr /><a:t>0.160</a:t></a:r></a:p></a:txBody></a:tc><a:tc><a:txBody><a:bodyPr /><a:lstStyle /><a:p><a:pPr lvl="0" indent="0" marL="0"><a:buNone /></a:pPr><a:r><a:rPr /><a:t>0.136</a:t></a:r></a:p></a:txBody></a:tc></a:tr><a:tr h="0"><a:tc><a:txBody><a:bodyPr /><a:lstStyle /><a:p><a:pPr lvl="0" indent="0" marL="0"><a:buNone /></a:pPr><a:r><a:rPr b="1" /><a:t>ROC AUC</a:t></a:r></a:p></a:txBody></a:tc><a:tc><a:txBody><a:bodyPr /><a:lstStyle /><a:p><a:pPr lvl="0" indent="0" marL="0"><a:buNone /></a:pPr><a:r><a:rPr b="1" /><a:t>0.627</a:t></a:r></a:p></a:txBody></a:tc><a:tc><a:txBody><a:bodyPr /><a:lstStyle /><a:p><a:pPr lvl="0" indent="0" marL="0"><a:buNone /></a:pPr><a:r><a:rPr b="1" /><a:t>0.866</a:t></a:r></a:p></a:txBody></a:tc></a:tr><a:tr h="0"><a:tc><a:txBody><a:bodyPr /><a:lstStyle /><a:p><a:pPr lvl="0" indent="0" marL="0"><a:buNone /></a:pPr><a:r><a:rPr b="1" /><a:t>PR AUC</a:t></a:r></a:p></a:txBody></a:tc><a:tc><a:txBody><a:bodyPr /><a:lstStyle /><a:p><a:pPr lvl="0" indent="0" marL="0"><a:buNone /></a:pPr><a:r><a:rPr /><a:t>0.232</a:t></a:r></a:p></a:txBody></a:tc><a:tc><a:txBody><a:bodyPr /><a:lstStyle /><a:p><a:pPr lvl="0" indent="0" marL="0"><a:buNone /></a:pPr><a:r><a:rPr /><a:t>0.475</a:t></a:r></a:p></a:txBody></a:tc></a:tr></a:tbl></a:graphicData></a:graphic></p:graphicFrame></p:spTree></p:cSld></p:sld>
+<file path=ppt/slides/slide38.xml><?xml version="1.0" encoding="utf-8"?>
+<p:sld xmlns:a="http://schemas.openxmlformats.org/drawingml/2006/main" xmlns:r="http://schemas.openxmlformats.org/officeDocument/2006/relationships" xmlns:p="http://schemas.openxmlformats.org/presentationml/2006/main">
+  <p:cSld>
+    <p:spTree>
+      <p:nvGrpSpPr>
+        <p:cNvPr id="1" name=""/>
+        <p:cNvGrpSpPr/>
+        <p:nvPr/>
+      </p:nvGrpSpPr>
+      <p:grpSpPr>
+        <a:xfrm>
+          <a:off x="0" y="0"/>
+          <a:ext cx="0" cy="0"/>
+          <a:chOff x="0" y="0"/>
+          <a:chExt cx="0" cy="0"/>
+        </a:xfrm>
+      </p:grpSpPr>
+      <p:sp>
+        <p:nvSpPr>
+          <p:cNvPr id="2" name="Title 1"/>
+          <p:cNvSpPr>
+            <a:spLocks noGrp="1"/>
+          </p:cNvSpPr>
+          <p:nvPr>
+            <p:ph type="title"/>
+          </p:nvPr>
+        </p:nvSpPr>
+        <p:spPr/>
+        <p:txBody>
+          <a:bodyPr/>
+          <a:lstStyle/>
+          <a:p>
+            <a:pPr lvl="0" indent="0" marL="0">
+              <a:buNone/>
+            </a:pPr>
+            <a:r>
+              <a:rPr/>
+              <a:t>What the threshold does to the decision</a:t>
+            </a:r>
+          </a:p>
+        </p:txBody>
+      </p:sp>
+      <p:pic>
+        <p:nvPicPr>
+          <p:cNvPr descr="slides_files/figure-pptx/cell-9-output-1.png" id="0" name="Picture 1"/>
+          <p:cNvPicPr>
+            <a:picLocks noGrp="1" noChangeAspect="1"/>
+          </p:cNvPicPr>
+          <p:nvPr/>
+        </p:nvPicPr>
+        <p:blipFill>
+          <a:blip r:embed="rId2"/>
+          <a:stretch>
+            <a:fillRect/>
+          </a:stretch>
+        </p:blipFill>
+        <p:spPr bwMode="auto">
+          <a:xfrm>
+            <a:off x="1206500" y="1193800"/>
+            <a:ext cx="6731000" cy="3390900"/>
+          </a:xfrm>
+          <a:prstGeom prst="rect">
+            <a:avLst/>
+          </a:prstGeom>
+          <a:noFill/>
+          <a:ln w="9525">
+            <a:noFill/>
+            <a:headEnd/>
+            <a:tailEnd/>
+          </a:ln>
+        </p:spPr>
+      </p:pic>
+    </p:spTree>
+  </p:cSld>
+</p:sld>
 </file>
 
 <file path=ppt/slides/slide39.xml><?xml version="1.0" encoding="utf-8"?>
@@ -8244,6 +6983,31 @@
       </p:grpSpPr>
       <p:sp>
         <p:nvSpPr>
+          <p:cNvPr id="2" name="Title 1"/>
+          <p:cNvSpPr>
+            <a:spLocks noGrp="1"/>
+          </p:cNvSpPr>
+          <p:nvPr>
+            <p:ph type="title"/>
+          </p:nvPr>
+        </p:nvSpPr>
+        <p:spPr/>
+        <p:txBody>
+          <a:bodyPr/>
+          <a:lstStyle/>
+          <a:p>
+            <a:pPr lvl="0" indent="0" marL="0">
+              <a:buNone/>
+            </a:pPr>
+            <a:r>
+              <a:rPr/>
+              <a:t>The number that should alarm you</a:t>
+            </a:r>
+          </a:p>
+        </p:txBody>
+      </p:sp>
+      <p:sp>
+        <p:nvSpPr>
           <p:cNvPr id="3" name="Content Placeholder 2"/>
           <p:cNvSpPr>
             <a:spLocks noGrp="1"/>
@@ -8257,25 +7021,32 @@
           <a:bodyPr/>
           <a:lstStyle/>
           <a:p>
+            <a:pPr lvl="0" indent="0">
+              <a:buNone/>
+            </a:pPr>
+            <a:r>
+              <a:rPr>
+                <a:latin typeface="Courier"/>
+              </a:rPr>
+              <a:t> threshold  flagged  recall
+     0.100     7625   0.915
+     0.167     4134   0.560
+     0.200     2440   0.369
+     0.300      215   0.050
+     0.500        0   0.000</a:t>
+            </a:r>
+          </a:p>
+          <a:p>
             <a:pPr lvl="0" indent="0" marL="0">
               <a:buNone/>
             </a:pPr>
             <a:r>
-              <a:rPr/>
-              <a:t>Both are imbalanced. Both use the same estimator. One barely ranks better than chance; the other ranks well. </a:t>
-            </a:r>
-            <a:r>
               <a:rPr b="1"/>
-              <a:t>The method did not differ — the informativeness of the predictors did.</a:t>
-            </a:r>
-          </a:p>
-          <a:p>
-            <a:pPr lvl="0" indent="0" marL="0">
-              <a:buNone/>
-            </a:pPr>
-            <a:r>
-              <a:rPr/>
-              <a:t>Chemistry measures the thing being judged. A credit file measures a person’s past, not their next three years.</a:t>
+              <a:t>At 0.50 the model flags nothing at all.</a:t>
+            </a:r>
+            <a:r>
+              <a:rPr/>
+              <a:t> Every applicant approved, recall zero — and the software reported no error whatsoever.</a:t>
             </a:r>
           </a:p>
         </p:txBody>
@@ -8347,14 +7118,14 @@
             </a:pPr>
             <a:r>
               <a:rPr/>
-              <a:t>By the end of this session you should be able to:</a:t>
+              <a:t>By the end you should be able to:</a:t>
             </a:r>
           </a:p>
           <a:p>
             <a:pPr lvl="0"/>
             <a:r>
               <a:rPr/>
-              <a:t>Explain </a:t>
+              <a:t>Say </a:t>
             </a:r>
             <a:r>
               <a:rPr b="1"/>
@@ -8362,14 +7133,14 @@
             </a:r>
             <a:r>
               <a:rPr/>
-              <a:t> a linear model is a poor basis for a binary decision</a:t>
+              <a:t> a linear model cannot support a binary decision, and show it on a plot</a:t>
             </a:r>
           </a:p>
           <a:p>
             <a:pPr lvl="0"/>
             <a:r>
               <a:rPr/>
-              <a:t>Fit and interpret a logistic regression in Python, and report an </a:t>
+              <a:t>Fit a logistic regression in Python and report an </a:t>
             </a:r>
             <a:r>
               <a:rPr b="1"/>
@@ -8383,16 +7154,12 @@
               <a:rPr b="1"/>
               <a:t>average marginal effect</a:t>
             </a:r>
-            <a:r>
-              <a:rPr/>
-              <a:t> correctly</a:t>
-            </a:r>
           </a:p>
           <a:p>
             <a:pPr lvl="0"/>
             <a:r>
               <a:rPr/>
-              <a:t>Say why </a:t>
+              <a:t>Explain why </a:t>
             </a:r>
             <a:r>
               <a:rPr b="1"/>
@@ -8400,7 +7167,7 @@
             </a:r>
             <a:r>
               <a:rPr/>
-              <a:t> is usually the wrong metric, and what to use instead</a:t>
+              <a:t> is the wrong metric under imbalance, and what to use instead</a:t>
             </a:r>
           </a:p>
           <a:p>
@@ -8415,42 +7182,22 @@
             </a:r>
             <a:r>
               <a:rPr/>
-              <a:t> and defend the cost ratio behind it</a:t>
+              <a:t>, and defend the cost ratio behind it</a:t>
             </a:r>
           </a:p>
           <a:p>
             <a:pPr lvl="0"/>
             <a:r>
               <a:rPr/>
-              <a:t>Recognise when a model is </a:t>
+              <a:t>Recognise </a:t>
             </a:r>
             <a:r>
               <a:rPr b="1"/>
-              <a:t>miscalibrated</a:t>
-            </a:r>
-            <a:r>
-              <a:rPr/>
-              <a:t>, and why that matters for a decision</a:t>
-            </a:r>
-          </a:p>
-          <a:p>
-            <a:pPr lvl="0" indent="0" marL="0">
-              <a:buNone/>
-            </a:pPr>
-            <a:r>
-              <a:rPr/>
-              <a:t>The derivations — the likelihood, the score, concavity, IRLS — are in </a:t>
-            </a:r>
-            <a:r>
-              <a:rPr>
-                <a:hlinkClick r:id="rId2"/>
-                <a:latin typeface="Courier"/>
-              </a:rPr>
-              <a:t>01-lecture/README.md</a:t>
-            </a:r>
-            <a:r>
-              <a:rPr/>
-              <a:t>, §6.1–6.9. These slides are the applied path.</a:t>
+              <a:t>miscalibration</a:t>
+            </a:r>
+            <a:r>
+              <a:rPr/>
+              <a:t>, and why it breaks a cost calculation</a:t>
             </a:r>
           </a:p>
         </p:txBody>
@@ -8487,26 +7234,51 @@
             <p:ph type="title"/>
           </p:nvPr>
         </p:nvSpPr>
-        <p:spPr>
+        <p:spPr/>
+        <p:txBody>
+          <a:bodyPr/>
+          <a:lstStyle/>
+          <a:p>
+            <a:pPr lvl="0" indent="0" marL="0">
+              <a:buNone/>
+            </a:pPr>
+            <a:r>
+              <a:rPr/>
+              <a:t>Is 0.3 really 30%?</a:t>
+            </a:r>
+          </a:p>
+        </p:txBody>
+      </p:sp>
+      <p:pic>
+        <p:nvPicPr>
+          <p:cNvPr descr="slides_files/figure-pptx/cell-11-output-1.png" id="0" name="Picture 1"/>
+          <p:cNvPicPr>
+            <a:picLocks noGrp="1" noChangeAspect="1"/>
+          </p:cNvPicPr>
+          <p:nvPr/>
+        </p:nvPicPr>
+        <p:blipFill>
+          <a:blip r:embed="rId2"/>
+          <a:stretch>
+            <a:fillRect/>
+          </a:stretch>
+        </p:blipFill>
+        <p:spPr bwMode="auto">
           <a:xfrm>
-            <a:off x="722313" y="3305176"/>
-            <a:ext cx="7772400" cy="1021556"/>
+            <a:off x="1587500" y="1193800"/>
+            <a:ext cx="5969000" cy="3390900"/>
           </a:xfrm>
+          <a:prstGeom prst="rect">
+            <a:avLst/>
+          </a:prstGeom>
+          <a:noFill/>
+          <a:ln w="9525">
+            <a:noFill/>
+            <a:headEnd/>
+            <a:tailEnd/>
+          </a:ln>
         </p:spPr>
-        <p:txBody>
-          <a:bodyPr/>
-          <a:lstStyle/>
-          <a:p>
-            <a:pPr lvl="0" indent="0" marL="0">
-              <a:buNone/>
-            </a:pPr>
-            <a:r>
-              <a:rPr/>
-              <a:t>8 · A third example</a:t>
-            </a:r>
-          </a:p>
-        </p:txBody>
-      </p:sp>
+      </p:pic>
     </p:spTree>
   </p:cSld>
 </p:sld>
@@ -8531,12 +7303,12 @@
       </p:grpSpPr>
       <p:sp>
         <p:nvSpPr>
-          <p:cNvPr id="2" name="Title 1"/>
-          <p:cNvSpPr>
-            <a:spLocks noGrp="1"/>
-          </p:cNvSpPr>
-          <p:nvPr>
-            <p:ph type="title"/>
+          <p:cNvPr id="3" name="Content Placeholder 2"/>
+          <p:cNvSpPr>
+            <a:spLocks noGrp="1"/>
+          </p:cNvSpPr>
+          <p:nvPr>
+            <p:ph idx="1"/>
           </p:nvPr>
         </p:nvSpPr>
         <p:spPr/>
@@ -8548,237 +7320,12 @@
               <a:buNone/>
             </a:pPr>
             <a:r>
-              <a:rPr/>
-              <a:t>Falling behind in Europe</a:t>
-            </a:r>
-          </a:p>
-        </p:txBody>
-      </p:sp>
-      <p:sp>
-        <p:nvSpPr>
-          <p:cNvPr id="3" name="Content Placeholder 2"/>
-          <p:cNvSpPr>
-            <a:spLocks noGrp="1"/>
-          </p:cNvSpPr>
-          <p:nvPr>
-            <p:ph idx="1"/>
-          </p:nvPr>
-        </p:nvSpPr>
-        <p:spPr/>
-        <p:txBody>
-          <a:bodyPr/>
-          <a:lstStyle/>
-          <a:p>
-            <a:pPr lvl="0" indent="0" marL="0">
-              <a:buNone/>
-            </a:pPr>
-            <a:r>
-              <a:rPr/>
-              <a:t>The same machinery, a policy question, and the practice data:</a:t>
-            </a:r>
-          </a:p>
-          <a:p>
-            <a:pPr lvl="0" indent="0">
-              <a:buNone/>
-            </a:pPr>
-            <a:r>
-              <a:rPr>
-                <a:latin typeface="Courier"/>
-              </a:rPr>
-              <a:t>core </a:t>
-            </a:r>
-            <a:r>
-              <a:rPr>
-                <a:solidFill>
-                  <a:srgbClr val="666666"/>
-                </a:solidFill>
-                <a:latin typeface="Courier"/>
-              </a:rPr>
-              <a:t>=</a:t>
-            </a:r>
-            <a:r>
-              <a:rPr>
-                <a:latin typeface="Courier"/>
-              </a:rPr>
-              <a:t> pd.read_parquet(</a:t>
-            </a:r>
-            <a:r>
-              <a:rPr>
-                <a:solidFill>
-                  <a:srgbClr val="4070A0"/>
-                </a:solidFill>
-                <a:latin typeface="Courier"/>
-              </a:rPr>
-              <a:t>"data/spine/core.parquet"</a:t>
-            </a:r>
-            <a:r>
-              <a:rPr>
-                <a:latin typeface="Courier"/>
-              </a:rPr>
-              <a:t>)</a:t>
-            </a:r>
-            <a:br/>
-            <a:r>
-              <a:rPr>
-                <a:latin typeface="Courier"/>
-              </a:rPr>
-              <a:t>d </a:t>
-            </a:r>
-            <a:r>
-              <a:rPr>
-                <a:solidFill>
-                  <a:srgbClr val="666666"/>
-                </a:solidFill>
-                <a:latin typeface="Courier"/>
-              </a:rPr>
-              <a:t>=</a:t>
-            </a:r>
-            <a:r>
-              <a:rPr>
-                <a:latin typeface="Courier"/>
-              </a:rPr>
-              <a:t> core.dropna(subset</a:t>
-            </a:r>
-            <a:r>
-              <a:rPr>
-                <a:solidFill>
-                  <a:srgbClr val="666666"/>
-                </a:solidFill>
-                <a:latin typeface="Courier"/>
-              </a:rPr>
-              <a:t>=</a:t>
-            </a:r>
-            <a:r>
-              <a:rPr>
-                <a:latin typeface="Courier"/>
-              </a:rPr>
-              <a:t>[</a:t>
-            </a:r>
-            <a:r>
-              <a:rPr>
-                <a:solidFill>
-                  <a:srgbClr val="4070A0"/>
-                </a:solidFill>
-                <a:latin typeface="Courier"/>
-              </a:rPr>
-              <a:t>"falling_behind_next"</a:t>
-            </a:r>
-            <a:r>
-              <a:rPr>
-                <a:latin typeface="Courier"/>
-              </a:rPr>
-              <a:t>])</a:t>
-            </a:r>
-            <a:br/>
-            <a:br/>
-            <a:r>
-              <a:rPr>
-                <a:solidFill>
-                  <a:srgbClr val="008000"/>
-                </a:solidFill>
-                <a:latin typeface="Courier"/>
-              </a:rPr>
-              <a:t>print</a:t>
-            </a:r>
-            <a:r>
-              <a:rPr>
-                <a:latin typeface="Courier"/>
-              </a:rPr>
-              <a:t>(</a:t>
-            </a:r>
-            <a:r>
-              <a:rPr>
-                <a:solidFill>
-                  <a:srgbClr val="008000"/>
-                </a:solidFill>
-                <a:latin typeface="Courier"/>
-              </a:rPr>
-              <a:t>len</a:t>
-            </a:r>
-            <a:r>
-              <a:rPr>
-                <a:latin typeface="Courier"/>
-              </a:rPr>
-              <a:t>(d), d[</a:t>
-            </a:r>
-            <a:r>
-              <a:rPr>
-                <a:solidFill>
-                  <a:srgbClr val="4070A0"/>
-                </a:solidFill>
-                <a:latin typeface="Courier"/>
-              </a:rPr>
-              <a:t>"falling_behind_next"</a:t>
-            </a:r>
-            <a:r>
-              <a:rPr>
-                <a:latin typeface="Courier"/>
-              </a:rPr>
-              <a:t>].mean())   </a:t>
-            </a:r>
-            <a:r>
-              <a:rPr i="1">
-                <a:solidFill>
-                  <a:srgbClr val="60A0B0"/>
-                </a:solidFill>
-                <a:latin typeface="Courier"/>
-              </a:rPr>
-              <a:t># 420, 0.10</a:t>
-            </a:r>
-          </a:p>
-          <a:p>
-            <a:pPr lvl="0"/>
-            <a:r>
-              <a:rPr/>
-              <a:t>Outcome: is this country in the </a:t>
-            </a:r>
-            <a:r>
               <a:rPr b="1"/>
-              <a:t>bottom decile</a:t>
-            </a:r>
-            <a:r>
-              <a:rPr/>
-              <a:t> of productivity growth </a:t>
-            </a:r>
-            <a:r>
-              <a:rPr b="1"/>
-              <a:t>next year</a:t>
-            </a:r>
-            <a:r>
-              <a:rPr/>
-              <a:t>?</a:t>
-            </a:r>
-          </a:p>
-          <a:p>
-            <a:pPr lvl="0"/>
-            <a:r>
-              <a:rPr/>
-              <a:t>Base rate </a:t>
-            </a:r>
-            <a:r>
-              <a:rPr b="1"/>
-              <a:t>10%</a:t>
-            </a:r>
-            <a:r>
-              <a:rPr/>
-              <a:t> — by construction, since the threshold is the within-year decile</a:t>
-            </a:r>
-          </a:p>
-          <a:p>
-            <a:pPr lvl="0"/>
-            <a:r>
-              <a:rPr/>
-              <a:t>30 rows are </a:t>
-            </a:r>
-            <a:r>
-              <a:rPr>
-                <a:latin typeface="Courier"/>
-              </a:rPr>
-              <a:t>NaN</a:t>
-            </a:r>
-            <a:r>
-              <a:rPr/>
-              <a:t>: the last year of each country. There is no next year.</a:t>
+              <a:t>Discrimination and calibration are different properties.</a:t>
+            </a:r>
+            <a:r>
+              <a:rPr/>
+              <a:t> A model can rank perfectly and still be miscalibrated — and a miscalibrated probability cannot enter a cost calculation.</a:t>
             </a:r>
           </a:p>
         </p:txBody>
@@ -8815,7 +7362,12 @@
             <p:ph type="title"/>
           </p:nvPr>
         </p:nvSpPr>
-        <p:spPr/>
+        <p:spPr>
+          <a:xfrm>
+            <a:off x="722313" y="3305176"/>
+            <a:ext cx="7772400" cy="1021556"/>
+          </a:xfrm>
+        </p:spPr>
         <p:txBody>
           <a:bodyPr/>
           <a:lstStyle/>
@@ -8825,78 +7377,7 @@
             </a:pPr>
             <a:r>
               <a:rPr/>
-              <a:t>Two differences that change everything</a:t>
-            </a:r>
-          </a:p>
-        </p:txBody>
-      </p:sp>
-      <p:sp>
-        <p:nvSpPr>
-          <p:cNvPr id="3" name="Content Placeholder 2"/>
-          <p:cNvSpPr>
-            <a:spLocks noGrp="1"/>
-          </p:cNvSpPr>
-          <p:nvPr>
-            <p:ph idx="1"/>
-          </p:nvPr>
-        </p:nvSpPr>
-        <p:spPr/>
-        <p:txBody>
-          <a:bodyPr/>
-          <a:lstStyle/>
-          <a:p>
-            <a:pPr lvl="0" indent="-342900" marL="342900">
-              <a:buAutoNum type="arabicPeriod"/>
-            </a:pPr>
-            <a:r>
-              <a:rPr b="1"/>
-              <a:t>The rows are not independent.</a:t>
-            </a:r>
-            <a:r>
-              <a:rPr/>
-              <a:t> 30 countries × 14 years. Germany 2019 and Germany 2020 are not two draws — so cross-validate with </a:t>
-            </a:r>
-            <a:r>
-              <a:rPr>
-                <a:latin typeface="Courier"/>
-              </a:rPr>
-              <a:t>GroupKFold</a:t>
-            </a:r>
-            <a:r>
-              <a:rPr/>
-              <a:t> on </a:t>
-            </a:r>
-            <a:r>
-              <a:rPr>
-                <a:latin typeface="Courier"/>
-              </a:rPr>
-              <a:t>geo</a:t>
-            </a:r>
-            <a:r>
-              <a:rPr/>
-              <a:t>, not at random.</a:t>
-            </a:r>
-          </a:p>
-          <a:p>
-            <a:pPr lvl="0" indent="-342900" marL="342900">
-              <a:buAutoNum type="arabicPeriod"/>
-            </a:pPr>
-            <a:r>
-              <a:rPr b="1"/>
-              <a:t>Dropping those 30 NaNs is correct.</a:t>
-            </a:r>
-            <a:r>
-              <a:rPr/>
-              <a:t> Imputing them would be inventing the future.</a:t>
-            </a:r>
-          </a:p>
-          <a:p>
-            <a:pPr lvl="0" indent="0" marL="0">
-              <a:buNone/>
-            </a:pPr>
-            <a:r>
-              <a:rPr/>
-              <a:t>Lending Club rows are arguably exchangeable. Panel rows never are. The method is identical; the validation is not.</a:t>
+              <a:t>8 · A second example</a:t>
             </a:r>
           </a:p>
         </p:txBody>
@@ -8933,12 +7414,7 @@
             <p:ph type="title"/>
           </p:nvPr>
         </p:nvSpPr>
-        <p:spPr>
-          <a:xfrm>
-            <a:off x="722313" y="3305176"/>
-            <a:ext cx="7772400" cy="1021556"/>
-          </a:xfrm>
-        </p:spPr>
+        <p:spPr/>
         <p:txBody>
           <a:bodyPr/>
           <a:lstStyle/>
@@ -8948,7 +7424,196 @@
             </a:pPr>
             <a:r>
               <a:rPr/>
-              <a:t>9 · Key takeaways</a:t>
+              <a:t>Portugal’s red wines</a:t>
+            </a:r>
+          </a:p>
+        </p:txBody>
+      </p:sp>
+      <p:sp>
+        <p:nvSpPr>
+          <p:cNvPr id="3" name="Content Placeholder 2"/>
+          <p:cNvSpPr>
+            <a:spLocks noGrp="1"/>
+          </p:cNvSpPr>
+          <p:nvPr>
+            <p:ph idx="1"/>
+          </p:nvPr>
+        </p:nvSpPr>
+        <p:spPr/>
+        <p:txBody>
+          <a:bodyPr/>
+          <a:lstStyle/>
+          <a:p>
+            <a:pPr lvl="0" indent="0" marL="0">
+              <a:buNone/>
+            </a:pPr>
+            <a:r>
+              <a:rPr/>
+              <a:t>1,599 red </a:t>
+            </a:r>
+            <a:r>
+              <a:rPr i="1"/>
+              <a:t>vinho verde</a:t>
+            </a:r>
+            <a:r>
+              <a:rPr/>
+              <a:t> wines, chemically assayed, each rated by at least three blind tasters.</a:t>
+            </a:r>
+          </a:p>
+          <a:p>
+            <a:pPr lvl="0" indent="0">
+              <a:buNone/>
+            </a:pPr>
+            <a:r>
+              <a:rPr>
+                <a:latin typeface="Courier"/>
+              </a:rPr>
+              <a:t>wine </a:t>
+            </a:r>
+            <a:r>
+              <a:rPr>
+                <a:solidFill>
+                  <a:srgbClr val="666666"/>
+                </a:solidFill>
+                <a:latin typeface="Courier"/>
+              </a:rPr>
+              <a:t>=</a:t>
+            </a:r>
+            <a:r>
+              <a:rPr>
+                <a:latin typeface="Courier"/>
+              </a:rPr>
+              <a:t> pd.read_parquet(</a:t>
+            </a:r>
+            <a:r>
+              <a:rPr>
+                <a:solidFill>
+                  <a:srgbClr val="4070A0"/>
+                </a:solidFill>
+                <a:latin typeface="Courier"/>
+              </a:rPr>
+              <a:t>"data/redwines.parquet"</a:t>
+            </a:r>
+            <a:r>
+              <a:rPr>
+                <a:latin typeface="Courier"/>
+              </a:rPr>
+              <a:t>)</a:t>
+            </a:r>
+            <a:br/>
+            <a:r>
+              <a:rPr>
+                <a:latin typeface="Courier"/>
+              </a:rPr>
+              <a:t>m_w  </a:t>
+            </a:r>
+            <a:r>
+              <a:rPr>
+                <a:solidFill>
+                  <a:srgbClr val="666666"/>
+                </a:solidFill>
+                <a:latin typeface="Courier"/>
+              </a:rPr>
+              <a:t>=</a:t>
+            </a:r>
+            <a:r>
+              <a:rPr>
+                <a:latin typeface="Courier"/>
+              </a:rPr>
+              <a:t> smf.logit(</a:t>
+            </a:r>
+            <a:r>
+              <a:rPr>
+                <a:solidFill>
+                  <a:srgbClr val="4070A0"/>
+                </a:solidFill>
+                <a:latin typeface="Courier"/>
+              </a:rPr>
+              <a:t>"good ~ alcohol + volatile_acidity + sulphates"</a:t>
+            </a:r>
+            <a:r>
+              <a:rPr>
+                <a:latin typeface="Courier"/>
+              </a:rPr>
+              <a:t>,</a:t>
+            </a:r>
+            <a:br/>
+            <a:r>
+              <a:rPr>
+                <a:latin typeface="Courier"/>
+              </a:rPr>
+              <a:t>                 data</a:t>
+            </a:r>
+            <a:r>
+              <a:rPr>
+                <a:solidFill>
+                  <a:srgbClr val="666666"/>
+                </a:solidFill>
+                <a:latin typeface="Courier"/>
+              </a:rPr>
+              <a:t>=</a:t>
+            </a:r>
+            <a:r>
+              <a:rPr>
+                <a:latin typeface="Courier"/>
+              </a:rPr>
+              <a:t>wine).fit()</a:t>
+            </a:r>
+            <a:br/>
+            <a:r>
+              <a:rPr>
+                <a:latin typeface="Courier"/>
+              </a:rPr>
+              <a:t>np.exp(m_w.params[</a:t>
+            </a:r>
+            <a:r>
+              <a:rPr>
+                <a:solidFill>
+                  <a:srgbClr val="4070A0"/>
+                </a:solidFill>
+                <a:latin typeface="Courier"/>
+              </a:rPr>
+              <a:t>"alcohol"</a:t>
+            </a:r>
+            <a:r>
+              <a:rPr>
+                <a:latin typeface="Courier"/>
+              </a:rPr>
+              <a:t>])     </a:t>
+            </a:r>
+            <a:r>
+              <a:rPr i="1">
+                <a:solidFill>
+                  <a:srgbClr val="60A0B0"/>
+                </a:solidFill>
+                <a:latin typeface="Courier"/>
+              </a:rPr>
+              <a:t># 2.74</a:t>
+            </a:r>
+          </a:p>
+          <a:p>
+            <a:pPr lvl="0" indent="0" marL="0">
+              <a:buNone/>
+            </a:pPr>
+            <a:r>
+              <a:rPr/>
+              <a:t>An odds ratio of </a:t>
+            </a:r>
+            <a:r>
+              <a:rPr b="1"/>
+              <a:t>2.74</a:t>
+            </a:r>
+            <a:r>
+              <a:rPr/>
+              <a:t>: each extra percentage point of alcohol nearly </a:t>
+            </a:r>
+            <a:r>
+              <a:rPr b="1"/>
+              <a:t>triples</a:t>
+            </a:r>
+            <a:r>
+              <a:rPr/>
+              <a:t> the odds a taster calls the wine good.</a:t>
             </a:r>
           </a:p>
         </p:txBody>
@@ -8995,111 +7660,315 @@
             </a:pPr>
             <a:r>
               <a:rPr/>
-              <a:t>What to carry out of this session</a:t>
-            </a:r>
-          </a:p>
-        </p:txBody>
-      </p:sp>
-      <p:sp>
-        <p:nvSpPr>
-          <p:cNvPr id="3" name="Content Placeholder 2"/>
-          <p:cNvSpPr>
-            <a:spLocks noGrp="1"/>
-          </p:cNvSpPr>
-          <p:nvPr>
-            <p:ph idx="1"/>
-          </p:nvPr>
-        </p:nvSpPr>
-        <p:spPr/>
-        <p:txBody>
-          <a:bodyPr/>
-          <a:lstStyle/>
-          <a:p>
-            <a:pPr lvl="0" indent="-342900" marL="342900">
-              <a:buAutoNum type="arabicPeriod"/>
-            </a:pPr>
-            <a:r>
-              <a:rPr b="1"/>
-              <a:t>A model gives a probability; a decision needs a threshold.</a:t>
-            </a:r>
-            <a:r>
-              <a:rPr/>
-              <a:t> Separate acts, separate justifications.</a:t>
-            </a:r>
-          </a:p>
-          <a:p>
-            <a:pPr lvl="0" indent="-342900" marL="342900">
-              <a:buAutoNum type="arabicPeriod"/>
-            </a:pPr>
-            <a:r>
-              <a:rPr b="1"/>
-              <a:t>Report the base rate first.</a:t>
-            </a:r>
-            <a:r>
-              <a:rPr/>
-              <a:t> Accuracy cannot be read without it.</a:t>
-            </a:r>
-          </a:p>
-          <a:p>
-            <a:pPr lvl="0" indent="-342900" marL="342900">
-              <a:buAutoNum type="arabicPeriod"/>
-            </a:pPr>
-            <a:r>
-              <a:rPr b="1"/>
-              <a:t>Report an odds ratio or an average marginal effect</a:t>
-            </a:r>
-            <a:r>
-              <a:rPr/>
-              <a:t>, with its units — not a bare coefficient.</a:t>
-            </a:r>
-          </a:p>
-          <a:p>
-            <a:pPr lvl="0" indent="-342900" marL="342900">
-              <a:buAutoNum type="arabicPeriod"/>
-            </a:pPr>
-            <a:r>
-              <a:rPr b="1"/>
-              <a:t>Derive your threshold from a stated cost ratio</a:t>
-            </a:r>
-            <a:r>
-              <a:rPr/>
-              <a:t>, and show how the answer moves if it is wrong.</a:t>
-            </a:r>
-          </a:p>
-          <a:p>
-            <a:pPr lvl="0" indent="-342900" marL="342900">
-              <a:buAutoNum type="arabicPeriod"/>
-            </a:pPr>
-            <a:r>
-              <a:rPr b="1"/>
-              <a:t>Check calibration</a:t>
-            </a:r>
-            <a:r>
-              <a:rPr/>
-              <a:t> before any probability enters a cost calculation.</a:t>
-            </a:r>
-          </a:p>
-          <a:p>
-            <a:pPr lvl="0" indent="-342900" marL="342900">
-              <a:buAutoNum type="arabicPeriod"/>
-            </a:pPr>
-            <a:r>
-              <a:rPr b="1"/>
-              <a:t>Match the validation to the data.</a:t>
-            </a:r>
-            <a:r>
-              <a:rPr/>
-              <a:t> Exchangeable rows and panel rows are not the same problem.</a:t>
-            </a:r>
-          </a:p>
-        </p:txBody>
-      </p:sp>
+              <a:t>Same method, very different signal</a:t>
+            </a:r>
+          </a:p>
+        </p:txBody>
+      </p:sp>
+      <p:pic>
+        <p:nvPicPr>
+          <p:cNvPr descr="slides_files/figure-pptx/cell-12-output-1.png" id="0" name="Picture 1"/>
+          <p:cNvPicPr>
+            <a:picLocks noGrp="1" noChangeAspect="1"/>
+          </p:cNvPicPr>
+          <p:nvPr/>
+        </p:nvPicPr>
+        <p:blipFill>
+          <a:blip r:embed="rId2"/>
+          <a:stretch>
+            <a:fillRect/>
+          </a:stretch>
+        </p:blipFill>
+        <p:spPr bwMode="auto">
+          <a:xfrm>
+            <a:off x="1574800" y="1193800"/>
+            <a:ext cx="5994400" cy="3390900"/>
+          </a:xfrm>
+          <a:prstGeom prst="rect">
+            <a:avLst/>
+          </a:prstGeom>
+          <a:noFill/>
+          <a:ln w="9525">
+            <a:noFill/>
+            <a:headEnd/>
+            <a:tailEnd/>
+          </a:ln>
+        </p:spPr>
+      </p:pic>
     </p:spTree>
   </p:cSld>
 </p:sld>
 </file>
 
-<file path=ppt/slides/slide45.xml><?xml version="1.0" encoding="utf-8"?>
+<file path=ppt/slides/slide45.xml><?xml version="1.0" encoding="UTF-8"?><p:sld xmlns:a="http://schemas.openxmlformats.org/drawingml/2006/main" xmlns:r="http://schemas.openxmlformats.org/officeDocument/2006/relationships" xmlns:p="http://schemas.openxmlformats.org/presentationml/2006/main"><p:cSld><p:spTree><p:nvGrpSpPr><p:cNvPr id="1" name="" /><p:cNvGrpSpPr /><p:nvPr /></p:nvGrpSpPr><p:grpSpPr><a:xfrm><a:off x="0" y="0" /><a:ext cx="0" cy="0" /><a:chOff x="0" y="0" /><a:chExt cx="0" cy="0" /></a:xfrm></p:grpSpPr><p:sp><p:nvSpPr><p:cNvPr id="2" name="Title 1" /><p:cNvSpPr><a:spLocks noGrp="1" /></p:cNvSpPr><p:nvPr><p:ph type="title" /></p:nvPr></p:nvSpPr><p:spPr /><p:txBody><a:bodyPr /><a:lstStyle /><a:p><a:pPr lvl="0" indent="0" marL="0"><a:buNone /></a:pPr><a:r><a:rPr /><a:t>Why the difference is not the method</a:t></a:r></a:p></p:txBody></p:sp><p:graphicFrame><p:nvGraphicFramePr><p:cNvPr id="6" name="Content Placeholder 5" /><p:cNvGraphicFramePr><a:graphicFrameLocks noGrp="1" /></p:cNvGraphicFramePr><p:nvPr><p:ph idx="1" /></p:nvPr></p:nvGraphicFramePr><p:xfrm><a:off x="457200" y="1193800" /><a:ext cx="8229600" cy="3390900" /></p:xfrm><a:graphic><a:graphicData uri="http://schemas.openxmlformats.org/drawingml/2006/table"><a:tbl><a:tblPr firstRow="1" bandRow="1"><a:tableStyleId>{5C22544A-7EE6-4342-B048-85BDC9FD1C3A}</a:tableStyleId></a:tblPr><a:tblGrid><a:gridCol w="2743200" /><a:gridCol w="2743200" /><a:gridCol w="2743200" /></a:tblGrid><a:tr h="0"><a:tc><a:txBody><a:bodyPr /><a:lstStyle /><a:p><a:endParaRPr /></a:p></a:txBody><a:tcPr /></a:tc><a:tc><a:txBody><a:bodyPr /><a:lstStyle /><a:p><a:pPr lvl="0" indent="0" marL="0"><a:buNone /></a:pPr><a:r><a:rPr /><a:t>Lending Club</a:t></a:r></a:p></a:txBody><a:tcPr /></a:tc><a:tc><a:txBody><a:bodyPr /><a:lstStyle /><a:p><a:pPr lvl="0" indent="0" marL="0"><a:buNone /></a:pPr><a:r><a:rPr /><a:t>Red wines</a:t></a:r></a:p></a:txBody><a:tcPr /></a:tc></a:tr><a:tr h="0"><a:tc><a:txBody><a:bodyPr /><a:lstStyle /><a:p><a:pPr lvl="0" indent="0" marL="0"><a:buNone /></a:pPr><a14:m><m:oMath xmlns:m="http://schemas.openxmlformats.org/officeDocument/2006/math"><m:r><m:t>n</m:t></m:r></m:oMath></a14:m></a:p></a:txBody></a:tc><a:tc><a:txBody><a:bodyPr /><a:lstStyle /><a:p><a:pPr lvl="0" indent="0" marL="0"><a:buNone /></a:pPr><a:r><a:rPr /><a:t>9,578</a:t></a:r></a:p></a:txBody></a:tc><a:tc><a:txBody><a:bodyPr /><a:lstStyle /><a:p><a:pPr lvl="0" indent="0" marL="0"><a:buNone /></a:pPr><a:r><a:rPr /><a:t>1,599</a:t></a:r></a:p></a:txBody></a:tc></a:tr><a:tr h="0"><a:tc><a:txBody><a:bodyPr /><a:lstStyle /><a:p><a:pPr lvl="0" indent="0" marL="0"><a:buNone /></a:pPr><a:r><a:rPr /><a:t>Base rate</a:t></a:r></a:p></a:txBody></a:tc><a:tc><a:txBody><a:bodyPr /><a:lstStyle /><a:p><a:pPr lvl="0" indent="0" marL="0"><a:buNone /></a:pPr><a:r><a:rPr /><a:t>0.160</a:t></a:r></a:p></a:txBody></a:tc><a:tc><a:txBody><a:bodyPr /><a:lstStyle /><a:p><a:pPr lvl="0" indent="0" marL="0"><a:buNone /></a:pPr><a:r><a:rPr /><a:t>0.136</a:t></a:r></a:p></a:txBody></a:tc></a:tr><a:tr h="0"><a:tc><a:txBody><a:bodyPr /><a:lstStyle /><a:p><a:pPr lvl="0" indent="0" marL="0"><a:buNone /></a:pPr><a:r><a:rPr /><a:t>ROC AUC</a:t></a:r></a:p></a:txBody></a:tc><a:tc><a:txBody><a:bodyPr /><a:lstStyle /><a:p><a:pPr lvl="0" indent="0" marL="0"><a:buNone /></a:pPr><a:r><a:rPr /><a:t>0.627</a:t></a:r></a:p></a:txBody></a:tc><a:tc><a:txBody><a:bodyPr /><a:lstStyle /><a:p><a:pPr lvl="0" indent="0" marL="0"><a:buNone /></a:pPr><a:r><a:rPr b="1" /><a:t>0.866</a:t></a:r></a:p></a:txBody></a:tc></a:tr></a:tbl></a:graphicData></a:graphic></p:graphicFrame></p:spTree></p:cSld></p:sld>
+</file>
+
+<file path=ppt/slides/slide46.xml><?xml version="1.0" encoding="utf-8"?>
+<p:sld xmlns:a="http://schemas.openxmlformats.org/drawingml/2006/main" xmlns:r="http://schemas.openxmlformats.org/officeDocument/2006/relationships" xmlns:p="http://schemas.openxmlformats.org/presentationml/2006/main">
+  <p:cSld>
+    <p:spTree>
+      <p:nvGrpSpPr>
+        <p:cNvPr id="1" name=""/>
+        <p:cNvGrpSpPr/>
+        <p:nvPr/>
+      </p:nvGrpSpPr>
+      <p:grpSpPr>
+        <a:xfrm>
+          <a:off x="0" y="0"/>
+          <a:ext cx="0" cy="0"/>
+          <a:chOff x="0" y="0"/>
+          <a:chExt cx="0" cy="0"/>
+        </a:xfrm>
+      </p:grpSpPr>
+      <p:sp>
+        <p:nvSpPr>
+          <p:cNvPr id="3" name="Content Placeholder 2"/>
+          <p:cNvSpPr>
+            <a:spLocks noGrp="1"/>
+          </p:cNvSpPr>
+          <p:nvPr>
+            <p:ph idx="1"/>
+          </p:nvPr>
+        </p:nvSpPr>
+        <p:spPr/>
+        <p:txBody>
+          <a:bodyPr/>
+          <a:lstStyle/>
+          <a:p>
+            <a:pPr lvl="0" indent="0" marL="0">
+              <a:buNone/>
+            </a:pPr>
+            <a:r>
+              <a:rPr/>
+              <a:t>Same estimator, both imbalanced. </a:t>
+            </a:r>
+            <a:r>
+              <a:rPr b="1"/>
+              <a:t>The predictors differ in how much they know.</a:t>
+            </a:r>
+            <a:r>
+              <a:rPr/>
+              <a:t> Chemistry measures the thing being judged; a credit file measures a person’s past, not their next three years.</a:t>
+            </a:r>
+          </a:p>
+          <a:p>
+            <a:pPr lvl="0" indent="0" marL="0">
+              <a:buNone/>
+            </a:pPr>
+            <a:r>
+              <a:rPr/>
+              <a:t>When a model performs badly, ask what the features could possibly contain </a:t>
+            </a:r>
+            <a:r>
+              <a:rPr b="1"/>
+              <a:t>before</a:t>
+            </a:r>
+            <a:r>
+              <a:rPr/>
+              <a:t> reaching for a fancier algorithm.</a:t>
+            </a:r>
+          </a:p>
+        </p:txBody>
+      </p:sp>
+    </p:spTree>
+  </p:cSld>
+</p:sld>
+</file>
+
+<file path=ppt/slides/slide47.xml><?xml version="1.0" encoding="utf-8"?>
+<p:sld xmlns:a="http://schemas.openxmlformats.org/drawingml/2006/main" xmlns:r="http://schemas.openxmlformats.org/officeDocument/2006/relationships" xmlns:p="http://schemas.openxmlformats.org/presentationml/2006/main">
+  <p:cSld>
+    <p:spTree>
+      <p:nvGrpSpPr>
+        <p:cNvPr id="1" name=""/>
+        <p:cNvGrpSpPr/>
+        <p:nvPr/>
+      </p:nvGrpSpPr>
+      <p:grpSpPr>
+        <a:xfrm>
+          <a:off x="0" y="0"/>
+          <a:ext cx="0" cy="0"/>
+          <a:chOff x="0" y="0"/>
+          <a:chExt cx="0" cy="0"/>
+        </a:xfrm>
+      </p:grpSpPr>
+      <p:sp>
+        <p:nvSpPr>
+          <p:cNvPr id="2" name="Title 1"/>
+          <p:cNvSpPr>
+            <a:spLocks noGrp="1"/>
+          </p:cNvSpPr>
+          <p:nvPr>
+            <p:ph type="title"/>
+          </p:nvPr>
+        </p:nvSpPr>
+        <p:spPr>
+          <a:xfrm>
+            <a:off x="722313" y="3305176"/>
+            <a:ext cx="7772400" cy="1021556"/>
+          </a:xfrm>
+        </p:spPr>
+        <p:txBody>
+          <a:bodyPr/>
+          <a:lstStyle/>
+          <a:p>
+            <a:pPr lvl="0" indent="0" marL="0">
+              <a:buNone/>
+            </a:pPr>
+            <a:r>
+              <a:rPr/>
+              <a:t>9 · Key takeaways</a:t>
+            </a:r>
+          </a:p>
+        </p:txBody>
+      </p:sp>
+    </p:spTree>
+  </p:cSld>
+</p:sld>
+</file>
+
+<file path=ppt/slides/slide48.xml><?xml version="1.0" encoding="utf-8"?>
+<p:sld xmlns:a="http://schemas.openxmlformats.org/drawingml/2006/main" xmlns:r="http://schemas.openxmlformats.org/officeDocument/2006/relationships" xmlns:p="http://schemas.openxmlformats.org/presentationml/2006/main">
+  <p:cSld>
+    <p:spTree>
+      <p:nvGrpSpPr>
+        <p:cNvPr id="1" name=""/>
+        <p:cNvGrpSpPr/>
+        <p:nvPr/>
+      </p:nvGrpSpPr>
+      <p:grpSpPr>
+        <a:xfrm>
+          <a:off x="0" y="0"/>
+          <a:ext cx="0" cy="0"/>
+          <a:chOff x="0" y="0"/>
+          <a:chExt cx="0" cy="0"/>
+        </a:xfrm>
+      </p:grpSpPr>
+      <p:sp>
+        <p:nvSpPr>
+          <p:cNvPr id="2" name="Title 1"/>
+          <p:cNvSpPr>
+            <a:spLocks noGrp="1"/>
+          </p:cNvSpPr>
+          <p:nvPr>
+            <p:ph type="title"/>
+          </p:nvPr>
+        </p:nvSpPr>
+        <p:spPr/>
+        <p:txBody>
+          <a:bodyPr/>
+          <a:lstStyle/>
+          <a:p>
+            <a:pPr lvl="0" indent="0" marL="0">
+              <a:buNone/>
+            </a:pPr>
+            <a:r>
+              <a:rPr/>
+              <a:t>What to carry out of this session</a:t>
+            </a:r>
+          </a:p>
+        </p:txBody>
+      </p:sp>
+      <p:sp>
+        <p:nvSpPr>
+          <p:cNvPr id="3" name="Content Placeholder 2"/>
+          <p:cNvSpPr>
+            <a:spLocks noGrp="1"/>
+          </p:cNvSpPr>
+          <p:nvPr>
+            <p:ph idx="1"/>
+          </p:nvPr>
+        </p:nvSpPr>
+        <p:spPr/>
+        <p:txBody>
+          <a:bodyPr/>
+          <a:lstStyle/>
+          <a:p>
+            <a:pPr lvl="0" indent="-342900" marL="342900">
+              <a:buAutoNum type="arabicPeriod"/>
+            </a:pPr>
+            <a:r>
+              <a:rPr b="1"/>
+              <a:t>A model gives a probability; a decision needs a threshold.</a:t>
+            </a:r>
+            <a:r>
+              <a:rPr/>
+              <a:t> Separate acts, separate evidence.</a:t>
+            </a:r>
+          </a:p>
+          <a:p>
+            <a:pPr lvl="0" indent="-342900" marL="342900">
+              <a:buAutoNum type="arabicPeriod"/>
+            </a:pPr>
+            <a:r>
+              <a:rPr b="1"/>
+              <a:t>Report the base rate first.</a:t>
+            </a:r>
+            <a:r>
+              <a:rPr/>
+              <a:t> Accuracy cannot be read without it.</a:t>
+            </a:r>
+          </a:p>
+          <a:p>
+            <a:pPr lvl="0" indent="-342900" marL="342900">
+              <a:buAutoNum type="arabicPeriod"/>
+            </a:pPr>
+            <a:r>
+              <a:rPr b="1"/>
+              <a:t>Report an odds ratio or an average marginal effect</a:t>
+            </a:r>
+            <a:r>
+              <a:rPr/>
+              <a:t>, with its units.</a:t>
+            </a:r>
+          </a:p>
+          <a:p>
+            <a:pPr lvl="0" indent="-342900" marL="342900">
+              <a:buAutoNum type="arabicPeriod"/>
+            </a:pPr>
+            <a:r>
+              <a:rPr b="1"/>
+              <a:t>Derive the threshold from a stated cost ratio</a:t>
+            </a:r>
+            <a:r>
+              <a:rPr/>
+              <a:t> — and show how the answer moves if it is wrong.</a:t>
+            </a:r>
+          </a:p>
+          <a:p>
+            <a:pPr lvl="0" indent="-342900" marL="342900">
+              <a:buAutoNum type="arabicPeriod"/>
+            </a:pPr>
+            <a:r>
+              <a:rPr b="1"/>
+              <a:t>Check calibration</a:t>
+            </a:r>
+            <a:r>
+              <a:rPr/>
+              <a:t> before any probability enters a cost calculation.</a:t>
+            </a:r>
+          </a:p>
+          <a:p>
+            <a:pPr lvl="0" indent="-342900" marL="342900">
+              <a:buAutoNum type="arabicPeriod"/>
+            </a:pPr>
+            <a:r>
+              <a:rPr b="1"/>
+              <a:t>A weak model may be a weak feature set.</a:t>
+            </a:r>
+            <a:r>
+              <a:rPr/>
+              <a:t> Look there before changing algorithm.</a:t>
+            </a:r>
+          </a:p>
+        </p:txBody>
+      </p:sp>
+    </p:spTree>
+  </p:cSld>
+</p:sld>
+</file>
+
+<file path=ppt/slides/slide49.xml><?xml version="1.0" encoding="utf-8"?>
 <p:sld xmlns:a="http://schemas.openxmlformats.org/drawingml/2006/main" xmlns:r="http://schemas.openxmlformats.org/officeDocument/2006/relationships" xmlns:p="http://schemas.openxmlformats.org/presentationml/2006/main">
   <p:cSld>
     <p:spTree>
@@ -9176,7 +8045,7 @@
                       </a:pPr>
                       <a:r>
                         <a:rPr/>
-                        <a:t>Reporting accuracy on an imbalanced problem</a:t>
+                        <a:t>Accuracy on an imbalanced problem</a:t>
                       </a:r>
                     </a:p>
                   </a:txBody>
@@ -9208,7 +8077,7 @@
                       </a:pPr>
                       <a:r>
                         <a:rPr/>
-                        <a:t>Leaving the threshold at 0.5 silently</a:t>
+                        <a:t>Threshold silently left at 0.5</a:t>
                       </a:r>
                     </a:p>
                   </a:txBody>
@@ -9272,7 +8141,7 @@
                       </a:pPr>
                       <a:r>
                         <a:rPr/>
-                        <a:t>Random K-fold on the panel</a:t>
+                        <a:t>Random K-fold on a panel</a:t>
                       </a:r>
                     </a:p>
                   </a:txBody>
@@ -9304,7 +8173,7 @@
                       </a:pPr>
                       <a:r>
                         <a:rPr/>
-                        <a:t>“The model identified the drivers of default”</a:t>
+                        <a:t>“The model found the drivers of default”</a:t>
                       </a:r>
                     </a:p>
                   </a:txBody>
@@ -9319,7 +8188,7 @@
                       </a:pPr>
                       <a:r>
                         <a:rPr/>
-                        <a:t>It did not. It found predictors.</a:t>
+                        <a:t>It found predictors</a:t>
                       </a:r>
                     </a:p>
                   </a:txBody>
@@ -9334,7 +8203,59 @@
 </p:sld>
 </file>
 
-<file path=ppt/slides/slide46.xml><?xml version="1.0" encoding="utf-8"?>
+<file path=ppt/slides/slide5.xml><?xml version="1.0" encoding="utf-8"?>
+<p:sld xmlns:a="http://schemas.openxmlformats.org/drawingml/2006/main" xmlns:r="http://schemas.openxmlformats.org/officeDocument/2006/relationships" xmlns:p="http://schemas.openxmlformats.org/presentationml/2006/main">
+  <p:cSld>
+    <p:spTree>
+      <p:nvGrpSpPr>
+        <p:cNvPr id="1" name=""/>
+        <p:cNvGrpSpPr/>
+        <p:nvPr/>
+      </p:nvGrpSpPr>
+      <p:grpSpPr>
+        <a:xfrm>
+          <a:off x="0" y="0"/>
+          <a:ext cx="0" cy="0"/>
+          <a:chOff x="0" y="0"/>
+          <a:chExt cx="0" cy="0"/>
+        </a:xfrm>
+      </p:grpSpPr>
+      <p:sp>
+        <p:nvSpPr>
+          <p:cNvPr id="2" name="Title 1"/>
+          <p:cNvSpPr>
+            <a:spLocks noGrp="1"/>
+          </p:cNvSpPr>
+          <p:nvPr>
+            <p:ph type="title"/>
+          </p:nvPr>
+        </p:nvSpPr>
+        <p:spPr>
+          <a:xfrm>
+            <a:off x="722313" y="3305176"/>
+            <a:ext cx="7772400" cy="1021556"/>
+          </a:xfrm>
+        </p:spPr>
+        <p:txBody>
+          <a:bodyPr/>
+          <a:lstStyle/>
+          <a:p>
+            <a:pPr lvl="0" indent="0" marL="0">
+              <a:buNone/>
+            </a:pPr>
+            <a:r>
+              <a:rPr/>
+              <a:t>1 · What this adds</a:t>
+            </a:r>
+          </a:p>
+        </p:txBody>
+      </p:sp>
+    </p:spTree>
+  </p:cSld>
+</p:sld>
+</file>
+
+<file path=ppt/slides/slide50.xml><?xml version="1.0" encoding="utf-8"?>
 <p:sld xmlns:a="http://schemas.openxmlformats.org/drawingml/2006/main" xmlns:r="http://schemas.openxmlformats.org/officeDocument/2006/relationships" xmlns:p="http://schemas.openxmlformats.org/presentationml/2006/main">
   <p:cSld>
     <p:spTree>
@@ -9478,7 +8399,7 @@
                 </a:pPr>
                 <a:r>
                   <a:rPr/>
-                  <a:t>Bootstrap the selection; report frequencies, not a single list</a:t>
+                  <a:t>Bootstrap the selection; report frequencies, not one list</a:t>
                 </a:r>
               </a:p>
               <a:p>
@@ -9487,7 +8408,7 @@
                 </a:pPr>
                 <a:r>
                   <a:rPr/>
-                  <a:t>Penalised logistic, IRLS and the imbalance table: </a:t>
+                  <a:t>Derivations, penalised logistic and IRLS: </a:t>
                 </a:r>
                 <a:r>
                   <a:rPr>
@@ -9498,7 +8419,7 @@
                 </a:r>
                 <a:r>
                   <a:rPr/>
-                  <a:t> §6.6–6.9 · brief: </a:t>
+                  <a:t> §6.1–6.9 · brief: </a:t>
                 </a:r>
                 <a:r>
                   <a:rPr>
@@ -9517,7 +8438,7 @@
 </p:sld>
 </file>
 
-<file path=ppt/slides/slide5.xml><?xml version="1.0" encoding="utf-8"?>
+<file path=ppt/slides/slide6.xml><?xml version="1.0" encoding="utf-8"?>
 <p:sld xmlns:a="http://schemas.openxmlformats.org/drawingml/2006/main" xmlns:r="http://schemas.openxmlformats.org/officeDocument/2006/relationships" xmlns:p="http://schemas.openxmlformats.org/presentationml/2006/main">
   <p:cSld>
     <p:spTree>
@@ -9544,12 +8465,7 @@
             <p:ph type="title"/>
           </p:nvPr>
         </p:nvSpPr>
-        <p:spPr>
-          <a:xfrm>
-            <a:off x="722313" y="3305176"/>
-            <a:ext cx="7772400" cy="1021556"/>
-          </a:xfrm>
-        </p:spPr>
+        <p:spPr/>
         <p:txBody>
           <a:bodyPr/>
           <a:lstStyle/>
@@ -9559,17 +8475,204 @@
             </a:pPr>
             <a:r>
               <a:rPr/>
-              <a:t>1 · Introduction</a:t>
-            </a:r>
-          </a:p>
-        </p:txBody>
-      </p:sp>
+              <a:t>Where we have got to</a:t>
+            </a:r>
+          </a:p>
+        </p:txBody>
+      </p:sp>
+      <p:graphicFrame>
+        <p:nvGraphicFramePr>
+          <p:cNvPr id="6" name="Content Placeholder 5"/>
+          <p:cNvGraphicFramePr>
+            <a:graphicFrameLocks noGrp="1"/>
+          </p:cNvGraphicFramePr>
+          <p:nvPr>
+            <p:ph idx="1"/>
+          </p:nvPr>
+        </p:nvGraphicFramePr>
+        <p:xfrm>
+          <a:off x="457200" y="1193800"/>
+          <a:ext cx="8229600" cy="3390900"/>
+        </p:xfrm>
+        <a:graphic>
+          <a:graphicData uri="http://schemas.openxmlformats.org/drawingml/2006/table">
+            <a:tbl>
+              <a:tblPr firstRow="1" bandRow="1">
+                <a:tableStyleId>{5C22544A-7EE6-4342-B048-85BDC9FD1C3A}</a:tableStyleId>
+              </a:tblPr>
+              <a:tblGrid>
+                <a:gridCol w="4114800"/>
+                <a:gridCol w="4114800"/>
+              </a:tblGrid>
+              <a:tr h="0">
+                <a:tc>
+                  <a:txBody>
+                    <a:bodyPr/>
+                    <a:lstStyle/>
+                    <a:p>
+                      <a:pPr lvl="0" indent="0" marL="0">
+                        <a:buNone/>
+                      </a:pPr>
+                      <a:r>
+                        <a:rPr/>
+                        <a:t>Session</a:t>
+                      </a:r>
+                    </a:p>
+                  </a:txBody>
+                  <a:tcPr/>
+                </a:tc>
+                <a:tc>
+                  <a:txBody>
+                    <a:bodyPr/>
+                    <a:lstStyle/>
+                    <a:p>
+                      <a:pPr lvl="0" indent="0" marL="0">
+                        <a:buNone/>
+                      </a:pPr>
+                      <a:r>
+                        <a:rPr/>
+                        <a:t>What you could do afterwards</a:t>
+                      </a:r>
+                    </a:p>
+                  </a:txBody>
+                  <a:tcPr/>
+                </a:tc>
+              </a:tr>
+              <a:tr h="0">
+                <a:tc>
+                  <a:txBody>
+                    <a:bodyPr/>
+                    <a:lstStyle/>
+                    <a:p>
+                      <a:pPr lvl="0" indent="0" marL="0">
+                        <a:buNone/>
+                      </a:pPr>
+                      <a:r>
+                        <a:rPr b="1"/>
+                        <a:t>02</a:t>
+                      </a:r>
+                    </a:p>
+                  </a:txBody>
+                </a:tc>
+                <a:tc>
+                  <a:txBody>
+                    <a:bodyPr/>
+                    <a:lstStyle/>
+                    <a:p>
+                      <a:pPr lvl="0" indent="0" marL="0">
+                        <a:buNone/>
+                      </a:pPr>
+                      <a:r>
+                        <a:rPr/>
+                        <a:t>Fit a line, and know what “controlling for” means geometrically</a:t>
+                      </a:r>
+                    </a:p>
+                  </a:txBody>
+                </a:tc>
+              </a:tr>
+              <a:tr h="0">
+                <a:tc>
+                  <a:txBody>
+                    <a:bodyPr/>
+                    <a:lstStyle/>
+                    <a:p>
+                      <a:pPr lvl="0" indent="0" marL="0">
+                        <a:buNone/>
+                      </a:pPr>
+                      <a:r>
+                        <a:rPr b="1"/>
+                        <a:t>03</a:t>
+                      </a:r>
+                    </a:p>
+                  </a:txBody>
+                </a:tc>
+                <a:tc>
+                  <a:txBody>
+                    <a:bodyPr/>
+                    <a:lstStyle/>
+                    <a:p>
+                      <a:pPr lvl="0" indent="0" marL="0">
+                        <a:buNone/>
+                      </a:pPr>
+                      <a:r>
+                        <a:rPr/>
+                        <a:t>Attach an honest standard error to it</a:t>
+                      </a:r>
+                    </a:p>
+                  </a:txBody>
+                </a:tc>
+              </a:tr>
+              <a:tr h="0">
+                <a:tc>
+                  <a:txBody>
+                    <a:bodyPr/>
+                    <a:lstStyle/>
+                    <a:p>
+                      <a:pPr lvl="0" indent="0" marL="0">
+                        <a:buNone/>
+                      </a:pPr>
+                      <a:r>
+                        <a:rPr b="1"/>
+                        <a:t>04</a:t>
+                      </a:r>
+                    </a:p>
+                  </a:txBody>
+                </a:tc>
+                <a:tc>
+                  <a:txBody>
+                    <a:bodyPr/>
+                    <a:lstStyle/>
+                    <a:p>
+                      <a:pPr lvl="0" indent="0" marL="0">
+                        <a:buNone/>
+                      </a:pPr>
+                      <a:r>
+                        <a:rPr/>
+                        <a:t>Say whether it will hold on data you have not seen</a:t>
+                      </a:r>
+                    </a:p>
+                  </a:txBody>
+                </a:tc>
+              </a:tr>
+              <a:tr h="0">
+                <a:tc>
+                  <a:txBody>
+                    <a:bodyPr/>
+                    <a:lstStyle/>
+                    <a:p>
+                      <a:pPr lvl="0" indent="0" marL="0">
+                        <a:buNone/>
+                      </a:pPr>
+                      <a:r>
+                        <a:rPr b="1"/>
+                        <a:t>05</a:t>
+                      </a:r>
+                    </a:p>
+                  </a:txBody>
+                </a:tc>
+                <a:tc>
+                  <a:txBody>
+                    <a:bodyPr/>
+                    <a:lstStyle/>
+                    <a:p>
+                      <a:pPr lvl="0" indent="0" marL="0">
+                        <a:buNone/>
+                      </a:pPr>
+                      <a:r>
+                        <a:rPr/>
+                        <a:t>Handle more predictors than you can defend individually</a:t>
+                      </a:r>
+                    </a:p>
+                  </a:txBody>
+                </a:tc>
+              </a:tr>
+            </a:tbl>
+          </a:graphicData>
+        </a:graphic>
+      </p:graphicFrame>
     </p:spTree>
   </p:cSld>
 </p:sld>
-</file>
-
-<file path=ppt/slides/slide6.xml><?xml version="1.0" encoding="UTF-8"?><p:sld xmlns:a="http://schemas.openxmlformats.org/drawingml/2006/main" xmlns:r="http://schemas.openxmlformats.org/officeDocument/2006/relationships" xmlns:p="http://schemas.openxmlformats.org/presentationml/2006/main"><p:cSld><p:spTree><p:nvGrpSpPr><p:cNvPr id="1" name="" /><p:cNvGrpSpPr /><p:nvPr /></p:nvGrpSpPr><p:grpSpPr><a:xfrm><a:off x="0" y="0" /><a:ext cx="0" cy="0" /><a:chOff x="0" y="0" /><a:chExt cx="0" cy="0" /></a:xfrm></p:grpSpPr><p:sp><p:nvSpPr><p:cNvPr id="2" name="Title 1" /><p:cNvSpPr><a:spLocks noGrp="1" /></p:cNvSpPr><p:nvPr><p:ph type="title" /></p:nvPr></p:nvSpPr><p:spPr><a:xfrm><a:off x="457201" y="204787" /><a:ext cx="3008313" cy="871538" /></a:xfrm></p:spPr><p:txBody><a:bodyPr /><a:lstStyle /><a:p><a:pPr lvl="0" indent="0" marL="0"><a:buNone /></a:pPr><a:r><a:rPr /><a:t>Two things people confuse</a:t></a:r></a:p></p:txBody></p:sp><p:sp><p:nvSpPr><p:cNvPr id="4" name="Text Placeholder 3" /><p:cNvSpPr><a:spLocks noGrp="1" /></p:cNvSpPr><p:nvPr><p:ph idx="2" sz="half" type="body" /></p:nvPr></p:nvSpPr><p:spPr /><p:txBody><a:bodyPr /><a:lstStyle /><a:p><a:pPr lvl="0" indent="0" marL="0"><a:buNone /></a:pPr><a:r><a:rPr /><a:t>Almost every applied mistake in this session comes from merging two separate acts.</a:t></a:r></a:p></p:txBody></p:sp><p:graphicFrame><p:nvGraphicFramePr><p:cNvPr id="6" name="Content Placeholder 5" /><p:cNvGraphicFramePr><a:graphicFrameLocks noGrp="1" /></p:cNvGraphicFramePr><p:nvPr><p:ph idx="1" /></p:nvPr></p:nvGraphicFramePr><p:xfrm><a:off x="3568700" y="203200" /><a:ext cx="5105400" cy="4381500" /></p:xfrm><a:graphic><a:graphicData uri="http://schemas.openxmlformats.org/drawingml/2006/table"><a:tbl><a:tblPr firstRow="0" bandRow="1"><a:tableStyleId>{5C22544A-7EE6-4342-B048-85BDC9FD1C3A}</a:tableStyleId></a:tblPr><a:tblGrid><a:gridCol w="2552700" /><a:gridCol w="2552700" /></a:tblGrid><a:tr h="0"><a:tc><a:txBody><a:bodyPr /><a:lstStyle /><a:p><a:pPr lvl="0" indent="0" marL="0"><a:buNone /></a:pPr><a:r><a:rPr b="1" /><a:t>The model</a:t></a:r></a:p></a:txBody></a:tc><a:tc><a:txBody><a:bodyPr /><a:lstStyle /><a:p><a:pPr lvl="0" indent="0" marL="0"><a:buNone /></a:pPr><a:r><a:rPr /><a:t>produces a probability, </a:t></a:r><a14:m><m:oMath xmlns:m="http://schemas.openxmlformats.org/officeDocument/2006/math"><m:sSub><m:e><m:acc><m:accPr><m:chr m:val="̂" /></m:accPr><m:e><m:r><m:t>p</m:t></m:r></m:e></m:acc></m:e><m:sub><m:r><m:t>i</m:t></m:r></m:sub></m:sSub><m:r><m:rPr><m:sty m:val="p" /></m:rPr><m:t>∈</m:t></m:r><m:d><m:dPr><m:begChr m:val="(" /><m:sepChr m:val="" /><m:endChr m:val=")" /><m:grow /></m:dPr><m:e><m:r><m:t>0</m:t></m:r><m:r><m:rPr><m:sty m:val="p" /></m:rPr><m:t>,</m:t></m:r><m:r><m:t>1</m:t></m:r></m:e></m:d></m:oMath></a14:m></a:p></a:txBody></a:tc></a:tr><a:tr h="0"><a:tc><a:txBody><a:bodyPr /><a:lstStyle /><a:p><a:pPr lvl="0" indent="0" marL="0"><a:buNone /></a:pPr><a:r><a:rPr b="1" /><a:t>The decision</a:t></a:r></a:p></a:txBody></a:tc><a:tc><a:txBody><a:bodyPr /><a:lstStyle /><a:p><a:pPr lvl="0" indent="0" marL="0"><a:buNone /></a:pPr><a:r><a:rPr /><a:t>applies a threshold, and acts</a:t></a:r></a:p></a:txBody></a:tc></a:tr></a:tbl></a:graphicData></a:graphic></p:graphicFrame></p:spTree></p:cSld></p:sld>
 </file>
 
 <file path=ppt/slides/slide7.xml><?xml version="1.0" encoding="utf-8"?>
@@ -9609,15 +8712,15 @@
             </a:pPr>
             <a:r>
               <a:rPr/>
-              <a:t>The model is a statistical object. The threshold is an </a:t>
+              <a:t>All four assume the thing you are predicting is a </a:t>
             </a:r>
             <a:r>
               <a:rPr b="1"/>
-              <a:t>economic</a:t>
-            </a:r>
-            <a:r>
-              <a:rPr/>
-              <a:t> one. They are chosen by different people, on different evidence, and they are almost never reported together.</a:t>
+              <a:t>number</a:t>
+            </a:r>
+            <a:r>
+              <a:rPr/>
+              <a:t>.</a:t>
             </a:r>
           </a:p>
         </p:txBody>
@@ -9664,106 +8767,77 @@
             </a:pPr>
             <a:r>
               <a:rPr/>
-              <a:t>Why not just use least squares?</a:t>
-            </a:r>
-          </a:p>
-        </p:txBody>
-      </p:sp>
-      <mc:AlternateContent xmlns:mc="http://schemas.openxmlformats.org/markup-compatibility/2006">
-        <mc:Choice xmlns:a14="http://schemas.microsoft.com/office/drawing/2010/main" Requires="a14">
-          <p:sp>
-            <p:nvSpPr>
-              <p:cNvPr id="3" name="Content Placeholder 2"/>
-              <p:cNvSpPr>
-                <a:spLocks noGrp="1"/>
-              </p:cNvSpPr>
-              <p:nvPr>
-                <p:ph idx="1"/>
-              </p:nvPr>
-            </p:nvSpPr>
-            <p:spPr/>
-            <p:txBody>
-              <a:bodyPr/>
-              <a:lstStyle/>
-              <a:p>
-                <a:pPr lvl="0" indent="0" marL="0">
-                  <a:buNone/>
-                </a:pPr>
-                <a:r>
-                  <a:rPr/>
-                  <a:t>You </a:t>
-                </a:r>
-                <a:r>
-                  <a:rPr i="1"/>
-                  <a:t>can</a:t>
-                </a:r>
-                <a:r>
-                  <a:rPr/>
-                  <a:t> regress a 0/1 outcome on </a:t>
-                </a:r>
-                <a14:m>
-                  <m:oMath xmlns:m="http://schemas.openxmlformats.org/officeDocument/2006/math">
-                    <m:r>
-                      <m:t>X</m:t>
-                    </m:r>
-                  </m:oMath>
-                </a14:m>
-                <a:r>
-                  <a:rPr/>
-                  <a:t>. Economists do, and it has real virtues — the coefficients are marginal effects, and it is robust.</a:t>
-                </a:r>
-              </a:p>
-              <a:p>
-                <a:pPr lvl="0" indent="0" marL="0">
-                  <a:buNone/>
-                </a:pPr>
-                <a:r>
-                  <a:rPr/>
-                  <a:t>But for a </a:t>
-                </a:r>
-                <a:r>
-                  <a:rPr b="1"/>
-                  <a:t>decision</a:t>
-                </a:r>
-                <a:r>
-                  <a:rPr/>
-                  <a:t>:</a:t>
-                </a:r>
-              </a:p>
-              <a:p>
-                <a:pPr lvl="0"/>
-                <a:r>
-                  <a:rPr/>
-                  <a:t>Fitted values go below 0 and above 1, which are not probabilities</a:t>
-                </a:r>
-              </a:p>
-              <a:p>
-                <a:pPr lvl="0"/>
-                <a:r>
-                  <a:rPr/>
-                  <a:t>The errors are heteroskedastic by construction</a:t>
-                </a:r>
-              </a:p>
-              <a:p>
-                <a:pPr lvl="0"/>
-                <a:r>
-                  <a:rPr/>
-                  <a:t>The fit is pulled around by points far from the boundary</a:t>
-                </a:r>
-              </a:p>
-              <a:p>
-                <a:pPr lvl="0" indent="0" marL="0">
-                  <a:buNone/>
-                </a:pPr>
-                <a:r>
-                  <a:rPr/>
-                  <a:t>Defensible for an average effect. A poor basis for acting on an individual case.</a:t>
-                </a:r>
-              </a:p>
-            </p:txBody>
-          </p:sp>
-        </mc:Choice>
-      </mc:AlternateContent>
+              <a:t>What changes today</a:t>
+            </a:r>
+          </a:p>
+        </p:txBody>
+      </p:sp>
+      <p:sp>
+        <p:nvSpPr>
+          <p:cNvPr id="3" name="Content Placeholder 2"/>
+          <p:cNvSpPr>
+            <a:spLocks noGrp="1"/>
+          </p:cNvSpPr>
+          <p:nvPr>
+            <p:ph idx="1"/>
+          </p:nvPr>
+        </p:nvSpPr>
+        <p:spPr/>
+        <p:txBody>
+          <a:bodyPr/>
+          <a:lstStyle/>
+          <a:p>
+            <a:pPr lvl="0" indent="0" marL="0">
+              <a:buNone/>
+            </a:pPr>
+            <a:r>
+              <a:rPr/>
+              <a:t>The outcome is a </a:t>
+            </a:r>
+            <a:r>
+              <a:rPr b="1"/>
+              <a:t>yes or no</a:t>
+            </a:r>
+            <a:r>
+              <a:rPr/>
+              <a:t>, and somebody has to </a:t>
+            </a:r>
+            <a:r>
+              <a:rPr b="1"/>
+              <a:t>act</a:t>
+            </a:r>
+            <a:r>
+              <a:rPr/>
+              <a:t> on it.</a:t>
+            </a:r>
+          </a:p>
+          <a:p>
+            <a:pPr lvl="0" indent="0" marL="0">
+              <a:buNone/>
+            </a:pPr>
+            <a:r>
+              <a:rPr/>
+              <a:t>That second half is new. Sessions 02–05 end with an estimate. This session ends with a </a:t>
+            </a:r>
+            <a:r>
+              <a:rPr b="1"/>
+              <a:t>decision</a:t>
+            </a:r>
+            <a:r>
+              <a:rPr/>
+              <a:t> — fund the loan or refuse it — and a decision needs something none of the earlier methods supplied: a </a:t>
+            </a:r>
+            <a:r>
+              <a:rPr b="1"/>
+              <a:t>threshold</a:t>
+            </a:r>
+            <a:r>
+              <a:rPr/>
+              <a:t>, which comes from economics, not from the data.</a:t>
+            </a:r>
+          </a:p>
+        </p:txBody>
+      </p:sp>
     </p:spTree>
   </p:cSld>
 </p:sld>
@@ -9796,12 +8870,7 @@
             <p:ph type="title"/>
           </p:nvPr>
         </p:nvSpPr>
-        <p:spPr>
-          <a:xfrm>
-            <a:off x="722313" y="3305176"/>
-            <a:ext cx="7772400" cy="1021556"/>
-          </a:xfrm>
-        </p:spPr>
+        <p:spPr/>
         <p:txBody>
           <a:bodyPr/>
           <a:lstStyle/>
@@ -9811,7 +8880,45 @@
             </a:pPr>
             <a:r>
               <a:rPr/>
-              <a:t>2 · An example</a:t>
+              <a:t>The one-sentence version</a:t>
+            </a:r>
+          </a:p>
+        </p:txBody>
+      </p:sp>
+      <p:sp>
+        <p:nvSpPr>
+          <p:cNvPr id="3" name="Content Placeholder 2"/>
+          <p:cNvSpPr>
+            <a:spLocks noGrp="1"/>
+          </p:cNvSpPr>
+          <p:nvPr>
+            <p:ph idx="1"/>
+          </p:nvPr>
+        </p:nvSpPr>
+        <p:spPr/>
+        <p:txBody>
+          <a:bodyPr/>
+          <a:lstStyle/>
+          <a:p>
+            <a:pPr lvl="0" indent="0" marL="1270000">
+              <a:buNone/>
+            </a:pPr>
+            <a:r>
+              <a:rPr sz="2000"/>
+              <a:t>Sessions 02–05 taught you to produce a number. </a:t>
+            </a:r>
+            <a:r>
+              <a:rPr sz="2000" b="1"/>
+              <a:t>Session 06 is the first time the number has to become an action.</a:t>
+            </a:r>
+          </a:p>
+          <a:p>
+            <a:pPr lvl="0" indent="0" marL="0">
+              <a:buNone/>
+            </a:pPr>
+            <a:r>
+              <a:rPr/>
+              <a:t>Everything awkward in this session follows from that step — and almost every applied mistake comes from taking it without noticing.</a:t>
             </a:r>
           </a:p>
         </p:txBody>

--- a/06-classification-logistic-and-penalised/slides.pptx
+++ b/06-classification-logistic-and-penalised/slides.pptx
@@ -955,15 +955,15 @@
         </p:nvSpPr>
         <p:spPr>
           <a:xfrm>
-            <a:off x="722313" y="3305176"/>
-            <a:ext cx="7772400" cy="1021556"/>
+            <a:off x="722313" y="1850000"/>
+            <a:ext cx="7772400" cy="1300000"/>
           </a:xfrm>
         </p:spPr>
         <p:txBody>
           <a:bodyPr anchor="t"/>
           <a:lstStyle>
             <a:lvl1pPr algn="l">
-              <a:defRPr sz="1850" b="1" cap="all"/>
+              <a:defRPr sz="2800" b="1" cap="none"/>
             </a:lvl1pPr>
           </a:lstStyle>
           <a:p>
@@ -986,8 +986,8 @@
         </p:nvSpPr>
         <p:spPr>
           <a:xfrm>
-            <a:off x="722313" y="2180035"/>
-            <a:ext cx="7772400" cy="1125140"/>
+            <a:off x="722313" y="3250000"/>
+            <a:ext cx="7772400" cy="700000"/>
           </a:xfrm>
         </p:spPr>
         <p:txBody>
@@ -3330,8 +3330,8 @@
         </p:nvSpPr>
         <p:spPr>
           <a:xfrm>
-            <a:off x="722313" y="3305176"/>
-            <a:ext cx="7772400" cy="1021556"/>
+            <a:off x="722313" y="1850000"/>
+            <a:ext cx="7772400" cy="1300000"/>
           </a:xfrm>
         </p:spPr>
         <p:txBody>
@@ -3911,8 +3911,8 @@
         </p:nvSpPr>
         <p:spPr>
           <a:xfrm>
-            <a:off x="722313" y="3305176"/>
-            <a:ext cx="7772400" cy="1021556"/>
+            <a:off x="722313" y="1850000"/>
+            <a:ext cx="7772400" cy="1300000"/>
           </a:xfrm>
         </p:spPr>
         <p:txBody>
@@ -4509,8 +4509,8 @@
         </p:nvSpPr>
         <p:spPr>
           <a:xfrm>
-            <a:off x="722313" y="3305176"/>
-            <a:ext cx="7772400" cy="1021556"/>
+            <a:off x="722313" y="1850000"/>
+            <a:ext cx="7772400" cy="1300000"/>
           </a:xfrm>
         </p:spPr>
         <p:txBody>
@@ -5079,8 +5079,8 @@
         </p:nvSpPr>
         <p:spPr>
           <a:xfrm>
-            <a:off x="722313" y="3305176"/>
-            <a:ext cx="7772400" cy="1021556"/>
+            <a:off x="722313" y="1850000"/>
+            <a:ext cx="7772400" cy="1300000"/>
           </a:xfrm>
         </p:spPr>
         <p:txBody>
@@ -6113,8 +6113,8 @@
         </p:nvSpPr>
         <p:spPr>
           <a:xfrm>
-            <a:off x="722313" y="3305176"/>
-            <a:ext cx="7772400" cy="1021556"/>
+            <a:off x="722313" y="1850000"/>
+            <a:ext cx="7772400" cy="1300000"/>
           </a:xfrm>
         </p:spPr>
         <p:txBody>
@@ -6466,8 +6466,8 @@
         </p:nvSpPr>
         <p:spPr>
           <a:xfrm>
-            <a:off x="722313" y="3305176"/>
-            <a:ext cx="7772400" cy="1021556"/>
+            <a:off x="722313" y="1850000"/>
+            <a:ext cx="7772400" cy="1300000"/>
           </a:xfrm>
         </p:spPr>
         <p:txBody>
@@ -7364,8 +7364,8 @@
         </p:nvSpPr>
         <p:spPr>
           <a:xfrm>
-            <a:off x="722313" y="3305176"/>
-            <a:ext cx="7772400" cy="1021556"/>
+            <a:off x="722313" y="1850000"/>
+            <a:ext cx="7772400" cy="1300000"/>
           </a:xfrm>
         </p:spPr>
         <p:txBody>
@@ -7804,8 +7804,8 @@
         </p:nvSpPr>
         <p:spPr>
           <a:xfrm>
-            <a:off x="722313" y="3305176"/>
-            <a:ext cx="7772400" cy="1021556"/>
+            <a:off x="722313" y="1850000"/>
+            <a:ext cx="7772400" cy="1300000"/>
           </a:xfrm>
         </p:spPr>
         <p:txBody>
@@ -8232,8 +8232,8 @@
         </p:nvSpPr>
         <p:spPr>
           <a:xfrm>
-            <a:off x="722313" y="3305176"/>
-            <a:ext cx="7772400" cy="1021556"/>
+            <a:off x="722313" y="1850000"/>
+            <a:ext cx="7772400" cy="1300000"/>
           </a:xfrm>
         </p:spPr>
         <p:txBody>

--- a/06-classification-logistic-and-penalised/slides.pptx
+++ b/06-classification-logistic-and-penalised/slides.pptx
@@ -3291,7 +3291,7 @@
             </a:pPr>
             <a:r>
               <a:rPr/>
-              <a:t>20 August 2026</a:t>
+              <a:t>21 August 2026</a:t>
             </a:r>
           </a:p>
         </p:txBody>
